--- a/doc/개발환경_설치매뉴얼(Vue.JS).pptx
+++ b/doc/개발환경_설치매뉴얼(Vue.JS).pptx
@@ -3610,7 +3610,7 @@
           <a:bodyPr/>
           <a:lstStyle/>
           <a:p>
-            <a:endParaRPr lang="ko-KR" altLang="en-US"/>
+            <a:endParaRPr lang="ko-KR" altLang="en-US" dirty="0"/>
           </a:p>
         </p:txBody>
       </p:sp>
@@ -3630,7 +3630,12 @@
             <p:ph idx="1"/>
           </p:nvPr>
         </p:nvSpPr>
-        <p:spPr/>
+        <p:spPr>
+          <a:xfrm>
+            <a:off x="838200" y="1825625"/>
+            <a:ext cx="10515600" cy="4351338"/>
+          </a:xfrm>
+        </p:spPr>
         <p:txBody>
           <a:bodyPr/>
           <a:lstStyle/>
@@ -3658,7 +3663,7 @@
               <a:t> : </a:t>
             </a:r>
             <a:r>
-              <a:rPr lang="ko-KR" altLang="en-US"/>
+              <a:rPr lang="ko-KR" altLang="en-US" dirty="0"/>
               <a:t>코드 검사기로써 에러가 있는지 검사해주는 도구</a:t>
             </a:r>
             <a:endParaRPr lang="en-US" altLang="ko-KR" dirty="0"/>
@@ -3687,6 +3692,17 @@
             <a:r>
               <a:rPr lang="ko-KR" altLang="en-US" dirty="0"/>
               <a:t> 예쁘게 작성할 수 있도록 도와주는 도구</a:t>
+            </a:r>
+            <a:endParaRPr lang="en-US" altLang="ko-KR" dirty="0"/>
+          </a:p>
+          <a:p>
+            <a:r>
+              <a:rPr lang="en-US" altLang="ko-KR" dirty="0"/>
+              <a:t>Vue-Official : </a:t>
+            </a:r>
+            <a:r>
+              <a:rPr lang="ko-KR" altLang="en-US" dirty="0"/>
+              <a:t>언어지원 플러그인</a:t>
             </a:r>
             <a:endParaRPr lang="en-US" altLang="ko-KR" dirty="0"/>
           </a:p>

--- a/doc/개발환경_설치매뉴얼(Vue.JS).pptx
+++ b/doc/개발환경_설치매뉴얼(Vue.JS).pptx
@@ -2,20 +2,22 @@
 <file path=ppt/presentation.xml><?xml version="1.0" encoding="utf-8"?>
 <p:presentation xmlns:a="http://schemas.openxmlformats.org/drawingml/2006/main" xmlns:r="http://schemas.openxmlformats.org/officeDocument/2006/relationships" xmlns:p="http://schemas.openxmlformats.org/presentationml/2006/main" saveSubsetFonts="1">
   <p:sldMasterIdLst>
-    <p:sldMasterId id="2147483648" r:id="rId1"/>
+    <p:sldMasterId id="2147483660" r:id="rId1"/>
   </p:sldMasterIdLst>
   <p:sldIdLst>
     <p:sldId id="256" r:id="rId2"/>
     <p:sldId id="277" r:id="rId3"/>
     <p:sldId id="278" r:id="rId4"/>
+    <p:sldId id="279" r:id="rId5"/>
+    <p:sldId id="280" r:id="rId6"/>
   </p:sldIdLst>
-  <p:sldSz cx="12192000" cy="6858000"/>
+  <p:sldSz cx="6858000" cy="12192000"/>
   <p:notesSz cx="6858000" cy="9144000"/>
   <p:defaultTextStyle>
     <a:defPPr>
-      <a:defRPr lang="ko-KR"/>
+      <a:defRPr lang="en-US"/>
     </a:defPPr>
-    <a:lvl1pPr marL="0" algn="l" defTabSz="914400" rtl="0" eaLnBrk="1" latinLnBrk="1" hangingPunct="1">
+    <a:lvl1pPr marL="0" algn="l" defTabSz="457200" rtl="0" eaLnBrk="1" latinLnBrk="0" hangingPunct="1">
       <a:defRPr sz="1800" kern="1200">
         <a:solidFill>
           <a:schemeClr val="tx1"/>
@@ -25,7 +27,7 @@
         <a:cs typeface="+mn-cs"/>
       </a:defRPr>
     </a:lvl1pPr>
-    <a:lvl2pPr marL="457200" algn="l" defTabSz="914400" rtl="0" eaLnBrk="1" latinLnBrk="1" hangingPunct="1">
+    <a:lvl2pPr marL="457200" algn="l" defTabSz="457200" rtl="0" eaLnBrk="1" latinLnBrk="0" hangingPunct="1">
       <a:defRPr sz="1800" kern="1200">
         <a:solidFill>
           <a:schemeClr val="tx1"/>
@@ -35,7 +37,7 @@
         <a:cs typeface="+mn-cs"/>
       </a:defRPr>
     </a:lvl2pPr>
-    <a:lvl3pPr marL="914400" algn="l" defTabSz="914400" rtl="0" eaLnBrk="1" latinLnBrk="1" hangingPunct="1">
+    <a:lvl3pPr marL="914400" algn="l" defTabSz="457200" rtl="0" eaLnBrk="1" latinLnBrk="0" hangingPunct="1">
       <a:defRPr sz="1800" kern="1200">
         <a:solidFill>
           <a:schemeClr val="tx1"/>
@@ -45,7 +47,7 @@
         <a:cs typeface="+mn-cs"/>
       </a:defRPr>
     </a:lvl3pPr>
-    <a:lvl4pPr marL="1371600" algn="l" defTabSz="914400" rtl="0" eaLnBrk="1" latinLnBrk="1" hangingPunct="1">
+    <a:lvl4pPr marL="1371600" algn="l" defTabSz="457200" rtl="0" eaLnBrk="1" latinLnBrk="0" hangingPunct="1">
       <a:defRPr sz="1800" kern="1200">
         <a:solidFill>
           <a:schemeClr val="tx1"/>
@@ -55,7 +57,7 @@
         <a:cs typeface="+mn-cs"/>
       </a:defRPr>
     </a:lvl4pPr>
-    <a:lvl5pPr marL="1828800" algn="l" defTabSz="914400" rtl="0" eaLnBrk="1" latinLnBrk="1" hangingPunct="1">
+    <a:lvl5pPr marL="1828800" algn="l" defTabSz="457200" rtl="0" eaLnBrk="1" latinLnBrk="0" hangingPunct="1">
       <a:defRPr sz="1800" kern="1200">
         <a:solidFill>
           <a:schemeClr val="tx1"/>
@@ -65,7 +67,7 @@
         <a:cs typeface="+mn-cs"/>
       </a:defRPr>
     </a:lvl5pPr>
-    <a:lvl6pPr marL="2286000" algn="l" defTabSz="914400" rtl="0" eaLnBrk="1" latinLnBrk="1" hangingPunct="1">
+    <a:lvl6pPr marL="2286000" algn="l" defTabSz="457200" rtl="0" eaLnBrk="1" latinLnBrk="0" hangingPunct="1">
       <a:defRPr sz="1800" kern="1200">
         <a:solidFill>
           <a:schemeClr val="tx1"/>
@@ -75,7 +77,7 @@
         <a:cs typeface="+mn-cs"/>
       </a:defRPr>
     </a:lvl6pPr>
-    <a:lvl7pPr marL="2743200" algn="l" defTabSz="914400" rtl="0" eaLnBrk="1" latinLnBrk="1" hangingPunct="1">
+    <a:lvl7pPr marL="2743200" algn="l" defTabSz="457200" rtl="0" eaLnBrk="1" latinLnBrk="0" hangingPunct="1">
       <a:defRPr sz="1800" kern="1200">
         <a:solidFill>
           <a:schemeClr val="tx1"/>
@@ -85,7 +87,7 @@
         <a:cs typeface="+mn-cs"/>
       </a:defRPr>
     </a:lvl7pPr>
-    <a:lvl8pPr marL="3200400" algn="l" defTabSz="914400" rtl="0" eaLnBrk="1" latinLnBrk="1" hangingPunct="1">
+    <a:lvl8pPr marL="3200400" algn="l" defTabSz="457200" rtl="0" eaLnBrk="1" latinLnBrk="0" hangingPunct="1">
       <a:defRPr sz="1800" kern="1200">
         <a:solidFill>
           <a:schemeClr val="tx1"/>
@@ -95,7 +97,7 @@
         <a:cs typeface="+mn-cs"/>
       </a:defRPr>
     </a:lvl8pPr>
-    <a:lvl9pPr marL="3657600" algn="l" defTabSz="914400" rtl="0" eaLnBrk="1" latinLnBrk="1" hangingPunct="1">
+    <a:lvl9pPr marL="3657600" algn="l" defTabSz="457200" rtl="0" eaLnBrk="1" latinLnBrk="0" hangingPunct="1">
       <a:defRPr sz="1800" kern="1200">
         <a:solidFill>
           <a:schemeClr val="tx1"/>
@@ -118,6 +120,8 @@
         <p14:section name="제목 없는 구역" id="{53E5FD2C-994F-4CFF-8214-B8896DC0A73D}">
           <p14:sldIdLst>
             <p14:sldId id="278"/>
+            <p14:sldId id="279"/>
+            <p14:sldId id="280"/>
           </p14:sldIdLst>
         </p14:section>
       </p14:sectionLst>
@@ -148,13 +152,7 @@
       </p:grpSpPr>
       <p:sp>
         <p:nvSpPr>
-          <p:cNvPr id="2" name="제목 1">
-            <a:extLst>
-              <a:ext uri="{FF2B5EF4-FFF2-40B4-BE49-F238E27FC236}">
-                <a16:creationId xmlns:a16="http://schemas.microsoft.com/office/drawing/2014/main" id="{99505E6A-8984-EFA1-470E-CC78E8040478}"/>
-              </a:ext>
-            </a:extLst>
-          </p:cNvPr>
+          <p:cNvPr id="2" name="Title 1"/>
           <p:cNvSpPr>
             <a:spLocks noGrp="1"/>
           </p:cNvSpPr>
@@ -164,15 +162,15 @@
         </p:nvSpPr>
         <p:spPr>
           <a:xfrm>
-            <a:off x="1524000" y="1122363"/>
-            <a:ext cx="9144000" cy="2387600"/>
+            <a:off x="514350" y="1995312"/>
+            <a:ext cx="5829300" cy="4244622"/>
           </a:xfrm>
         </p:spPr>
         <p:txBody>
           <a:bodyPr anchor="b"/>
           <a:lstStyle>
             <a:lvl1pPr algn="ctr">
-              <a:defRPr sz="6000"/>
+              <a:defRPr sz="4500"/>
             </a:lvl1pPr>
           </a:lstStyle>
           <a:p>
@@ -180,18 +178,13 @@
               <a:rPr lang="ko-KR" altLang="en-US"/>
               <a:t>마스터 제목 스타일 편집</a:t>
             </a:r>
-          </a:p>
-        </p:txBody>
-      </p:sp>
-      <p:sp>
-        <p:nvSpPr>
-          <p:cNvPr id="3" name="부제목 2">
-            <a:extLst>
-              <a:ext uri="{FF2B5EF4-FFF2-40B4-BE49-F238E27FC236}">
-                <a16:creationId xmlns:a16="http://schemas.microsoft.com/office/drawing/2014/main" id="{340DD331-7DFE-E3A0-60ED-61643026848F}"/>
-              </a:ext>
-            </a:extLst>
-          </p:cNvPr>
+            <a:endParaRPr lang="en-US" dirty="0"/>
+          </a:p>
+        </p:txBody>
+      </p:sp>
+      <p:sp>
+        <p:nvSpPr>
+          <p:cNvPr id="3" name="Subtitle 2"/>
           <p:cNvSpPr>
             <a:spLocks noGrp="1"/>
           </p:cNvSpPr>
@@ -201,8 +194,8 @@
         </p:nvSpPr>
         <p:spPr>
           <a:xfrm>
-            <a:off x="1524000" y="3602038"/>
-            <a:ext cx="9144000" cy="1655762"/>
+            <a:off x="857250" y="6403623"/>
+            <a:ext cx="5143500" cy="2943577"/>
           </a:xfrm>
         </p:spPr>
         <p:txBody>
@@ -210,39 +203,39 @@
           <a:lstStyle>
             <a:lvl1pPr marL="0" indent="0" algn="ctr">
               <a:buNone/>
-              <a:defRPr sz="2400"/>
+              <a:defRPr sz="1800"/>
             </a:lvl1pPr>
-            <a:lvl2pPr marL="457200" indent="0" algn="ctr">
-              <a:buNone/>
-              <a:defRPr sz="2000"/>
+            <a:lvl2pPr marL="342900" indent="0" algn="ctr">
+              <a:buNone/>
+              <a:defRPr sz="1500"/>
             </a:lvl2pPr>
-            <a:lvl3pPr marL="914400" indent="0" algn="ctr">
-              <a:buNone/>
-              <a:defRPr sz="1800"/>
+            <a:lvl3pPr marL="685800" indent="0" algn="ctr">
+              <a:buNone/>
+              <a:defRPr sz="1350"/>
             </a:lvl3pPr>
-            <a:lvl4pPr marL="1371600" indent="0" algn="ctr">
-              <a:buNone/>
-              <a:defRPr sz="1600"/>
+            <a:lvl4pPr marL="1028700" indent="0" algn="ctr">
+              <a:buNone/>
+              <a:defRPr sz="1200"/>
             </a:lvl4pPr>
-            <a:lvl5pPr marL="1828800" indent="0" algn="ctr">
-              <a:buNone/>
-              <a:defRPr sz="1600"/>
+            <a:lvl5pPr marL="1371600" indent="0" algn="ctr">
+              <a:buNone/>
+              <a:defRPr sz="1200"/>
             </a:lvl5pPr>
-            <a:lvl6pPr marL="2286000" indent="0" algn="ctr">
-              <a:buNone/>
-              <a:defRPr sz="1600"/>
+            <a:lvl6pPr marL="1714500" indent="0" algn="ctr">
+              <a:buNone/>
+              <a:defRPr sz="1200"/>
             </a:lvl6pPr>
-            <a:lvl7pPr marL="2743200" indent="0" algn="ctr">
-              <a:buNone/>
-              <a:defRPr sz="1600"/>
+            <a:lvl7pPr marL="2057400" indent="0" algn="ctr">
+              <a:buNone/>
+              <a:defRPr sz="1200"/>
             </a:lvl7pPr>
-            <a:lvl8pPr marL="3200400" indent="0" algn="ctr">
-              <a:buNone/>
-              <a:defRPr sz="1600"/>
+            <a:lvl8pPr marL="2400300" indent="0" algn="ctr">
+              <a:buNone/>
+              <a:defRPr sz="1200"/>
             </a:lvl8pPr>
-            <a:lvl9pPr marL="3657600" indent="0" algn="ctr">
-              <a:buNone/>
-              <a:defRPr sz="1600"/>
+            <a:lvl9pPr marL="2743200" indent="0" algn="ctr">
+              <a:buNone/>
+              <a:defRPr sz="1200"/>
             </a:lvl9pPr>
           </a:lstStyle>
           <a:p>
@@ -250,18 +243,13 @@
               <a:rPr lang="ko-KR" altLang="en-US"/>
               <a:t>클릭하여 마스터 부제목 스타일 편집</a:t>
             </a:r>
-          </a:p>
-        </p:txBody>
-      </p:sp>
-      <p:sp>
-        <p:nvSpPr>
-          <p:cNvPr id="4" name="날짜 개체 틀 3">
-            <a:extLst>
-              <a:ext uri="{FF2B5EF4-FFF2-40B4-BE49-F238E27FC236}">
-                <a16:creationId xmlns:a16="http://schemas.microsoft.com/office/drawing/2014/main" id="{66B44CAF-9969-87D7-A259-7AC10E731AEE}"/>
-              </a:ext>
-            </a:extLst>
-          </p:cNvPr>
+            <a:endParaRPr lang="en-US" dirty="0"/>
+          </a:p>
+        </p:txBody>
+      </p:sp>
+      <p:sp>
+        <p:nvSpPr>
+          <p:cNvPr id="4" name="Date Placeholder 3"/>
           <p:cNvSpPr>
             <a:spLocks noGrp="1"/>
           </p:cNvSpPr>
@@ -276,7 +264,7 @@
           <a:p>
             <a:fld id="{7359EE32-49FD-4EA7-9011-353EB936649F}" type="datetimeFigureOut">
               <a:rPr lang="ko-KR" altLang="en-US" smtClean="0"/>
-              <a:t>2025-09-04</a:t>
+              <a:t>2025-09-06</a:t>
             </a:fld>
             <a:endParaRPr lang="ko-KR" altLang="en-US"/>
           </a:p>
@@ -284,13 +272,7 @@
       </p:sp>
       <p:sp>
         <p:nvSpPr>
-          <p:cNvPr id="5" name="바닥글 개체 틀 4">
-            <a:extLst>
-              <a:ext uri="{FF2B5EF4-FFF2-40B4-BE49-F238E27FC236}">
-                <a16:creationId xmlns:a16="http://schemas.microsoft.com/office/drawing/2014/main" id="{BFED3A56-B52E-14CF-C7AB-1A8265F3E358}"/>
-              </a:ext>
-            </a:extLst>
-          </p:cNvPr>
+          <p:cNvPr id="5" name="Footer Placeholder 4"/>
           <p:cNvSpPr>
             <a:spLocks noGrp="1"/>
           </p:cNvSpPr>
@@ -309,13 +291,7 @@
       </p:sp>
       <p:sp>
         <p:nvSpPr>
-          <p:cNvPr id="6" name="슬라이드 번호 개체 틀 5">
-            <a:extLst>
-              <a:ext uri="{FF2B5EF4-FFF2-40B4-BE49-F238E27FC236}">
-                <a16:creationId xmlns:a16="http://schemas.microsoft.com/office/drawing/2014/main" id="{3BA90E76-48B1-1323-FCA0-755EB08FD3B3}"/>
-              </a:ext>
-            </a:extLst>
-          </p:cNvPr>
+          <p:cNvPr id="6" name="Slide Number Placeholder 5"/>
           <p:cNvSpPr>
             <a:spLocks noGrp="1"/>
           </p:cNvSpPr>
@@ -339,7 +315,7 @@
     </p:spTree>
     <p:extLst>
       <p:ext uri="{BB962C8B-B14F-4D97-AF65-F5344CB8AC3E}">
-        <p14:creationId xmlns:p14="http://schemas.microsoft.com/office/powerpoint/2010/main" val="2343250922"/>
+        <p14:creationId xmlns:p14="http://schemas.microsoft.com/office/powerpoint/2010/main" val="3039902612"/>
       </p:ext>
     </p:extLst>
   </p:cSld>
@@ -368,13 +344,7 @@
       </p:grpSpPr>
       <p:sp>
         <p:nvSpPr>
-          <p:cNvPr id="2" name="제목 1">
-            <a:extLst>
-              <a:ext uri="{FF2B5EF4-FFF2-40B4-BE49-F238E27FC236}">
-                <a16:creationId xmlns:a16="http://schemas.microsoft.com/office/drawing/2014/main" id="{E124ACE1-A4F0-346A-9111-E9E77D07DFFA}"/>
-              </a:ext>
-            </a:extLst>
-          </p:cNvPr>
+          <p:cNvPr id="2" name="Title 1"/>
           <p:cNvSpPr>
             <a:spLocks noGrp="1"/>
           </p:cNvSpPr>
@@ -391,18 +361,13 @@
               <a:rPr lang="ko-KR" altLang="en-US"/>
               <a:t>마스터 제목 스타일 편집</a:t>
             </a:r>
-          </a:p>
-        </p:txBody>
-      </p:sp>
-      <p:sp>
-        <p:nvSpPr>
-          <p:cNvPr id="3" name="세로 텍스트 개체 틀 2">
-            <a:extLst>
-              <a:ext uri="{FF2B5EF4-FFF2-40B4-BE49-F238E27FC236}">
-                <a16:creationId xmlns:a16="http://schemas.microsoft.com/office/drawing/2014/main" id="{CBB54B05-9EE8-BCB1-4C25-80BA7D39B512}"/>
-              </a:ext>
-            </a:extLst>
-          </p:cNvPr>
+            <a:endParaRPr lang="en-US" dirty="0"/>
+          </a:p>
+        </p:txBody>
+      </p:sp>
+      <p:sp>
+        <p:nvSpPr>
+          <p:cNvPr id="3" name="Vertical Text Placeholder 2"/>
           <p:cNvSpPr>
             <a:spLocks noGrp="1"/>
           </p:cNvSpPr>
@@ -448,18 +413,13 @@
               <a:rPr lang="ko-KR" altLang="en-US"/>
               <a:t>다섯 번째 수준</a:t>
             </a:r>
-          </a:p>
-        </p:txBody>
-      </p:sp>
-      <p:sp>
-        <p:nvSpPr>
-          <p:cNvPr id="4" name="날짜 개체 틀 3">
-            <a:extLst>
-              <a:ext uri="{FF2B5EF4-FFF2-40B4-BE49-F238E27FC236}">
-                <a16:creationId xmlns:a16="http://schemas.microsoft.com/office/drawing/2014/main" id="{15B25541-E4D1-95FE-7EC2-5746A2BFA2B2}"/>
-              </a:ext>
-            </a:extLst>
-          </p:cNvPr>
+            <a:endParaRPr lang="en-US" dirty="0"/>
+          </a:p>
+        </p:txBody>
+      </p:sp>
+      <p:sp>
+        <p:nvSpPr>
+          <p:cNvPr id="4" name="Date Placeholder 3"/>
           <p:cNvSpPr>
             <a:spLocks noGrp="1"/>
           </p:cNvSpPr>
@@ -474,7 +434,7 @@
           <a:p>
             <a:fld id="{7359EE32-49FD-4EA7-9011-353EB936649F}" type="datetimeFigureOut">
               <a:rPr lang="ko-KR" altLang="en-US" smtClean="0"/>
-              <a:t>2025-09-04</a:t>
+              <a:t>2025-09-06</a:t>
             </a:fld>
             <a:endParaRPr lang="ko-KR" altLang="en-US"/>
           </a:p>
@@ -482,13 +442,7 @@
       </p:sp>
       <p:sp>
         <p:nvSpPr>
-          <p:cNvPr id="5" name="바닥글 개체 틀 4">
-            <a:extLst>
-              <a:ext uri="{FF2B5EF4-FFF2-40B4-BE49-F238E27FC236}">
-                <a16:creationId xmlns:a16="http://schemas.microsoft.com/office/drawing/2014/main" id="{F5F26A8D-5A74-BE7B-6929-272B5BB6DBD5}"/>
-              </a:ext>
-            </a:extLst>
-          </p:cNvPr>
+          <p:cNvPr id="5" name="Footer Placeholder 4"/>
           <p:cNvSpPr>
             <a:spLocks noGrp="1"/>
           </p:cNvSpPr>
@@ -507,13 +461,7 @@
       </p:sp>
       <p:sp>
         <p:nvSpPr>
-          <p:cNvPr id="6" name="슬라이드 번호 개체 틀 5">
-            <a:extLst>
-              <a:ext uri="{FF2B5EF4-FFF2-40B4-BE49-F238E27FC236}">
-                <a16:creationId xmlns:a16="http://schemas.microsoft.com/office/drawing/2014/main" id="{0CDE9733-D35C-2DF7-5CD9-AA5306B58099}"/>
-              </a:ext>
-            </a:extLst>
-          </p:cNvPr>
+          <p:cNvPr id="6" name="Slide Number Placeholder 5"/>
           <p:cNvSpPr>
             <a:spLocks noGrp="1"/>
           </p:cNvSpPr>
@@ -537,7 +485,7 @@
     </p:spTree>
     <p:extLst>
       <p:ext uri="{BB962C8B-B14F-4D97-AF65-F5344CB8AC3E}">
-        <p14:creationId xmlns:p14="http://schemas.microsoft.com/office/powerpoint/2010/main" val="1155799294"/>
+        <p14:creationId xmlns:p14="http://schemas.microsoft.com/office/powerpoint/2010/main" val="2627052886"/>
       </p:ext>
     </p:extLst>
   </p:cSld>
@@ -566,13 +514,7 @@
       </p:grpSpPr>
       <p:sp>
         <p:nvSpPr>
-          <p:cNvPr id="2" name="세로 제목 1">
-            <a:extLst>
-              <a:ext uri="{FF2B5EF4-FFF2-40B4-BE49-F238E27FC236}">
-                <a16:creationId xmlns:a16="http://schemas.microsoft.com/office/drawing/2014/main" id="{0DFD80FC-273F-588E-C294-71B175B7EB38}"/>
-              </a:ext>
-            </a:extLst>
-          </p:cNvPr>
+          <p:cNvPr id="2" name="Vertical Title 1"/>
           <p:cNvSpPr>
             <a:spLocks noGrp="1"/>
           </p:cNvSpPr>
@@ -582,8 +524,8 @@
         </p:nvSpPr>
         <p:spPr>
           <a:xfrm>
-            <a:off x="8724900" y="365125"/>
-            <a:ext cx="2628900" cy="5811838"/>
+            <a:off x="4907757" y="649111"/>
+            <a:ext cx="1478756" cy="10332156"/>
           </a:xfrm>
         </p:spPr>
         <p:txBody>
@@ -594,18 +536,13 @@
               <a:rPr lang="ko-KR" altLang="en-US"/>
               <a:t>마스터 제목 스타일 편집</a:t>
             </a:r>
-          </a:p>
-        </p:txBody>
-      </p:sp>
-      <p:sp>
-        <p:nvSpPr>
-          <p:cNvPr id="3" name="세로 텍스트 개체 틀 2">
-            <a:extLst>
-              <a:ext uri="{FF2B5EF4-FFF2-40B4-BE49-F238E27FC236}">
-                <a16:creationId xmlns:a16="http://schemas.microsoft.com/office/drawing/2014/main" id="{504A1528-A9B6-921F-0E26-C5FB14091E1E}"/>
-              </a:ext>
-            </a:extLst>
-          </p:cNvPr>
+            <a:endParaRPr lang="en-US" dirty="0"/>
+          </a:p>
+        </p:txBody>
+      </p:sp>
+      <p:sp>
+        <p:nvSpPr>
+          <p:cNvPr id="3" name="Vertical Text Placeholder 2"/>
           <p:cNvSpPr>
             <a:spLocks noGrp="1"/>
           </p:cNvSpPr>
@@ -615,8 +552,8 @@
         </p:nvSpPr>
         <p:spPr>
           <a:xfrm>
-            <a:off x="838200" y="365125"/>
-            <a:ext cx="7734300" cy="5811838"/>
+            <a:off x="471488" y="649111"/>
+            <a:ext cx="4350544" cy="10332156"/>
           </a:xfrm>
         </p:spPr>
         <p:txBody>
@@ -656,18 +593,13 @@
               <a:rPr lang="ko-KR" altLang="en-US"/>
               <a:t>다섯 번째 수준</a:t>
             </a:r>
-          </a:p>
-        </p:txBody>
-      </p:sp>
-      <p:sp>
-        <p:nvSpPr>
-          <p:cNvPr id="4" name="날짜 개체 틀 3">
-            <a:extLst>
-              <a:ext uri="{FF2B5EF4-FFF2-40B4-BE49-F238E27FC236}">
-                <a16:creationId xmlns:a16="http://schemas.microsoft.com/office/drawing/2014/main" id="{CF95F084-DC99-19E0-7AF1-11FF4F11C5C8}"/>
-              </a:ext>
-            </a:extLst>
-          </p:cNvPr>
+            <a:endParaRPr lang="en-US" dirty="0"/>
+          </a:p>
+        </p:txBody>
+      </p:sp>
+      <p:sp>
+        <p:nvSpPr>
+          <p:cNvPr id="4" name="Date Placeholder 3"/>
           <p:cNvSpPr>
             <a:spLocks noGrp="1"/>
           </p:cNvSpPr>
@@ -682,7 +614,7 @@
           <a:p>
             <a:fld id="{7359EE32-49FD-4EA7-9011-353EB936649F}" type="datetimeFigureOut">
               <a:rPr lang="ko-KR" altLang="en-US" smtClean="0"/>
-              <a:t>2025-09-04</a:t>
+              <a:t>2025-09-06</a:t>
             </a:fld>
             <a:endParaRPr lang="ko-KR" altLang="en-US"/>
           </a:p>
@@ -690,13 +622,7 @@
       </p:sp>
       <p:sp>
         <p:nvSpPr>
-          <p:cNvPr id="5" name="바닥글 개체 틀 4">
-            <a:extLst>
-              <a:ext uri="{FF2B5EF4-FFF2-40B4-BE49-F238E27FC236}">
-                <a16:creationId xmlns:a16="http://schemas.microsoft.com/office/drawing/2014/main" id="{4EB3E12D-057D-273D-A228-DA9CD15268A4}"/>
-              </a:ext>
-            </a:extLst>
-          </p:cNvPr>
+          <p:cNvPr id="5" name="Footer Placeholder 4"/>
           <p:cNvSpPr>
             <a:spLocks noGrp="1"/>
           </p:cNvSpPr>
@@ -715,13 +641,7 @@
       </p:sp>
       <p:sp>
         <p:nvSpPr>
-          <p:cNvPr id="6" name="슬라이드 번호 개체 틀 5">
-            <a:extLst>
-              <a:ext uri="{FF2B5EF4-FFF2-40B4-BE49-F238E27FC236}">
-                <a16:creationId xmlns:a16="http://schemas.microsoft.com/office/drawing/2014/main" id="{3F9F82EE-AAC0-33E6-9BD3-1DDB43FB4FBD}"/>
-              </a:ext>
-            </a:extLst>
-          </p:cNvPr>
+          <p:cNvPr id="6" name="Slide Number Placeholder 5"/>
           <p:cNvSpPr>
             <a:spLocks noGrp="1"/>
           </p:cNvSpPr>
@@ -745,7 +665,7 @@
     </p:spTree>
     <p:extLst>
       <p:ext uri="{BB962C8B-B14F-4D97-AF65-F5344CB8AC3E}">
-        <p14:creationId xmlns:p14="http://schemas.microsoft.com/office/powerpoint/2010/main" val="2944094904"/>
+        <p14:creationId xmlns:p14="http://schemas.microsoft.com/office/powerpoint/2010/main" val="3717365502"/>
       </p:ext>
     </p:extLst>
   </p:cSld>
@@ -774,13 +694,7 @@
       </p:grpSpPr>
       <p:sp>
         <p:nvSpPr>
-          <p:cNvPr id="2" name="제목 1">
-            <a:extLst>
-              <a:ext uri="{FF2B5EF4-FFF2-40B4-BE49-F238E27FC236}">
-                <a16:creationId xmlns:a16="http://schemas.microsoft.com/office/drawing/2014/main" id="{4C9FCAD6-30DA-718A-0B9E-F91CA2C68F6F}"/>
-              </a:ext>
-            </a:extLst>
-          </p:cNvPr>
+          <p:cNvPr id="2" name="Title 1"/>
           <p:cNvSpPr>
             <a:spLocks noGrp="1"/>
           </p:cNvSpPr>
@@ -797,18 +711,13 @@
               <a:rPr lang="ko-KR" altLang="en-US"/>
               <a:t>마스터 제목 스타일 편집</a:t>
             </a:r>
-          </a:p>
-        </p:txBody>
-      </p:sp>
-      <p:sp>
-        <p:nvSpPr>
-          <p:cNvPr id="3" name="내용 개체 틀 2">
-            <a:extLst>
-              <a:ext uri="{FF2B5EF4-FFF2-40B4-BE49-F238E27FC236}">
-                <a16:creationId xmlns:a16="http://schemas.microsoft.com/office/drawing/2014/main" id="{D5F6BE5E-5EC4-7180-86B9-0C223D578B80}"/>
-              </a:ext>
-            </a:extLst>
-          </p:cNvPr>
+            <a:endParaRPr lang="en-US" dirty="0"/>
+          </a:p>
+        </p:txBody>
+      </p:sp>
+      <p:sp>
+        <p:nvSpPr>
+          <p:cNvPr id="3" name="Content Placeholder 2"/>
           <p:cNvSpPr>
             <a:spLocks noGrp="1"/>
           </p:cNvSpPr>
@@ -854,18 +763,13 @@
               <a:rPr lang="ko-KR" altLang="en-US"/>
               <a:t>다섯 번째 수준</a:t>
             </a:r>
-          </a:p>
-        </p:txBody>
-      </p:sp>
-      <p:sp>
-        <p:nvSpPr>
-          <p:cNvPr id="4" name="날짜 개체 틀 3">
-            <a:extLst>
-              <a:ext uri="{FF2B5EF4-FFF2-40B4-BE49-F238E27FC236}">
-                <a16:creationId xmlns:a16="http://schemas.microsoft.com/office/drawing/2014/main" id="{7A557CBF-6129-74C9-A914-62F7E4E0A6C2}"/>
-              </a:ext>
-            </a:extLst>
-          </p:cNvPr>
+            <a:endParaRPr lang="en-US" dirty="0"/>
+          </a:p>
+        </p:txBody>
+      </p:sp>
+      <p:sp>
+        <p:nvSpPr>
+          <p:cNvPr id="4" name="Date Placeholder 3"/>
           <p:cNvSpPr>
             <a:spLocks noGrp="1"/>
           </p:cNvSpPr>
@@ -880,7 +784,7 @@
           <a:p>
             <a:fld id="{7359EE32-49FD-4EA7-9011-353EB936649F}" type="datetimeFigureOut">
               <a:rPr lang="ko-KR" altLang="en-US" smtClean="0"/>
-              <a:t>2025-09-04</a:t>
+              <a:t>2025-09-06</a:t>
             </a:fld>
             <a:endParaRPr lang="ko-KR" altLang="en-US"/>
           </a:p>
@@ -888,13 +792,7 @@
       </p:sp>
       <p:sp>
         <p:nvSpPr>
-          <p:cNvPr id="5" name="바닥글 개체 틀 4">
-            <a:extLst>
-              <a:ext uri="{FF2B5EF4-FFF2-40B4-BE49-F238E27FC236}">
-                <a16:creationId xmlns:a16="http://schemas.microsoft.com/office/drawing/2014/main" id="{73AED207-E025-BA6A-D6F9-FE1C612FA117}"/>
-              </a:ext>
-            </a:extLst>
-          </p:cNvPr>
+          <p:cNvPr id="5" name="Footer Placeholder 4"/>
           <p:cNvSpPr>
             <a:spLocks noGrp="1"/>
           </p:cNvSpPr>
@@ -913,13 +811,7 @@
       </p:sp>
       <p:sp>
         <p:nvSpPr>
-          <p:cNvPr id="6" name="슬라이드 번호 개체 틀 5">
-            <a:extLst>
-              <a:ext uri="{FF2B5EF4-FFF2-40B4-BE49-F238E27FC236}">
-                <a16:creationId xmlns:a16="http://schemas.microsoft.com/office/drawing/2014/main" id="{DB5CCB6A-DB1E-A96E-0A3D-9322821BD3F7}"/>
-              </a:ext>
-            </a:extLst>
-          </p:cNvPr>
+          <p:cNvPr id="6" name="Slide Number Placeholder 5"/>
           <p:cNvSpPr>
             <a:spLocks noGrp="1"/>
           </p:cNvSpPr>
@@ -943,7 +835,7 @@
     </p:spTree>
     <p:extLst>
       <p:ext uri="{BB962C8B-B14F-4D97-AF65-F5344CB8AC3E}">
-        <p14:creationId xmlns:p14="http://schemas.microsoft.com/office/powerpoint/2010/main" val="2161254322"/>
+        <p14:creationId xmlns:p14="http://schemas.microsoft.com/office/powerpoint/2010/main" val="3127184102"/>
       </p:ext>
     </p:extLst>
   </p:cSld>
@@ -972,13 +864,7 @@
       </p:grpSpPr>
       <p:sp>
         <p:nvSpPr>
-          <p:cNvPr id="2" name="제목 1">
-            <a:extLst>
-              <a:ext uri="{FF2B5EF4-FFF2-40B4-BE49-F238E27FC236}">
-                <a16:creationId xmlns:a16="http://schemas.microsoft.com/office/drawing/2014/main" id="{CC832211-1E6F-F3A4-9050-32A6C9DC6425}"/>
-              </a:ext>
-            </a:extLst>
-          </p:cNvPr>
+          <p:cNvPr id="2" name="Title 1"/>
           <p:cNvSpPr>
             <a:spLocks noGrp="1"/>
           </p:cNvSpPr>
@@ -988,15 +874,15 @@
         </p:nvSpPr>
         <p:spPr>
           <a:xfrm>
-            <a:off x="831850" y="1709738"/>
-            <a:ext cx="10515600" cy="2852737"/>
+            <a:off x="467916" y="3039537"/>
+            <a:ext cx="5915025" cy="5071532"/>
           </a:xfrm>
         </p:spPr>
         <p:txBody>
           <a:bodyPr anchor="b"/>
           <a:lstStyle>
             <a:lvl1pPr>
-              <a:defRPr sz="6000"/>
+              <a:defRPr sz="4500"/>
             </a:lvl1pPr>
           </a:lstStyle>
           <a:p>
@@ -1004,18 +890,13 @@
               <a:rPr lang="ko-KR" altLang="en-US"/>
               <a:t>마스터 제목 스타일 편집</a:t>
             </a:r>
-          </a:p>
-        </p:txBody>
-      </p:sp>
-      <p:sp>
-        <p:nvSpPr>
-          <p:cNvPr id="3" name="텍스트 개체 틀 2">
-            <a:extLst>
-              <a:ext uri="{FF2B5EF4-FFF2-40B4-BE49-F238E27FC236}">
-                <a16:creationId xmlns:a16="http://schemas.microsoft.com/office/drawing/2014/main" id="{04A56608-4347-F241-745B-AB6695A9E8CC}"/>
-              </a:ext>
-            </a:extLst>
-          </p:cNvPr>
+            <a:endParaRPr lang="en-US" dirty="0"/>
+          </a:p>
+        </p:txBody>
+      </p:sp>
+      <p:sp>
+        <p:nvSpPr>
+          <p:cNvPr id="3" name="Text Placeholder 2"/>
           <p:cNvSpPr>
             <a:spLocks noGrp="1"/>
           </p:cNvSpPr>
@@ -1025,8 +906,8 @@
         </p:nvSpPr>
         <p:spPr>
           <a:xfrm>
-            <a:off x="831850" y="4589463"/>
-            <a:ext cx="10515600" cy="1500187"/>
+            <a:off x="467916" y="8159048"/>
+            <a:ext cx="5915025" cy="2666999"/>
           </a:xfrm>
         </p:spPr>
         <p:txBody>
@@ -1034,7 +915,7 @@
           <a:lstStyle>
             <a:lvl1pPr marL="0" indent="0">
               <a:buNone/>
-              <a:defRPr sz="2400">
+              <a:defRPr sz="1800">
                 <a:solidFill>
                   <a:schemeClr val="tx1">
                     <a:tint val="82000"/>
@@ -1042,9 +923,9 @@
                 </a:solidFill>
               </a:defRPr>
             </a:lvl1pPr>
-            <a:lvl2pPr marL="457200" indent="0">
-              <a:buNone/>
-              <a:defRPr sz="2000">
+            <a:lvl2pPr marL="342900" indent="0">
+              <a:buNone/>
+              <a:defRPr sz="1500">
                 <a:solidFill>
                   <a:schemeClr val="tx1">
                     <a:tint val="82000"/>
@@ -1052,9 +933,9 @@
                 </a:solidFill>
               </a:defRPr>
             </a:lvl2pPr>
-            <a:lvl3pPr marL="914400" indent="0">
-              <a:buNone/>
-              <a:defRPr sz="1800">
+            <a:lvl3pPr marL="685800" indent="0">
+              <a:buNone/>
+              <a:defRPr sz="1350">
                 <a:solidFill>
                   <a:schemeClr val="tx1">
                     <a:tint val="82000"/>
@@ -1062,9 +943,9 @@
                 </a:solidFill>
               </a:defRPr>
             </a:lvl3pPr>
-            <a:lvl4pPr marL="1371600" indent="0">
-              <a:buNone/>
-              <a:defRPr sz="1600">
+            <a:lvl4pPr marL="1028700" indent="0">
+              <a:buNone/>
+              <a:defRPr sz="1200">
                 <a:solidFill>
                   <a:schemeClr val="tx1">
                     <a:tint val="82000"/>
@@ -1072,9 +953,9 @@
                 </a:solidFill>
               </a:defRPr>
             </a:lvl4pPr>
-            <a:lvl5pPr marL="1828800" indent="0">
-              <a:buNone/>
-              <a:defRPr sz="1600">
+            <a:lvl5pPr marL="1371600" indent="0">
+              <a:buNone/>
+              <a:defRPr sz="1200">
                 <a:solidFill>
                   <a:schemeClr val="tx1">
                     <a:tint val="82000"/>
@@ -1082,9 +963,9 @@
                 </a:solidFill>
               </a:defRPr>
             </a:lvl5pPr>
-            <a:lvl6pPr marL="2286000" indent="0">
-              <a:buNone/>
-              <a:defRPr sz="1600">
+            <a:lvl6pPr marL="1714500" indent="0">
+              <a:buNone/>
+              <a:defRPr sz="1200">
                 <a:solidFill>
                   <a:schemeClr val="tx1">
                     <a:tint val="82000"/>
@@ -1092,9 +973,9 @@
                 </a:solidFill>
               </a:defRPr>
             </a:lvl6pPr>
-            <a:lvl7pPr marL="2743200" indent="0">
-              <a:buNone/>
-              <a:defRPr sz="1600">
+            <a:lvl7pPr marL="2057400" indent="0">
+              <a:buNone/>
+              <a:defRPr sz="1200">
                 <a:solidFill>
                   <a:schemeClr val="tx1">
                     <a:tint val="82000"/>
@@ -1102,9 +983,9 @@
                 </a:solidFill>
               </a:defRPr>
             </a:lvl7pPr>
-            <a:lvl8pPr marL="3200400" indent="0">
-              <a:buNone/>
-              <a:defRPr sz="1600">
+            <a:lvl8pPr marL="2400300" indent="0">
+              <a:buNone/>
+              <a:defRPr sz="1200">
                 <a:solidFill>
                   <a:schemeClr val="tx1">
                     <a:tint val="82000"/>
@@ -1112,9 +993,9 @@
                 </a:solidFill>
               </a:defRPr>
             </a:lvl8pPr>
-            <a:lvl9pPr marL="3657600" indent="0">
-              <a:buNone/>
-              <a:defRPr sz="1600">
+            <a:lvl9pPr marL="2743200" indent="0">
+              <a:buNone/>
+              <a:defRPr sz="1200">
                 <a:solidFill>
                   <a:schemeClr val="tx1">
                     <a:tint val="82000"/>
@@ -1134,13 +1015,7 @@
       </p:sp>
       <p:sp>
         <p:nvSpPr>
-          <p:cNvPr id="4" name="날짜 개체 틀 3">
-            <a:extLst>
-              <a:ext uri="{FF2B5EF4-FFF2-40B4-BE49-F238E27FC236}">
-                <a16:creationId xmlns:a16="http://schemas.microsoft.com/office/drawing/2014/main" id="{6228BE8B-B936-0E69-A9CC-DFDBFC37BD9E}"/>
-              </a:ext>
-            </a:extLst>
-          </p:cNvPr>
+          <p:cNvPr id="4" name="Date Placeholder 3"/>
           <p:cNvSpPr>
             <a:spLocks noGrp="1"/>
           </p:cNvSpPr>
@@ -1155,7 +1030,7 @@
           <a:p>
             <a:fld id="{7359EE32-49FD-4EA7-9011-353EB936649F}" type="datetimeFigureOut">
               <a:rPr lang="ko-KR" altLang="en-US" smtClean="0"/>
-              <a:t>2025-09-04</a:t>
+              <a:t>2025-09-06</a:t>
             </a:fld>
             <a:endParaRPr lang="ko-KR" altLang="en-US"/>
           </a:p>
@@ -1163,13 +1038,7 @@
       </p:sp>
       <p:sp>
         <p:nvSpPr>
-          <p:cNvPr id="5" name="바닥글 개체 틀 4">
-            <a:extLst>
-              <a:ext uri="{FF2B5EF4-FFF2-40B4-BE49-F238E27FC236}">
-                <a16:creationId xmlns:a16="http://schemas.microsoft.com/office/drawing/2014/main" id="{E3FF8286-8F65-ED9D-299E-B1763B3674B8}"/>
-              </a:ext>
-            </a:extLst>
-          </p:cNvPr>
+          <p:cNvPr id="5" name="Footer Placeholder 4"/>
           <p:cNvSpPr>
             <a:spLocks noGrp="1"/>
           </p:cNvSpPr>
@@ -1188,13 +1057,7 @@
       </p:sp>
       <p:sp>
         <p:nvSpPr>
-          <p:cNvPr id="6" name="슬라이드 번호 개체 틀 5">
-            <a:extLst>
-              <a:ext uri="{FF2B5EF4-FFF2-40B4-BE49-F238E27FC236}">
-                <a16:creationId xmlns:a16="http://schemas.microsoft.com/office/drawing/2014/main" id="{2CC15C32-F422-830D-A537-7398F319CDF3}"/>
-              </a:ext>
-            </a:extLst>
-          </p:cNvPr>
+          <p:cNvPr id="6" name="Slide Number Placeholder 5"/>
           <p:cNvSpPr>
             <a:spLocks noGrp="1"/>
           </p:cNvSpPr>
@@ -1218,7 +1081,7 @@
     </p:spTree>
     <p:extLst>
       <p:ext uri="{BB962C8B-B14F-4D97-AF65-F5344CB8AC3E}">
-        <p14:creationId xmlns:p14="http://schemas.microsoft.com/office/powerpoint/2010/main" val="1529131648"/>
+        <p14:creationId xmlns:p14="http://schemas.microsoft.com/office/powerpoint/2010/main" val="3015422216"/>
       </p:ext>
     </p:extLst>
   </p:cSld>
@@ -1247,13 +1110,7 @@
       </p:grpSpPr>
       <p:sp>
         <p:nvSpPr>
-          <p:cNvPr id="2" name="제목 1">
-            <a:extLst>
-              <a:ext uri="{FF2B5EF4-FFF2-40B4-BE49-F238E27FC236}">
-                <a16:creationId xmlns:a16="http://schemas.microsoft.com/office/drawing/2014/main" id="{13F16C10-3816-432F-38FA-B0EE9832E17B}"/>
-              </a:ext>
-            </a:extLst>
-          </p:cNvPr>
+          <p:cNvPr id="2" name="Title 1"/>
           <p:cNvSpPr>
             <a:spLocks noGrp="1"/>
           </p:cNvSpPr>
@@ -1270,18 +1127,13 @@
               <a:rPr lang="ko-KR" altLang="en-US"/>
               <a:t>마스터 제목 스타일 편집</a:t>
             </a:r>
-          </a:p>
-        </p:txBody>
-      </p:sp>
-      <p:sp>
-        <p:nvSpPr>
-          <p:cNvPr id="3" name="내용 개체 틀 2">
-            <a:extLst>
-              <a:ext uri="{FF2B5EF4-FFF2-40B4-BE49-F238E27FC236}">
-                <a16:creationId xmlns:a16="http://schemas.microsoft.com/office/drawing/2014/main" id="{76D0E7BB-13BA-D54E-8414-7F5FD9C6F309}"/>
-              </a:ext>
-            </a:extLst>
-          </p:cNvPr>
+            <a:endParaRPr lang="en-US" dirty="0"/>
+          </a:p>
+        </p:txBody>
+      </p:sp>
+      <p:sp>
+        <p:nvSpPr>
+          <p:cNvPr id="3" name="Content Placeholder 2"/>
           <p:cNvSpPr>
             <a:spLocks noGrp="1"/>
           </p:cNvSpPr>
@@ -1291,8 +1143,8 @@
         </p:nvSpPr>
         <p:spPr>
           <a:xfrm>
-            <a:off x="838200" y="1825625"/>
-            <a:ext cx="5181600" cy="4351338"/>
+            <a:off x="471488" y="3245556"/>
+            <a:ext cx="2914650" cy="7735712"/>
           </a:xfrm>
         </p:spPr>
         <p:txBody>
@@ -1332,18 +1184,13 @@
               <a:rPr lang="ko-KR" altLang="en-US"/>
               <a:t>다섯 번째 수준</a:t>
             </a:r>
-          </a:p>
-        </p:txBody>
-      </p:sp>
-      <p:sp>
-        <p:nvSpPr>
-          <p:cNvPr id="4" name="내용 개체 틀 3">
-            <a:extLst>
-              <a:ext uri="{FF2B5EF4-FFF2-40B4-BE49-F238E27FC236}">
-                <a16:creationId xmlns:a16="http://schemas.microsoft.com/office/drawing/2014/main" id="{C571964C-62EA-53EF-2A0A-488125F534A8}"/>
-              </a:ext>
-            </a:extLst>
-          </p:cNvPr>
+            <a:endParaRPr lang="en-US" dirty="0"/>
+          </a:p>
+        </p:txBody>
+      </p:sp>
+      <p:sp>
+        <p:nvSpPr>
+          <p:cNvPr id="4" name="Content Placeholder 3"/>
           <p:cNvSpPr>
             <a:spLocks noGrp="1"/>
           </p:cNvSpPr>
@@ -1353,8 +1200,8 @@
         </p:nvSpPr>
         <p:spPr>
           <a:xfrm>
-            <a:off x="6172200" y="1825625"/>
-            <a:ext cx="5181600" cy="4351338"/>
+            <a:off x="3471863" y="3245556"/>
+            <a:ext cx="2914650" cy="7735712"/>
           </a:xfrm>
         </p:spPr>
         <p:txBody>
@@ -1394,18 +1241,13 @@
               <a:rPr lang="ko-KR" altLang="en-US"/>
               <a:t>다섯 번째 수준</a:t>
             </a:r>
-          </a:p>
-        </p:txBody>
-      </p:sp>
-      <p:sp>
-        <p:nvSpPr>
-          <p:cNvPr id="5" name="날짜 개체 틀 4">
-            <a:extLst>
-              <a:ext uri="{FF2B5EF4-FFF2-40B4-BE49-F238E27FC236}">
-                <a16:creationId xmlns:a16="http://schemas.microsoft.com/office/drawing/2014/main" id="{63998E5F-2E43-0165-E3EA-AA09D3FE564A}"/>
-              </a:ext>
-            </a:extLst>
-          </p:cNvPr>
+            <a:endParaRPr lang="en-US" dirty="0"/>
+          </a:p>
+        </p:txBody>
+      </p:sp>
+      <p:sp>
+        <p:nvSpPr>
+          <p:cNvPr id="5" name="Date Placeholder 4"/>
           <p:cNvSpPr>
             <a:spLocks noGrp="1"/>
           </p:cNvSpPr>
@@ -1420,7 +1262,7 @@
           <a:p>
             <a:fld id="{7359EE32-49FD-4EA7-9011-353EB936649F}" type="datetimeFigureOut">
               <a:rPr lang="ko-KR" altLang="en-US" smtClean="0"/>
-              <a:t>2025-09-04</a:t>
+              <a:t>2025-09-06</a:t>
             </a:fld>
             <a:endParaRPr lang="ko-KR" altLang="en-US"/>
           </a:p>
@@ -1428,13 +1270,7 @@
       </p:sp>
       <p:sp>
         <p:nvSpPr>
-          <p:cNvPr id="6" name="바닥글 개체 틀 5">
-            <a:extLst>
-              <a:ext uri="{FF2B5EF4-FFF2-40B4-BE49-F238E27FC236}">
-                <a16:creationId xmlns:a16="http://schemas.microsoft.com/office/drawing/2014/main" id="{D9A6802C-A3FF-3C3B-3C05-90CAE561A087}"/>
-              </a:ext>
-            </a:extLst>
-          </p:cNvPr>
+          <p:cNvPr id="6" name="Footer Placeholder 5"/>
           <p:cNvSpPr>
             <a:spLocks noGrp="1"/>
           </p:cNvSpPr>
@@ -1453,13 +1289,7 @@
       </p:sp>
       <p:sp>
         <p:nvSpPr>
-          <p:cNvPr id="7" name="슬라이드 번호 개체 틀 6">
-            <a:extLst>
-              <a:ext uri="{FF2B5EF4-FFF2-40B4-BE49-F238E27FC236}">
-                <a16:creationId xmlns:a16="http://schemas.microsoft.com/office/drawing/2014/main" id="{FED7C0EF-9084-5DD0-699A-7DEC25AB1AF1}"/>
-              </a:ext>
-            </a:extLst>
-          </p:cNvPr>
+          <p:cNvPr id="7" name="Slide Number Placeholder 6"/>
           <p:cNvSpPr>
             <a:spLocks noGrp="1"/>
           </p:cNvSpPr>
@@ -1483,7 +1313,7 @@
     </p:spTree>
     <p:extLst>
       <p:ext uri="{BB962C8B-B14F-4D97-AF65-F5344CB8AC3E}">
-        <p14:creationId xmlns:p14="http://schemas.microsoft.com/office/powerpoint/2010/main" val="3137155873"/>
+        <p14:creationId xmlns:p14="http://schemas.microsoft.com/office/powerpoint/2010/main" val="787321937"/>
       </p:ext>
     </p:extLst>
   </p:cSld>
@@ -1512,13 +1342,7 @@
       </p:grpSpPr>
       <p:sp>
         <p:nvSpPr>
-          <p:cNvPr id="2" name="제목 1">
-            <a:extLst>
-              <a:ext uri="{FF2B5EF4-FFF2-40B4-BE49-F238E27FC236}">
-                <a16:creationId xmlns:a16="http://schemas.microsoft.com/office/drawing/2014/main" id="{926EC5AB-6580-EA19-94F2-A61CB40A231A}"/>
-              </a:ext>
-            </a:extLst>
-          </p:cNvPr>
+          <p:cNvPr id="2" name="Title 1"/>
           <p:cNvSpPr>
             <a:spLocks noGrp="1"/>
           </p:cNvSpPr>
@@ -1528,8 +1352,8 @@
         </p:nvSpPr>
         <p:spPr>
           <a:xfrm>
-            <a:off x="839788" y="365125"/>
-            <a:ext cx="10515600" cy="1325563"/>
+            <a:off x="472381" y="649114"/>
+            <a:ext cx="5915025" cy="2356556"/>
           </a:xfrm>
         </p:spPr>
         <p:txBody>
@@ -1540,18 +1364,13 @@
               <a:rPr lang="ko-KR" altLang="en-US"/>
               <a:t>마스터 제목 스타일 편집</a:t>
             </a:r>
-          </a:p>
-        </p:txBody>
-      </p:sp>
-      <p:sp>
-        <p:nvSpPr>
-          <p:cNvPr id="3" name="텍스트 개체 틀 2">
-            <a:extLst>
-              <a:ext uri="{FF2B5EF4-FFF2-40B4-BE49-F238E27FC236}">
-                <a16:creationId xmlns:a16="http://schemas.microsoft.com/office/drawing/2014/main" id="{194D46D0-0F51-7669-9A99-623021B8C6FE}"/>
-              </a:ext>
-            </a:extLst>
-          </p:cNvPr>
+            <a:endParaRPr lang="en-US" dirty="0"/>
+          </a:p>
+        </p:txBody>
+      </p:sp>
+      <p:sp>
+        <p:nvSpPr>
+          <p:cNvPr id="3" name="Text Placeholder 2"/>
           <p:cNvSpPr>
             <a:spLocks noGrp="1"/>
           </p:cNvSpPr>
@@ -1561,8 +1380,8 @@
         </p:nvSpPr>
         <p:spPr>
           <a:xfrm>
-            <a:off x="839788" y="1681163"/>
-            <a:ext cx="5157787" cy="823912"/>
+            <a:off x="472381" y="2988734"/>
+            <a:ext cx="2901255" cy="1464732"/>
           </a:xfrm>
         </p:spPr>
         <p:txBody>
@@ -1570,39 +1389,39 @@
           <a:lstStyle>
             <a:lvl1pPr marL="0" indent="0">
               <a:buNone/>
-              <a:defRPr sz="2400" b="1"/>
+              <a:defRPr sz="1800" b="1"/>
             </a:lvl1pPr>
-            <a:lvl2pPr marL="457200" indent="0">
-              <a:buNone/>
-              <a:defRPr sz="2000" b="1"/>
+            <a:lvl2pPr marL="342900" indent="0">
+              <a:buNone/>
+              <a:defRPr sz="1500" b="1"/>
             </a:lvl2pPr>
-            <a:lvl3pPr marL="914400" indent="0">
-              <a:buNone/>
-              <a:defRPr sz="1800" b="1"/>
+            <a:lvl3pPr marL="685800" indent="0">
+              <a:buNone/>
+              <a:defRPr sz="1350" b="1"/>
             </a:lvl3pPr>
-            <a:lvl4pPr marL="1371600" indent="0">
-              <a:buNone/>
-              <a:defRPr sz="1600" b="1"/>
+            <a:lvl4pPr marL="1028700" indent="0">
+              <a:buNone/>
+              <a:defRPr sz="1200" b="1"/>
             </a:lvl4pPr>
-            <a:lvl5pPr marL="1828800" indent="0">
-              <a:buNone/>
-              <a:defRPr sz="1600" b="1"/>
+            <a:lvl5pPr marL="1371600" indent="0">
+              <a:buNone/>
+              <a:defRPr sz="1200" b="1"/>
             </a:lvl5pPr>
-            <a:lvl6pPr marL="2286000" indent="0">
-              <a:buNone/>
-              <a:defRPr sz="1600" b="1"/>
+            <a:lvl6pPr marL="1714500" indent="0">
+              <a:buNone/>
+              <a:defRPr sz="1200" b="1"/>
             </a:lvl6pPr>
-            <a:lvl7pPr marL="2743200" indent="0">
-              <a:buNone/>
-              <a:defRPr sz="1600" b="1"/>
+            <a:lvl7pPr marL="2057400" indent="0">
+              <a:buNone/>
+              <a:defRPr sz="1200" b="1"/>
             </a:lvl7pPr>
-            <a:lvl8pPr marL="3200400" indent="0">
-              <a:buNone/>
-              <a:defRPr sz="1600" b="1"/>
+            <a:lvl8pPr marL="2400300" indent="0">
+              <a:buNone/>
+              <a:defRPr sz="1200" b="1"/>
             </a:lvl8pPr>
-            <a:lvl9pPr marL="3657600" indent="0">
-              <a:buNone/>
-              <a:defRPr sz="1600" b="1"/>
+            <a:lvl9pPr marL="2743200" indent="0">
+              <a:buNone/>
+              <a:defRPr sz="1200" b="1"/>
             </a:lvl9pPr>
           </a:lstStyle>
           <a:p>
@@ -1616,13 +1435,7 @@
       </p:sp>
       <p:sp>
         <p:nvSpPr>
-          <p:cNvPr id="4" name="내용 개체 틀 3">
-            <a:extLst>
-              <a:ext uri="{FF2B5EF4-FFF2-40B4-BE49-F238E27FC236}">
-                <a16:creationId xmlns:a16="http://schemas.microsoft.com/office/drawing/2014/main" id="{826C8450-E8F8-7516-3E30-5E36D0BB17B7}"/>
-              </a:ext>
-            </a:extLst>
-          </p:cNvPr>
+          <p:cNvPr id="4" name="Content Placeholder 3"/>
           <p:cNvSpPr>
             <a:spLocks noGrp="1"/>
           </p:cNvSpPr>
@@ -1632,8 +1445,8 @@
         </p:nvSpPr>
         <p:spPr>
           <a:xfrm>
-            <a:off x="839788" y="2505075"/>
-            <a:ext cx="5157787" cy="3684588"/>
+            <a:off x="472381" y="4453467"/>
+            <a:ext cx="2901255" cy="6550379"/>
           </a:xfrm>
         </p:spPr>
         <p:txBody>
@@ -1673,18 +1486,13 @@
               <a:rPr lang="ko-KR" altLang="en-US"/>
               <a:t>다섯 번째 수준</a:t>
             </a:r>
-          </a:p>
-        </p:txBody>
-      </p:sp>
-      <p:sp>
-        <p:nvSpPr>
-          <p:cNvPr id="5" name="텍스트 개체 틀 4">
-            <a:extLst>
-              <a:ext uri="{FF2B5EF4-FFF2-40B4-BE49-F238E27FC236}">
-                <a16:creationId xmlns:a16="http://schemas.microsoft.com/office/drawing/2014/main" id="{0CB756FD-6D0D-49DC-BFBA-C300B20B432A}"/>
-              </a:ext>
-            </a:extLst>
-          </p:cNvPr>
+            <a:endParaRPr lang="en-US" dirty="0"/>
+          </a:p>
+        </p:txBody>
+      </p:sp>
+      <p:sp>
+        <p:nvSpPr>
+          <p:cNvPr id="5" name="Text Placeholder 4"/>
           <p:cNvSpPr>
             <a:spLocks noGrp="1"/>
           </p:cNvSpPr>
@@ -1694,8 +1502,8 @@
         </p:nvSpPr>
         <p:spPr>
           <a:xfrm>
-            <a:off x="6172200" y="1681163"/>
-            <a:ext cx="5183188" cy="823912"/>
+            <a:off x="3471863" y="2988734"/>
+            <a:ext cx="2915543" cy="1464732"/>
           </a:xfrm>
         </p:spPr>
         <p:txBody>
@@ -1703,39 +1511,39 @@
           <a:lstStyle>
             <a:lvl1pPr marL="0" indent="0">
               <a:buNone/>
-              <a:defRPr sz="2400" b="1"/>
+              <a:defRPr sz="1800" b="1"/>
             </a:lvl1pPr>
-            <a:lvl2pPr marL="457200" indent="0">
-              <a:buNone/>
-              <a:defRPr sz="2000" b="1"/>
+            <a:lvl2pPr marL="342900" indent="0">
+              <a:buNone/>
+              <a:defRPr sz="1500" b="1"/>
             </a:lvl2pPr>
-            <a:lvl3pPr marL="914400" indent="0">
-              <a:buNone/>
-              <a:defRPr sz="1800" b="1"/>
+            <a:lvl3pPr marL="685800" indent="0">
+              <a:buNone/>
+              <a:defRPr sz="1350" b="1"/>
             </a:lvl3pPr>
-            <a:lvl4pPr marL="1371600" indent="0">
-              <a:buNone/>
-              <a:defRPr sz="1600" b="1"/>
+            <a:lvl4pPr marL="1028700" indent="0">
+              <a:buNone/>
+              <a:defRPr sz="1200" b="1"/>
             </a:lvl4pPr>
-            <a:lvl5pPr marL="1828800" indent="0">
-              <a:buNone/>
-              <a:defRPr sz="1600" b="1"/>
+            <a:lvl5pPr marL="1371600" indent="0">
+              <a:buNone/>
+              <a:defRPr sz="1200" b="1"/>
             </a:lvl5pPr>
-            <a:lvl6pPr marL="2286000" indent="0">
-              <a:buNone/>
-              <a:defRPr sz="1600" b="1"/>
+            <a:lvl6pPr marL="1714500" indent="0">
+              <a:buNone/>
+              <a:defRPr sz="1200" b="1"/>
             </a:lvl6pPr>
-            <a:lvl7pPr marL="2743200" indent="0">
-              <a:buNone/>
-              <a:defRPr sz="1600" b="1"/>
+            <a:lvl7pPr marL="2057400" indent="0">
+              <a:buNone/>
+              <a:defRPr sz="1200" b="1"/>
             </a:lvl7pPr>
-            <a:lvl8pPr marL="3200400" indent="0">
-              <a:buNone/>
-              <a:defRPr sz="1600" b="1"/>
+            <a:lvl8pPr marL="2400300" indent="0">
+              <a:buNone/>
+              <a:defRPr sz="1200" b="1"/>
             </a:lvl8pPr>
-            <a:lvl9pPr marL="3657600" indent="0">
-              <a:buNone/>
-              <a:defRPr sz="1600" b="1"/>
+            <a:lvl9pPr marL="2743200" indent="0">
+              <a:buNone/>
+              <a:defRPr sz="1200" b="1"/>
             </a:lvl9pPr>
           </a:lstStyle>
           <a:p>
@@ -1749,13 +1557,7 @@
       </p:sp>
       <p:sp>
         <p:nvSpPr>
-          <p:cNvPr id="6" name="내용 개체 틀 5">
-            <a:extLst>
-              <a:ext uri="{FF2B5EF4-FFF2-40B4-BE49-F238E27FC236}">
-                <a16:creationId xmlns:a16="http://schemas.microsoft.com/office/drawing/2014/main" id="{950179B7-D0AF-48E7-CA89-B61A74390BBA}"/>
-              </a:ext>
-            </a:extLst>
-          </p:cNvPr>
+          <p:cNvPr id="6" name="Content Placeholder 5"/>
           <p:cNvSpPr>
             <a:spLocks noGrp="1"/>
           </p:cNvSpPr>
@@ -1765,8 +1567,8 @@
         </p:nvSpPr>
         <p:spPr>
           <a:xfrm>
-            <a:off x="6172200" y="2505075"/>
-            <a:ext cx="5183188" cy="3684588"/>
+            <a:off x="3471863" y="4453467"/>
+            <a:ext cx="2915543" cy="6550379"/>
           </a:xfrm>
         </p:spPr>
         <p:txBody>
@@ -1806,18 +1608,13 @@
               <a:rPr lang="ko-KR" altLang="en-US"/>
               <a:t>다섯 번째 수준</a:t>
             </a:r>
-          </a:p>
-        </p:txBody>
-      </p:sp>
-      <p:sp>
-        <p:nvSpPr>
-          <p:cNvPr id="7" name="날짜 개체 틀 6">
-            <a:extLst>
-              <a:ext uri="{FF2B5EF4-FFF2-40B4-BE49-F238E27FC236}">
-                <a16:creationId xmlns:a16="http://schemas.microsoft.com/office/drawing/2014/main" id="{7E03B105-7526-AAF4-9DDD-0A16130A481A}"/>
-              </a:ext>
-            </a:extLst>
-          </p:cNvPr>
+            <a:endParaRPr lang="en-US" dirty="0"/>
+          </a:p>
+        </p:txBody>
+      </p:sp>
+      <p:sp>
+        <p:nvSpPr>
+          <p:cNvPr id="7" name="Date Placeholder 6"/>
           <p:cNvSpPr>
             <a:spLocks noGrp="1"/>
           </p:cNvSpPr>
@@ -1832,7 +1629,7 @@
           <a:p>
             <a:fld id="{7359EE32-49FD-4EA7-9011-353EB936649F}" type="datetimeFigureOut">
               <a:rPr lang="ko-KR" altLang="en-US" smtClean="0"/>
-              <a:t>2025-09-04</a:t>
+              <a:t>2025-09-06</a:t>
             </a:fld>
             <a:endParaRPr lang="ko-KR" altLang="en-US"/>
           </a:p>
@@ -1840,13 +1637,7 @@
       </p:sp>
       <p:sp>
         <p:nvSpPr>
-          <p:cNvPr id="8" name="바닥글 개체 틀 7">
-            <a:extLst>
-              <a:ext uri="{FF2B5EF4-FFF2-40B4-BE49-F238E27FC236}">
-                <a16:creationId xmlns:a16="http://schemas.microsoft.com/office/drawing/2014/main" id="{71704524-7241-5B7B-AA8F-D5106AD93A1F}"/>
-              </a:ext>
-            </a:extLst>
-          </p:cNvPr>
+          <p:cNvPr id="8" name="Footer Placeholder 7"/>
           <p:cNvSpPr>
             <a:spLocks noGrp="1"/>
           </p:cNvSpPr>
@@ -1865,13 +1656,7 @@
       </p:sp>
       <p:sp>
         <p:nvSpPr>
-          <p:cNvPr id="9" name="슬라이드 번호 개체 틀 8">
-            <a:extLst>
-              <a:ext uri="{FF2B5EF4-FFF2-40B4-BE49-F238E27FC236}">
-                <a16:creationId xmlns:a16="http://schemas.microsoft.com/office/drawing/2014/main" id="{8C118A96-EC14-0C6D-7880-B76E32E38DB1}"/>
-              </a:ext>
-            </a:extLst>
-          </p:cNvPr>
+          <p:cNvPr id="9" name="Slide Number Placeholder 8"/>
           <p:cNvSpPr>
             <a:spLocks noGrp="1"/>
           </p:cNvSpPr>
@@ -1895,7 +1680,7 @@
     </p:spTree>
     <p:extLst>
       <p:ext uri="{BB962C8B-B14F-4D97-AF65-F5344CB8AC3E}">
-        <p14:creationId xmlns:p14="http://schemas.microsoft.com/office/powerpoint/2010/main" val="135226918"/>
+        <p14:creationId xmlns:p14="http://schemas.microsoft.com/office/powerpoint/2010/main" val="813613428"/>
       </p:ext>
     </p:extLst>
   </p:cSld>
@@ -1924,13 +1709,7 @@
       </p:grpSpPr>
       <p:sp>
         <p:nvSpPr>
-          <p:cNvPr id="2" name="제목 1">
-            <a:extLst>
-              <a:ext uri="{FF2B5EF4-FFF2-40B4-BE49-F238E27FC236}">
-                <a16:creationId xmlns:a16="http://schemas.microsoft.com/office/drawing/2014/main" id="{B9BCF931-5C47-098E-669A-A071695E4DD2}"/>
-              </a:ext>
-            </a:extLst>
-          </p:cNvPr>
+          <p:cNvPr id="2" name="Title 1"/>
           <p:cNvSpPr>
             <a:spLocks noGrp="1"/>
           </p:cNvSpPr>
@@ -1947,18 +1726,13 @@
               <a:rPr lang="ko-KR" altLang="en-US"/>
               <a:t>마스터 제목 스타일 편집</a:t>
             </a:r>
-          </a:p>
-        </p:txBody>
-      </p:sp>
-      <p:sp>
-        <p:nvSpPr>
-          <p:cNvPr id="3" name="날짜 개체 틀 2">
-            <a:extLst>
-              <a:ext uri="{FF2B5EF4-FFF2-40B4-BE49-F238E27FC236}">
-                <a16:creationId xmlns:a16="http://schemas.microsoft.com/office/drawing/2014/main" id="{CF47CD62-7BEB-93F6-8F59-9A38920B1A1A}"/>
-              </a:ext>
-            </a:extLst>
-          </p:cNvPr>
+            <a:endParaRPr lang="en-US" dirty="0"/>
+          </a:p>
+        </p:txBody>
+      </p:sp>
+      <p:sp>
+        <p:nvSpPr>
+          <p:cNvPr id="3" name="Date Placeholder 2"/>
           <p:cNvSpPr>
             <a:spLocks noGrp="1"/>
           </p:cNvSpPr>
@@ -1973,7 +1747,7 @@
           <a:p>
             <a:fld id="{7359EE32-49FD-4EA7-9011-353EB936649F}" type="datetimeFigureOut">
               <a:rPr lang="ko-KR" altLang="en-US" smtClean="0"/>
-              <a:t>2025-09-04</a:t>
+              <a:t>2025-09-06</a:t>
             </a:fld>
             <a:endParaRPr lang="ko-KR" altLang="en-US"/>
           </a:p>
@@ -1981,13 +1755,7 @@
       </p:sp>
       <p:sp>
         <p:nvSpPr>
-          <p:cNvPr id="4" name="바닥글 개체 틀 3">
-            <a:extLst>
-              <a:ext uri="{FF2B5EF4-FFF2-40B4-BE49-F238E27FC236}">
-                <a16:creationId xmlns:a16="http://schemas.microsoft.com/office/drawing/2014/main" id="{C75D8707-8721-5828-F469-C2EAE3699F98}"/>
-              </a:ext>
-            </a:extLst>
-          </p:cNvPr>
+          <p:cNvPr id="4" name="Footer Placeholder 3"/>
           <p:cNvSpPr>
             <a:spLocks noGrp="1"/>
           </p:cNvSpPr>
@@ -2006,13 +1774,7 @@
       </p:sp>
       <p:sp>
         <p:nvSpPr>
-          <p:cNvPr id="5" name="슬라이드 번호 개체 틀 4">
-            <a:extLst>
-              <a:ext uri="{FF2B5EF4-FFF2-40B4-BE49-F238E27FC236}">
-                <a16:creationId xmlns:a16="http://schemas.microsoft.com/office/drawing/2014/main" id="{7CC4656B-0285-FB2E-3898-9A15C2600CB0}"/>
-              </a:ext>
-            </a:extLst>
-          </p:cNvPr>
+          <p:cNvPr id="5" name="Slide Number Placeholder 4"/>
           <p:cNvSpPr>
             <a:spLocks noGrp="1"/>
           </p:cNvSpPr>
@@ -2036,7 +1798,7 @@
     </p:spTree>
     <p:extLst>
       <p:ext uri="{BB962C8B-B14F-4D97-AF65-F5344CB8AC3E}">
-        <p14:creationId xmlns:p14="http://schemas.microsoft.com/office/powerpoint/2010/main" val="69460635"/>
+        <p14:creationId xmlns:p14="http://schemas.microsoft.com/office/powerpoint/2010/main" val="1695403709"/>
       </p:ext>
     </p:extLst>
   </p:cSld>
@@ -2065,13 +1827,7 @@
       </p:grpSpPr>
       <p:sp>
         <p:nvSpPr>
-          <p:cNvPr id="2" name="날짜 개체 틀 1">
-            <a:extLst>
-              <a:ext uri="{FF2B5EF4-FFF2-40B4-BE49-F238E27FC236}">
-                <a16:creationId xmlns:a16="http://schemas.microsoft.com/office/drawing/2014/main" id="{BD4A1931-8E47-A32B-D7DB-CFF8DE9D244F}"/>
-              </a:ext>
-            </a:extLst>
-          </p:cNvPr>
+          <p:cNvPr id="2" name="Date Placeholder 1"/>
           <p:cNvSpPr>
             <a:spLocks noGrp="1"/>
           </p:cNvSpPr>
@@ -2086,7 +1842,7 @@
           <a:p>
             <a:fld id="{7359EE32-49FD-4EA7-9011-353EB936649F}" type="datetimeFigureOut">
               <a:rPr lang="ko-KR" altLang="en-US" smtClean="0"/>
-              <a:t>2025-09-04</a:t>
+              <a:t>2025-09-06</a:t>
             </a:fld>
             <a:endParaRPr lang="ko-KR" altLang="en-US"/>
           </a:p>
@@ -2094,13 +1850,7 @@
       </p:sp>
       <p:sp>
         <p:nvSpPr>
-          <p:cNvPr id="3" name="바닥글 개체 틀 2">
-            <a:extLst>
-              <a:ext uri="{FF2B5EF4-FFF2-40B4-BE49-F238E27FC236}">
-                <a16:creationId xmlns:a16="http://schemas.microsoft.com/office/drawing/2014/main" id="{A67033E6-B526-1B70-0589-2324F6DAD51D}"/>
-              </a:ext>
-            </a:extLst>
-          </p:cNvPr>
+          <p:cNvPr id="3" name="Footer Placeholder 2"/>
           <p:cNvSpPr>
             <a:spLocks noGrp="1"/>
           </p:cNvSpPr>
@@ -2119,13 +1869,7 @@
       </p:sp>
       <p:sp>
         <p:nvSpPr>
-          <p:cNvPr id="4" name="슬라이드 번호 개체 틀 3">
-            <a:extLst>
-              <a:ext uri="{FF2B5EF4-FFF2-40B4-BE49-F238E27FC236}">
-                <a16:creationId xmlns:a16="http://schemas.microsoft.com/office/drawing/2014/main" id="{9DFF42FE-05BC-9F27-685D-412409EA375C}"/>
-              </a:ext>
-            </a:extLst>
-          </p:cNvPr>
+          <p:cNvPr id="4" name="Slide Number Placeholder 3"/>
           <p:cNvSpPr>
             <a:spLocks noGrp="1"/>
           </p:cNvSpPr>
@@ -2149,7 +1893,7 @@
     </p:spTree>
     <p:extLst>
       <p:ext uri="{BB962C8B-B14F-4D97-AF65-F5344CB8AC3E}">
-        <p14:creationId xmlns:p14="http://schemas.microsoft.com/office/powerpoint/2010/main" val="587510123"/>
+        <p14:creationId xmlns:p14="http://schemas.microsoft.com/office/powerpoint/2010/main" val="3671545672"/>
       </p:ext>
     </p:extLst>
   </p:cSld>
@@ -2178,13 +1922,7 @@
       </p:grpSpPr>
       <p:sp>
         <p:nvSpPr>
-          <p:cNvPr id="2" name="제목 1">
-            <a:extLst>
-              <a:ext uri="{FF2B5EF4-FFF2-40B4-BE49-F238E27FC236}">
-                <a16:creationId xmlns:a16="http://schemas.microsoft.com/office/drawing/2014/main" id="{DE07CA9B-6AF0-EF10-B4BB-8A9E8CE1A849}"/>
-              </a:ext>
-            </a:extLst>
-          </p:cNvPr>
+          <p:cNvPr id="2" name="Title 1"/>
           <p:cNvSpPr>
             <a:spLocks noGrp="1"/>
           </p:cNvSpPr>
@@ -2194,15 +1932,15 @@
         </p:nvSpPr>
         <p:spPr>
           <a:xfrm>
-            <a:off x="839788" y="457200"/>
-            <a:ext cx="3932237" cy="1600200"/>
+            <a:off x="472381" y="812800"/>
+            <a:ext cx="2211884" cy="2844800"/>
           </a:xfrm>
         </p:spPr>
         <p:txBody>
           <a:bodyPr anchor="b"/>
           <a:lstStyle>
             <a:lvl1pPr>
-              <a:defRPr sz="3200"/>
+              <a:defRPr sz="2400"/>
             </a:lvl1pPr>
           </a:lstStyle>
           <a:p>
@@ -2210,18 +1948,13 @@
               <a:rPr lang="ko-KR" altLang="en-US"/>
               <a:t>마스터 제목 스타일 편집</a:t>
             </a:r>
-          </a:p>
-        </p:txBody>
-      </p:sp>
-      <p:sp>
-        <p:nvSpPr>
-          <p:cNvPr id="3" name="내용 개체 틀 2">
-            <a:extLst>
-              <a:ext uri="{FF2B5EF4-FFF2-40B4-BE49-F238E27FC236}">
-                <a16:creationId xmlns:a16="http://schemas.microsoft.com/office/drawing/2014/main" id="{38ECF62D-66CC-6C64-5F83-7FBAF3D0CD98}"/>
-              </a:ext>
-            </a:extLst>
-          </p:cNvPr>
+            <a:endParaRPr lang="en-US" dirty="0"/>
+          </a:p>
+        </p:txBody>
+      </p:sp>
+      <p:sp>
+        <p:nvSpPr>
+          <p:cNvPr id="3" name="Content Placeholder 2"/>
           <p:cNvSpPr>
             <a:spLocks noGrp="1"/>
           </p:cNvSpPr>
@@ -2231,39 +1964,39 @@
         </p:nvSpPr>
         <p:spPr>
           <a:xfrm>
-            <a:off x="5183188" y="987425"/>
-            <a:ext cx="6172200" cy="4873625"/>
+            <a:off x="2915543" y="1755425"/>
+            <a:ext cx="3471863" cy="8664222"/>
           </a:xfrm>
         </p:spPr>
         <p:txBody>
           <a:bodyPr/>
           <a:lstStyle>
             <a:lvl1pPr>
-              <a:defRPr sz="3200"/>
+              <a:defRPr sz="2400"/>
             </a:lvl1pPr>
             <a:lvl2pPr>
-              <a:defRPr sz="2800"/>
+              <a:defRPr sz="2100"/>
             </a:lvl2pPr>
             <a:lvl3pPr>
-              <a:defRPr sz="2400"/>
+              <a:defRPr sz="1800"/>
             </a:lvl3pPr>
             <a:lvl4pPr>
-              <a:defRPr sz="2000"/>
+              <a:defRPr sz="1500"/>
             </a:lvl4pPr>
             <a:lvl5pPr>
-              <a:defRPr sz="2000"/>
+              <a:defRPr sz="1500"/>
             </a:lvl5pPr>
             <a:lvl6pPr>
-              <a:defRPr sz="2000"/>
+              <a:defRPr sz="1500"/>
             </a:lvl6pPr>
             <a:lvl7pPr>
-              <a:defRPr sz="2000"/>
+              <a:defRPr sz="1500"/>
             </a:lvl7pPr>
             <a:lvl8pPr>
-              <a:defRPr sz="2000"/>
+              <a:defRPr sz="1500"/>
             </a:lvl8pPr>
             <a:lvl9pPr>
-              <a:defRPr sz="2000"/>
+              <a:defRPr sz="1500"/>
             </a:lvl9pPr>
           </a:lstStyle>
           <a:p>
@@ -2300,18 +2033,13 @@
               <a:rPr lang="ko-KR" altLang="en-US"/>
               <a:t>다섯 번째 수준</a:t>
             </a:r>
-          </a:p>
-        </p:txBody>
-      </p:sp>
-      <p:sp>
-        <p:nvSpPr>
-          <p:cNvPr id="4" name="텍스트 개체 틀 3">
-            <a:extLst>
-              <a:ext uri="{FF2B5EF4-FFF2-40B4-BE49-F238E27FC236}">
-                <a16:creationId xmlns:a16="http://schemas.microsoft.com/office/drawing/2014/main" id="{DE57CD72-A01A-C13B-D551-99ABBE052AB6}"/>
-              </a:ext>
-            </a:extLst>
-          </p:cNvPr>
+            <a:endParaRPr lang="en-US" dirty="0"/>
+          </a:p>
+        </p:txBody>
+      </p:sp>
+      <p:sp>
+        <p:nvSpPr>
+          <p:cNvPr id="4" name="Text Placeholder 3"/>
           <p:cNvSpPr>
             <a:spLocks noGrp="1"/>
           </p:cNvSpPr>
@@ -2321,8 +2049,8 @@
         </p:nvSpPr>
         <p:spPr>
           <a:xfrm>
-            <a:off x="839788" y="2057400"/>
-            <a:ext cx="3932237" cy="3811588"/>
+            <a:off x="472381" y="3657600"/>
+            <a:ext cx="2211884" cy="6776156"/>
           </a:xfrm>
         </p:spPr>
         <p:txBody>
@@ -2330,39 +2058,39 @@
           <a:lstStyle>
             <a:lvl1pPr marL="0" indent="0">
               <a:buNone/>
-              <a:defRPr sz="1600"/>
+              <a:defRPr sz="1200"/>
             </a:lvl1pPr>
-            <a:lvl2pPr marL="457200" indent="0">
-              <a:buNone/>
-              <a:defRPr sz="1400"/>
+            <a:lvl2pPr marL="342900" indent="0">
+              <a:buNone/>
+              <a:defRPr sz="1050"/>
             </a:lvl2pPr>
-            <a:lvl3pPr marL="914400" indent="0">
-              <a:buNone/>
-              <a:defRPr sz="1200"/>
+            <a:lvl3pPr marL="685800" indent="0">
+              <a:buNone/>
+              <a:defRPr sz="900"/>
             </a:lvl3pPr>
-            <a:lvl4pPr marL="1371600" indent="0">
-              <a:buNone/>
-              <a:defRPr sz="1000"/>
+            <a:lvl4pPr marL="1028700" indent="0">
+              <a:buNone/>
+              <a:defRPr sz="750"/>
             </a:lvl4pPr>
-            <a:lvl5pPr marL="1828800" indent="0">
-              <a:buNone/>
-              <a:defRPr sz="1000"/>
+            <a:lvl5pPr marL="1371600" indent="0">
+              <a:buNone/>
+              <a:defRPr sz="750"/>
             </a:lvl5pPr>
-            <a:lvl6pPr marL="2286000" indent="0">
-              <a:buNone/>
-              <a:defRPr sz="1000"/>
+            <a:lvl6pPr marL="1714500" indent="0">
+              <a:buNone/>
+              <a:defRPr sz="750"/>
             </a:lvl6pPr>
-            <a:lvl7pPr marL="2743200" indent="0">
-              <a:buNone/>
-              <a:defRPr sz="1000"/>
+            <a:lvl7pPr marL="2057400" indent="0">
+              <a:buNone/>
+              <a:defRPr sz="750"/>
             </a:lvl7pPr>
-            <a:lvl8pPr marL="3200400" indent="0">
-              <a:buNone/>
-              <a:defRPr sz="1000"/>
+            <a:lvl8pPr marL="2400300" indent="0">
+              <a:buNone/>
+              <a:defRPr sz="750"/>
             </a:lvl8pPr>
-            <a:lvl9pPr marL="3657600" indent="0">
-              <a:buNone/>
-              <a:defRPr sz="1000"/>
+            <a:lvl9pPr marL="2743200" indent="0">
+              <a:buNone/>
+              <a:defRPr sz="750"/>
             </a:lvl9pPr>
           </a:lstStyle>
           <a:p>
@@ -2376,13 +2104,7 @@
       </p:sp>
       <p:sp>
         <p:nvSpPr>
-          <p:cNvPr id="5" name="날짜 개체 틀 4">
-            <a:extLst>
-              <a:ext uri="{FF2B5EF4-FFF2-40B4-BE49-F238E27FC236}">
-                <a16:creationId xmlns:a16="http://schemas.microsoft.com/office/drawing/2014/main" id="{C5719B9B-C79D-C92B-0700-B6977B4CE369}"/>
-              </a:ext>
-            </a:extLst>
-          </p:cNvPr>
+          <p:cNvPr id="5" name="Date Placeholder 4"/>
           <p:cNvSpPr>
             <a:spLocks noGrp="1"/>
           </p:cNvSpPr>
@@ -2397,7 +2119,7 @@
           <a:p>
             <a:fld id="{7359EE32-49FD-4EA7-9011-353EB936649F}" type="datetimeFigureOut">
               <a:rPr lang="ko-KR" altLang="en-US" smtClean="0"/>
-              <a:t>2025-09-04</a:t>
+              <a:t>2025-09-06</a:t>
             </a:fld>
             <a:endParaRPr lang="ko-KR" altLang="en-US"/>
           </a:p>
@@ -2405,13 +2127,7 @@
       </p:sp>
       <p:sp>
         <p:nvSpPr>
-          <p:cNvPr id="6" name="바닥글 개체 틀 5">
-            <a:extLst>
-              <a:ext uri="{FF2B5EF4-FFF2-40B4-BE49-F238E27FC236}">
-                <a16:creationId xmlns:a16="http://schemas.microsoft.com/office/drawing/2014/main" id="{A48C00A2-B151-884C-FA28-E846231504F3}"/>
-              </a:ext>
-            </a:extLst>
-          </p:cNvPr>
+          <p:cNvPr id="6" name="Footer Placeholder 5"/>
           <p:cNvSpPr>
             <a:spLocks noGrp="1"/>
           </p:cNvSpPr>
@@ -2430,13 +2146,7 @@
       </p:sp>
       <p:sp>
         <p:nvSpPr>
-          <p:cNvPr id="7" name="슬라이드 번호 개체 틀 6">
-            <a:extLst>
-              <a:ext uri="{FF2B5EF4-FFF2-40B4-BE49-F238E27FC236}">
-                <a16:creationId xmlns:a16="http://schemas.microsoft.com/office/drawing/2014/main" id="{1F2019E7-A589-2732-95EF-B781C89095CC}"/>
-              </a:ext>
-            </a:extLst>
-          </p:cNvPr>
+          <p:cNvPr id="7" name="Slide Number Placeholder 6"/>
           <p:cNvSpPr>
             <a:spLocks noGrp="1"/>
           </p:cNvSpPr>
@@ -2460,7 +2170,7 @@
     </p:spTree>
     <p:extLst>
       <p:ext uri="{BB962C8B-B14F-4D97-AF65-F5344CB8AC3E}">
-        <p14:creationId xmlns:p14="http://schemas.microsoft.com/office/powerpoint/2010/main" val="2411021960"/>
+        <p14:creationId xmlns:p14="http://schemas.microsoft.com/office/powerpoint/2010/main" val="106097792"/>
       </p:ext>
     </p:extLst>
   </p:cSld>
@@ -2489,13 +2199,7 @@
       </p:grpSpPr>
       <p:sp>
         <p:nvSpPr>
-          <p:cNvPr id="2" name="제목 1">
-            <a:extLst>
-              <a:ext uri="{FF2B5EF4-FFF2-40B4-BE49-F238E27FC236}">
-                <a16:creationId xmlns:a16="http://schemas.microsoft.com/office/drawing/2014/main" id="{56FC6B8F-13B2-D492-33DF-C1283501C9A3}"/>
-              </a:ext>
-            </a:extLst>
-          </p:cNvPr>
+          <p:cNvPr id="2" name="Title 1"/>
           <p:cNvSpPr>
             <a:spLocks noGrp="1"/>
           </p:cNvSpPr>
@@ -2505,15 +2209,15 @@
         </p:nvSpPr>
         <p:spPr>
           <a:xfrm>
-            <a:off x="839788" y="457200"/>
-            <a:ext cx="3932237" cy="1600200"/>
+            <a:off x="472381" y="812800"/>
+            <a:ext cx="2211884" cy="2844800"/>
           </a:xfrm>
         </p:spPr>
         <p:txBody>
           <a:bodyPr anchor="b"/>
           <a:lstStyle>
             <a:lvl1pPr>
-              <a:defRPr sz="3200"/>
+              <a:defRPr sz="2400"/>
             </a:lvl1pPr>
           </a:lstStyle>
           <a:p>
@@ -2521,20 +2225,15 @@
               <a:rPr lang="ko-KR" altLang="en-US"/>
               <a:t>마스터 제목 스타일 편집</a:t>
             </a:r>
-          </a:p>
-        </p:txBody>
-      </p:sp>
-      <p:sp>
-        <p:nvSpPr>
-          <p:cNvPr id="3" name="그림 개체 틀 2">
-            <a:extLst>
-              <a:ext uri="{FF2B5EF4-FFF2-40B4-BE49-F238E27FC236}">
-                <a16:creationId xmlns:a16="http://schemas.microsoft.com/office/drawing/2014/main" id="{7BB241D6-17E0-C89D-27A9-A238929B0DBC}"/>
-              </a:ext>
-            </a:extLst>
-          </p:cNvPr>
-          <p:cNvSpPr>
-            <a:spLocks noGrp="1"/>
+            <a:endParaRPr lang="en-US" dirty="0"/>
+          </a:p>
+        </p:txBody>
+      </p:sp>
+      <p:sp>
+        <p:nvSpPr>
+          <p:cNvPr id="3" name="Picture Placeholder 2"/>
+          <p:cNvSpPr>
+            <a:spLocks noGrp="1" noChangeAspect="1"/>
           </p:cNvSpPr>
           <p:nvPr>
             <p:ph type="pic" idx="1"/>
@@ -2542,64 +2241,62 @@
         </p:nvSpPr>
         <p:spPr>
           <a:xfrm>
-            <a:off x="5183188" y="987425"/>
-            <a:ext cx="6172200" cy="4873625"/>
+            <a:off x="2915543" y="1755425"/>
+            <a:ext cx="3471863" cy="8664222"/>
           </a:xfrm>
         </p:spPr>
         <p:txBody>
-          <a:bodyPr/>
+          <a:bodyPr anchor="t"/>
           <a:lstStyle>
             <a:lvl1pPr marL="0" indent="0">
               <a:buNone/>
-              <a:defRPr sz="3200"/>
+              <a:defRPr sz="2400"/>
             </a:lvl1pPr>
-            <a:lvl2pPr marL="457200" indent="0">
-              <a:buNone/>
-              <a:defRPr sz="2800"/>
+            <a:lvl2pPr marL="342900" indent="0">
+              <a:buNone/>
+              <a:defRPr sz="2100"/>
             </a:lvl2pPr>
-            <a:lvl3pPr marL="914400" indent="0">
-              <a:buNone/>
-              <a:defRPr sz="2400"/>
+            <a:lvl3pPr marL="685800" indent="0">
+              <a:buNone/>
+              <a:defRPr sz="1800"/>
             </a:lvl3pPr>
-            <a:lvl4pPr marL="1371600" indent="0">
-              <a:buNone/>
-              <a:defRPr sz="2000"/>
+            <a:lvl4pPr marL="1028700" indent="0">
+              <a:buNone/>
+              <a:defRPr sz="1500"/>
             </a:lvl4pPr>
-            <a:lvl5pPr marL="1828800" indent="0">
-              <a:buNone/>
-              <a:defRPr sz="2000"/>
+            <a:lvl5pPr marL="1371600" indent="0">
+              <a:buNone/>
+              <a:defRPr sz="1500"/>
             </a:lvl5pPr>
-            <a:lvl6pPr marL="2286000" indent="0">
-              <a:buNone/>
-              <a:defRPr sz="2000"/>
+            <a:lvl6pPr marL="1714500" indent="0">
+              <a:buNone/>
+              <a:defRPr sz="1500"/>
             </a:lvl6pPr>
-            <a:lvl7pPr marL="2743200" indent="0">
-              <a:buNone/>
-              <a:defRPr sz="2000"/>
+            <a:lvl7pPr marL="2057400" indent="0">
+              <a:buNone/>
+              <a:defRPr sz="1500"/>
             </a:lvl7pPr>
-            <a:lvl8pPr marL="3200400" indent="0">
-              <a:buNone/>
-              <a:defRPr sz="2000"/>
+            <a:lvl8pPr marL="2400300" indent="0">
+              <a:buNone/>
+              <a:defRPr sz="1500"/>
             </a:lvl8pPr>
-            <a:lvl9pPr marL="3657600" indent="0">
-              <a:buNone/>
-              <a:defRPr sz="2000"/>
+            <a:lvl9pPr marL="2743200" indent="0">
+              <a:buNone/>
+              <a:defRPr sz="1500"/>
             </a:lvl9pPr>
           </a:lstStyle>
           <a:p>
-            <a:endParaRPr lang="ko-KR" altLang="en-US"/>
-          </a:p>
-        </p:txBody>
-      </p:sp>
-      <p:sp>
-        <p:nvSpPr>
-          <p:cNvPr id="4" name="텍스트 개체 틀 3">
-            <a:extLst>
-              <a:ext uri="{FF2B5EF4-FFF2-40B4-BE49-F238E27FC236}">
-                <a16:creationId xmlns:a16="http://schemas.microsoft.com/office/drawing/2014/main" id="{907D10C6-0019-CCF9-13E5-37B67551E5BD}"/>
-              </a:ext>
-            </a:extLst>
-          </p:cNvPr>
+            <a:r>
+              <a:rPr lang="ko-KR" altLang="en-US"/>
+              <a:t>그림을 추가하려면 아이콘을 클릭하십시오</a:t>
+            </a:r>
+            <a:endParaRPr lang="en-US" dirty="0"/>
+          </a:p>
+        </p:txBody>
+      </p:sp>
+      <p:sp>
+        <p:nvSpPr>
+          <p:cNvPr id="4" name="Text Placeholder 3"/>
           <p:cNvSpPr>
             <a:spLocks noGrp="1"/>
           </p:cNvSpPr>
@@ -2609,8 +2306,8 @@
         </p:nvSpPr>
         <p:spPr>
           <a:xfrm>
-            <a:off x="839788" y="2057400"/>
-            <a:ext cx="3932237" cy="3811588"/>
+            <a:off x="472381" y="3657600"/>
+            <a:ext cx="2211884" cy="6776156"/>
           </a:xfrm>
         </p:spPr>
         <p:txBody>
@@ -2618,39 +2315,39 @@
           <a:lstStyle>
             <a:lvl1pPr marL="0" indent="0">
               <a:buNone/>
-              <a:defRPr sz="1600"/>
+              <a:defRPr sz="1200"/>
             </a:lvl1pPr>
-            <a:lvl2pPr marL="457200" indent="0">
-              <a:buNone/>
-              <a:defRPr sz="1400"/>
+            <a:lvl2pPr marL="342900" indent="0">
+              <a:buNone/>
+              <a:defRPr sz="1050"/>
             </a:lvl2pPr>
-            <a:lvl3pPr marL="914400" indent="0">
-              <a:buNone/>
-              <a:defRPr sz="1200"/>
+            <a:lvl3pPr marL="685800" indent="0">
+              <a:buNone/>
+              <a:defRPr sz="900"/>
             </a:lvl3pPr>
-            <a:lvl4pPr marL="1371600" indent="0">
-              <a:buNone/>
-              <a:defRPr sz="1000"/>
+            <a:lvl4pPr marL="1028700" indent="0">
+              <a:buNone/>
+              <a:defRPr sz="750"/>
             </a:lvl4pPr>
-            <a:lvl5pPr marL="1828800" indent="0">
-              <a:buNone/>
-              <a:defRPr sz="1000"/>
+            <a:lvl5pPr marL="1371600" indent="0">
+              <a:buNone/>
+              <a:defRPr sz="750"/>
             </a:lvl5pPr>
-            <a:lvl6pPr marL="2286000" indent="0">
-              <a:buNone/>
-              <a:defRPr sz="1000"/>
+            <a:lvl6pPr marL="1714500" indent="0">
+              <a:buNone/>
+              <a:defRPr sz="750"/>
             </a:lvl6pPr>
-            <a:lvl7pPr marL="2743200" indent="0">
-              <a:buNone/>
-              <a:defRPr sz="1000"/>
+            <a:lvl7pPr marL="2057400" indent="0">
+              <a:buNone/>
+              <a:defRPr sz="750"/>
             </a:lvl7pPr>
-            <a:lvl8pPr marL="3200400" indent="0">
-              <a:buNone/>
-              <a:defRPr sz="1000"/>
+            <a:lvl8pPr marL="2400300" indent="0">
+              <a:buNone/>
+              <a:defRPr sz="750"/>
             </a:lvl8pPr>
-            <a:lvl9pPr marL="3657600" indent="0">
-              <a:buNone/>
-              <a:defRPr sz="1000"/>
+            <a:lvl9pPr marL="2743200" indent="0">
+              <a:buNone/>
+              <a:defRPr sz="750"/>
             </a:lvl9pPr>
           </a:lstStyle>
           <a:p>
@@ -2664,13 +2361,7 @@
       </p:sp>
       <p:sp>
         <p:nvSpPr>
-          <p:cNvPr id="5" name="날짜 개체 틀 4">
-            <a:extLst>
-              <a:ext uri="{FF2B5EF4-FFF2-40B4-BE49-F238E27FC236}">
-                <a16:creationId xmlns:a16="http://schemas.microsoft.com/office/drawing/2014/main" id="{8EC5E3FF-65EA-82CE-53E8-063CE1552198}"/>
-              </a:ext>
-            </a:extLst>
-          </p:cNvPr>
+          <p:cNvPr id="5" name="Date Placeholder 4"/>
           <p:cNvSpPr>
             <a:spLocks noGrp="1"/>
           </p:cNvSpPr>
@@ -2685,7 +2376,7 @@
           <a:p>
             <a:fld id="{7359EE32-49FD-4EA7-9011-353EB936649F}" type="datetimeFigureOut">
               <a:rPr lang="ko-KR" altLang="en-US" smtClean="0"/>
-              <a:t>2025-09-04</a:t>
+              <a:t>2025-09-06</a:t>
             </a:fld>
             <a:endParaRPr lang="ko-KR" altLang="en-US"/>
           </a:p>
@@ -2693,13 +2384,7 @@
       </p:sp>
       <p:sp>
         <p:nvSpPr>
-          <p:cNvPr id="6" name="바닥글 개체 틀 5">
-            <a:extLst>
-              <a:ext uri="{FF2B5EF4-FFF2-40B4-BE49-F238E27FC236}">
-                <a16:creationId xmlns:a16="http://schemas.microsoft.com/office/drawing/2014/main" id="{FD1406EE-93F0-00B6-1C99-4D098B3DD5F1}"/>
-              </a:ext>
-            </a:extLst>
-          </p:cNvPr>
+          <p:cNvPr id="6" name="Footer Placeholder 5"/>
           <p:cNvSpPr>
             <a:spLocks noGrp="1"/>
           </p:cNvSpPr>
@@ -2718,13 +2403,7 @@
       </p:sp>
       <p:sp>
         <p:nvSpPr>
-          <p:cNvPr id="7" name="슬라이드 번호 개체 틀 6">
-            <a:extLst>
-              <a:ext uri="{FF2B5EF4-FFF2-40B4-BE49-F238E27FC236}">
-                <a16:creationId xmlns:a16="http://schemas.microsoft.com/office/drawing/2014/main" id="{E8E53093-EE0C-C9E2-8B62-947266899E27}"/>
-              </a:ext>
-            </a:extLst>
-          </p:cNvPr>
+          <p:cNvPr id="7" name="Slide Number Placeholder 6"/>
           <p:cNvSpPr>
             <a:spLocks noGrp="1"/>
           </p:cNvSpPr>
@@ -2748,7 +2427,7 @@
     </p:spTree>
     <p:extLst>
       <p:ext uri="{BB962C8B-B14F-4D97-AF65-F5344CB8AC3E}">
-        <p14:creationId xmlns:p14="http://schemas.microsoft.com/office/powerpoint/2010/main" val="556858474"/>
+        <p14:creationId xmlns:p14="http://schemas.microsoft.com/office/powerpoint/2010/main" val="1445750668"/>
       </p:ext>
     </p:extLst>
   </p:cSld>
@@ -2782,13 +2461,7 @@
       </p:grpSpPr>
       <p:sp>
         <p:nvSpPr>
-          <p:cNvPr id="2" name="제목 개체 틀 1">
-            <a:extLst>
-              <a:ext uri="{FF2B5EF4-FFF2-40B4-BE49-F238E27FC236}">
-                <a16:creationId xmlns:a16="http://schemas.microsoft.com/office/drawing/2014/main" id="{D5AEEB5A-2190-7F9A-9A96-6D342883D10D}"/>
-              </a:ext>
-            </a:extLst>
-          </p:cNvPr>
+          <p:cNvPr id="2" name="Title Placeholder 1"/>
           <p:cNvSpPr>
             <a:spLocks noGrp="1"/>
           </p:cNvSpPr>
@@ -2798,8 +2471,8 @@
         </p:nvSpPr>
         <p:spPr>
           <a:xfrm>
-            <a:off x="838200" y="365125"/>
-            <a:ext cx="10515600" cy="1325563"/>
+            <a:off x="471488" y="649114"/>
+            <a:ext cx="5915025" cy="2356556"/>
           </a:xfrm>
           <a:prstGeom prst="rect">
             <a:avLst/>
@@ -2815,18 +2488,13 @@
               <a:rPr lang="ko-KR" altLang="en-US"/>
               <a:t>마스터 제목 스타일 편집</a:t>
             </a:r>
-          </a:p>
-        </p:txBody>
-      </p:sp>
-      <p:sp>
-        <p:nvSpPr>
-          <p:cNvPr id="3" name="텍스트 개체 틀 2">
-            <a:extLst>
-              <a:ext uri="{FF2B5EF4-FFF2-40B4-BE49-F238E27FC236}">
-                <a16:creationId xmlns:a16="http://schemas.microsoft.com/office/drawing/2014/main" id="{DD93ECF4-33BD-E166-F96D-BF2E7F816D34}"/>
-              </a:ext>
-            </a:extLst>
-          </p:cNvPr>
+            <a:endParaRPr lang="en-US" dirty="0"/>
+          </a:p>
+        </p:txBody>
+      </p:sp>
+      <p:sp>
+        <p:nvSpPr>
+          <p:cNvPr id="3" name="Text Placeholder 2"/>
           <p:cNvSpPr>
             <a:spLocks noGrp="1"/>
           </p:cNvSpPr>
@@ -2836,8 +2504,8 @@
         </p:nvSpPr>
         <p:spPr>
           <a:xfrm>
-            <a:off x="838200" y="1825625"/>
-            <a:ext cx="10515600" cy="4351338"/>
+            <a:off x="471488" y="3245556"/>
+            <a:ext cx="5915025" cy="7735712"/>
           </a:xfrm>
           <a:prstGeom prst="rect">
             <a:avLst/>
@@ -2882,18 +2550,13 @@
               <a:rPr lang="ko-KR" altLang="en-US"/>
               <a:t>다섯 번째 수준</a:t>
             </a:r>
-          </a:p>
-        </p:txBody>
-      </p:sp>
-      <p:sp>
-        <p:nvSpPr>
-          <p:cNvPr id="4" name="날짜 개체 틀 3">
-            <a:extLst>
-              <a:ext uri="{FF2B5EF4-FFF2-40B4-BE49-F238E27FC236}">
-                <a16:creationId xmlns:a16="http://schemas.microsoft.com/office/drawing/2014/main" id="{43BD7807-FA6D-B54F-E92D-CE43FE003C06}"/>
-              </a:ext>
-            </a:extLst>
-          </p:cNvPr>
+            <a:endParaRPr lang="en-US" dirty="0"/>
+          </a:p>
+        </p:txBody>
+      </p:sp>
+      <p:sp>
+        <p:nvSpPr>
+          <p:cNvPr id="4" name="Date Placeholder 3"/>
           <p:cNvSpPr>
             <a:spLocks noGrp="1"/>
           </p:cNvSpPr>
@@ -2903,8 +2566,8 @@
         </p:nvSpPr>
         <p:spPr>
           <a:xfrm>
-            <a:off x="838200" y="6356350"/>
-            <a:ext cx="2743200" cy="365125"/>
+            <a:off x="471488" y="11300181"/>
+            <a:ext cx="1543050" cy="649111"/>
           </a:xfrm>
           <a:prstGeom prst="rect">
             <a:avLst/>
@@ -2914,7 +2577,7 @@
           <a:bodyPr vert="horz" lIns="91440" tIns="45720" rIns="91440" bIns="45720" rtlCol="0" anchor="ctr"/>
           <a:lstStyle>
             <a:lvl1pPr algn="l">
-              <a:defRPr sz="1200">
+              <a:defRPr sz="900">
                 <a:solidFill>
                   <a:schemeClr val="tx1">
                     <a:tint val="82000"/>
@@ -2926,7 +2589,7 @@
           <a:p>
             <a:fld id="{7359EE32-49FD-4EA7-9011-353EB936649F}" type="datetimeFigureOut">
               <a:rPr lang="ko-KR" altLang="en-US" smtClean="0"/>
-              <a:t>2025-09-04</a:t>
+              <a:t>2025-09-06</a:t>
             </a:fld>
             <a:endParaRPr lang="ko-KR" altLang="en-US"/>
           </a:p>
@@ -2934,13 +2597,7 @@
       </p:sp>
       <p:sp>
         <p:nvSpPr>
-          <p:cNvPr id="5" name="바닥글 개체 틀 4">
-            <a:extLst>
-              <a:ext uri="{FF2B5EF4-FFF2-40B4-BE49-F238E27FC236}">
-                <a16:creationId xmlns:a16="http://schemas.microsoft.com/office/drawing/2014/main" id="{C657B33D-9757-66EA-F3D1-A756308E06B4}"/>
-              </a:ext>
-            </a:extLst>
-          </p:cNvPr>
+          <p:cNvPr id="5" name="Footer Placeholder 4"/>
           <p:cNvSpPr>
             <a:spLocks noGrp="1"/>
           </p:cNvSpPr>
@@ -2950,8 +2607,8 @@
         </p:nvSpPr>
         <p:spPr>
           <a:xfrm>
-            <a:off x="4038600" y="6356350"/>
-            <a:ext cx="4114800" cy="365125"/>
+            <a:off x="2271713" y="11300181"/>
+            <a:ext cx="2314575" cy="649111"/>
           </a:xfrm>
           <a:prstGeom prst="rect">
             <a:avLst/>
@@ -2961,7 +2618,7 @@
           <a:bodyPr vert="horz" lIns="91440" tIns="45720" rIns="91440" bIns="45720" rtlCol="0" anchor="ctr"/>
           <a:lstStyle>
             <a:lvl1pPr algn="ctr">
-              <a:defRPr sz="1200">
+              <a:defRPr sz="900">
                 <a:solidFill>
                   <a:schemeClr val="tx1">
                     <a:tint val="82000"/>
@@ -2977,13 +2634,7 @@
       </p:sp>
       <p:sp>
         <p:nvSpPr>
-          <p:cNvPr id="6" name="슬라이드 번호 개체 틀 5">
-            <a:extLst>
-              <a:ext uri="{FF2B5EF4-FFF2-40B4-BE49-F238E27FC236}">
-                <a16:creationId xmlns:a16="http://schemas.microsoft.com/office/drawing/2014/main" id="{591E8AF7-464C-65E0-58DA-481FF6906DBC}"/>
-              </a:ext>
-            </a:extLst>
-          </p:cNvPr>
+          <p:cNvPr id="6" name="Slide Number Placeholder 5"/>
           <p:cNvSpPr>
             <a:spLocks noGrp="1"/>
           </p:cNvSpPr>
@@ -2993,8 +2644,8 @@
         </p:nvSpPr>
         <p:spPr>
           <a:xfrm>
-            <a:off x="8610600" y="6356350"/>
-            <a:ext cx="2743200" cy="365125"/>
+            <a:off x="4843463" y="11300181"/>
+            <a:ext cx="1543050" cy="649111"/>
           </a:xfrm>
           <a:prstGeom prst="rect">
             <a:avLst/>
@@ -3004,7 +2655,7 @@
           <a:bodyPr vert="horz" lIns="91440" tIns="45720" rIns="91440" bIns="45720" rtlCol="0" anchor="ctr"/>
           <a:lstStyle>
             <a:lvl1pPr algn="r">
-              <a:defRPr sz="1200">
+              <a:defRPr sz="900">
                 <a:solidFill>
                   <a:schemeClr val="tx1">
                     <a:tint val="82000"/>
@@ -3025,27 +2676,27 @@
     </p:spTree>
     <p:extLst>
       <p:ext uri="{BB962C8B-B14F-4D97-AF65-F5344CB8AC3E}">
-        <p14:creationId xmlns:p14="http://schemas.microsoft.com/office/powerpoint/2010/main" val="1191298892"/>
+        <p14:creationId xmlns:p14="http://schemas.microsoft.com/office/powerpoint/2010/main" val="23401304"/>
       </p:ext>
     </p:extLst>
   </p:cSld>
   <p:clrMap bg1="lt1" tx1="dk1" bg2="lt2" tx2="dk2" accent1="accent1" accent2="accent2" accent3="accent3" accent4="accent4" accent5="accent5" accent6="accent6" hlink="hlink" folHlink="folHlink"/>
   <p:sldLayoutIdLst>
-    <p:sldLayoutId id="2147483649" r:id="rId1"/>
-    <p:sldLayoutId id="2147483650" r:id="rId2"/>
-    <p:sldLayoutId id="2147483651" r:id="rId3"/>
-    <p:sldLayoutId id="2147483652" r:id="rId4"/>
-    <p:sldLayoutId id="2147483653" r:id="rId5"/>
-    <p:sldLayoutId id="2147483654" r:id="rId6"/>
-    <p:sldLayoutId id="2147483655" r:id="rId7"/>
-    <p:sldLayoutId id="2147483656" r:id="rId8"/>
-    <p:sldLayoutId id="2147483657" r:id="rId9"/>
-    <p:sldLayoutId id="2147483658" r:id="rId10"/>
-    <p:sldLayoutId id="2147483659" r:id="rId11"/>
+    <p:sldLayoutId id="2147483661" r:id="rId1"/>
+    <p:sldLayoutId id="2147483662" r:id="rId2"/>
+    <p:sldLayoutId id="2147483663" r:id="rId3"/>
+    <p:sldLayoutId id="2147483664" r:id="rId4"/>
+    <p:sldLayoutId id="2147483665" r:id="rId5"/>
+    <p:sldLayoutId id="2147483666" r:id="rId6"/>
+    <p:sldLayoutId id="2147483667" r:id="rId7"/>
+    <p:sldLayoutId id="2147483668" r:id="rId8"/>
+    <p:sldLayoutId id="2147483669" r:id="rId9"/>
+    <p:sldLayoutId id="2147483670" r:id="rId10"/>
+    <p:sldLayoutId id="2147483671" r:id="rId11"/>
   </p:sldLayoutIdLst>
   <p:txStyles>
     <p:titleStyle>
-      <a:lvl1pPr algn="l" defTabSz="914400" rtl="0" eaLnBrk="1" latinLnBrk="1" hangingPunct="1">
+      <a:lvl1pPr algn="l" defTabSz="685800" rtl="0" eaLnBrk="1" latinLnBrk="1" hangingPunct="1">
         <a:lnSpc>
           <a:spcPct val="90000"/>
         </a:lnSpc>
@@ -3053,7 +2704,7 @@
           <a:spcPct val="0"/>
         </a:spcBef>
         <a:buNone/>
-        <a:defRPr sz="4400" kern="1200">
+        <a:defRPr sz="3300" kern="1200">
           <a:solidFill>
             <a:schemeClr val="tx1"/>
           </a:solidFill>
@@ -3064,16 +2715,16 @@
       </a:lvl1pPr>
     </p:titleStyle>
     <p:bodyStyle>
-      <a:lvl1pPr marL="228600" indent="-228600" algn="l" defTabSz="914400" rtl="0" eaLnBrk="1" latinLnBrk="1" hangingPunct="1">
+      <a:lvl1pPr marL="171450" indent="-171450" algn="l" defTabSz="685800" rtl="0" eaLnBrk="1" latinLnBrk="1" hangingPunct="1">
         <a:lnSpc>
           <a:spcPct val="90000"/>
         </a:lnSpc>
         <a:spcBef>
-          <a:spcPts val="1000"/>
+          <a:spcPts val="750"/>
         </a:spcBef>
         <a:buFont typeface="Arial" panose="020B0604020202020204" pitchFamily="34" charset="0"/>
         <a:buChar char="•"/>
-        <a:defRPr sz="2800" kern="1200">
+        <a:defRPr sz="2100" kern="1200">
           <a:solidFill>
             <a:schemeClr val="tx1"/>
           </a:solidFill>
@@ -3082,48 +2733,12 @@
           <a:cs typeface="+mn-cs"/>
         </a:defRPr>
       </a:lvl1pPr>
-      <a:lvl2pPr marL="685800" indent="-228600" algn="l" defTabSz="914400" rtl="0" eaLnBrk="1" latinLnBrk="1" hangingPunct="1">
+      <a:lvl2pPr marL="514350" indent="-171450" algn="l" defTabSz="685800" rtl="0" eaLnBrk="1" latinLnBrk="1" hangingPunct="1">
         <a:lnSpc>
           <a:spcPct val="90000"/>
         </a:lnSpc>
         <a:spcBef>
-          <a:spcPts val="500"/>
-        </a:spcBef>
-        <a:buFont typeface="Arial" panose="020B0604020202020204" pitchFamily="34" charset="0"/>
-        <a:buChar char="•"/>
-        <a:defRPr sz="2400" kern="1200">
-          <a:solidFill>
-            <a:schemeClr val="tx1"/>
-          </a:solidFill>
-          <a:latin typeface="+mn-lt"/>
-          <a:ea typeface="+mn-ea"/>
-          <a:cs typeface="+mn-cs"/>
-        </a:defRPr>
-      </a:lvl2pPr>
-      <a:lvl3pPr marL="1143000" indent="-228600" algn="l" defTabSz="914400" rtl="0" eaLnBrk="1" latinLnBrk="1" hangingPunct="1">
-        <a:lnSpc>
-          <a:spcPct val="90000"/>
-        </a:lnSpc>
-        <a:spcBef>
-          <a:spcPts val="500"/>
-        </a:spcBef>
-        <a:buFont typeface="Arial" panose="020B0604020202020204" pitchFamily="34" charset="0"/>
-        <a:buChar char="•"/>
-        <a:defRPr sz="2000" kern="1200">
-          <a:solidFill>
-            <a:schemeClr val="tx1"/>
-          </a:solidFill>
-          <a:latin typeface="+mn-lt"/>
-          <a:ea typeface="+mn-ea"/>
-          <a:cs typeface="+mn-cs"/>
-        </a:defRPr>
-      </a:lvl3pPr>
-      <a:lvl4pPr marL="1600200" indent="-228600" algn="l" defTabSz="914400" rtl="0" eaLnBrk="1" latinLnBrk="1" hangingPunct="1">
-        <a:lnSpc>
-          <a:spcPct val="90000"/>
-        </a:lnSpc>
-        <a:spcBef>
-          <a:spcPts val="500"/>
+          <a:spcPts val="375"/>
         </a:spcBef>
         <a:buFont typeface="Arial" panose="020B0604020202020204" pitchFamily="34" charset="0"/>
         <a:buChar char="•"/>
@@ -3135,17 +2750,53 @@
           <a:ea typeface="+mn-ea"/>
           <a:cs typeface="+mn-cs"/>
         </a:defRPr>
-      </a:lvl4pPr>
-      <a:lvl5pPr marL="2057400" indent="-228600" algn="l" defTabSz="914400" rtl="0" eaLnBrk="1" latinLnBrk="1" hangingPunct="1">
+      </a:lvl2pPr>
+      <a:lvl3pPr marL="857250" indent="-171450" algn="l" defTabSz="685800" rtl="0" eaLnBrk="1" latinLnBrk="1" hangingPunct="1">
         <a:lnSpc>
           <a:spcPct val="90000"/>
         </a:lnSpc>
         <a:spcBef>
-          <a:spcPts val="500"/>
+          <a:spcPts val="375"/>
         </a:spcBef>
         <a:buFont typeface="Arial" panose="020B0604020202020204" pitchFamily="34" charset="0"/>
         <a:buChar char="•"/>
-        <a:defRPr sz="1800" kern="1200">
+        <a:defRPr sz="1500" kern="1200">
+          <a:solidFill>
+            <a:schemeClr val="tx1"/>
+          </a:solidFill>
+          <a:latin typeface="+mn-lt"/>
+          <a:ea typeface="+mn-ea"/>
+          <a:cs typeface="+mn-cs"/>
+        </a:defRPr>
+      </a:lvl3pPr>
+      <a:lvl4pPr marL="1200150" indent="-171450" algn="l" defTabSz="685800" rtl="0" eaLnBrk="1" latinLnBrk="1" hangingPunct="1">
+        <a:lnSpc>
+          <a:spcPct val="90000"/>
+        </a:lnSpc>
+        <a:spcBef>
+          <a:spcPts val="375"/>
+        </a:spcBef>
+        <a:buFont typeface="Arial" panose="020B0604020202020204" pitchFamily="34" charset="0"/>
+        <a:buChar char="•"/>
+        <a:defRPr sz="1350" kern="1200">
+          <a:solidFill>
+            <a:schemeClr val="tx1"/>
+          </a:solidFill>
+          <a:latin typeface="+mn-lt"/>
+          <a:ea typeface="+mn-ea"/>
+          <a:cs typeface="+mn-cs"/>
+        </a:defRPr>
+      </a:lvl4pPr>
+      <a:lvl5pPr marL="1543050" indent="-171450" algn="l" defTabSz="685800" rtl="0" eaLnBrk="1" latinLnBrk="1" hangingPunct="1">
+        <a:lnSpc>
+          <a:spcPct val="90000"/>
+        </a:lnSpc>
+        <a:spcBef>
+          <a:spcPts val="375"/>
+        </a:spcBef>
+        <a:buFont typeface="Arial" panose="020B0604020202020204" pitchFamily="34" charset="0"/>
+        <a:buChar char="•"/>
+        <a:defRPr sz="1350" kern="1200">
           <a:solidFill>
             <a:schemeClr val="tx1"/>
           </a:solidFill>
@@ -3154,16 +2805,16 @@
           <a:cs typeface="+mn-cs"/>
         </a:defRPr>
       </a:lvl5pPr>
-      <a:lvl6pPr marL="2514600" indent="-228600" algn="l" defTabSz="914400" rtl="0" eaLnBrk="1" latinLnBrk="1" hangingPunct="1">
+      <a:lvl6pPr marL="1885950" indent="-171450" algn="l" defTabSz="685800" rtl="0" eaLnBrk="1" latinLnBrk="1" hangingPunct="1">
         <a:lnSpc>
           <a:spcPct val="90000"/>
         </a:lnSpc>
         <a:spcBef>
-          <a:spcPts val="500"/>
+          <a:spcPts val="375"/>
         </a:spcBef>
         <a:buFont typeface="Arial" panose="020B0604020202020204" pitchFamily="34" charset="0"/>
         <a:buChar char="•"/>
-        <a:defRPr sz="1800" kern="1200">
+        <a:defRPr sz="1350" kern="1200">
           <a:solidFill>
             <a:schemeClr val="tx1"/>
           </a:solidFill>
@@ -3172,16 +2823,16 @@
           <a:cs typeface="+mn-cs"/>
         </a:defRPr>
       </a:lvl6pPr>
-      <a:lvl7pPr marL="2971800" indent="-228600" algn="l" defTabSz="914400" rtl="0" eaLnBrk="1" latinLnBrk="1" hangingPunct="1">
+      <a:lvl7pPr marL="2228850" indent="-171450" algn="l" defTabSz="685800" rtl="0" eaLnBrk="1" latinLnBrk="1" hangingPunct="1">
         <a:lnSpc>
           <a:spcPct val="90000"/>
         </a:lnSpc>
         <a:spcBef>
-          <a:spcPts val="500"/>
+          <a:spcPts val="375"/>
         </a:spcBef>
         <a:buFont typeface="Arial" panose="020B0604020202020204" pitchFamily="34" charset="0"/>
         <a:buChar char="•"/>
-        <a:defRPr sz="1800" kern="1200">
+        <a:defRPr sz="1350" kern="1200">
           <a:solidFill>
             <a:schemeClr val="tx1"/>
           </a:solidFill>
@@ -3190,16 +2841,16 @@
           <a:cs typeface="+mn-cs"/>
         </a:defRPr>
       </a:lvl7pPr>
-      <a:lvl8pPr marL="3429000" indent="-228600" algn="l" defTabSz="914400" rtl="0" eaLnBrk="1" latinLnBrk="1" hangingPunct="1">
+      <a:lvl8pPr marL="2571750" indent="-171450" algn="l" defTabSz="685800" rtl="0" eaLnBrk="1" latinLnBrk="1" hangingPunct="1">
         <a:lnSpc>
           <a:spcPct val="90000"/>
         </a:lnSpc>
         <a:spcBef>
-          <a:spcPts val="500"/>
+          <a:spcPts val="375"/>
         </a:spcBef>
         <a:buFont typeface="Arial" panose="020B0604020202020204" pitchFamily="34" charset="0"/>
         <a:buChar char="•"/>
-        <a:defRPr sz="1800" kern="1200">
+        <a:defRPr sz="1350" kern="1200">
           <a:solidFill>
             <a:schemeClr val="tx1"/>
           </a:solidFill>
@@ -3208,16 +2859,16 @@
           <a:cs typeface="+mn-cs"/>
         </a:defRPr>
       </a:lvl8pPr>
-      <a:lvl9pPr marL="3886200" indent="-228600" algn="l" defTabSz="914400" rtl="0" eaLnBrk="1" latinLnBrk="1" hangingPunct="1">
+      <a:lvl9pPr marL="2914650" indent="-171450" algn="l" defTabSz="685800" rtl="0" eaLnBrk="1" latinLnBrk="1" hangingPunct="1">
         <a:lnSpc>
           <a:spcPct val="90000"/>
         </a:lnSpc>
         <a:spcBef>
-          <a:spcPts val="500"/>
+          <a:spcPts val="375"/>
         </a:spcBef>
         <a:buFont typeface="Arial" panose="020B0604020202020204" pitchFamily="34" charset="0"/>
         <a:buChar char="•"/>
-        <a:defRPr sz="1800" kern="1200">
+        <a:defRPr sz="1350" kern="1200">
           <a:solidFill>
             <a:schemeClr val="tx1"/>
           </a:solidFill>
@@ -3229,10 +2880,10 @@
     </p:bodyStyle>
     <p:otherStyle>
       <a:defPPr>
-        <a:defRPr lang="ko-KR"/>
+        <a:defRPr lang="en-US"/>
       </a:defPPr>
-      <a:lvl1pPr marL="0" algn="l" defTabSz="914400" rtl="0" eaLnBrk="1" latinLnBrk="1" hangingPunct="1">
-        <a:defRPr sz="1800" kern="1200">
+      <a:lvl1pPr marL="0" algn="l" defTabSz="685800" rtl="0" eaLnBrk="1" latinLnBrk="1" hangingPunct="1">
+        <a:defRPr sz="1350" kern="1200">
           <a:solidFill>
             <a:schemeClr val="tx1"/>
           </a:solidFill>
@@ -3241,8 +2892,8 @@
           <a:cs typeface="+mn-cs"/>
         </a:defRPr>
       </a:lvl1pPr>
-      <a:lvl2pPr marL="457200" algn="l" defTabSz="914400" rtl="0" eaLnBrk="1" latinLnBrk="1" hangingPunct="1">
-        <a:defRPr sz="1800" kern="1200">
+      <a:lvl2pPr marL="342900" algn="l" defTabSz="685800" rtl="0" eaLnBrk="1" latinLnBrk="1" hangingPunct="1">
+        <a:defRPr sz="1350" kern="1200">
           <a:solidFill>
             <a:schemeClr val="tx1"/>
           </a:solidFill>
@@ -3251,8 +2902,8 @@
           <a:cs typeface="+mn-cs"/>
         </a:defRPr>
       </a:lvl2pPr>
-      <a:lvl3pPr marL="914400" algn="l" defTabSz="914400" rtl="0" eaLnBrk="1" latinLnBrk="1" hangingPunct="1">
-        <a:defRPr sz="1800" kern="1200">
+      <a:lvl3pPr marL="685800" algn="l" defTabSz="685800" rtl="0" eaLnBrk="1" latinLnBrk="1" hangingPunct="1">
+        <a:defRPr sz="1350" kern="1200">
           <a:solidFill>
             <a:schemeClr val="tx1"/>
           </a:solidFill>
@@ -3261,8 +2912,8 @@
           <a:cs typeface="+mn-cs"/>
         </a:defRPr>
       </a:lvl3pPr>
-      <a:lvl4pPr marL="1371600" algn="l" defTabSz="914400" rtl="0" eaLnBrk="1" latinLnBrk="1" hangingPunct="1">
-        <a:defRPr sz="1800" kern="1200">
+      <a:lvl4pPr marL="1028700" algn="l" defTabSz="685800" rtl="0" eaLnBrk="1" latinLnBrk="1" hangingPunct="1">
+        <a:defRPr sz="1350" kern="1200">
           <a:solidFill>
             <a:schemeClr val="tx1"/>
           </a:solidFill>
@@ -3271,8 +2922,8 @@
           <a:cs typeface="+mn-cs"/>
         </a:defRPr>
       </a:lvl4pPr>
-      <a:lvl5pPr marL="1828800" algn="l" defTabSz="914400" rtl="0" eaLnBrk="1" latinLnBrk="1" hangingPunct="1">
-        <a:defRPr sz="1800" kern="1200">
+      <a:lvl5pPr marL="1371600" algn="l" defTabSz="685800" rtl="0" eaLnBrk="1" latinLnBrk="1" hangingPunct="1">
+        <a:defRPr sz="1350" kern="1200">
           <a:solidFill>
             <a:schemeClr val="tx1"/>
           </a:solidFill>
@@ -3281,8 +2932,8 @@
           <a:cs typeface="+mn-cs"/>
         </a:defRPr>
       </a:lvl5pPr>
-      <a:lvl6pPr marL="2286000" algn="l" defTabSz="914400" rtl="0" eaLnBrk="1" latinLnBrk="1" hangingPunct="1">
-        <a:defRPr sz="1800" kern="1200">
+      <a:lvl6pPr marL="1714500" algn="l" defTabSz="685800" rtl="0" eaLnBrk="1" latinLnBrk="1" hangingPunct="1">
+        <a:defRPr sz="1350" kern="1200">
           <a:solidFill>
             <a:schemeClr val="tx1"/>
           </a:solidFill>
@@ -3291,8 +2942,8 @@
           <a:cs typeface="+mn-cs"/>
         </a:defRPr>
       </a:lvl6pPr>
-      <a:lvl7pPr marL="2743200" algn="l" defTabSz="914400" rtl="0" eaLnBrk="1" latinLnBrk="1" hangingPunct="1">
-        <a:defRPr sz="1800" kern="1200">
+      <a:lvl7pPr marL="2057400" algn="l" defTabSz="685800" rtl="0" eaLnBrk="1" latinLnBrk="1" hangingPunct="1">
+        <a:defRPr sz="1350" kern="1200">
           <a:solidFill>
             <a:schemeClr val="tx1"/>
           </a:solidFill>
@@ -3301,8 +2952,8 @@
           <a:cs typeface="+mn-cs"/>
         </a:defRPr>
       </a:lvl7pPr>
-      <a:lvl8pPr marL="3200400" algn="l" defTabSz="914400" rtl="0" eaLnBrk="1" latinLnBrk="1" hangingPunct="1">
-        <a:defRPr sz="1800" kern="1200">
+      <a:lvl8pPr marL="2400300" algn="l" defTabSz="685800" rtl="0" eaLnBrk="1" latinLnBrk="1" hangingPunct="1">
+        <a:defRPr sz="1350" kern="1200">
           <a:solidFill>
             <a:schemeClr val="tx1"/>
           </a:solidFill>
@@ -3311,8 +2962,8 @@
           <a:cs typeface="+mn-cs"/>
         </a:defRPr>
       </a:lvl8pPr>
-      <a:lvl9pPr marL="3657600" algn="l" defTabSz="914400" rtl="0" eaLnBrk="1" latinLnBrk="1" hangingPunct="1">
-        <a:defRPr sz="1800" kern="1200">
+      <a:lvl9pPr marL="2743200" algn="l" defTabSz="685800" rtl="0" eaLnBrk="1" latinLnBrk="1" hangingPunct="1">
+        <a:defRPr sz="1350" kern="1200">
           <a:solidFill>
             <a:schemeClr val="tx1"/>
           </a:solidFill>
@@ -3394,7 +3045,7 @@
           <a:p>
             <a:r>
               <a:rPr lang="en-US" altLang="ko-KR" dirty="0"/>
-              <a:t>Vue.JS</a:t>
+              <a:t>Vue.JS 3</a:t>
             </a:r>
             <a:endParaRPr lang="ko-KR" altLang="en-US" dirty="0"/>
           </a:p>
@@ -3474,7 +3125,7 @@
         <p:spPr/>
         <p:txBody>
           <a:bodyPr>
-            <a:normAutofit fontScale="92500" lnSpcReduction="20000"/>
+            <a:normAutofit/>
           </a:bodyPr>
           <a:lstStyle/>
           <a:p>
@@ -3632,128 +3283,165 @@
         </p:nvSpPr>
         <p:spPr>
           <a:xfrm>
-            <a:off x="838200" y="1825625"/>
+            <a:off x="-1828800" y="4492625"/>
             <a:ext cx="10515600" cy="4351338"/>
           </a:xfrm>
         </p:spPr>
         <p:txBody>
-          <a:bodyPr/>
-          <a:lstStyle/>
-          <a:p>
-            <a:r>
-              <a:rPr lang="en-US" altLang="ko-KR" dirty="0"/>
-              <a:t>Material Icon Theme: </a:t>
-            </a:r>
-            <a:r>
-              <a:rPr lang="ko-KR" altLang="en-US" dirty="0"/>
+          <a:bodyPr>
+            <a:normAutofit/>
+          </a:bodyPr>
+          <a:lstStyle/>
+          <a:p>
+            <a:r>
+              <a:rPr lang="en-US" altLang="ko-KR" sz="1000" dirty="0"/>
+              <a:t>Material Icon Theme</a:t>
+            </a:r>
+            <a:br>
+              <a:rPr lang="en-US" altLang="ko-KR" sz="1000" dirty="0"/>
+            </a:br>
+            <a:r>
+              <a:rPr lang="en-US" altLang="ko-KR" sz="1000" dirty="0"/>
+              <a:t>: </a:t>
+            </a:r>
+            <a:r>
+              <a:rPr lang="ko-KR" altLang="en-US" sz="1000" dirty="0"/>
               <a:t>파일 탐색기에서 파일 아이콘을 추가하여 보기 쉽게 만들어준다</a:t>
             </a:r>
             <a:r>
-              <a:rPr lang="en-US" altLang="ko-KR" dirty="0"/>
+              <a:rPr lang="en-US" altLang="ko-KR" sz="1000" dirty="0"/>
               <a:t>.</a:t>
             </a:r>
           </a:p>
           <a:p>
             <a:r>
-              <a:rPr lang="en-US" altLang="ko-KR" dirty="0" err="1"/>
+              <a:rPr lang="en-US" altLang="ko-KR" sz="1000" dirty="0" err="1"/>
               <a:t>ESLint</a:t>
             </a:r>
             <a:r>
-              <a:rPr lang="en-US" altLang="ko-KR" dirty="0"/>
+              <a:rPr lang="en-US" altLang="ko-KR" sz="1000" dirty="0"/>
+              <a:t> </a:t>
+            </a:r>
+            <a:br>
+              <a:rPr lang="en-US" altLang="ko-KR" sz="1000" dirty="0"/>
+            </a:br>
+            <a:r>
+              <a:rPr lang="en-US" altLang="ko-KR" sz="1000" dirty="0"/>
+              <a:t>: </a:t>
+            </a:r>
+            <a:r>
+              <a:rPr lang="ko-KR" altLang="en-US" sz="1000" dirty="0"/>
+              <a:t>코드 검사기로써 에러가 있는지 검사해주는 도구</a:t>
+            </a:r>
+            <a:endParaRPr lang="en-US" altLang="ko-KR" sz="1000" dirty="0"/>
+          </a:p>
+          <a:p>
+            <a:r>
+              <a:rPr lang="en-US" altLang="ko-KR" sz="1000" dirty="0"/>
+              <a:t>Prettier</a:t>
+            </a:r>
+            <a:br>
+              <a:rPr lang="en-US" altLang="ko-KR" sz="1000" dirty="0"/>
+            </a:br>
+            <a:r>
+              <a:rPr lang="en-US" altLang="ko-KR" sz="1000" dirty="0"/>
               <a:t> : </a:t>
             </a:r>
             <a:r>
-              <a:rPr lang="ko-KR" altLang="en-US" dirty="0"/>
-              <a:t>코드 검사기로써 에러가 있는지 검사해주는 도구</a:t>
-            </a:r>
-            <a:endParaRPr lang="en-US" altLang="ko-KR" dirty="0"/>
-          </a:p>
-          <a:p>
-            <a:r>
-              <a:rPr lang="en-US" altLang="ko-KR" dirty="0"/>
-              <a:t>Prettier : </a:t>
-            </a:r>
-            <a:r>
-              <a:rPr lang="ko-KR" altLang="en-US" dirty="0"/>
+              <a:rPr lang="ko-KR" altLang="en-US" sz="1000" dirty="0"/>
               <a:t>코드 </a:t>
             </a:r>
             <a:r>
-              <a:rPr lang="ko-KR" altLang="en-US" dirty="0" err="1"/>
+              <a:rPr lang="ko-KR" altLang="en-US" sz="1000" dirty="0" err="1"/>
               <a:t>포멧터로써</a:t>
             </a:r>
             <a:r>
-              <a:rPr lang="ko-KR" altLang="en-US" dirty="0"/>
+              <a:rPr lang="ko-KR" altLang="en-US" sz="1000" dirty="0"/>
               <a:t> 코드를 </a:t>
             </a:r>
             <a:r>
-              <a:rPr lang="ko-KR" altLang="en-US" dirty="0" err="1"/>
+              <a:rPr lang="ko-KR" altLang="en-US" sz="1000" dirty="0" err="1"/>
               <a:t>일관성있고</a:t>
             </a:r>
             <a:r>
-              <a:rPr lang="ko-KR" altLang="en-US" dirty="0"/>
+              <a:rPr lang="ko-KR" altLang="en-US" sz="1000" dirty="0"/>
               <a:t> 예쁘게 작성할 수 있도록 도와주는 도구</a:t>
             </a:r>
-            <a:endParaRPr lang="en-US" altLang="ko-KR" dirty="0"/>
-          </a:p>
-          <a:p>
-            <a:r>
-              <a:rPr lang="en-US" altLang="ko-KR" dirty="0"/>
-              <a:t>Vue-Official : </a:t>
-            </a:r>
-            <a:r>
-              <a:rPr lang="ko-KR" altLang="en-US" dirty="0"/>
+            <a:endParaRPr lang="en-US" altLang="ko-KR" sz="1000" dirty="0"/>
+          </a:p>
+          <a:p>
+            <a:r>
+              <a:rPr lang="en-US" altLang="ko-KR" sz="1000" dirty="0"/>
+              <a:t>Vue-Official</a:t>
+            </a:r>
+            <a:br>
+              <a:rPr lang="en-US" altLang="ko-KR" sz="1000" dirty="0"/>
+            </a:br>
+            <a:r>
+              <a:rPr lang="en-US" altLang="ko-KR" sz="1000" dirty="0"/>
+              <a:t> : </a:t>
+            </a:r>
+            <a:r>
+              <a:rPr lang="ko-KR" altLang="en-US" sz="1000" dirty="0"/>
               <a:t>언어지원 플러그인</a:t>
             </a:r>
-            <a:endParaRPr lang="en-US" altLang="ko-KR" dirty="0"/>
-          </a:p>
-          <a:p>
-            <a:r>
-              <a:rPr lang="en-US" altLang="ko-KR" dirty="0"/>
+            <a:endParaRPr lang="en-US" altLang="ko-KR" sz="1000" dirty="0"/>
+          </a:p>
+          <a:p>
+            <a:r>
+              <a:rPr lang="en-US" altLang="ko-KR" sz="1000" dirty="0"/>
               <a:t>Vue </a:t>
             </a:r>
             <a:r>
-              <a:rPr lang="en-US" altLang="ko-KR" dirty="0" err="1"/>
+              <a:rPr lang="en-US" altLang="ko-KR" sz="1000" dirty="0" err="1"/>
               <a:t>VSCode</a:t>
             </a:r>
             <a:r>
-              <a:rPr lang="en-US" altLang="ko-KR" dirty="0"/>
+              <a:rPr lang="en-US" altLang="ko-KR" sz="1000" dirty="0"/>
               <a:t> Snippets</a:t>
             </a:r>
           </a:p>
           <a:p>
             <a:r>
-              <a:rPr lang="en-US" altLang="ko-KR" dirty="0"/>
-              <a:t>CSS Peek : HTML </a:t>
-            </a:r>
-            <a:r>
-              <a:rPr lang="ko-KR" altLang="en-US" dirty="0"/>
+              <a:rPr lang="en-US" altLang="ko-KR" sz="1000" dirty="0"/>
+              <a:t>CSS Peek</a:t>
+            </a:r>
+            <a:br>
+              <a:rPr lang="en-US" altLang="ko-KR" sz="1000" dirty="0"/>
+            </a:br>
+            <a:r>
+              <a:rPr lang="en-US" altLang="ko-KR" sz="1000" dirty="0"/>
+              <a:t>: HTML </a:t>
+            </a:r>
+            <a:r>
+              <a:rPr lang="ko-KR" altLang="en-US" sz="1000" dirty="0"/>
               <a:t>문서에서 정의된 </a:t>
             </a:r>
             <a:r>
-              <a:rPr lang="en-US" altLang="ko-KR" dirty="0"/>
+              <a:rPr lang="en-US" altLang="ko-KR" sz="1000" dirty="0"/>
               <a:t>CSS</a:t>
             </a:r>
             <a:r>
-              <a:rPr lang="ko-KR" altLang="en-US" dirty="0"/>
+              <a:rPr lang="ko-KR" altLang="en-US" sz="1000" dirty="0"/>
               <a:t>를 금방 찾을 수 있도록 </a:t>
             </a:r>
             <a:r>
-              <a:rPr lang="ko-KR" altLang="en-US" dirty="0" err="1"/>
+              <a:rPr lang="ko-KR" altLang="en-US" sz="1000" dirty="0" err="1"/>
               <a:t>도와줌</a:t>
             </a:r>
             <a:r>
-              <a:rPr lang="en-US" altLang="ko-KR" dirty="0"/>
+              <a:rPr lang="en-US" altLang="ko-KR" sz="1000" dirty="0"/>
               <a:t>. Ctrl + </a:t>
             </a:r>
             <a:r>
-              <a:rPr lang="ko-KR" altLang="en-US" dirty="0"/>
+              <a:rPr lang="ko-KR" altLang="en-US" sz="1000" dirty="0"/>
               <a:t>클릭 하면 선언된 곳으로 이동함</a:t>
             </a:r>
             <a:r>
-              <a:rPr lang="en-US" altLang="ko-KR" dirty="0"/>
+              <a:rPr lang="en-US" altLang="ko-KR" sz="1000" dirty="0"/>
               <a:t>.</a:t>
             </a:r>
-            <a:endParaRPr lang="ko-KR" altLang="en-US" dirty="0"/>
+            <a:endParaRPr lang="ko-KR" altLang="en-US" sz="1000" dirty="0"/>
           </a:p>
         </p:txBody>
       </p:sp>
@@ -3770,10 +3458,598 @@
 </p:sld>
 </file>
 
+<file path=ppt/slides/slide4.xml><?xml version="1.0" encoding="utf-8"?>
+<p:sld xmlns:a="http://schemas.openxmlformats.org/drawingml/2006/main" xmlns:r="http://schemas.openxmlformats.org/officeDocument/2006/relationships" xmlns:p="http://schemas.openxmlformats.org/presentationml/2006/main">
+  <p:cSld>
+    <p:spTree>
+      <p:nvGrpSpPr>
+        <p:cNvPr id="1" name=""/>
+        <p:cNvGrpSpPr/>
+        <p:nvPr/>
+      </p:nvGrpSpPr>
+      <p:grpSpPr>
+        <a:xfrm>
+          <a:off x="0" y="0"/>
+          <a:ext cx="0" cy="0"/>
+          <a:chOff x="0" y="0"/>
+          <a:chExt cx="0" cy="0"/>
+        </a:xfrm>
+      </p:grpSpPr>
+      <p:sp>
+        <p:nvSpPr>
+          <p:cNvPr id="2" name="제목 1">
+            <a:extLst>
+              <a:ext uri="{FF2B5EF4-FFF2-40B4-BE49-F238E27FC236}">
+                <a16:creationId xmlns:a16="http://schemas.microsoft.com/office/drawing/2014/main" id="{E372DB09-F1A5-0E9C-EE6B-14ABB7F9AF85}"/>
+              </a:ext>
+            </a:extLst>
+          </p:cNvPr>
+          <p:cNvSpPr>
+            <a:spLocks noGrp="1"/>
+          </p:cNvSpPr>
+          <p:nvPr>
+            <p:ph type="title"/>
+          </p:nvPr>
+        </p:nvSpPr>
+        <p:spPr/>
+        <p:txBody>
+          <a:bodyPr/>
+          <a:lstStyle/>
+          <a:p>
+            <a:r>
+              <a:rPr lang="en-US" altLang="ko-KR" dirty="0"/>
+              <a:t>Vue Router</a:t>
+            </a:r>
+            <a:endParaRPr lang="ko-KR" altLang="en-US" dirty="0"/>
+          </a:p>
+        </p:txBody>
+      </p:sp>
+      <p:sp>
+        <p:nvSpPr>
+          <p:cNvPr id="3" name="내용 개체 틀 2">
+            <a:extLst>
+              <a:ext uri="{FF2B5EF4-FFF2-40B4-BE49-F238E27FC236}">
+                <a16:creationId xmlns:a16="http://schemas.microsoft.com/office/drawing/2014/main" id="{885DABAA-E41B-E3AC-B623-601A614B581B}"/>
+              </a:ext>
+            </a:extLst>
+          </p:cNvPr>
+          <p:cNvSpPr>
+            <a:spLocks noGrp="1"/>
+          </p:cNvSpPr>
+          <p:nvPr>
+            <p:ph idx="1"/>
+          </p:nvPr>
+        </p:nvSpPr>
+        <p:spPr/>
+        <p:txBody>
+          <a:bodyPr/>
+          <a:lstStyle/>
+          <a:p>
+            <a:r>
+              <a:rPr lang="en-US" altLang="ko-KR" dirty="0"/>
+              <a:t>$ </a:t>
+            </a:r>
+            <a:r>
+              <a:rPr lang="en-US" altLang="ko-KR" dirty="0" err="1"/>
+              <a:t>npm</a:t>
+            </a:r>
+            <a:r>
+              <a:rPr lang="en-US" altLang="ko-KR" dirty="0"/>
+              <a:t> install </a:t>
+            </a:r>
+            <a:r>
+              <a:rPr lang="en-US" altLang="ko-KR" dirty="0" err="1"/>
+              <a:t>vue</a:t>
+            </a:r>
+            <a:r>
+              <a:rPr lang="en-US" altLang="ko-KR" dirty="0"/>
+              <a:t>-router</a:t>
+            </a:r>
+          </a:p>
+          <a:p>
+            <a:endParaRPr lang="en-US" altLang="ko-KR" dirty="0"/>
+          </a:p>
+          <a:p>
+            <a:r>
+              <a:rPr lang="en-US" altLang="ko-KR" dirty="0"/>
+              <a:t>&lt;</a:t>
+            </a:r>
+            <a:r>
+              <a:rPr lang="en-US" altLang="ko-KR" dirty="0" err="1"/>
+              <a:t>RouterLink</a:t>
+            </a:r>
+            <a:r>
+              <a:rPr lang="en-US" altLang="ko-KR" dirty="0"/>
+              <a:t>&gt;</a:t>
+            </a:r>
+          </a:p>
+          <a:p>
+            <a:r>
+              <a:rPr lang="en-US" altLang="ko-KR" dirty="0"/>
+              <a:t>&lt;</a:t>
+            </a:r>
+            <a:r>
+              <a:rPr lang="en-US" altLang="ko-KR" dirty="0" err="1"/>
+              <a:t>RouterView</a:t>
+            </a:r>
+            <a:r>
+              <a:rPr lang="en-US" altLang="ko-KR" dirty="0"/>
+              <a:t>&gt;</a:t>
+            </a:r>
+            <a:endParaRPr lang="ko-KR" altLang="en-US" dirty="0"/>
+          </a:p>
+        </p:txBody>
+      </p:sp>
+    </p:spTree>
+    <p:extLst>
+      <p:ext uri="{BB962C8B-B14F-4D97-AF65-F5344CB8AC3E}">
+        <p14:creationId xmlns:p14="http://schemas.microsoft.com/office/powerpoint/2010/main" val="2359618191"/>
+      </p:ext>
+    </p:extLst>
+  </p:cSld>
+  <p:clrMapOvr>
+    <a:masterClrMapping/>
+  </p:clrMapOvr>
+</p:sld>
+</file>
+
+<file path=ppt/slides/slide5.xml><?xml version="1.0" encoding="utf-8"?>
+<p:sld xmlns:a="http://schemas.openxmlformats.org/drawingml/2006/main" xmlns:r="http://schemas.openxmlformats.org/officeDocument/2006/relationships" xmlns:p="http://schemas.openxmlformats.org/presentationml/2006/main">
+  <p:cSld>
+    <p:spTree>
+      <p:nvGrpSpPr>
+        <p:cNvPr id="1" name=""/>
+        <p:cNvGrpSpPr/>
+        <p:nvPr/>
+      </p:nvGrpSpPr>
+      <p:grpSpPr>
+        <a:xfrm>
+          <a:off x="0" y="0"/>
+          <a:ext cx="0" cy="0"/>
+          <a:chOff x="0" y="0"/>
+          <a:chExt cx="0" cy="0"/>
+        </a:xfrm>
+      </p:grpSpPr>
+      <p:sp>
+        <p:nvSpPr>
+          <p:cNvPr id="2" name="제목 1">
+            <a:extLst>
+              <a:ext uri="{FF2B5EF4-FFF2-40B4-BE49-F238E27FC236}">
+                <a16:creationId xmlns:a16="http://schemas.microsoft.com/office/drawing/2014/main" id="{8E3DE72D-461E-4EAD-0CA8-F1F2F7D47A3F}"/>
+              </a:ext>
+            </a:extLst>
+          </p:cNvPr>
+          <p:cNvSpPr>
+            <a:spLocks noGrp="1"/>
+          </p:cNvSpPr>
+          <p:nvPr>
+            <p:ph type="title"/>
+          </p:nvPr>
+        </p:nvSpPr>
+        <p:spPr/>
+        <p:txBody>
+          <a:bodyPr/>
+          <a:lstStyle/>
+          <a:p>
+            <a:r>
+              <a:rPr lang="en-US" altLang="ko-KR" dirty="0" err="1"/>
+              <a:t>rojuer</a:t>
+            </a:r>
+            <a:r>
+              <a:rPr lang="en-US" altLang="ko-KR" dirty="0"/>
+              <a:t>/index.js</a:t>
+            </a:r>
+            <a:endParaRPr lang="ko-KR" altLang="en-US" dirty="0"/>
+          </a:p>
+        </p:txBody>
+      </p:sp>
+      <p:sp>
+        <p:nvSpPr>
+          <p:cNvPr id="3" name="내용 개체 틀 2">
+            <a:extLst>
+              <a:ext uri="{FF2B5EF4-FFF2-40B4-BE49-F238E27FC236}">
+                <a16:creationId xmlns:a16="http://schemas.microsoft.com/office/drawing/2014/main" id="{9969492D-A957-EBB9-A547-077F581E157C}"/>
+              </a:ext>
+            </a:extLst>
+          </p:cNvPr>
+          <p:cNvSpPr>
+            <a:spLocks noGrp="1"/>
+          </p:cNvSpPr>
+          <p:nvPr>
+            <p:ph idx="1"/>
+          </p:nvPr>
+        </p:nvSpPr>
+        <p:spPr/>
+        <p:txBody>
+          <a:bodyPr vert="horz" lIns="0" tIns="0" rIns="0" bIns="0" rtlCol="0">
+            <a:noAutofit/>
+          </a:bodyPr>
+          <a:lstStyle/>
+          <a:p>
+            <a:pPr marL="0" indent="0">
+              <a:buNone/>
+            </a:pPr>
+            <a:r>
+              <a:rPr lang="en-US" altLang="ko-KR" sz="800" dirty="0"/>
+              <a:t>/* </a:t>
+            </a:r>
+            <a:r>
+              <a:rPr lang="en-US" altLang="ko-KR" sz="800" dirty="0" err="1"/>
+              <a:t>eslint</a:t>
+            </a:r>
+            <a:r>
+              <a:rPr lang="en-US" altLang="ko-KR" sz="800" dirty="0"/>
+              <a:t>-disable no-unused-vars */</a:t>
+            </a:r>
+          </a:p>
+          <a:p>
+            <a:pPr marL="0" indent="0">
+              <a:buNone/>
+            </a:pPr>
+            <a:r>
+              <a:rPr lang="en-US" altLang="ko-KR" sz="800" dirty="0"/>
+              <a:t>import { </a:t>
+            </a:r>
+            <a:r>
+              <a:rPr lang="en-US" altLang="ko-KR" sz="800" dirty="0" err="1"/>
+              <a:t>createRouter</a:t>
+            </a:r>
+            <a:r>
+              <a:rPr lang="en-US" altLang="ko-KR" sz="800" dirty="0"/>
+              <a:t>, </a:t>
+            </a:r>
+            <a:r>
+              <a:rPr lang="en-US" altLang="ko-KR" sz="800" dirty="0" err="1"/>
+              <a:t>createWebHistory</a:t>
+            </a:r>
+            <a:r>
+              <a:rPr lang="en-US" altLang="ko-KR" sz="800" dirty="0"/>
+              <a:t>, </a:t>
+            </a:r>
+            <a:r>
+              <a:rPr lang="en-US" altLang="ko-KR" sz="800" dirty="0" err="1"/>
+              <a:t>createMemoryHistory</a:t>
+            </a:r>
+            <a:r>
+              <a:rPr lang="en-US" altLang="ko-KR" sz="800" dirty="0"/>
+              <a:t>} from '</a:t>
+            </a:r>
+            <a:r>
+              <a:rPr lang="en-US" altLang="ko-KR" sz="800" dirty="0" err="1"/>
+              <a:t>vue</a:t>
+            </a:r>
+            <a:r>
+              <a:rPr lang="en-US" altLang="ko-KR" sz="800" dirty="0"/>
+              <a:t>-router'</a:t>
+            </a:r>
+          </a:p>
+          <a:p>
+            <a:pPr marL="0" indent="0">
+              <a:buNone/>
+            </a:pPr>
+            <a:r>
+              <a:rPr lang="en-US" altLang="ko-KR" sz="800" dirty="0"/>
+              <a:t>import </a:t>
+            </a:r>
+            <a:r>
+              <a:rPr lang="en-US" altLang="ko-KR" sz="800" dirty="0" err="1"/>
+              <a:t>HomeView</a:t>
+            </a:r>
+            <a:r>
+              <a:rPr lang="en-US" altLang="ko-KR" sz="800" dirty="0"/>
+              <a:t> from '@/Views/</a:t>
+            </a:r>
+            <a:r>
+              <a:rPr lang="en-US" altLang="ko-KR" sz="800" dirty="0" err="1"/>
+              <a:t>HomeView.vue</a:t>
+            </a:r>
+            <a:r>
+              <a:rPr lang="en-US" altLang="ko-KR" sz="800" dirty="0"/>
+              <a:t>'</a:t>
+            </a:r>
+          </a:p>
+          <a:p>
+            <a:pPr marL="0" indent="0">
+              <a:buNone/>
+            </a:pPr>
+            <a:r>
+              <a:rPr lang="en-US" altLang="ko-KR" sz="800" dirty="0"/>
+              <a:t>import </a:t>
+            </a:r>
+            <a:r>
+              <a:rPr lang="en-US" altLang="ko-KR" sz="800" dirty="0" err="1"/>
+              <a:t>MonitorView</a:t>
+            </a:r>
+            <a:r>
+              <a:rPr lang="en-US" altLang="ko-KR" sz="800" dirty="0"/>
+              <a:t> from '@/Views/</a:t>
+            </a:r>
+            <a:r>
+              <a:rPr lang="en-US" altLang="ko-KR" sz="800" dirty="0" err="1"/>
+              <a:t>MonitorView.vue</a:t>
+            </a:r>
+            <a:r>
+              <a:rPr lang="en-US" altLang="ko-KR" sz="800" dirty="0"/>
+              <a:t>'</a:t>
+            </a:r>
+          </a:p>
+          <a:p>
+            <a:pPr marL="0" indent="0">
+              <a:buNone/>
+            </a:pPr>
+            <a:r>
+              <a:rPr lang="en-US" altLang="ko-KR" sz="800" dirty="0"/>
+              <a:t>import </a:t>
+            </a:r>
+            <a:r>
+              <a:rPr lang="en-US" altLang="ko-KR" sz="800" dirty="0" err="1"/>
+              <a:t>ControlView</a:t>
+            </a:r>
+            <a:r>
+              <a:rPr lang="en-US" altLang="ko-KR" sz="800" dirty="0"/>
+              <a:t> from '@/Views/</a:t>
+            </a:r>
+            <a:r>
+              <a:rPr lang="en-US" altLang="ko-KR" sz="800" dirty="0" err="1"/>
+              <a:t>ControlView.vue</a:t>
+            </a:r>
+            <a:r>
+              <a:rPr lang="en-US" altLang="ko-KR" sz="800" dirty="0"/>
+              <a:t>'</a:t>
+            </a:r>
+          </a:p>
+          <a:p>
+            <a:pPr marL="0" indent="0">
+              <a:buNone/>
+            </a:pPr>
+            <a:r>
+              <a:rPr lang="en-US" altLang="ko-KR" sz="800" dirty="0"/>
+              <a:t>import </a:t>
+            </a:r>
+            <a:r>
+              <a:rPr lang="en-US" altLang="ko-KR" sz="800" dirty="0" err="1"/>
+              <a:t>AboutView</a:t>
+            </a:r>
+            <a:r>
+              <a:rPr lang="en-US" altLang="ko-KR" sz="800" dirty="0"/>
+              <a:t> from '@/Views/</a:t>
+            </a:r>
+            <a:r>
+              <a:rPr lang="en-US" altLang="ko-KR" sz="800" dirty="0" err="1"/>
+              <a:t>AboutView.vue</a:t>
+            </a:r>
+            <a:r>
+              <a:rPr lang="en-US" altLang="ko-KR" sz="800" dirty="0"/>
+              <a:t>'</a:t>
+            </a:r>
+          </a:p>
+          <a:p>
+            <a:pPr marL="0" indent="0">
+              <a:buNone/>
+            </a:pPr>
+            <a:br>
+              <a:rPr lang="en-US" altLang="ko-KR" sz="800" dirty="0"/>
+            </a:br>
+            <a:endParaRPr lang="en-US" altLang="ko-KR" sz="800" dirty="0"/>
+          </a:p>
+          <a:p>
+            <a:pPr marL="0" indent="0">
+              <a:buNone/>
+            </a:pPr>
+            <a:r>
+              <a:rPr lang="en-US" altLang="ko-KR" sz="800" dirty="0"/>
+              <a:t>const routes = [</a:t>
+            </a:r>
+          </a:p>
+          <a:p>
+            <a:pPr marL="0" indent="0">
+              <a:buNone/>
+            </a:pPr>
+            <a:r>
+              <a:rPr lang="en-US" altLang="ko-KR" sz="800" dirty="0"/>
+              <a:t>    { path: '/home',  component: </a:t>
+            </a:r>
+            <a:r>
+              <a:rPr lang="en-US" altLang="ko-KR" sz="800" dirty="0" err="1"/>
+              <a:t>HomeView</a:t>
+            </a:r>
+            <a:r>
+              <a:rPr lang="en-US" altLang="ko-KR" sz="800" dirty="0"/>
+              <a:t> },</a:t>
+            </a:r>
+          </a:p>
+          <a:p>
+            <a:pPr marL="0" indent="0">
+              <a:buNone/>
+            </a:pPr>
+            <a:r>
+              <a:rPr lang="en-US" altLang="ko-KR" sz="800" dirty="0"/>
+              <a:t>    { path: '/</a:t>
+            </a:r>
+            <a:r>
+              <a:rPr lang="en-US" altLang="ko-KR" sz="800" dirty="0" err="1"/>
+              <a:t>moniter</a:t>
+            </a:r>
+            <a:r>
+              <a:rPr lang="en-US" altLang="ko-KR" sz="800" dirty="0"/>
+              <a:t>',  component: </a:t>
+            </a:r>
+            <a:r>
+              <a:rPr lang="en-US" altLang="ko-KR" sz="800" dirty="0" err="1"/>
+              <a:t>MoniterView</a:t>
+            </a:r>
+            <a:r>
+              <a:rPr lang="en-US" altLang="ko-KR" sz="800" dirty="0"/>
+              <a:t> },</a:t>
+            </a:r>
+          </a:p>
+          <a:p>
+            <a:pPr marL="0" indent="0">
+              <a:buNone/>
+            </a:pPr>
+            <a:r>
+              <a:rPr lang="en-US" altLang="ko-KR" sz="800" dirty="0"/>
+              <a:t>    { path: '/control',  component: </a:t>
+            </a:r>
+            <a:r>
+              <a:rPr lang="en-US" altLang="ko-KR" sz="800" dirty="0" err="1"/>
+              <a:t>ControlView</a:t>
+            </a:r>
+            <a:r>
+              <a:rPr lang="en-US" altLang="ko-KR" sz="800" dirty="0"/>
+              <a:t> },</a:t>
+            </a:r>
+          </a:p>
+          <a:p>
+            <a:pPr marL="0" indent="0">
+              <a:buNone/>
+            </a:pPr>
+            <a:r>
+              <a:rPr lang="en-US" altLang="ko-KR" sz="800" dirty="0"/>
+              <a:t>    { path: '/about', component: </a:t>
+            </a:r>
+            <a:r>
+              <a:rPr lang="en-US" altLang="ko-KR" sz="800" dirty="0" err="1"/>
+              <a:t>AboutView</a:t>
+            </a:r>
+            <a:r>
+              <a:rPr lang="en-US" altLang="ko-KR" sz="800" dirty="0"/>
+              <a:t> },</a:t>
+            </a:r>
+          </a:p>
+          <a:p>
+            <a:pPr marL="0" indent="0">
+              <a:buNone/>
+            </a:pPr>
+            <a:r>
+              <a:rPr lang="en-US" altLang="ko-KR" sz="800" dirty="0"/>
+              <a:t>];</a:t>
+            </a:r>
+          </a:p>
+          <a:p>
+            <a:pPr marL="0" indent="0">
+              <a:buNone/>
+            </a:pPr>
+            <a:br>
+              <a:rPr lang="en-US" altLang="ko-KR" sz="800" dirty="0"/>
+            </a:br>
+            <a:endParaRPr lang="en-US" altLang="ko-KR" sz="800" dirty="0"/>
+          </a:p>
+          <a:p>
+            <a:pPr marL="0" indent="0">
+              <a:buNone/>
+            </a:pPr>
+            <a:r>
+              <a:rPr lang="en-US" altLang="ko-KR" sz="800" dirty="0"/>
+              <a:t>const router = </a:t>
+            </a:r>
+            <a:r>
+              <a:rPr lang="en-US" altLang="ko-KR" sz="800" dirty="0" err="1"/>
+              <a:t>createRouter</a:t>
+            </a:r>
+            <a:r>
+              <a:rPr lang="en-US" altLang="ko-KR" sz="800" dirty="0"/>
+              <a:t>({</a:t>
+            </a:r>
+          </a:p>
+          <a:p>
+            <a:pPr marL="0" indent="0">
+              <a:buNone/>
+            </a:pPr>
+            <a:r>
+              <a:rPr lang="en-US" altLang="ko-KR" sz="800" dirty="0"/>
+              <a:t>        history: </a:t>
+            </a:r>
+            <a:r>
+              <a:rPr lang="en-US" altLang="ko-KR" sz="800" dirty="0" err="1"/>
+              <a:t>createWebHistory</a:t>
+            </a:r>
+            <a:r>
+              <a:rPr lang="en-US" altLang="ko-KR" sz="800" dirty="0"/>
+              <a:t>('/'),</a:t>
+            </a:r>
+          </a:p>
+          <a:p>
+            <a:pPr marL="0" indent="0">
+              <a:buNone/>
+            </a:pPr>
+            <a:r>
+              <a:rPr lang="en-US" altLang="ko-KR" sz="800" dirty="0"/>
+              <a:t>        //history: </a:t>
+            </a:r>
+            <a:r>
+              <a:rPr lang="en-US" altLang="ko-KR" sz="800" dirty="0" err="1"/>
+              <a:t>createMemoryHistory</a:t>
+            </a:r>
+            <a:r>
+              <a:rPr lang="en-US" altLang="ko-KR" sz="800" dirty="0"/>
+              <a:t>(),</a:t>
+            </a:r>
+          </a:p>
+          <a:p>
+            <a:pPr marL="0" indent="0">
+              <a:buNone/>
+            </a:pPr>
+            <a:r>
+              <a:rPr lang="en-US" altLang="ko-KR" sz="800" dirty="0"/>
+              <a:t>        routes</a:t>
+            </a:r>
+          </a:p>
+          <a:p>
+            <a:pPr marL="0" indent="0">
+              <a:buNone/>
+            </a:pPr>
+            <a:r>
+              <a:rPr lang="en-US" altLang="ko-KR" sz="800" dirty="0"/>
+              <a:t>    }</a:t>
+            </a:r>
+          </a:p>
+          <a:p>
+            <a:pPr marL="0" indent="0">
+              <a:buNone/>
+            </a:pPr>
+            <a:r>
+              <a:rPr lang="en-US" altLang="ko-KR" sz="800" dirty="0"/>
+              <a:t>);</a:t>
+            </a:r>
+          </a:p>
+          <a:p>
+            <a:pPr marL="0" indent="0">
+              <a:buNone/>
+            </a:pPr>
+            <a:br>
+              <a:rPr lang="en-US" altLang="ko-KR" sz="800" dirty="0"/>
+            </a:br>
+            <a:endParaRPr lang="en-US" altLang="ko-KR" sz="800" dirty="0"/>
+          </a:p>
+          <a:p>
+            <a:pPr marL="0" indent="0">
+              <a:buNone/>
+            </a:pPr>
+            <a:r>
+              <a:rPr lang="en-US" altLang="ko-KR" sz="800" dirty="0"/>
+              <a:t>export default router;</a:t>
+            </a:r>
+          </a:p>
+        </p:txBody>
+      </p:sp>
+    </p:spTree>
+    <p:extLst>
+      <p:ext uri="{BB962C8B-B14F-4D97-AF65-F5344CB8AC3E}">
+        <p14:creationId xmlns:p14="http://schemas.microsoft.com/office/powerpoint/2010/main" val="3651663899"/>
+      </p:ext>
+    </p:extLst>
+  </p:cSld>
+  <p:clrMapOvr>
+    <a:masterClrMapping/>
+  </p:clrMapOvr>
+</p:sld>
+</file>
+
 <file path=ppt/theme/theme1.xml><?xml version="1.0" encoding="utf-8"?>
 <a:theme xmlns:a="http://schemas.openxmlformats.org/drawingml/2006/main" name="Office 테마">
   <a:themeElements>
-    <a:clrScheme name="Office">
+    <a:clrScheme name="Office 테마">
       <a:dk1>
         <a:sysClr val="windowText" lastClr="000000"/>
       </a:dk1>
@@ -3811,9 +4087,9 @@
         <a:srgbClr val="96607D"/>
       </a:folHlink>
     </a:clrScheme>
-    <a:fontScheme name="Office">
+    <a:fontScheme name="Office 테마">
       <a:majorFont>
-        <a:latin typeface="맑은 고딕" panose="02110004020202020204"/>
+        <a:latin typeface="Aptos Display" panose="02110004020202020204"/>
         <a:ea typeface=""/>
         <a:cs typeface=""/>
         <a:font script="Jpan" typeface="游ゴシック Light"/>
@@ -3865,7 +4141,7 @@
         <a:font script="Tfng" typeface="Ebrima"/>
       </a:majorFont>
       <a:minorFont>
-        <a:latin typeface="맑은 고딕" panose="02110004020202020204"/>
+        <a:latin typeface="Aptos" panose="02110004020202020204"/>
         <a:ea typeface=""/>
         <a:cs typeface=""/>
         <a:font script="Jpan" typeface="游ゴシック"/>
@@ -3917,7 +4193,7 @@
         <a:font script="Tfng" typeface="Ebrima"/>
       </a:minorFont>
     </a:fontScheme>
-    <a:fmtScheme name="Office">
+    <a:fmtScheme name="Office 테마">
       <a:fillStyleLst>
         <a:solidFill>
           <a:schemeClr val="phClr"/>

--- a/doc/개발환경_설치매뉴얼(Vue.JS).pptx
+++ b/doc/개발환경_설치매뉴얼(Vue.JS).pptx
@@ -8,8 +8,10 @@
     <p:sldId id="256" r:id="rId2"/>
     <p:sldId id="277" r:id="rId3"/>
     <p:sldId id="278" r:id="rId4"/>
-    <p:sldId id="279" r:id="rId5"/>
-    <p:sldId id="280" r:id="rId6"/>
+    <p:sldId id="283" r:id="rId5"/>
+    <p:sldId id="279" r:id="rId6"/>
+    <p:sldId id="282" r:id="rId7"/>
+    <p:sldId id="281" r:id="rId8"/>
   </p:sldIdLst>
   <p:sldSz cx="6858000" cy="12192000"/>
   <p:notesSz cx="6858000" cy="9144000"/>
@@ -120,8 +122,10 @@
         <p14:section name="제목 없는 구역" id="{53E5FD2C-994F-4CFF-8214-B8896DC0A73D}">
           <p14:sldIdLst>
             <p14:sldId id="278"/>
+            <p14:sldId id="283"/>
             <p14:sldId id="279"/>
-            <p14:sldId id="280"/>
+            <p14:sldId id="282"/>
+            <p14:sldId id="281"/>
           </p14:sldIdLst>
         </p14:section>
       </p14:sectionLst>
@@ -264,7 +268,7 @@
           <a:p>
             <a:fld id="{7359EE32-49FD-4EA7-9011-353EB936649F}" type="datetimeFigureOut">
               <a:rPr lang="ko-KR" altLang="en-US" smtClean="0"/>
-              <a:t>2025-09-06</a:t>
+              <a:t>2025-09-07</a:t>
             </a:fld>
             <a:endParaRPr lang="ko-KR" altLang="en-US"/>
           </a:p>
@@ -434,7 +438,7 @@
           <a:p>
             <a:fld id="{7359EE32-49FD-4EA7-9011-353EB936649F}" type="datetimeFigureOut">
               <a:rPr lang="ko-KR" altLang="en-US" smtClean="0"/>
-              <a:t>2025-09-06</a:t>
+              <a:t>2025-09-07</a:t>
             </a:fld>
             <a:endParaRPr lang="ko-KR" altLang="en-US"/>
           </a:p>
@@ -614,7 +618,7 @@
           <a:p>
             <a:fld id="{7359EE32-49FD-4EA7-9011-353EB936649F}" type="datetimeFigureOut">
               <a:rPr lang="ko-KR" altLang="en-US" smtClean="0"/>
-              <a:t>2025-09-06</a:t>
+              <a:t>2025-09-07</a:t>
             </a:fld>
             <a:endParaRPr lang="ko-KR" altLang="en-US"/>
           </a:p>
@@ -784,7 +788,7 @@
           <a:p>
             <a:fld id="{7359EE32-49FD-4EA7-9011-353EB936649F}" type="datetimeFigureOut">
               <a:rPr lang="ko-KR" altLang="en-US" smtClean="0"/>
-              <a:t>2025-09-06</a:t>
+              <a:t>2025-09-07</a:t>
             </a:fld>
             <a:endParaRPr lang="ko-KR" altLang="en-US"/>
           </a:p>
@@ -1030,7 +1034,7 @@
           <a:p>
             <a:fld id="{7359EE32-49FD-4EA7-9011-353EB936649F}" type="datetimeFigureOut">
               <a:rPr lang="ko-KR" altLang="en-US" smtClean="0"/>
-              <a:t>2025-09-06</a:t>
+              <a:t>2025-09-07</a:t>
             </a:fld>
             <a:endParaRPr lang="ko-KR" altLang="en-US"/>
           </a:p>
@@ -1262,7 +1266,7 @@
           <a:p>
             <a:fld id="{7359EE32-49FD-4EA7-9011-353EB936649F}" type="datetimeFigureOut">
               <a:rPr lang="ko-KR" altLang="en-US" smtClean="0"/>
-              <a:t>2025-09-06</a:t>
+              <a:t>2025-09-07</a:t>
             </a:fld>
             <a:endParaRPr lang="ko-KR" altLang="en-US"/>
           </a:p>
@@ -1629,7 +1633,7 @@
           <a:p>
             <a:fld id="{7359EE32-49FD-4EA7-9011-353EB936649F}" type="datetimeFigureOut">
               <a:rPr lang="ko-KR" altLang="en-US" smtClean="0"/>
-              <a:t>2025-09-06</a:t>
+              <a:t>2025-09-07</a:t>
             </a:fld>
             <a:endParaRPr lang="ko-KR" altLang="en-US"/>
           </a:p>
@@ -1747,7 +1751,7 @@
           <a:p>
             <a:fld id="{7359EE32-49FD-4EA7-9011-353EB936649F}" type="datetimeFigureOut">
               <a:rPr lang="ko-KR" altLang="en-US" smtClean="0"/>
-              <a:t>2025-09-06</a:t>
+              <a:t>2025-09-07</a:t>
             </a:fld>
             <a:endParaRPr lang="ko-KR" altLang="en-US"/>
           </a:p>
@@ -1842,7 +1846,7 @@
           <a:p>
             <a:fld id="{7359EE32-49FD-4EA7-9011-353EB936649F}" type="datetimeFigureOut">
               <a:rPr lang="ko-KR" altLang="en-US" smtClean="0"/>
-              <a:t>2025-09-06</a:t>
+              <a:t>2025-09-07</a:t>
             </a:fld>
             <a:endParaRPr lang="ko-KR" altLang="en-US"/>
           </a:p>
@@ -2119,7 +2123,7 @@
           <a:p>
             <a:fld id="{7359EE32-49FD-4EA7-9011-353EB936649F}" type="datetimeFigureOut">
               <a:rPr lang="ko-KR" altLang="en-US" smtClean="0"/>
-              <a:t>2025-09-06</a:t>
+              <a:t>2025-09-07</a:t>
             </a:fld>
             <a:endParaRPr lang="ko-KR" altLang="en-US"/>
           </a:p>
@@ -2376,7 +2380,7 @@
           <a:p>
             <a:fld id="{7359EE32-49FD-4EA7-9011-353EB936649F}" type="datetimeFigureOut">
               <a:rPr lang="ko-KR" altLang="en-US" smtClean="0"/>
-              <a:t>2025-09-06</a:t>
+              <a:t>2025-09-07</a:t>
             </a:fld>
             <a:endParaRPr lang="ko-KR" altLang="en-US"/>
           </a:p>
@@ -2589,7 +2593,7 @@
           <a:p>
             <a:fld id="{7359EE32-49FD-4EA7-9011-353EB936649F}" type="datetimeFigureOut">
               <a:rPr lang="ko-KR" altLang="en-US" smtClean="0"/>
-              <a:t>2025-09-06</a:t>
+              <a:t>2025-09-07</a:t>
             </a:fld>
             <a:endParaRPr lang="ko-KR" altLang="en-US"/>
           </a:p>
@@ -3102,7 +3106,11 @@
           <a:bodyPr/>
           <a:lstStyle/>
           <a:p>
-            <a:endParaRPr lang="ko-KR" altLang="en-US"/>
+            <a:r>
+              <a:rPr lang="en-US" altLang="ko-KR" dirty="0"/>
+              <a:t>Vue.JS 3</a:t>
+            </a:r>
+            <a:endParaRPr lang="ko-KR" altLang="en-US" dirty="0"/>
           </a:p>
         </p:txBody>
       </p:sp>
@@ -3130,6 +3138,14 @@
           <a:lstStyle/>
           <a:p>
             <a:r>
+              <a:rPr lang="ko-KR" altLang="en-US" dirty="0"/>
+              <a:t>설치</a:t>
+            </a:r>
+            <a:endParaRPr lang="en-US" altLang="ko-KR" dirty="0"/>
+          </a:p>
+          <a:p>
+            <a:pPr lvl="1"/>
+            <a:r>
               <a:rPr lang="en-US" altLang="ko-KR" dirty="0"/>
               <a:t>$ </a:t>
             </a:r>
@@ -3147,6 +3163,14 @@
           </a:p>
           <a:p>
             <a:r>
+              <a:rPr lang="ko-KR" altLang="en-US" dirty="0"/>
+              <a:t>프로젝트 생성</a:t>
+            </a:r>
+            <a:endParaRPr lang="en-US" altLang="ko-KR" dirty="0"/>
+          </a:p>
+          <a:p>
+            <a:pPr lvl="1"/>
+            <a:r>
               <a:rPr lang="en-US" altLang="ko-KR" dirty="0"/>
               <a:t>$ </a:t>
             </a:r>
@@ -3160,15 +3184,25 @@
             </a:r>
           </a:p>
           <a:p>
-            <a:endParaRPr lang="en-US" altLang="ko-KR" dirty="0"/>
-          </a:p>
-          <a:p>
+            <a:pPr lvl="1"/>
             <a:r>
               <a:rPr lang="en-US" altLang="ko-KR" dirty="0"/>
               <a:t>$ cd frontend</a:t>
             </a:r>
           </a:p>
           <a:p>
+            <a:pPr lvl="1"/>
+            <a:endParaRPr lang="en-US" altLang="ko-KR" dirty="0"/>
+          </a:p>
+          <a:p>
+            <a:r>
+              <a:rPr lang="ko-KR" altLang="en-US" dirty="0"/>
+              <a:t>프로젝트 실행</a:t>
+            </a:r>
+            <a:endParaRPr lang="en-US" altLang="ko-KR" dirty="0"/>
+          </a:p>
+          <a:p>
+            <a:pPr lvl="1"/>
             <a:r>
               <a:rPr lang="en-US" altLang="ko-KR" dirty="0"/>
               <a:t>$ </a:t>
@@ -3186,6 +3220,14 @@
             <a:endParaRPr lang="en-US" altLang="ko-KR" dirty="0"/>
           </a:p>
           <a:p>
+            <a:r>
+              <a:rPr lang="ko-KR" altLang="en-US" dirty="0"/>
+              <a:t>프로젝트 접속</a:t>
+            </a:r>
+            <a:endParaRPr lang="en-US" altLang="ko-KR" dirty="0"/>
+          </a:p>
+          <a:p>
+            <a:pPr lvl="1"/>
             <a:r>
               <a:rPr lang="en-US" altLang="ko-KR" dirty="0">
                 <a:hlinkClick r:id="rId2"/>
@@ -3195,9 +3237,30 @@
             <a:endParaRPr lang="en-US" altLang="ko-KR" dirty="0"/>
           </a:p>
           <a:p>
+            <a:pPr lvl="1"/>
+            <a:r>
+              <a:rPr lang="en-US" altLang="ko-KR" dirty="0">
+                <a:hlinkClick r:id="rId3"/>
+              </a:rPr>
+              <a:t>http://localhost:80</a:t>
+            </a:r>
             <a:endParaRPr lang="en-US" altLang="ko-KR" dirty="0"/>
           </a:p>
           <a:p>
+            <a:pPr marL="0" indent="0">
+              <a:buNone/>
+            </a:pPr>
+            <a:endParaRPr lang="en-US" altLang="ko-KR" dirty="0"/>
+          </a:p>
+          <a:p>
+            <a:r>
+              <a:rPr lang="ko-KR" altLang="en-US" dirty="0"/>
+              <a:t>프로젝트 배포</a:t>
+            </a:r>
+            <a:endParaRPr lang="en-US" altLang="ko-KR" dirty="0"/>
+          </a:p>
+          <a:p>
+            <a:pPr lvl="1"/>
             <a:r>
               <a:rPr lang="en-US" altLang="ko-KR" dirty="0" err="1"/>
               <a:t>npm</a:t>
@@ -3261,7 +3324,10 @@
           <a:bodyPr/>
           <a:lstStyle/>
           <a:p>
-            <a:endParaRPr lang="ko-KR" altLang="en-US" dirty="0"/>
+            <a:r>
+              <a:rPr lang="ko-KR" altLang="en-US" dirty="0"/>
+              <a:t>플러그인</a:t>
+            </a:r>
           </a:p>
         </p:txBody>
       </p:sp>
@@ -3283,8 +3349,8 @@
         </p:nvSpPr>
         <p:spPr>
           <a:xfrm>
-            <a:off x="-1828800" y="4492625"/>
-            <a:ext cx="10515600" cy="4351338"/>
+            <a:off x="471488" y="3508375"/>
+            <a:ext cx="6273800" cy="4351338"/>
           </a:xfrm>
         </p:spPr>
         <p:txBody>
@@ -3295,6 +3361,50 @@
           <a:p>
             <a:r>
               <a:rPr lang="en-US" altLang="ko-KR" sz="1000" dirty="0"/>
+              <a:t>Vue-Official</a:t>
+            </a:r>
+            <a:br>
+              <a:rPr lang="en-US" altLang="ko-KR" sz="1000" dirty="0"/>
+            </a:br>
+            <a:r>
+              <a:rPr lang="en-US" altLang="ko-KR" sz="1000" dirty="0"/>
+              <a:t> : </a:t>
+            </a:r>
+            <a:r>
+              <a:rPr lang="ko-KR" altLang="en-US" sz="1000" dirty="0"/>
+              <a:t>언어지원 플러그인</a:t>
+            </a:r>
+            <a:endParaRPr lang="en-US" altLang="ko-KR" sz="1000" dirty="0"/>
+          </a:p>
+          <a:p>
+            <a:r>
+              <a:rPr lang="en-US" altLang="ko-KR" sz="1000" dirty="0"/>
+              <a:t>Vue </a:t>
+            </a:r>
+            <a:r>
+              <a:rPr lang="en-US" altLang="ko-KR" sz="1000" dirty="0" err="1"/>
+              <a:t>VSCode</a:t>
+            </a:r>
+            <a:r>
+              <a:rPr lang="en-US" altLang="ko-KR" sz="1000" dirty="0"/>
+              <a:t> Snippets</a:t>
+            </a:r>
+            <a:br>
+              <a:rPr lang="en-US" altLang="ko-KR" sz="1000" dirty="0"/>
+            </a:br>
+            <a:r>
+              <a:rPr lang="en-US" altLang="ko-KR" sz="1000" dirty="0"/>
+              <a:t>: Vue </a:t>
+            </a:r>
+            <a:r>
+              <a:rPr lang="ko-KR" altLang="en-US" sz="1000" dirty="0"/>
+              <a:t>코드 자동생성</a:t>
+            </a:r>
+            <a:endParaRPr lang="en-US" altLang="ko-KR" sz="1000" dirty="0"/>
+          </a:p>
+          <a:p>
+            <a:r>
+              <a:rPr lang="en-US" altLang="ko-KR" sz="1000" dirty="0"/>
               <a:t>Material Icon Theme</a:t>
             </a:r>
             <a:br>
@@ -3368,38 +3478,6 @@
               <a:t> 예쁘게 작성할 수 있도록 도와주는 도구</a:t>
             </a:r>
             <a:endParaRPr lang="en-US" altLang="ko-KR" sz="1000" dirty="0"/>
-          </a:p>
-          <a:p>
-            <a:r>
-              <a:rPr lang="en-US" altLang="ko-KR" sz="1000" dirty="0"/>
-              <a:t>Vue-Official</a:t>
-            </a:r>
-            <a:br>
-              <a:rPr lang="en-US" altLang="ko-KR" sz="1000" dirty="0"/>
-            </a:br>
-            <a:r>
-              <a:rPr lang="en-US" altLang="ko-KR" sz="1000" dirty="0"/>
-              <a:t> : </a:t>
-            </a:r>
-            <a:r>
-              <a:rPr lang="ko-KR" altLang="en-US" sz="1000" dirty="0"/>
-              <a:t>언어지원 플러그인</a:t>
-            </a:r>
-            <a:endParaRPr lang="en-US" altLang="ko-KR" sz="1000" dirty="0"/>
-          </a:p>
-          <a:p>
-            <a:r>
-              <a:rPr lang="en-US" altLang="ko-KR" sz="1000" dirty="0"/>
-              <a:t>Vue </a:t>
-            </a:r>
-            <a:r>
-              <a:rPr lang="en-US" altLang="ko-KR" sz="1000" dirty="0" err="1"/>
-              <a:t>VSCode</a:t>
-            </a:r>
-            <a:r>
-              <a:rPr lang="en-US" altLang="ko-KR" sz="1000" dirty="0"/>
-              <a:t> Snippets</a:t>
-            </a:r>
           </a:p>
           <a:p>
             <a:r>
@@ -3480,7 +3558,7 @@
           <p:cNvPr id="2" name="제목 1">
             <a:extLst>
               <a:ext uri="{FF2B5EF4-FFF2-40B4-BE49-F238E27FC236}">
-                <a16:creationId xmlns:a16="http://schemas.microsoft.com/office/drawing/2014/main" id="{E372DB09-F1A5-0E9C-EE6B-14ABB7F9AF85}"/>
+                <a16:creationId xmlns:a16="http://schemas.microsoft.com/office/drawing/2014/main" id="{045D86C5-76D7-0D8F-0760-F24AF0B6341F}"/>
               </a:ext>
             </a:extLst>
           </p:cNvPr>
@@ -3497,10 +3575,10 @@
           <a:lstStyle/>
           <a:p>
             <a:r>
-              <a:rPr lang="en-US" altLang="ko-KR" dirty="0"/>
-              <a:t>Vue Router</a:t>
-            </a:r>
-            <a:endParaRPr lang="ko-KR" altLang="en-US" dirty="0"/>
+              <a:rPr lang="ko-KR" altLang="en-US" dirty="0"/>
+              <a:t>구동포트 설정</a:t>
+            </a:r>
+            <a:endParaRPr lang="en-US" altLang="ko-KR" dirty="0"/>
           </a:p>
         </p:txBody>
       </p:sp>
@@ -3509,7 +3587,7 @@
           <p:cNvPr id="3" name="내용 개체 틀 2">
             <a:extLst>
               <a:ext uri="{FF2B5EF4-FFF2-40B4-BE49-F238E27FC236}">
-                <a16:creationId xmlns:a16="http://schemas.microsoft.com/office/drawing/2014/main" id="{885DABAA-E41B-E3AC-B623-601A614B581B}"/>
+                <a16:creationId xmlns:a16="http://schemas.microsoft.com/office/drawing/2014/main" id="{AB13174C-2860-3BEE-697F-07719080D8C9}"/>
               </a:ext>
             </a:extLst>
           </p:cNvPr>
@@ -3525,65 +3603,120 @@
           <a:bodyPr/>
           <a:lstStyle/>
           <a:p>
-            <a:r>
-              <a:rPr lang="en-US" altLang="ko-KR" dirty="0"/>
-              <a:t>$ </a:t>
-            </a:r>
+            <a:pPr marL="0" indent="0">
+              <a:buNone/>
+            </a:pPr>
             <a:r>
               <a:rPr lang="en-US" altLang="ko-KR" dirty="0" err="1"/>
-              <a:t>npm</a:t>
-            </a:r>
-            <a:r>
-              <a:rPr lang="en-US" altLang="ko-KR" dirty="0"/>
-              <a:t> install </a:t>
-            </a:r>
-            <a:r>
-              <a:rPr lang="en-US" altLang="ko-KR" dirty="0" err="1"/>
-              <a:t>vue</a:t>
-            </a:r>
-            <a:r>
-              <a:rPr lang="en-US" altLang="ko-KR" dirty="0"/>
-              <a:t>-router</a:t>
-            </a:r>
-          </a:p>
-          <a:p>
-            <a:endParaRPr lang="en-US" altLang="ko-KR" dirty="0"/>
-          </a:p>
-          <a:p>
-            <a:r>
-              <a:rPr lang="en-US" altLang="ko-KR" dirty="0"/>
-              <a:t>&lt;</a:t>
-            </a:r>
-            <a:r>
-              <a:rPr lang="en-US" altLang="ko-KR" dirty="0" err="1"/>
-              <a:t>RouterLink</a:t>
-            </a:r>
-            <a:r>
-              <a:rPr lang="en-US" altLang="ko-KR" dirty="0"/>
-              <a:t>&gt;</a:t>
-            </a:r>
-          </a:p>
-          <a:p>
-            <a:r>
-              <a:rPr lang="en-US" altLang="ko-KR" dirty="0"/>
-              <a:t>&lt;</a:t>
-            </a:r>
-            <a:r>
-              <a:rPr lang="en-US" altLang="ko-KR" dirty="0" err="1"/>
-              <a:t>RouterView</a:t>
-            </a:r>
-            <a:r>
-              <a:rPr lang="en-US" altLang="ko-KR" dirty="0"/>
-              <a:t>&gt;</a:t>
-            </a:r>
-            <a:endParaRPr lang="ko-KR" altLang="en-US" dirty="0"/>
+              <a:t>package.json</a:t>
+            </a:r>
+            <a:endParaRPr lang="fr-FR" altLang="ko-KR" dirty="0"/>
+          </a:p>
+          <a:p>
+            <a:pPr marL="0" indent="0">
+              <a:buNone/>
+            </a:pPr>
+            <a:r>
+              <a:rPr lang="fr-FR" altLang="ko-KR" dirty="0"/>
+              <a:t>{</a:t>
+            </a:r>
+          </a:p>
+          <a:p>
+            <a:pPr marL="0" indent="0">
+              <a:buNone/>
+            </a:pPr>
+            <a:r>
+              <a:rPr lang="fr-FR" altLang="ko-KR" dirty="0"/>
+              <a:t>  "name": "frontend",</a:t>
+            </a:r>
+          </a:p>
+          <a:p>
+            <a:pPr marL="0" indent="0">
+              <a:buNone/>
+            </a:pPr>
+            <a:r>
+              <a:rPr lang="fr-FR" altLang="ko-KR" dirty="0"/>
+              <a:t>  "version": "0.1.0",</a:t>
+            </a:r>
+          </a:p>
+          <a:p>
+            <a:pPr marL="0" indent="0">
+              <a:buNone/>
+            </a:pPr>
+            <a:r>
+              <a:rPr lang="fr-FR" altLang="ko-KR" dirty="0"/>
+              <a:t>  "private": true,</a:t>
+            </a:r>
+          </a:p>
+          <a:p>
+            <a:pPr marL="0" indent="0">
+              <a:buNone/>
+            </a:pPr>
+            <a:r>
+              <a:rPr lang="fr-FR" altLang="ko-KR" dirty="0"/>
+              <a:t>  "scripts": {</a:t>
+            </a:r>
+          </a:p>
+          <a:p>
+            <a:pPr marL="0" indent="0">
+              <a:buNone/>
+            </a:pPr>
+            <a:r>
+              <a:rPr lang="fr-FR" altLang="ko-KR" dirty="0"/>
+              <a:t>    "serve": "vue-cli-service serve </a:t>
+            </a:r>
+            <a:r>
+              <a:rPr lang="fr-FR" altLang="ko-KR" dirty="0">
+                <a:solidFill>
+                  <a:srgbClr val="FF0000"/>
+                </a:solidFill>
+              </a:rPr>
+              <a:t>--port 80</a:t>
+            </a:r>
+            <a:r>
+              <a:rPr lang="fr-FR" altLang="ko-KR" dirty="0"/>
+              <a:t>",</a:t>
+            </a:r>
+          </a:p>
+          <a:p>
+            <a:pPr marL="0" indent="0">
+              <a:buNone/>
+            </a:pPr>
+            <a:r>
+              <a:rPr lang="fr-FR" altLang="ko-KR" dirty="0"/>
+              <a:t>    "build": "vue-cli-service build",</a:t>
+            </a:r>
+          </a:p>
+          <a:p>
+            <a:pPr marL="0" indent="0">
+              <a:buNone/>
+            </a:pPr>
+            <a:r>
+              <a:rPr lang="fr-FR" altLang="ko-KR" dirty="0"/>
+              <a:t>    "lint": "vue-cli-service lint"</a:t>
+            </a:r>
+          </a:p>
+          <a:p>
+            <a:pPr marL="0" indent="0">
+              <a:buNone/>
+            </a:pPr>
+            <a:r>
+              <a:rPr lang="fr-FR" altLang="ko-KR" dirty="0"/>
+              <a:t>  },</a:t>
+            </a:r>
+          </a:p>
+          <a:p>
+            <a:pPr marL="0" indent="0">
+              <a:buNone/>
+            </a:pPr>
+            <a:endParaRPr lang="fr-FR" altLang="ko-KR" dirty="0"/>
           </a:p>
         </p:txBody>
       </p:sp>
     </p:spTree>
     <p:extLst>
       <p:ext uri="{BB962C8B-B14F-4D97-AF65-F5344CB8AC3E}">
-        <p14:creationId xmlns:p14="http://schemas.microsoft.com/office/powerpoint/2010/main" val="2359618191"/>
+        <p14:creationId xmlns:p14="http://schemas.microsoft.com/office/powerpoint/2010/main" val="2193087922"/>
       </p:ext>
     </p:extLst>
   </p:cSld>
@@ -3615,7 +3748,7 @@
           <p:cNvPr id="2" name="제목 1">
             <a:extLst>
               <a:ext uri="{FF2B5EF4-FFF2-40B4-BE49-F238E27FC236}">
-                <a16:creationId xmlns:a16="http://schemas.microsoft.com/office/drawing/2014/main" id="{8E3DE72D-461E-4EAD-0CA8-F1F2F7D47A3F}"/>
+                <a16:creationId xmlns:a16="http://schemas.microsoft.com/office/drawing/2014/main" id="{E372DB09-F1A5-0E9C-EE6B-14ABB7F9AF85}"/>
               </a:ext>
             </a:extLst>
           </p:cNvPr>
@@ -3632,12 +3765,35 @@
           <a:lstStyle/>
           <a:p>
             <a:r>
-              <a:rPr lang="en-US" altLang="ko-KR" dirty="0" err="1"/>
-              <a:t>rojuer</a:t>
-            </a:r>
-            <a:r>
               <a:rPr lang="en-US" altLang="ko-KR" dirty="0"/>
-              <a:t>/index.js</a:t>
+              <a:t>Vue Router</a:t>
+            </a:r>
+            <a:br>
+              <a:rPr lang="en-US" altLang="ko-KR" dirty="0"/>
+            </a:br>
+            <a:r>
+              <a:rPr lang="en-US" altLang="ko-KR" dirty="0"/>
+              <a:t>(&gt;</a:t>
+            </a:r>
+            <a:r>
+              <a:rPr lang="en-US" altLang="ko-KR" sz="3600" dirty="0"/>
+              <a:t> </a:t>
+            </a:r>
+            <a:r>
+              <a:rPr lang="en-US" altLang="ko-KR" sz="3600" dirty="0" err="1"/>
+              <a:t>npm</a:t>
+            </a:r>
+            <a:r>
+              <a:rPr lang="en-US" altLang="ko-KR" sz="3600" dirty="0"/>
+              <a:t> install </a:t>
+            </a:r>
+            <a:r>
+              <a:rPr lang="en-US" altLang="ko-KR" sz="3600" dirty="0" err="1"/>
+              <a:t>vue</a:t>
+            </a:r>
+            <a:r>
+              <a:rPr lang="en-US" altLang="ko-KR" sz="3600" dirty="0"/>
+              <a:t>-router)</a:t>
             </a:r>
             <a:endParaRPr lang="ko-KR" altLang="en-US" dirty="0"/>
           </a:p>
@@ -3648,7 +3804,7 @@
           <p:cNvPr id="3" name="내용 개체 틀 2">
             <a:extLst>
               <a:ext uri="{FF2B5EF4-FFF2-40B4-BE49-F238E27FC236}">
-                <a16:creationId xmlns:a16="http://schemas.microsoft.com/office/drawing/2014/main" id="{9969492D-A957-EBB9-A547-077F581E157C}"/>
+                <a16:creationId xmlns:a16="http://schemas.microsoft.com/office/drawing/2014/main" id="{885DABAA-E41B-E3AC-B623-601A614B581B}"/>
               </a:ext>
             </a:extLst>
           </p:cNvPr>
@@ -3661,382 +3817,1015 @@
         </p:nvSpPr>
         <p:spPr/>
         <p:txBody>
-          <a:bodyPr vert="horz" lIns="0" tIns="0" rIns="0" bIns="0" rtlCol="0">
+          <a:bodyPr>
             <a:noAutofit/>
           </a:bodyPr>
           <a:lstStyle/>
           <a:p>
             <a:pPr marL="0" indent="0">
-              <a:buNone/>
-            </a:pPr>
-            <a:r>
-              <a:rPr lang="en-US" altLang="ko-KR" sz="800" dirty="0"/>
+              <a:lnSpc>
+                <a:spcPct val="50000"/>
+              </a:lnSpc>
+              <a:buNone/>
+            </a:pPr>
+            <a:endParaRPr lang="en-US" altLang="ko-KR" sz="1000" dirty="0"/>
+          </a:p>
+          <a:p>
+            <a:pPr marL="0" indent="0">
+              <a:lnSpc>
+                <a:spcPct val="50000"/>
+              </a:lnSpc>
+              <a:buNone/>
+            </a:pPr>
+            <a:r>
+              <a:rPr lang="en-US" altLang="ko-KR" sz="1000" dirty="0"/>
+              <a:t>router/index.js</a:t>
+            </a:r>
+          </a:p>
+          <a:p>
+            <a:pPr marL="0" indent="0">
+              <a:lnSpc>
+                <a:spcPct val="50000"/>
+              </a:lnSpc>
+              <a:buNone/>
+            </a:pPr>
+            <a:r>
+              <a:rPr lang="en-US" altLang="ko-KR" sz="1000" dirty="0"/>
+              <a:t>{</a:t>
+            </a:r>
+          </a:p>
+          <a:p>
+            <a:pPr marL="342900" lvl="1" indent="0">
+              <a:lnSpc>
+                <a:spcPct val="50000"/>
+              </a:lnSpc>
+              <a:buNone/>
+            </a:pPr>
+            <a:r>
+              <a:rPr lang="en-US" altLang="ko-KR" sz="1000" dirty="0"/>
               <a:t>/* </a:t>
             </a:r>
             <a:r>
-              <a:rPr lang="en-US" altLang="ko-KR" sz="800" dirty="0" err="1"/>
+              <a:rPr lang="en-US" altLang="ko-KR" sz="1000" dirty="0" err="1"/>
               <a:t>eslint</a:t>
             </a:r>
             <a:r>
-              <a:rPr lang="en-US" altLang="ko-KR" sz="800" dirty="0"/>
+              <a:rPr lang="en-US" altLang="ko-KR" sz="1000" dirty="0"/>
               <a:t>-disable no-unused-vars */</a:t>
             </a:r>
           </a:p>
           <a:p>
+            <a:pPr marL="342900" lvl="1" indent="0">
+              <a:lnSpc>
+                <a:spcPct val="50000"/>
+              </a:lnSpc>
+              <a:buNone/>
+            </a:pPr>
+            <a:r>
+              <a:rPr lang="en-US" altLang="ko-KR" sz="1000" dirty="0"/>
+              <a:t>import { </a:t>
+            </a:r>
+            <a:r>
+              <a:rPr lang="en-US" altLang="ko-KR" sz="1000" dirty="0" err="1"/>
+              <a:t>createRouter</a:t>
+            </a:r>
+            <a:r>
+              <a:rPr lang="en-US" altLang="ko-KR" sz="1000" dirty="0"/>
+              <a:t>, </a:t>
+            </a:r>
+            <a:r>
+              <a:rPr lang="en-US" altLang="ko-KR" sz="1000" dirty="0" err="1"/>
+              <a:t>createWebHistory</a:t>
+            </a:r>
+            <a:r>
+              <a:rPr lang="en-US" altLang="ko-KR" sz="1000" dirty="0"/>
+              <a:t>, </a:t>
+            </a:r>
+            <a:r>
+              <a:rPr lang="en-US" altLang="ko-KR" sz="1000" dirty="0" err="1"/>
+              <a:t>createMemoryHistory</a:t>
+            </a:r>
+            <a:r>
+              <a:rPr lang="en-US" altLang="ko-KR" sz="1000" dirty="0"/>
+              <a:t>} from '</a:t>
+            </a:r>
+            <a:r>
+              <a:rPr lang="en-US" altLang="ko-KR" sz="1000" dirty="0" err="1"/>
+              <a:t>vue</a:t>
+            </a:r>
+            <a:r>
+              <a:rPr lang="en-US" altLang="ko-KR" sz="1000" dirty="0"/>
+              <a:t>-router'</a:t>
+            </a:r>
+          </a:p>
+          <a:p>
+            <a:pPr marL="342900" lvl="1" indent="0">
+              <a:lnSpc>
+                <a:spcPct val="50000"/>
+              </a:lnSpc>
+              <a:buNone/>
+            </a:pPr>
+            <a:r>
+              <a:rPr lang="en-US" altLang="ko-KR" sz="1000" dirty="0"/>
+              <a:t>import </a:t>
+            </a:r>
+            <a:r>
+              <a:rPr lang="en-US" altLang="ko-KR" sz="1000" dirty="0" err="1"/>
+              <a:t>HomeView</a:t>
+            </a:r>
+            <a:r>
+              <a:rPr lang="en-US" altLang="ko-KR" sz="1000" dirty="0"/>
+              <a:t> from '@/Views/</a:t>
+            </a:r>
+            <a:r>
+              <a:rPr lang="en-US" altLang="ko-KR" sz="1000" dirty="0" err="1"/>
+              <a:t>HomeView.vue</a:t>
+            </a:r>
+            <a:r>
+              <a:rPr lang="en-US" altLang="ko-KR" sz="1000" dirty="0"/>
+              <a:t>'</a:t>
+            </a:r>
+          </a:p>
+          <a:p>
+            <a:pPr marL="342900" lvl="1" indent="0">
+              <a:lnSpc>
+                <a:spcPct val="50000"/>
+              </a:lnSpc>
+              <a:buNone/>
+            </a:pPr>
+            <a:r>
+              <a:rPr lang="en-US" altLang="ko-KR" sz="1000" dirty="0"/>
+              <a:t>import </a:t>
+            </a:r>
+            <a:r>
+              <a:rPr lang="en-US" altLang="ko-KR" sz="1000" dirty="0" err="1"/>
+              <a:t>AboutView</a:t>
+            </a:r>
+            <a:r>
+              <a:rPr lang="en-US" altLang="ko-KR" sz="1000" dirty="0"/>
+              <a:t> from '@/Views/</a:t>
+            </a:r>
+            <a:r>
+              <a:rPr lang="en-US" altLang="ko-KR" sz="1000" dirty="0" err="1"/>
+              <a:t>AboutView.vue</a:t>
+            </a:r>
+            <a:r>
+              <a:rPr lang="en-US" altLang="ko-KR" sz="1000" dirty="0"/>
+              <a:t>'</a:t>
+            </a:r>
+          </a:p>
+          <a:p>
+            <a:pPr marL="342900" lvl="1" indent="0">
+              <a:lnSpc>
+                <a:spcPct val="50000"/>
+              </a:lnSpc>
+              <a:buNone/>
+            </a:pPr>
+            <a:br>
+              <a:rPr lang="en-US" altLang="ko-KR" sz="1000" dirty="0"/>
+            </a:br>
+            <a:r>
+              <a:rPr lang="en-US" altLang="ko-KR" sz="1000" dirty="0"/>
+              <a:t>const routes = [</a:t>
+            </a:r>
+          </a:p>
+          <a:p>
+            <a:pPr marL="342900" lvl="1" indent="0">
+              <a:lnSpc>
+                <a:spcPct val="50000"/>
+              </a:lnSpc>
+              <a:buNone/>
+            </a:pPr>
+            <a:r>
+              <a:rPr lang="en-US" altLang="ko-KR" sz="1000" dirty="0"/>
+              <a:t>    { path: '</a:t>
+            </a:r>
+            <a:r>
+              <a:rPr lang="en-US" altLang="ko-KR" sz="1000" dirty="0">
+                <a:solidFill>
+                  <a:srgbClr val="FF0000"/>
+                </a:solidFill>
+              </a:rPr>
+              <a:t>/home</a:t>
+            </a:r>
+            <a:r>
+              <a:rPr lang="en-US" altLang="ko-KR" sz="1000" dirty="0"/>
+              <a:t>',  component: </a:t>
+            </a:r>
+            <a:r>
+              <a:rPr lang="en-US" altLang="ko-KR" sz="1000" dirty="0" err="1">
+                <a:solidFill>
+                  <a:srgbClr val="0070C0"/>
+                </a:solidFill>
+              </a:rPr>
+              <a:t>HomeView</a:t>
+            </a:r>
+            <a:r>
+              <a:rPr lang="en-US" altLang="ko-KR" sz="1000" dirty="0"/>
+              <a:t> },</a:t>
+            </a:r>
+          </a:p>
+          <a:p>
+            <a:pPr marL="342900" lvl="1" indent="0">
+              <a:lnSpc>
+                <a:spcPct val="50000"/>
+              </a:lnSpc>
+              <a:buNone/>
+            </a:pPr>
+            <a:r>
+              <a:rPr lang="en-US" altLang="ko-KR" sz="1000" dirty="0"/>
+              <a:t>    { path: '</a:t>
+            </a:r>
+            <a:r>
+              <a:rPr lang="en-US" altLang="ko-KR" sz="1000" dirty="0">
+                <a:solidFill>
+                  <a:srgbClr val="FF0000"/>
+                </a:solidFill>
+              </a:rPr>
+              <a:t>/about</a:t>
+            </a:r>
+            <a:r>
+              <a:rPr lang="en-US" altLang="ko-KR" sz="1000" dirty="0"/>
+              <a:t>', component: </a:t>
+            </a:r>
+            <a:r>
+              <a:rPr lang="en-US" altLang="ko-KR" sz="1000" dirty="0" err="1">
+                <a:solidFill>
+                  <a:srgbClr val="0070C0"/>
+                </a:solidFill>
+              </a:rPr>
+              <a:t>AboutView</a:t>
+            </a:r>
+            <a:r>
+              <a:rPr lang="en-US" altLang="ko-KR" sz="1000" dirty="0"/>
+              <a:t> },</a:t>
+            </a:r>
+          </a:p>
+          <a:p>
+            <a:pPr marL="342900" lvl="1" indent="0">
+              <a:lnSpc>
+                <a:spcPct val="50000"/>
+              </a:lnSpc>
+              <a:buNone/>
+            </a:pPr>
+            <a:r>
+              <a:rPr lang="en-US" altLang="ko-KR" sz="1000" dirty="0"/>
+              <a:t>];</a:t>
+            </a:r>
+          </a:p>
+          <a:p>
+            <a:pPr marL="342900" lvl="1" indent="0">
+              <a:lnSpc>
+                <a:spcPct val="50000"/>
+              </a:lnSpc>
+              <a:buNone/>
+            </a:pPr>
+            <a:br>
+              <a:rPr lang="en-US" altLang="ko-KR" sz="1000" dirty="0"/>
+            </a:br>
+            <a:r>
+              <a:rPr lang="en-US" altLang="ko-KR" sz="1000" dirty="0"/>
+              <a:t>const router = </a:t>
+            </a:r>
+            <a:r>
+              <a:rPr lang="en-US" altLang="ko-KR" sz="1000" dirty="0" err="1"/>
+              <a:t>createRouter</a:t>
+            </a:r>
+            <a:r>
+              <a:rPr lang="en-US" altLang="ko-KR" sz="1000" dirty="0"/>
+              <a:t>({</a:t>
+            </a:r>
+          </a:p>
+          <a:p>
+            <a:pPr marL="342900" lvl="1" indent="0">
+              <a:lnSpc>
+                <a:spcPct val="50000"/>
+              </a:lnSpc>
+              <a:buNone/>
+            </a:pPr>
+            <a:r>
+              <a:rPr lang="en-US" altLang="ko-KR" sz="1000" dirty="0"/>
+              <a:t>        history: </a:t>
+            </a:r>
+            <a:r>
+              <a:rPr lang="en-US" altLang="ko-KR" sz="1000" dirty="0" err="1"/>
+              <a:t>createWebHistory</a:t>
+            </a:r>
+            <a:r>
+              <a:rPr lang="en-US" altLang="ko-KR" sz="1000" dirty="0"/>
+              <a:t>('/'),</a:t>
+            </a:r>
+          </a:p>
+          <a:p>
+            <a:pPr marL="342900" lvl="1" indent="0">
+              <a:lnSpc>
+                <a:spcPct val="50000"/>
+              </a:lnSpc>
+              <a:buNone/>
+            </a:pPr>
+            <a:r>
+              <a:rPr lang="en-US" altLang="ko-KR" sz="1000" dirty="0"/>
+              <a:t>        //history: </a:t>
+            </a:r>
+            <a:r>
+              <a:rPr lang="en-US" altLang="ko-KR" sz="1000" dirty="0" err="1"/>
+              <a:t>createMemoryHistory</a:t>
+            </a:r>
+            <a:r>
+              <a:rPr lang="en-US" altLang="ko-KR" sz="1000" dirty="0"/>
+              <a:t>(),</a:t>
+            </a:r>
+          </a:p>
+          <a:p>
+            <a:pPr marL="342900" lvl="1" indent="0">
+              <a:lnSpc>
+                <a:spcPct val="50000"/>
+              </a:lnSpc>
+              <a:buNone/>
+            </a:pPr>
+            <a:r>
+              <a:rPr lang="en-US" altLang="ko-KR" sz="1000" dirty="0"/>
+              <a:t>        routes</a:t>
+            </a:r>
+          </a:p>
+          <a:p>
+            <a:pPr marL="342900" lvl="1" indent="0">
+              <a:lnSpc>
+                <a:spcPct val="50000"/>
+              </a:lnSpc>
+              <a:buNone/>
+            </a:pPr>
+            <a:r>
+              <a:rPr lang="en-US" altLang="ko-KR" sz="1000" dirty="0"/>
+              <a:t>    }</a:t>
+            </a:r>
+          </a:p>
+          <a:p>
+            <a:pPr marL="342900" lvl="1" indent="0">
+              <a:lnSpc>
+                <a:spcPct val="50000"/>
+              </a:lnSpc>
+              <a:buNone/>
+            </a:pPr>
+            <a:r>
+              <a:rPr lang="en-US" altLang="ko-KR" sz="1000" dirty="0"/>
+              <a:t>);</a:t>
+            </a:r>
+          </a:p>
+          <a:p>
+            <a:pPr marL="342900" lvl="1" indent="0">
+              <a:lnSpc>
+                <a:spcPct val="50000"/>
+              </a:lnSpc>
+              <a:buNone/>
+            </a:pPr>
+            <a:r>
+              <a:rPr lang="en-US" altLang="ko-KR" sz="1000" dirty="0"/>
+              <a:t>export default router;</a:t>
+            </a:r>
+          </a:p>
+          <a:p>
             <a:pPr marL="0" indent="0">
-              <a:buNone/>
-            </a:pPr>
-            <a:r>
-              <a:rPr lang="en-US" altLang="ko-KR" sz="800" dirty="0"/>
-              <a:t>import { </a:t>
-            </a:r>
-            <a:r>
-              <a:rPr lang="en-US" altLang="ko-KR" sz="800" dirty="0" err="1"/>
-              <a:t>createRouter</a:t>
-            </a:r>
-            <a:r>
-              <a:rPr lang="en-US" altLang="ko-KR" sz="800" dirty="0"/>
-              <a:t>, </a:t>
-            </a:r>
-            <a:r>
-              <a:rPr lang="en-US" altLang="ko-KR" sz="800" dirty="0" err="1"/>
-              <a:t>createWebHistory</a:t>
-            </a:r>
-            <a:r>
-              <a:rPr lang="en-US" altLang="ko-KR" sz="800" dirty="0"/>
-              <a:t>, </a:t>
-            </a:r>
-            <a:r>
-              <a:rPr lang="en-US" altLang="ko-KR" sz="800" dirty="0" err="1"/>
-              <a:t>createMemoryHistory</a:t>
-            </a:r>
-            <a:r>
-              <a:rPr lang="en-US" altLang="ko-KR" sz="800" dirty="0"/>
-              <a:t>} from '</a:t>
-            </a:r>
-            <a:r>
-              <a:rPr lang="en-US" altLang="ko-KR" sz="800" dirty="0" err="1"/>
-              <a:t>vue</a:t>
-            </a:r>
-            <a:r>
-              <a:rPr lang="en-US" altLang="ko-KR" sz="800" dirty="0"/>
-              <a:t>-router'</a:t>
+              <a:lnSpc>
+                <a:spcPct val="50000"/>
+              </a:lnSpc>
+              <a:buNone/>
+            </a:pPr>
+            <a:r>
+              <a:rPr lang="en-US" altLang="ko-KR" sz="1000" dirty="0"/>
+              <a:t>}</a:t>
             </a:r>
           </a:p>
           <a:p>
             <a:pPr marL="0" indent="0">
-              <a:buNone/>
-            </a:pPr>
-            <a:r>
-              <a:rPr lang="en-US" altLang="ko-KR" sz="800" dirty="0"/>
-              <a:t>import </a:t>
-            </a:r>
-            <a:r>
-              <a:rPr lang="en-US" altLang="ko-KR" sz="800" dirty="0" err="1"/>
-              <a:t>HomeView</a:t>
-            </a:r>
-            <a:r>
-              <a:rPr lang="en-US" altLang="ko-KR" sz="800" dirty="0"/>
-              <a:t> from '@/Views/</a:t>
-            </a:r>
-            <a:r>
-              <a:rPr lang="en-US" altLang="ko-KR" sz="800" dirty="0" err="1"/>
-              <a:t>HomeView.vue</a:t>
-            </a:r>
-            <a:r>
-              <a:rPr lang="en-US" altLang="ko-KR" sz="800" dirty="0"/>
-              <a:t>'</a:t>
-            </a:r>
+              <a:lnSpc>
+                <a:spcPct val="50000"/>
+              </a:lnSpc>
+              <a:buNone/>
+            </a:pPr>
+            <a:endParaRPr lang="en-US" altLang="ko-KR" sz="1000" dirty="0"/>
           </a:p>
           <a:p>
             <a:pPr marL="0" indent="0">
-              <a:buNone/>
-            </a:pPr>
-            <a:r>
-              <a:rPr lang="en-US" altLang="ko-KR" sz="800" dirty="0"/>
-              <a:t>import </a:t>
-            </a:r>
-            <a:r>
-              <a:rPr lang="en-US" altLang="ko-KR" sz="800" dirty="0" err="1"/>
-              <a:t>MonitorView</a:t>
-            </a:r>
-            <a:r>
-              <a:rPr lang="en-US" altLang="ko-KR" sz="800" dirty="0"/>
-              <a:t> from '@/Views/</a:t>
-            </a:r>
-            <a:r>
-              <a:rPr lang="en-US" altLang="ko-KR" sz="800" dirty="0" err="1"/>
-              <a:t>MonitorView.vue</a:t>
-            </a:r>
-            <a:r>
-              <a:rPr lang="en-US" altLang="ko-KR" sz="800" dirty="0"/>
-              <a:t>'</a:t>
-            </a:r>
+              <a:lnSpc>
+                <a:spcPct val="50000"/>
+              </a:lnSpc>
+              <a:buNone/>
+            </a:pPr>
+            <a:r>
+              <a:rPr lang="en-US" altLang="ko-KR" sz="1000" dirty="0" err="1"/>
+              <a:t>App.vue</a:t>
+            </a:r>
+            <a:endParaRPr lang="en-US" altLang="ko-KR" sz="1000" dirty="0"/>
           </a:p>
           <a:p>
             <a:pPr marL="0" indent="0">
-              <a:buNone/>
-            </a:pPr>
-            <a:r>
-              <a:rPr lang="en-US" altLang="ko-KR" sz="800" dirty="0"/>
-              <a:t>import </a:t>
-            </a:r>
-            <a:r>
-              <a:rPr lang="en-US" altLang="ko-KR" sz="800" dirty="0" err="1"/>
-              <a:t>ControlView</a:t>
-            </a:r>
-            <a:r>
-              <a:rPr lang="en-US" altLang="ko-KR" sz="800" dirty="0"/>
-              <a:t> from '@/Views/</a:t>
-            </a:r>
-            <a:r>
-              <a:rPr lang="en-US" altLang="ko-KR" sz="800" dirty="0" err="1"/>
-              <a:t>ControlView.vue</a:t>
-            </a:r>
-            <a:r>
-              <a:rPr lang="en-US" altLang="ko-KR" sz="800" dirty="0"/>
-              <a:t>'</a:t>
+              <a:lnSpc>
+                <a:spcPct val="50000"/>
+              </a:lnSpc>
+              <a:buNone/>
+            </a:pPr>
+            <a:r>
+              <a:rPr lang="en-US" altLang="ko-KR" sz="1000" dirty="0"/>
+              <a:t>{</a:t>
+            </a:r>
+          </a:p>
+          <a:p>
+            <a:pPr marL="342900" lvl="1" indent="0">
+              <a:lnSpc>
+                <a:spcPct val="50000"/>
+              </a:lnSpc>
+              <a:buNone/>
+            </a:pPr>
+            <a:r>
+              <a:rPr lang="en-US" altLang="ko-KR" sz="1000" dirty="0"/>
+              <a:t>&lt;template&gt;</a:t>
+            </a:r>
+          </a:p>
+          <a:p>
+            <a:pPr marL="342900" lvl="1" indent="0">
+              <a:lnSpc>
+                <a:spcPct val="50000"/>
+              </a:lnSpc>
+              <a:buNone/>
+            </a:pPr>
+            <a:r>
+              <a:rPr lang="en-US" altLang="ko-KR" sz="1000" dirty="0"/>
+              <a:t>  &lt;p&gt; </a:t>
+            </a:r>
+            <a:r>
+              <a:rPr lang="en-US" altLang="ko-KR" sz="1000" dirty="0">
+                <a:solidFill>
+                  <a:srgbClr val="0070C0"/>
+                </a:solidFill>
+              </a:rPr>
+              <a:t>{{ $</a:t>
+            </a:r>
+            <a:r>
+              <a:rPr lang="en-US" altLang="ko-KR" sz="1000" dirty="0" err="1">
+                <a:solidFill>
+                  <a:srgbClr val="0070C0"/>
+                </a:solidFill>
+              </a:rPr>
+              <a:t>route.fullPath</a:t>
+            </a:r>
+            <a:r>
+              <a:rPr lang="en-US" altLang="ko-KR" sz="1000" dirty="0">
+                <a:solidFill>
+                  <a:srgbClr val="0070C0"/>
+                </a:solidFill>
+              </a:rPr>
+              <a:t> }}</a:t>
+            </a:r>
+            <a:r>
+              <a:rPr lang="en-US" altLang="ko-KR" sz="1000" dirty="0"/>
+              <a:t>&lt;/p&gt;  </a:t>
+            </a:r>
+          </a:p>
+          <a:p>
+            <a:pPr marL="342900" lvl="1" indent="0">
+              <a:lnSpc>
+                <a:spcPct val="50000"/>
+              </a:lnSpc>
+              <a:buNone/>
+            </a:pPr>
+            <a:r>
+              <a:rPr lang="en-US" altLang="ko-KR" sz="1000" dirty="0"/>
+              <a:t>    &lt;</a:t>
+            </a:r>
+            <a:r>
+              <a:rPr lang="en-US" altLang="ko-KR" sz="1000" dirty="0" err="1">
+                <a:solidFill>
+                  <a:srgbClr val="FF0000"/>
+                </a:solidFill>
+              </a:rPr>
+              <a:t>RouterLink</a:t>
+            </a:r>
+            <a:r>
+              <a:rPr lang="en-US" altLang="ko-KR" sz="1000" dirty="0"/>
+              <a:t> to="/"&gt;Home&lt;/</a:t>
+            </a:r>
+            <a:r>
+              <a:rPr lang="en-US" altLang="ko-KR" sz="1000" dirty="0" err="1">
+                <a:solidFill>
+                  <a:srgbClr val="FF0000"/>
+                </a:solidFill>
+              </a:rPr>
+              <a:t>RouterLink</a:t>
+            </a:r>
+            <a:r>
+              <a:rPr lang="en-US" altLang="ko-KR" sz="1000" dirty="0"/>
+              <a:t>&gt;</a:t>
+            </a:r>
+          </a:p>
+          <a:p>
+            <a:pPr marL="342900" lvl="1" indent="0">
+              <a:lnSpc>
+                <a:spcPct val="50000"/>
+              </a:lnSpc>
+              <a:buNone/>
+            </a:pPr>
+            <a:r>
+              <a:rPr lang="en-US" altLang="ko-KR" sz="1000" dirty="0"/>
+              <a:t>    &lt;</a:t>
+            </a:r>
+            <a:r>
+              <a:rPr lang="en-US" altLang="ko-KR" sz="1000" dirty="0" err="1">
+                <a:solidFill>
+                  <a:srgbClr val="FF0000"/>
+                </a:solidFill>
+              </a:rPr>
+              <a:t>RouterLink</a:t>
+            </a:r>
+            <a:r>
+              <a:rPr lang="en-US" altLang="ko-KR" sz="1000" dirty="0"/>
+              <a:t> to="/about"&gt;About&lt;/</a:t>
+            </a:r>
+            <a:r>
+              <a:rPr lang="en-US" altLang="ko-KR" sz="1000" dirty="0" err="1">
+                <a:solidFill>
+                  <a:srgbClr val="FF0000"/>
+                </a:solidFill>
+              </a:rPr>
+              <a:t>RouterLink</a:t>
+            </a:r>
+            <a:r>
+              <a:rPr lang="en-US" altLang="ko-KR" sz="1000" dirty="0"/>
+              <a:t>&gt;</a:t>
+            </a:r>
+          </a:p>
+          <a:p>
+            <a:pPr marL="342900" lvl="1" indent="0">
+              <a:lnSpc>
+                <a:spcPct val="50000"/>
+              </a:lnSpc>
+              <a:buNone/>
+            </a:pPr>
+            <a:r>
+              <a:rPr lang="en-US" altLang="ko-KR" sz="1000" dirty="0"/>
+              <a:t>  &lt;</a:t>
+            </a:r>
+            <a:r>
+              <a:rPr lang="en-US" altLang="ko-KR" sz="1000" dirty="0" err="1">
+                <a:solidFill>
+                  <a:srgbClr val="FF0000"/>
+                </a:solidFill>
+              </a:rPr>
+              <a:t>RouterView</a:t>
+            </a:r>
+            <a:r>
+              <a:rPr lang="en-US" altLang="ko-KR" sz="1000" dirty="0"/>
+              <a:t> /&gt;</a:t>
+            </a:r>
+          </a:p>
+          <a:p>
+            <a:pPr marL="342900" lvl="1" indent="0">
+              <a:lnSpc>
+                <a:spcPct val="50000"/>
+              </a:lnSpc>
+              <a:buNone/>
+            </a:pPr>
+            <a:r>
+              <a:rPr lang="en-US" altLang="ko-KR" sz="1000" dirty="0"/>
+              <a:t>&lt;/template&gt;</a:t>
             </a:r>
           </a:p>
           <a:p>
             <a:pPr marL="0" indent="0">
-              <a:buNone/>
-            </a:pPr>
-            <a:r>
-              <a:rPr lang="en-US" altLang="ko-KR" sz="800" dirty="0"/>
-              <a:t>import </a:t>
-            </a:r>
-            <a:r>
-              <a:rPr lang="en-US" altLang="ko-KR" sz="800" dirty="0" err="1"/>
-              <a:t>AboutView</a:t>
-            </a:r>
-            <a:r>
-              <a:rPr lang="en-US" altLang="ko-KR" sz="800" dirty="0"/>
-              <a:t> from '@/Views/</a:t>
-            </a:r>
-            <a:r>
-              <a:rPr lang="en-US" altLang="ko-KR" sz="800" dirty="0" err="1"/>
-              <a:t>AboutView.vue</a:t>
-            </a:r>
-            <a:r>
-              <a:rPr lang="en-US" altLang="ko-KR" sz="800" dirty="0"/>
-              <a:t>'</a:t>
+              <a:lnSpc>
+                <a:spcPct val="50000"/>
+              </a:lnSpc>
+              <a:buNone/>
+            </a:pPr>
+            <a:r>
+              <a:rPr lang="en-US" altLang="ko-KR" sz="1000" dirty="0"/>
+              <a:t>}</a:t>
             </a:r>
           </a:p>
           <a:p>
             <a:pPr marL="0" indent="0">
-              <a:buNone/>
-            </a:pPr>
+              <a:lnSpc>
+                <a:spcPct val="50000"/>
+              </a:lnSpc>
+              <a:buNone/>
+            </a:pPr>
+            <a:endParaRPr lang="en-US" altLang="ko-KR" sz="1000" dirty="0"/>
+          </a:p>
+          <a:p>
+            <a:pPr marL="0" indent="0">
+              <a:lnSpc>
+                <a:spcPct val="50000"/>
+              </a:lnSpc>
+              <a:buNone/>
+            </a:pPr>
+            <a:r>
+              <a:rPr lang="en-US" altLang="ko-KR" sz="1000" dirty="0"/>
+              <a:t>main.js</a:t>
+            </a:r>
+          </a:p>
+          <a:p>
+            <a:pPr marL="0" indent="0">
+              <a:lnSpc>
+                <a:spcPct val="50000"/>
+              </a:lnSpc>
+              <a:buNone/>
+            </a:pPr>
+            <a:r>
+              <a:rPr lang="en-US" altLang="ko-KR" sz="1000" dirty="0"/>
+              <a:t>{</a:t>
+            </a:r>
+          </a:p>
+          <a:p>
+            <a:pPr marL="342900" lvl="1" indent="0">
+              <a:lnSpc>
+                <a:spcPct val="50000"/>
+              </a:lnSpc>
+              <a:buNone/>
+            </a:pPr>
+            <a:r>
+              <a:rPr lang="fr-FR" altLang="ko-KR" sz="1000" dirty="0"/>
+              <a:t>// vue-router</a:t>
+            </a:r>
+          </a:p>
+          <a:p>
+            <a:pPr marL="342900" lvl="1" indent="0">
+              <a:lnSpc>
+                <a:spcPct val="50000"/>
+              </a:lnSpc>
+              <a:buNone/>
+            </a:pPr>
+            <a:r>
+              <a:rPr lang="fr-FR" altLang="ko-KR" sz="1000" dirty="0"/>
+              <a:t>import router from '@/router/index.js'</a:t>
+            </a:r>
             <a:br>
-              <a:rPr lang="en-US" altLang="ko-KR" sz="800" dirty="0"/>
+              <a:rPr lang="fr-FR" altLang="ko-KR" sz="1000" dirty="0"/>
             </a:br>
-            <a:endParaRPr lang="en-US" altLang="ko-KR" sz="800" dirty="0"/>
+            <a:endParaRPr lang="fr-FR" altLang="ko-KR" sz="1000" dirty="0"/>
+          </a:p>
+          <a:p>
+            <a:pPr marL="342900" lvl="1" indent="0">
+              <a:lnSpc>
+                <a:spcPct val="50000"/>
+              </a:lnSpc>
+              <a:buNone/>
+            </a:pPr>
+            <a:r>
+              <a:rPr lang="fr-FR" altLang="ko-KR" sz="1000" dirty="0"/>
+              <a:t>createApp(App).</a:t>
+            </a:r>
+            <a:r>
+              <a:rPr lang="fr-FR" altLang="ko-KR" sz="1000" dirty="0">
+                <a:solidFill>
+                  <a:srgbClr val="FF0000"/>
+                </a:solidFill>
+              </a:rPr>
+              <a:t>use(router)</a:t>
+            </a:r>
+            <a:r>
+              <a:rPr lang="fr-FR" altLang="ko-KR" sz="1000" dirty="0"/>
+              <a:t>.mount('#app')</a:t>
+            </a:r>
+            <a:endParaRPr lang="en-US" altLang="ko-KR" sz="1000" dirty="0"/>
           </a:p>
           <a:p>
             <a:pPr marL="0" indent="0">
-              <a:buNone/>
-            </a:pPr>
-            <a:r>
-              <a:rPr lang="en-US" altLang="ko-KR" sz="800" dirty="0"/>
-              <a:t>const routes = [</a:t>
-            </a:r>
-          </a:p>
-          <a:p>
-            <a:pPr marL="0" indent="0">
-              <a:buNone/>
-            </a:pPr>
-            <a:r>
-              <a:rPr lang="en-US" altLang="ko-KR" sz="800" dirty="0"/>
-              <a:t>    { path: '/home',  component: </a:t>
-            </a:r>
-            <a:r>
-              <a:rPr lang="en-US" altLang="ko-KR" sz="800" dirty="0" err="1"/>
-              <a:t>HomeView</a:t>
-            </a:r>
-            <a:r>
-              <a:rPr lang="en-US" altLang="ko-KR" sz="800" dirty="0"/>
-              <a:t> },</a:t>
-            </a:r>
-          </a:p>
-          <a:p>
-            <a:pPr marL="0" indent="0">
-              <a:buNone/>
-            </a:pPr>
-            <a:r>
-              <a:rPr lang="en-US" altLang="ko-KR" sz="800" dirty="0"/>
-              <a:t>    { path: '/</a:t>
-            </a:r>
-            <a:r>
-              <a:rPr lang="en-US" altLang="ko-KR" sz="800" dirty="0" err="1"/>
-              <a:t>moniter</a:t>
-            </a:r>
-            <a:r>
-              <a:rPr lang="en-US" altLang="ko-KR" sz="800" dirty="0"/>
-              <a:t>',  component: </a:t>
-            </a:r>
-            <a:r>
-              <a:rPr lang="en-US" altLang="ko-KR" sz="800" dirty="0" err="1"/>
-              <a:t>MoniterView</a:t>
-            </a:r>
-            <a:r>
-              <a:rPr lang="en-US" altLang="ko-KR" sz="800" dirty="0"/>
-              <a:t> },</a:t>
-            </a:r>
-          </a:p>
-          <a:p>
-            <a:pPr marL="0" indent="0">
-              <a:buNone/>
-            </a:pPr>
-            <a:r>
-              <a:rPr lang="en-US" altLang="ko-KR" sz="800" dirty="0"/>
-              <a:t>    { path: '/control',  component: </a:t>
-            </a:r>
-            <a:r>
-              <a:rPr lang="en-US" altLang="ko-KR" sz="800" dirty="0" err="1"/>
-              <a:t>ControlView</a:t>
-            </a:r>
-            <a:r>
-              <a:rPr lang="en-US" altLang="ko-KR" sz="800" dirty="0"/>
-              <a:t> },</a:t>
-            </a:r>
-          </a:p>
-          <a:p>
-            <a:pPr marL="0" indent="0">
-              <a:buNone/>
-            </a:pPr>
-            <a:r>
-              <a:rPr lang="en-US" altLang="ko-KR" sz="800" dirty="0"/>
-              <a:t>    { path: '/about', component: </a:t>
-            </a:r>
-            <a:r>
-              <a:rPr lang="en-US" altLang="ko-KR" sz="800" dirty="0" err="1"/>
-              <a:t>AboutView</a:t>
-            </a:r>
-            <a:r>
-              <a:rPr lang="en-US" altLang="ko-KR" sz="800" dirty="0"/>
-              <a:t> },</a:t>
-            </a:r>
-          </a:p>
-          <a:p>
-            <a:pPr marL="0" indent="0">
-              <a:buNone/>
-            </a:pPr>
-            <a:r>
-              <a:rPr lang="en-US" altLang="ko-KR" sz="800" dirty="0"/>
-              <a:t>];</a:t>
-            </a:r>
-          </a:p>
-          <a:p>
-            <a:pPr marL="0" indent="0">
-              <a:buNone/>
-            </a:pPr>
-            <a:br>
-              <a:rPr lang="en-US" altLang="ko-KR" sz="800" dirty="0"/>
-            </a:br>
-            <a:endParaRPr lang="en-US" altLang="ko-KR" sz="800" dirty="0"/>
-          </a:p>
-          <a:p>
-            <a:pPr marL="0" indent="0">
-              <a:buNone/>
-            </a:pPr>
-            <a:r>
-              <a:rPr lang="en-US" altLang="ko-KR" sz="800" dirty="0"/>
-              <a:t>const router = </a:t>
-            </a:r>
-            <a:r>
-              <a:rPr lang="en-US" altLang="ko-KR" sz="800" dirty="0" err="1"/>
-              <a:t>createRouter</a:t>
-            </a:r>
-            <a:r>
-              <a:rPr lang="en-US" altLang="ko-KR" sz="800" dirty="0"/>
-              <a:t>({</a:t>
-            </a:r>
-          </a:p>
-          <a:p>
-            <a:pPr marL="0" indent="0">
-              <a:buNone/>
-            </a:pPr>
-            <a:r>
-              <a:rPr lang="en-US" altLang="ko-KR" sz="800" dirty="0"/>
-              <a:t>        history: </a:t>
-            </a:r>
-            <a:r>
-              <a:rPr lang="en-US" altLang="ko-KR" sz="800" dirty="0" err="1"/>
-              <a:t>createWebHistory</a:t>
-            </a:r>
-            <a:r>
-              <a:rPr lang="en-US" altLang="ko-KR" sz="800" dirty="0"/>
-              <a:t>('/'),</a:t>
-            </a:r>
-          </a:p>
-          <a:p>
-            <a:pPr marL="0" indent="0">
-              <a:buNone/>
-            </a:pPr>
-            <a:r>
-              <a:rPr lang="en-US" altLang="ko-KR" sz="800" dirty="0"/>
-              <a:t>        //history: </a:t>
-            </a:r>
-            <a:r>
-              <a:rPr lang="en-US" altLang="ko-KR" sz="800" dirty="0" err="1"/>
-              <a:t>createMemoryHistory</a:t>
-            </a:r>
-            <a:r>
-              <a:rPr lang="en-US" altLang="ko-KR" sz="800" dirty="0"/>
-              <a:t>(),</a:t>
-            </a:r>
-          </a:p>
-          <a:p>
-            <a:pPr marL="0" indent="0">
-              <a:buNone/>
-            </a:pPr>
-            <a:r>
-              <a:rPr lang="en-US" altLang="ko-KR" sz="800" dirty="0"/>
-              <a:t>        routes</a:t>
-            </a:r>
-          </a:p>
-          <a:p>
-            <a:pPr marL="0" indent="0">
-              <a:buNone/>
-            </a:pPr>
-            <a:r>
-              <a:rPr lang="en-US" altLang="ko-KR" sz="800" dirty="0"/>
-              <a:t>    }</a:t>
-            </a:r>
-          </a:p>
-          <a:p>
-            <a:pPr marL="0" indent="0">
-              <a:buNone/>
-            </a:pPr>
-            <a:r>
-              <a:rPr lang="en-US" altLang="ko-KR" sz="800" dirty="0"/>
-              <a:t>);</a:t>
-            </a:r>
-          </a:p>
-          <a:p>
-            <a:pPr marL="0" indent="0">
-              <a:buNone/>
-            </a:pPr>
-            <a:br>
-              <a:rPr lang="en-US" altLang="ko-KR" sz="800" dirty="0"/>
-            </a:br>
-            <a:endParaRPr lang="en-US" altLang="ko-KR" sz="800" dirty="0"/>
-          </a:p>
-          <a:p>
-            <a:pPr marL="0" indent="0">
-              <a:buNone/>
-            </a:pPr>
-            <a:r>
-              <a:rPr lang="en-US" altLang="ko-KR" sz="800" dirty="0"/>
-              <a:t>export default router;</a:t>
-            </a:r>
+              <a:lnSpc>
+                <a:spcPct val="50000"/>
+              </a:lnSpc>
+              <a:buNone/>
+            </a:pPr>
+            <a:r>
+              <a:rPr lang="en-US" altLang="ko-KR" sz="1000" dirty="0"/>
+              <a:t>}</a:t>
+            </a:r>
+            <a:endParaRPr lang="ko-KR" altLang="en-US" sz="1000" dirty="0"/>
           </a:p>
         </p:txBody>
       </p:sp>
     </p:spTree>
     <p:extLst>
       <p:ext uri="{BB962C8B-B14F-4D97-AF65-F5344CB8AC3E}">
-        <p14:creationId xmlns:p14="http://schemas.microsoft.com/office/powerpoint/2010/main" val="3651663899"/>
+        <p14:creationId xmlns:p14="http://schemas.microsoft.com/office/powerpoint/2010/main" val="2359618191"/>
+      </p:ext>
+    </p:extLst>
+  </p:cSld>
+  <p:clrMapOvr>
+    <a:masterClrMapping/>
+  </p:clrMapOvr>
+</p:sld>
+</file>
+
+<file path=ppt/slides/slide6.xml><?xml version="1.0" encoding="utf-8"?>
+<p:sld xmlns:a="http://schemas.openxmlformats.org/drawingml/2006/main" xmlns:r="http://schemas.openxmlformats.org/officeDocument/2006/relationships" xmlns:p="http://schemas.openxmlformats.org/presentationml/2006/main">
+  <p:cSld>
+    <p:spTree>
+      <p:nvGrpSpPr>
+        <p:cNvPr id="1" name=""/>
+        <p:cNvGrpSpPr/>
+        <p:nvPr/>
+      </p:nvGrpSpPr>
+      <p:grpSpPr>
+        <a:xfrm>
+          <a:off x="0" y="0"/>
+          <a:ext cx="0" cy="0"/>
+          <a:chOff x="0" y="0"/>
+          <a:chExt cx="0" cy="0"/>
+        </a:xfrm>
+      </p:grpSpPr>
+      <p:sp>
+        <p:nvSpPr>
+          <p:cNvPr id="2" name="제목 1">
+            <a:extLst>
+              <a:ext uri="{FF2B5EF4-FFF2-40B4-BE49-F238E27FC236}">
+                <a16:creationId xmlns:a16="http://schemas.microsoft.com/office/drawing/2014/main" id="{EFBFC305-4B5A-94B8-A925-D0F01F378E60}"/>
+              </a:ext>
+            </a:extLst>
+          </p:cNvPr>
+          <p:cNvSpPr>
+            <a:spLocks noGrp="1"/>
+          </p:cNvSpPr>
+          <p:nvPr>
+            <p:ph type="title"/>
+          </p:nvPr>
+        </p:nvSpPr>
+        <p:spPr/>
+        <p:txBody>
+          <a:bodyPr/>
+          <a:lstStyle/>
+          <a:p>
+            <a:r>
+              <a:rPr lang="en-US" altLang="ko-KR" dirty="0" err="1"/>
+              <a:t>dotenv</a:t>
+            </a:r>
+            <a:endParaRPr lang="ko-KR" altLang="en-US" dirty="0"/>
+          </a:p>
+        </p:txBody>
+      </p:sp>
+      <p:sp>
+        <p:nvSpPr>
+          <p:cNvPr id="3" name="내용 개체 틀 2">
+            <a:extLst>
+              <a:ext uri="{FF2B5EF4-FFF2-40B4-BE49-F238E27FC236}">
+                <a16:creationId xmlns:a16="http://schemas.microsoft.com/office/drawing/2014/main" id="{C7322994-9217-D1F4-418D-534CC52C9BFF}"/>
+              </a:ext>
+            </a:extLst>
+          </p:cNvPr>
+          <p:cNvSpPr>
+            <a:spLocks noGrp="1"/>
+          </p:cNvSpPr>
+          <p:nvPr>
+            <p:ph idx="1"/>
+          </p:nvPr>
+        </p:nvSpPr>
+        <p:spPr/>
+        <p:txBody>
+          <a:bodyPr/>
+          <a:lstStyle/>
+          <a:p>
+            <a:pPr marL="0" indent="0">
+              <a:buNone/>
+            </a:pPr>
+            <a:r>
+              <a:rPr lang="en-US" altLang="ko-KR" dirty="0"/>
+              <a:t>/.env</a:t>
+            </a:r>
+          </a:p>
+          <a:p>
+            <a:pPr marL="0" indent="0">
+              <a:buNone/>
+            </a:pPr>
+            <a:r>
+              <a:rPr lang="en-US" altLang="ko-KR" dirty="0"/>
+              <a:t>{</a:t>
+            </a:r>
+          </a:p>
+          <a:p>
+            <a:pPr marL="0" indent="0">
+              <a:buNone/>
+            </a:pPr>
+            <a:r>
+              <a:rPr lang="en-US" altLang="ko-KR" dirty="0"/>
+              <a:t>	</a:t>
+            </a:r>
+            <a:r>
+              <a:rPr lang="en-US" altLang="ko-KR" dirty="0">
+                <a:solidFill>
+                  <a:srgbClr val="FF0000"/>
+                </a:solidFill>
+              </a:rPr>
+              <a:t>$</a:t>
+            </a:r>
+            <a:r>
+              <a:rPr lang="ko-KR" altLang="en-US" dirty="0">
+                <a:solidFill>
+                  <a:srgbClr val="FF0000"/>
+                </a:solidFill>
+              </a:rPr>
+              <a:t>키</a:t>
+            </a:r>
+            <a:r>
+              <a:rPr lang="en-US" altLang="ko-KR" dirty="0"/>
+              <a:t>=</a:t>
+            </a:r>
+            <a:r>
+              <a:rPr lang="ko-KR" altLang="en-US" dirty="0">
+                <a:solidFill>
+                  <a:srgbClr val="0070C0"/>
+                </a:solidFill>
+              </a:rPr>
+              <a:t>값</a:t>
+            </a:r>
+            <a:endParaRPr lang="en-US" altLang="ko-KR" dirty="0">
+              <a:solidFill>
+                <a:srgbClr val="0070C0"/>
+              </a:solidFill>
+            </a:endParaRPr>
+          </a:p>
+          <a:p>
+            <a:pPr marL="0" indent="0">
+              <a:buNone/>
+            </a:pPr>
+            <a:r>
+              <a:rPr lang="en-US" altLang="ko-KR" dirty="0"/>
+              <a:t>}</a:t>
+            </a:r>
+          </a:p>
+          <a:p>
+            <a:pPr marL="0" indent="0">
+              <a:buNone/>
+            </a:pPr>
+            <a:endParaRPr lang="en-US" altLang="ko-KR" dirty="0"/>
+          </a:p>
+          <a:p>
+            <a:pPr marL="0" indent="0">
+              <a:buNone/>
+            </a:pPr>
+            <a:r>
+              <a:rPr lang="en-US" altLang="ko-KR" dirty="0"/>
+              <a:t>console.log( </a:t>
+            </a:r>
+            <a:r>
+              <a:rPr lang="en-US" altLang="ko-KR" dirty="0" err="1"/>
+              <a:t>process.env</a:t>
+            </a:r>
+            <a:r>
+              <a:rPr lang="en-US" altLang="ko-KR" dirty="0"/>
+              <a:t>.</a:t>
+            </a:r>
+            <a:r>
+              <a:rPr lang="en-US" altLang="ko-KR" dirty="0">
+                <a:solidFill>
+                  <a:srgbClr val="FF0000"/>
+                </a:solidFill>
+              </a:rPr>
+              <a:t>$</a:t>
+            </a:r>
+            <a:r>
+              <a:rPr lang="ko-KR" altLang="en-US" dirty="0">
+                <a:solidFill>
+                  <a:srgbClr val="FF0000"/>
+                </a:solidFill>
+              </a:rPr>
+              <a:t>키</a:t>
+            </a:r>
+            <a:r>
+              <a:rPr lang="en-US" altLang="ko-KR" dirty="0">
+                <a:solidFill>
+                  <a:srgbClr val="FF0000"/>
+                </a:solidFill>
+              </a:rPr>
+              <a:t> </a:t>
+            </a:r>
+            <a:r>
+              <a:rPr lang="en-US" altLang="ko-KR" dirty="0"/>
+              <a:t>);</a:t>
+            </a:r>
+          </a:p>
+          <a:p>
+            <a:pPr marL="0" indent="0">
+              <a:buNone/>
+            </a:pPr>
+            <a:endParaRPr lang="en-US" altLang="ko-KR" dirty="0"/>
+          </a:p>
+        </p:txBody>
+      </p:sp>
+    </p:spTree>
+    <p:extLst>
+      <p:ext uri="{BB962C8B-B14F-4D97-AF65-F5344CB8AC3E}">
+        <p14:creationId xmlns:p14="http://schemas.microsoft.com/office/powerpoint/2010/main" val="3078939797"/>
+      </p:ext>
+    </p:extLst>
+  </p:cSld>
+  <p:clrMapOvr>
+    <a:masterClrMapping/>
+  </p:clrMapOvr>
+</p:sld>
+</file>
+
+<file path=ppt/slides/slide7.xml><?xml version="1.0" encoding="utf-8"?>
+<p:sld xmlns:a="http://schemas.openxmlformats.org/drawingml/2006/main" xmlns:r="http://schemas.openxmlformats.org/officeDocument/2006/relationships" xmlns:p="http://schemas.openxmlformats.org/presentationml/2006/main">
+  <p:cSld>
+    <p:spTree>
+      <p:nvGrpSpPr>
+        <p:cNvPr id="1" name=""/>
+        <p:cNvGrpSpPr/>
+        <p:nvPr/>
+      </p:nvGrpSpPr>
+      <p:grpSpPr>
+        <a:xfrm>
+          <a:off x="0" y="0"/>
+          <a:ext cx="0" cy="0"/>
+          <a:chOff x="0" y="0"/>
+          <a:chExt cx="0" cy="0"/>
+        </a:xfrm>
+      </p:grpSpPr>
+      <p:sp>
+        <p:nvSpPr>
+          <p:cNvPr id="2" name="제목 1">
+            <a:extLst>
+              <a:ext uri="{FF2B5EF4-FFF2-40B4-BE49-F238E27FC236}">
+                <a16:creationId xmlns:a16="http://schemas.microsoft.com/office/drawing/2014/main" id="{A621E84C-8DB4-8B94-9170-25F1E16D45E1}"/>
+              </a:ext>
+            </a:extLst>
+          </p:cNvPr>
+          <p:cNvSpPr>
+            <a:spLocks noGrp="1"/>
+          </p:cNvSpPr>
+          <p:nvPr>
+            <p:ph type="title"/>
+          </p:nvPr>
+        </p:nvSpPr>
+        <p:spPr/>
+        <p:txBody>
+          <a:bodyPr/>
+          <a:lstStyle/>
+          <a:p>
+            <a:r>
+              <a:rPr lang="en-US" altLang="ko-KR" dirty="0" err="1"/>
+              <a:t>kakao</a:t>
+            </a:r>
+            <a:r>
+              <a:rPr lang="en-US" altLang="ko-KR" dirty="0"/>
+              <a:t>(</a:t>
+            </a:r>
+            <a:r>
+              <a:rPr lang="ko-KR" altLang="en-US" dirty="0"/>
+              <a:t>작업중</a:t>
+            </a:r>
+            <a:r>
+              <a:rPr lang="en-US" altLang="ko-KR" dirty="0"/>
+              <a:t>)</a:t>
+            </a:r>
+            <a:endParaRPr lang="ko-KR" altLang="en-US" dirty="0"/>
+          </a:p>
+        </p:txBody>
+      </p:sp>
+      <p:sp>
+        <p:nvSpPr>
+          <p:cNvPr id="3" name="내용 개체 틀 2">
+            <a:extLst>
+              <a:ext uri="{FF2B5EF4-FFF2-40B4-BE49-F238E27FC236}">
+                <a16:creationId xmlns:a16="http://schemas.microsoft.com/office/drawing/2014/main" id="{859B6F44-24D5-B6AE-B9A2-74329FD28E5E}"/>
+              </a:ext>
+            </a:extLst>
+          </p:cNvPr>
+          <p:cNvSpPr>
+            <a:spLocks noGrp="1"/>
+          </p:cNvSpPr>
+          <p:nvPr>
+            <p:ph idx="1"/>
+          </p:nvPr>
+        </p:nvSpPr>
+        <p:spPr/>
+        <p:txBody>
+          <a:bodyPr/>
+          <a:lstStyle/>
+          <a:p>
+            <a:r>
+              <a:rPr lang="en-US" altLang="ko-KR" dirty="0"/>
+              <a:t>$ </a:t>
+            </a:r>
+            <a:r>
+              <a:rPr lang="en-US" altLang="ko-KR" dirty="0" err="1"/>
+              <a:t>npm</a:t>
+            </a:r>
+            <a:r>
+              <a:rPr lang="en-US" altLang="ko-KR" dirty="0"/>
+              <a:t> install </a:t>
+            </a:r>
+            <a:r>
+              <a:rPr lang="en-US" altLang="ko-KR" dirty="0" err="1"/>
+              <a:t>vue-kakao-sdk</a:t>
+            </a:r>
+            <a:endParaRPr lang="ko-KR" altLang="en-US" dirty="0"/>
+          </a:p>
+        </p:txBody>
+      </p:sp>
+    </p:spTree>
+    <p:extLst>
+      <p:ext uri="{BB962C8B-B14F-4D97-AF65-F5344CB8AC3E}">
+        <p14:creationId xmlns:p14="http://schemas.microsoft.com/office/powerpoint/2010/main" val="859526064"/>
       </p:ext>
     </p:extLst>
   </p:cSld>

--- a/doc/개발환경_설치매뉴얼(Vue.JS).pptx
+++ b/doc/개발환경_설치매뉴얼(Vue.JS).pptx
@@ -4006,7 +4006,7 @@
                   <a:srgbClr val="FF0000"/>
                 </a:solidFill>
               </a:rPr>
-              <a:t>/home</a:t>
+              <a:t>/</a:t>
             </a:r>
             <a:r>
               <a:rPr lang="en-US" altLang="ko-KR" sz="1000" dirty="0"/>
@@ -4042,6 +4042,42 @@
                   <a:srgbClr val="FF0000"/>
                 </a:solidFill>
               </a:rPr>
+              <a:t>/home</a:t>
+            </a:r>
+            <a:r>
+              <a:rPr lang="en-US" altLang="ko-KR" sz="1000" dirty="0"/>
+              <a:t>',  component: </a:t>
+            </a:r>
+            <a:r>
+              <a:rPr lang="en-US" altLang="ko-KR" sz="1000" dirty="0" err="1">
+                <a:solidFill>
+                  <a:srgbClr val="0070C0"/>
+                </a:solidFill>
+              </a:rPr>
+              <a:t>HomeView</a:t>
+            </a:r>
+            <a:r>
+              <a:rPr lang="en-US" altLang="ko-KR" sz="1000" dirty="0"/>
+              <a:t> },</a:t>
+            </a:r>
+          </a:p>
+          <a:p>
+            <a:pPr marL="342900" lvl="1" indent="0">
+              <a:lnSpc>
+                <a:spcPct val="50000"/>
+              </a:lnSpc>
+              <a:buNone/>
+            </a:pPr>
+            <a:r>
+              <a:rPr lang="en-US" altLang="ko-KR" sz="1000" dirty="0"/>
+              <a:t>    { path: '</a:t>
+            </a:r>
+            <a:r>
+              <a:rPr lang="en-US" altLang="ko-KR" sz="1000" dirty="0">
+                <a:solidFill>
+                  <a:srgbClr val="FF0000"/>
+                </a:solidFill>
+              </a:rPr>
               <a:t>/about</a:t>
             </a:r>
             <a:r>
@@ -4145,7 +4181,7 @@
             </a:pPr>
             <a:r>
               <a:rPr lang="en-US" altLang="ko-KR" sz="1000" dirty="0"/>
-              <a:t>        routes</a:t>
+              <a:t>        routes,</a:t>
             </a:r>
           </a:p>
           <a:p>
@@ -4157,7 +4193,7 @@
             </a:pPr>
             <a:r>
               <a:rPr lang="en-US" altLang="ko-KR" sz="1000" dirty="0"/>
-              <a:t>    }</a:t>
+              <a:t>    });</a:t>
             </a:r>
           </a:p>
           <a:p>
@@ -4167,10 +4203,7 @@
               </a:lnSpc>
               <a:buNone/>
             </a:pPr>
-            <a:r>
-              <a:rPr lang="en-US" altLang="ko-KR" sz="1000" dirty="0"/>
-              <a:t>);</a:t>
-            </a:r>
+            <a:endParaRPr lang="en-US" altLang="ko-KR" sz="1000" dirty="0"/>
           </a:p>
           <a:p>
             <a:pPr marL="342900" lvl="1" indent="0">
@@ -4303,7 +4336,7 @@
             </a:r>
             <a:r>
               <a:rPr lang="en-US" altLang="ko-KR" sz="1000" dirty="0"/>
-              <a:t> to="/"&gt;Home&lt;/</a:t>
+              <a:t> to=‘/’&gt;Home&lt;/</a:t>
             </a:r>
             <a:r>
               <a:rPr lang="en-US" altLang="ko-KR" sz="1000" dirty="0" err="1">
@@ -4339,7 +4372,7 @@
             </a:r>
             <a:r>
               <a:rPr lang="en-US" altLang="ko-KR" sz="1000" dirty="0"/>
-              <a:t> to="/about"&gt;About&lt;/</a:t>
+              <a:t> to=‘/about’&gt;About&lt;/</a:t>
             </a:r>
             <a:r>
               <a:rPr lang="en-US" altLang="ko-KR" sz="1000" dirty="0" err="1">
@@ -4362,6 +4395,59 @@
               <a:buNone/>
             </a:pPr>
             <a:r>
+              <a:rPr lang="it-IT" altLang="ko-KR" sz="1000" dirty="0">
+                <a:solidFill>
+                  <a:schemeClr val="accent5"/>
+                </a:solidFill>
+              </a:rPr>
+              <a:t>    &lt;button @click="this.$router.push('control')"&gt;sd&lt;/button&gt;</a:t>
+            </a:r>
+            <a:endParaRPr lang="en-US" altLang="ko-KR" sz="1000" dirty="0">
+              <a:solidFill>
+                <a:schemeClr val="accent5"/>
+              </a:solidFill>
+            </a:endParaRPr>
+          </a:p>
+          <a:p>
+            <a:pPr marL="342900" lvl="1" indent="0">
+              <a:lnSpc>
+                <a:spcPct val="50000"/>
+              </a:lnSpc>
+              <a:buNone/>
+            </a:pPr>
+            <a:r>
+              <a:rPr lang="en-US" altLang="ko-KR" sz="1000" dirty="0">
+                <a:solidFill>
+                  <a:srgbClr val="00B050"/>
+                </a:solidFill>
+              </a:rPr>
+              <a:t>    &lt;button</a:t>
+            </a:r>
+            <a:r>
+              <a:rPr lang="ko-KR" altLang="en-US" sz="1000" dirty="0">
+                <a:solidFill>
+                  <a:srgbClr val="00B050"/>
+                </a:solidFill>
+              </a:rPr>
+              <a:t> </a:t>
+            </a:r>
+            <a:r>
+              <a:rPr lang="en-US" altLang="ko-KR" sz="1000" dirty="0">
+                <a:solidFill>
+                  <a:srgbClr val="00B050"/>
+                </a:solidFill>
+              </a:rPr>
+              <a:t>@click=“GoMenu(‘/home’)”&gt;</a:t>
+            </a:r>
+          </a:p>
+          <a:p>
+            <a:pPr marL="342900" lvl="1" indent="0">
+              <a:lnSpc>
+                <a:spcPct val="50000"/>
+              </a:lnSpc>
+              <a:buNone/>
+            </a:pPr>
+            <a:r>
               <a:rPr lang="en-US" altLang="ko-KR" sz="1000" dirty="0"/>
               <a:t>  &lt;</a:t>
             </a:r>
@@ -4391,6 +4477,223 @@
             </a:r>
           </a:p>
           <a:p>
+            <a:pPr marL="342900" lvl="1" indent="0">
+              <a:lnSpc>
+                <a:spcPct val="50000"/>
+              </a:lnSpc>
+              <a:buNone/>
+            </a:pPr>
+            <a:endParaRPr lang="en-US" altLang="ko-KR" sz="1000" dirty="0"/>
+          </a:p>
+          <a:p>
+            <a:pPr marL="342900" lvl="1" indent="0">
+              <a:lnSpc>
+                <a:spcPct val="50000"/>
+              </a:lnSpc>
+              <a:buNone/>
+            </a:pPr>
+            <a:r>
+              <a:rPr lang="en-US" altLang="ko-KR" sz="1000" dirty="0">
+                <a:solidFill>
+                  <a:srgbClr val="00B050"/>
+                </a:solidFill>
+              </a:rPr>
+              <a:t>&lt;script&gt;</a:t>
+            </a:r>
+          </a:p>
+          <a:p>
+            <a:pPr marL="342900" lvl="1" indent="0">
+              <a:lnSpc>
+                <a:spcPct val="50000"/>
+              </a:lnSpc>
+              <a:buNone/>
+            </a:pPr>
+            <a:r>
+              <a:rPr lang="en-US" altLang="ko-KR" sz="1000" dirty="0">
+                <a:solidFill>
+                  <a:srgbClr val="00B050"/>
+                </a:solidFill>
+              </a:rPr>
+              <a:t>export default</a:t>
+            </a:r>
+          </a:p>
+          <a:p>
+            <a:pPr marL="342900" lvl="1" indent="0">
+              <a:lnSpc>
+                <a:spcPct val="50000"/>
+              </a:lnSpc>
+              <a:buNone/>
+            </a:pPr>
+            <a:r>
+              <a:rPr lang="en-US" altLang="ko-KR" sz="1000" dirty="0">
+                <a:solidFill>
+                  <a:srgbClr val="00B050"/>
+                </a:solidFill>
+              </a:rPr>
+              <a:t>{</a:t>
+            </a:r>
+          </a:p>
+          <a:p>
+            <a:pPr marL="342900" lvl="1" indent="0">
+              <a:lnSpc>
+                <a:spcPct val="50000"/>
+              </a:lnSpc>
+              <a:buNone/>
+            </a:pPr>
+            <a:r>
+              <a:rPr lang="en-US" altLang="ko-KR" sz="1000" dirty="0">
+                <a:solidFill>
+                  <a:srgbClr val="00B050"/>
+                </a:solidFill>
+              </a:rPr>
+              <a:t>	methods: {</a:t>
+            </a:r>
+          </a:p>
+          <a:p>
+            <a:pPr marL="342900" lvl="1" indent="0">
+              <a:lnSpc>
+                <a:spcPct val="50000"/>
+              </a:lnSpc>
+              <a:buNone/>
+            </a:pPr>
+            <a:r>
+              <a:rPr lang="en-US" altLang="ko-KR" sz="1000" dirty="0">
+                <a:solidFill>
+                  <a:srgbClr val="00B050"/>
+                </a:solidFill>
+              </a:rPr>
+              <a:t>	    </a:t>
+            </a:r>
+            <a:r>
+              <a:rPr lang="en-US" altLang="ko-KR" sz="1000" dirty="0" err="1">
+                <a:solidFill>
+                  <a:srgbClr val="00B050"/>
+                </a:solidFill>
+              </a:rPr>
+              <a:t>GoMenu</a:t>
+            </a:r>
+            <a:r>
+              <a:rPr lang="en-US" altLang="ko-KR" sz="1000" dirty="0">
+                <a:solidFill>
+                  <a:srgbClr val="00B050"/>
+                </a:solidFill>
+              </a:rPr>
+              <a:t>(path)</a:t>
+            </a:r>
+          </a:p>
+          <a:p>
+            <a:pPr marL="342900" lvl="1" indent="0">
+              <a:lnSpc>
+                <a:spcPct val="50000"/>
+              </a:lnSpc>
+              <a:buNone/>
+            </a:pPr>
+            <a:r>
+              <a:rPr lang="en-US" altLang="ko-KR" sz="1000" dirty="0">
+                <a:solidFill>
+                  <a:srgbClr val="00B050"/>
+                </a:solidFill>
+              </a:rPr>
+              <a:t>	    {</a:t>
+            </a:r>
+          </a:p>
+          <a:p>
+            <a:pPr marL="342900" lvl="1" indent="0">
+              <a:lnSpc>
+                <a:spcPct val="50000"/>
+              </a:lnSpc>
+              <a:buNone/>
+            </a:pPr>
+            <a:r>
+              <a:rPr lang="en-US" altLang="ko-KR" sz="1000" dirty="0">
+                <a:solidFill>
+                  <a:srgbClr val="00B050"/>
+                </a:solidFill>
+              </a:rPr>
+              <a:t>	        this.$</a:t>
+            </a:r>
+            <a:r>
+              <a:rPr lang="en-US" altLang="ko-KR" sz="1000" dirty="0" err="1">
+                <a:solidFill>
+                  <a:srgbClr val="00B050"/>
+                </a:solidFill>
+              </a:rPr>
+              <a:t>router.push</a:t>
+            </a:r>
+            <a:r>
+              <a:rPr lang="en-US" altLang="ko-KR" sz="1000" dirty="0">
+                <a:solidFill>
+                  <a:srgbClr val="00B050"/>
+                </a:solidFill>
+              </a:rPr>
+              <a:t>(path);</a:t>
+            </a:r>
+          </a:p>
+          <a:p>
+            <a:pPr marL="342900" lvl="1" indent="0">
+              <a:lnSpc>
+                <a:spcPct val="50000"/>
+              </a:lnSpc>
+              <a:buNone/>
+            </a:pPr>
+            <a:r>
+              <a:rPr lang="en-US" altLang="ko-KR" sz="1000" dirty="0">
+                <a:solidFill>
+                  <a:srgbClr val="00B050"/>
+                </a:solidFill>
+              </a:rPr>
+              <a:t>	    }</a:t>
+            </a:r>
+          </a:p>
+          <a:p>
+            <a:pPr marL="342900" lvl="1" indent="0">
+              <a:lnSpc>
+                <a:spcPct val="50000"/>
+              </a:lnSpc>
+              <a:buNone/>
+            </a:pPr>
+            <a:r>
+              <a:rPr lang="en-US" altLang="ko-KR" sz="1000" dirty="0">
+                <a:solidFill>
+                  <a:srgbClr val="00B050"/>
+                </a:solidFill>
+              </a:rPr>
+              <a:t>	}</a:t>
+            </a:r>
+          </a:p>
+          <a:p>
+            <a:pPr marL="342900" lvl="1" indent="0">
+              <a:lnSpc>
+                <a:spcPct val="50000"/>
+              </a:lnSpc>
+              <a:buNone/>
+            </a:pPr>
+            <a:r>
+              <a:rPr lang="en-US" altLang="ko-KR" sz="1000" dirty="0">
+                <a:solidFill>
+                  <a:srgbClr val="00B050"/>
+                </a:solidFill>
+              </a:rPr>
+              <a:t>}</a:t>
+            </a:r>
+          </a:p>
+          <a:p>
+            <a:pPr marL="342900" lvl="1" indent="0">
+              <a:lnSpc>
+                <a:spcPct val="50000"/>
+              </a:lnSpc>
+              <a:buNone/>
+            </a:pPr>
+            <a:r>
+              <a:rPr lang="en-US" altLang="ko-KR" sz="1000" dirty="0">
+                <a:solidFill>
+                  <a:srgbClr val="00B050"/>
+                </a:solidFill>
+              </a:rPr>
+              <a:t>&lt;/script&gt;</a:t>
+            </a:r>
+          </a:p>
+          <a:p>
             <a:pPr marL="0" indent="0">
               <a:lnSpc>
                 <a:spcPct val="50000"/>
@@ -4456,12 +4759,34 @@
             </a:pPr>
             <a:r>
               <a:rPr lang="fr-FR" altLang="ko-KR" sz="1000" dirty="0"/>
-              <a:t>import router from '@/router/index.js'</a:t>
+              <a:t>import router from '@/router/index.js’    </a:t>
+            </a:r>
+            <a:r>
+              <a:rPr lang="fr-FR" altLang="ko-KR" sz="1000" dirty="0">
+                <a:solidFill>
+                  <a:schemeClr val="bg1">
+                    <a:lumMod val="65000"/>
+                  </a:schemeClr>
+                </a:solidFill>
+              </a:rPr>
+              <a:t>// import router from '@/router'</a:t>
             </a:r>
             <a:br>
-              <a:rPr lang="fr-FR" altLang="ko-KR" sz="1000" dirty="0"/>
+              <a:rPr lang="fr-FR" altLang="ko-KR" sz="1000" dirty="0">
+                <a:solidFill>
+                  <a:schemeClr val="bg1">
+                    <a:lumMod val="65000"/>
+                  </a:schemeClr>
+                </a:solidFill>
+              </a:rPr>
             </a:br>
-            <a:endParaRPr lang="fr-FR" altLang="ko-KR" sz="1000" dirty="0"/>
+            <a:endParaRPr lang="fr-FR" altLang="ko-KR" sz="1000" dirty="0">
+              <a:solidFill>
+                <a:schemeClr val="bg1">
+                  <a:lumMod val="65000"/>
+                </a:schemeClr>
+              </a:solidFill>
+            </a:endParaRPr>
           </a:p>
           <a:p>
             <a:pPr marL="342900" lvl="1" indent="0">

--- a/doc/개발환경_설치매뉴얼(Vue.JS).pptx
+++ b/doc/개발환경_설치매뉴얼(Vue.JS).pptx
@@ -9,9 +9,10 @@
     <p:sldId id="277" r:id="rId3"/>
     <p:sldId id="278" r:id="rId4"/>
     <p:sldId id="283" r:id="rId5"/>
-    <p:sldId id="279" r:id="rId6"/>
-    <p:sldId id="282" r:id="rId7"/>
-    <p:sldId id="281" r:id="rId8"/>
+    <p:sldId id="284" r:id="rId6"/>
+    <p:sldId id="279" r:id="rId7"/>
+    <p:sldId id="282" r:id="rId8"/>
+    <p:sldId id="281" r:id="rId9"/>
   </p:sldIdLst>
   <p:sldSz cx="6858000" cy="12192000"/>
   <p:notesSz cx="6858000" cy="9144000"/>
@@ -117,12 +118,9 @@
           <p14:sldIdLst>
             <p14:sldId id="256"/>
             <p14:sldId id="277"/>
-          </p14:sldIdLst>
-        </p14:section>
-        <p14:section name="제목 없는 구역" id="{53E5FD2C-994F-4CFF-8214-B8896DC0A73D}">
-          <p14:sldIdLst>
             <p14:sldId id="278"/>
             <p14:sldId id="283"/>
+            <p14:sldId id="284"/>
             <p14:sldId id="279"/>
             <p14:sldId id="282"/>
             <p14:sldId id="281"/>
@@ -268,7 +266,7 @@
           <a:p>
             <a:fld id="{7359EE32-49FD-4EA7-9011-353EB936649F}" type="datetimeFigureOut">
               <a:rPr lang="ko-KR" altLang="en-US" smtClean="0"/>
-              <a:t>2025-09-07</a:t>
+              <a:t>2025-09-08</a:t>
             </a:fld>
             <a:endParaRPr lang="ko-KR" altLang="en-US"/>
           </a:p>
@@ -438,7 +436,7 @@
           <a:p>
             <a:fld id="{7359EE32-49FD-4EA7-9011-353EB936649F}" type="datetimeFigureOut">
               <a:rPr lang="ko-KR" altLang="en-US" smtClean="0"/>
-              <a:t>2025-09-07</a:t>
+              <a:t>2025-09-08</a:t>
             </a:fld>
             <a:endParaRPr lang="ko-KR" altLang="en-US"/>
           </a:p>
@@ -618,7 +616,7 @@
           <a:p>
             <a:fld id="{7359EE32-49FD-4EA7-9011-353EB936649F}" type="datetimeFigureOut">
               <a:rPr lang="ko-KR" altLang="en-US" smtClean="0"/>
-              <a:t>2025-09-07</a:t>
+              <a:t>2025-09-08</a:t>
             </a:fld>
             <a:endParaRPr lang="ko-KR" altLang="en-US"/>
           </a:p>
@@ -788,7 +786,7 @@
           <a:p>
             <a:fld id="{7359EE32-49FD-4EA7-9011-353EB936649F}" type="datetimeFigureOut">
               <a:rPr lang="ko-KR" altLang="en-US" smtClean="0"/>
-              <a:t>2025-09-07</a:t>
+              <a:t>2025-09-08</a:t>
             </a:fld>
             <a:endParaRPr lang="ko-KR" altLang="en-US"/>
           </a:p>
@@ -1034,7 +1032,7 @@
           <a:p>
             <a:fld id="{7359EE32-49FD-4EA7-9011-353EB936649F}" type="datetimeFigureOut">
               <a:rPr lang="ko-KR" altLang="en-US" smtClean="0"/>
-              <a:t>2025-09-07</a:t>
+              <a:t>2025-09-08</a:t>
             </a:fld>
             <a:endParaRPr lang="ko-KR" altLang="en-US"/>
           </a:p>
@@ -1266,7 +1264,7 @@
           <a:p>
             <a:fld id="{7359EE32-49FD-4EA7-9011-353EB936649F}" type="datetimeFigureOut">
               <a:rPr lang="ko-KR" altLang="en-US" smtClean="0"/>
-              <a:t>2025-09-07</a:t>
+              <a:t>2025-09-08</a:t>
             </a:fld>
             <a:endParaRPr lang="ko-KR" altLang="en-US"/>
           </a:p>
@@ -1633,7 +1631,7 @@
           <a:p>
             <a:fld id="{7359EE32-49FD-4EA7-9011-353EB936649F}" type="datetimeFigureOut">
               <a:rPr lang="ko-KR" altLang="en-US" smtClean="0"/>
-              <a:t>2025-09-07</a:t>
+              <a:t>2025-09-08</a:t>
             </a:fld>
             <a:endParaRPr lang="ko-KR" altLang="en-US"/>
           </a:p>
@@ -1751,7 +1749,7 @@
           <a:p>
             <a:fld id="{7359EE32-49FD-4EA7-9011-353EB936649F}" type="datetimeFigureOut">
               <a:rPr lang="ko-KR" altLang="en-US" smtClean="0"/>
-              <a:t>2025-09-07</a:t>
+              <a:t>2025-09-08</a:t>
             </a:fld>
             <a:endParaRPr lang="ko-KR" altLang="en-US"/>
           </a:p>
@@ -1846,7 +1844,7 @@
           <a:p>
             <a:fld id="{7359EE32-49FD-4EA7-9011-353EB936649F}" type="datetimeFigureOut">
               <a:rPr lang="ko-KR" altLang="en-US" smtClean="0"/>
-              <a:t>2025-09-07</a:t>
+              <a:t>2025-09-08</a:t>
             </a:fld>
             <a:endParaRPr lang="ko-KR" altLang="en-US"/>
           </a:p>
@@ -2123,7 +2121,7 @@
           <a:p>
             <a:fld id="{7359EE32-49FD-4EA7-9011-353EB936649F}" type="datetimeFigureOut">
               <a:rPr lang="ko-KR" altLang="en-US" smtClean="0"/>
-              <a:t>2025-09-07</a:t>
+              <a:t>2025-09-08</a:t>
             </a:fld>
             <a:endParaRPr lang="ko-KR" altLang="en-US"/>
           </a:p>
@@ -2380,7 +2378,7 @@
           <a:p>
             <a:fld id="{7359EE32-49FD-4EA7-9011-353EB936649F}" type="datetimeFigureOut">
               <a:rPr lang="ko-KR" altLang="en-US" smtClean="0"/>
-              <a:t>2025-09-07</a:t>
+              <a:t>2025-09-08</a:t>
             </a:fld>
             <a:endParaRPr lang="ko-KR" altLang="en-US"/>
           </a:p>
@@ -2593,7 +2591,7 @@
           <a:p>
             <a:fld id="{7359EE32-49FD-4EA7-9011-353EB936649F}" type="datetimeFigureOut">
               <a:rPr lang="ko-KR" altLang="en-US" smtClean="0"/>
-              <a:t>2025-09-07</a:t>
+              <a:t>2025-09-08</a:t>
             </a:fld>
             <a:endParaRPr lang="ko-KR" altLang="en-US"/>
           </a:p>
@@ -3748,7 +3746,7 @@
           <p:cNvPr id="2" name="제목 1">
             <a:extLst>
               <a:ext uri="{FF2B5EF4-FFF2-40B4-BE49-F238E27FC236}">
-                <a16:creationId xmlns:a16="http://schemas.microsoft.com/office/drawing/2014/main" id="{E372DB09-F1A5-0E9C-EE6B-14ABB7F9AF85}"/>
+                <a16:creationId xmlns:a16="http://schemas.microsoft.com/office/drawing/2014/main" id="{D0290395-1D88-E6A8-5431-9F884B33694B}"/>
               </a:ext>
             </a:extLst>
           </p:cNvPr>
@@ -3766,34 +3764,7 @@
           <a:p>
             <a:r>
               <a:rPr lang="en-US" altLang="ko-KR" dirty="0"/>
-              <a:t>Vue Router</a:t>
-            </a:r>
-            <a:br>
-              <a:rPr lang="en-US" altLang="ko-KR" dirty="0"/>
-            </a:br>
-            <a:r>
-              <a:rPr lang="en-US" altLang="ko-KR" dirty="0"/>
-              <a:t>(&gt;</a:t>
-            </a:r>
-            <a:r>
-              <a:rPr lang="en-US" altLang="ko-KR" sz="3600" dirty="0"/>
-              <a:t> </a:t>
-            </a:r>
-            <a:r>
-              <a:rPr lang="en-US" altLang="ko-KR" sz="3600" dirty="0" err="1"/>
-              <a:t>npm</a:t>
-            </a:r>
-            <a:r>
-              <a:rPr lang="en-US" altLang="ko-KR" sz="3600" dirty="0"/>
-              <a:t> install </a:t>
-            </a:r>
-            <a:r>
-              <a:rPr lang="en-US" altLang="ko-KR" sz="3600" dirty="0" err="1"/>
-              <a:t>vue</a:t>
-            </a:r>
-            <a:r>
-              <a:rPr lang="en-US" altLang="ko-KR" sz="3600" dirty="0"/>
-              <a:t>-router)</a:t>
+              <a:t>Vue Base</a:t>
             </a:r>
             <a:endParaRPr lang="ko-KR" altLang="en-US" dirty="0"/>
           </a:p>
@@ -3804,7 +3775,7 @@
           <p:cNvPr id="3" name="내용 개체 틀 2">
             <a:extLst>
               <a:ext uri="{FF2B5EF4-FFF2-40B4-BE49-F238E27FC236}">
-                <a16:creationId xmlns:a16="http://schemas.microsoft.com/office/drawing/2014/main" id="{885DABAA-E41B-E3AC-B623-601A614B581B}"/>
+                <a16:creationId xmlns:a16="http://schemas.microsoft.com/office/drawing/2014/main" id="{3A3D22AC-52FF-092B-5DD8-37AA02A16B33}"/>
               </a:ext>
             </a:extLst>
           </p:cNvPr>
@@ -3818,1020 +3789,356 @@
         <p:spPr/>
         <p:txBody>
           <a:bodyPr>
-            <a:noAutofit/>
+            <a:normAutofit fontScale="62500" lnSpcReduction="20000"/>
           </a:bodyPr>
           <a:lstStyle/>
           <a:p>
             <a:pPr marL="0" indent="0">
-              <a:lnSpc>
-                <a:spcPct val="50000"/>
-              </a:lnSpc>
-              <a:buNone/>
-            </a:pPr>
-            <a:endParaRPr lang="en-US" altLang="ko-KR" sz="1000" dirty="0"/>
-          </a:p>
-          <a:p>
-            <a:pPr marL="0" indent="0">
-              <a:lnSpc>
-                <a:spcPct val="50000"/>
-              </a:lnSpc>
-              <a:buNone/>
-            </a:pPr>
-            <a:r>
-              <a:rPr lang="en-US" altLang="ko-KR" sz="1000" dirty="0"/>
-              <a:t>router/index.js</a:t>
-            </a:r>
-          </a:p>
-          <a:p>
-            <a:pPr marL="0" indent="0">
-              <a:lnSpc>
-                <a:spcPct val="50000"/>
-              </a:lnSpc>
-              <a:buNone/>
-            </a:pPr>
-            <a:r>
-              <a:rPr lang="en-US" altLang="ko-KR" sz="1000" dirty="0"/>
-              <a:t>{</a:t>
-            </a:r>
-          </a:p>
-          <a:p>
-            <a:pPr marL="342900" lvl="1" indent="0">
-              <a:lnSpc>
-                <a:spcPct val="50000"/>
-              </a:lnSpc>
-              <a:buNone/>
-            </a:pPr>
-            <a:r>
-              <a:rPr lang="en-US" altLang="ko-KR" sz="1000" dirty="0"/>
-              <a:t>/* </a:t>
-            </a:r>
-            <a:r>
-              <a:rPr lang="en-US" altLang="ko-KR" sz="1000" dirty="0" err="1"/>
-              <a:t>eslint</a:t>
-            </a:r>
-            <a:r>
-              <a:rPr lang="en-US" altLang="ko-KR" sz="1000" dirty="0"/>
-              <a:t>-disable no-unused-vars */</a:t>
-            </a:r>
-          </a:p>
-          <a:p>
-            <a:pPr marL="342900" lvl="1" indent="0">
-              <a:lnSpc>
-                <a:spcPct val="50000"/>
-              </a:lnSpc>
-              <a:buNone/>
-            </a:pPr>
-            <a:r>
-              <a:rPr lang="en-US" altLang="ko-KR" sz="1000" dirty="0"/>
+              <a:buNone/>
+            </a:pPr>
+            <a:r>
+              <a:rPr lang="en-US" altLang="ko-KR" dirty="0"/>
+              <a:t>&lt;template&gt;</a:t>
+            </a:r>
+          </a:p>
+          <a:p>
+            <a:pPr marL="0" indent="0">
+              <a:buNone/>
+            </a:pPr>
+            <a:r>
+              <a:rPr lang="en-US" altLang="ko-KR" dirty="0"/>
+              <a:t>    &lt;div&gt;</a:t>
+            </a:r>
+          </a:p>
+          <a:p>
+            <a:pPr marL="0" indent="0">
+              <a:buNone/>
+            </a:pPr>
+            <a:r>
+              <a:rPr lang="en-US" altLang="ko-KR" dirty="0"/>
+              <a:t>    &lt;/div&gt;</a:t>
+            </a:r>
+          </a:p>
+          <a:p>
+            <a:pPr marL="0" indent="0">
+              <a:buNone/>
+            </a:pPr>
+            <a:r>
+              <a:rPr lang="en-US" altLang="ko-KR" dirty="0"/>
+              <a:t>&lt;/template&gt;</a:t>
+            </a:r>
+          </a:p>
+          <a:p>
+            <a:pPr marL="0" indent="0">
+              <a:buNone/>
+            </a:pPr>
+            <a:br>
+              <a:rPr lang="en-US" altLang="ko-KR" dirty="0"/>
+            </a:br>
+            <a:endParaRPr lang="en-US" altLang="ko-KR" dirty="0"/>
+          </a:p>
+          <a:p>
+            <a:pPr marL="0" indent="0">
+              <a:buNone/>
+            </a:pPr>
+            <a:r>
+              <a:rPr lang="en-US" altLang="ko-KR" dirty="0"/>
+              <a:t>//Composition </a:t>
+            </a:r>
+            <a:r>
+              <a:rPr lang="ko-KR" altLang="en-US" dirty="0"/>
+              <a:t>스타일</a:t>
+            </a:r>
+            <a:endParaRPr lang="en-US" altLang="ko-KR" dirty="0"/>
+          </a:p>
+          <a:p>
+            <a:pPr marL="0" indent="0">
+              <a:buNone/>
+            </a:pPr>
+            <a:r>
+              <a:rPr lang="en-US" altLang="ko-KR" dirty="0"/>
+              <a:t>&lt;script setup&gt;</a:t>
+            </a:r>
+          </a:p>
+          <a:p>
+            <a:pPr marL="0" indent="0">
+              <a:buNone/>
+            </a:pPr>
+            <a:r>
+              <a:rPr lang="en-US" altLang="ko-KR" dirty="0"/>
               <a:t>import { </a:t>
             </a:r>
             <a:r>
-              <a:rPr lang="en-US" altLang="ko-KR" sz="1000" dirty="0" err="1"/>
-              <a:t>createRouter</a:t>
-            </a:r>
-            <a:r>
-              <a:rPr lang="en-US" altLang="ko-KR" sz="1000" dirty="0"/>
-              <a:t>, </a:t>
-            </a:r>
-            <a:r>
-              <a:rPr lang="en-US" altLang="ko-KR" sz="1000" dirty="0" err="1"/>
-              <a:t>createWebHistory</a:t>
-            </a:r>
-            <a:r>
-              <a:rPr lang="en-US" altLang="ko-KR" sz="1000" dirty="0"/>
-              <a:t>, </a:t>
-            </a:r>
-            <a:r>
-              <a:rPr lang="en-US" altLang="ko-KR" sz="1000" dirty="0" err="1"/>
-              <a:t>createMemoryHistory</a:t>
-            </a:r>
-            <a:r>
-              <a:rPr lang="en-US" altLang="ko-KR" sz="1000" dirty="0"/>
-              <a:t>} from '</a:t>
-            </a:r>
-            <a:r>
-              <a:rPr lang="en-US" altLang="ko-KR" sz="1000" dirty="0" err="1"/>
+              <a:rPr lang="en-US" altLang="ko-KR" dirty="0" err="1"/>
+              <a:t>onMounted</a:t>
+            </a:r>
+            <a:r>
+              <a:rPr lang="en-US" altLang="ko-KR" dirty="0"/>
+              <a:t> , inject } from ‘</a:t>
+            </a:r>
+            <a:r>
+              <a:rPr lang="en-US" altLang="ko-KR" dirty="0" err="1"/>
               <a:t>vue</a:t>
             </a:r>
             <a:r>
-              <a:rPr lang="en-US" altLang="ko-KR" sz="1000" dirty="0"/>
-              <a:t>-router'</a:t>
-            </a:r>
-          </a:p>
-          <a:p>
-            <a:pPr marL="342900" lvl="1" indent="0">
-              <a:lnSpc>
-                <a:spcPct val="50000"/>
-              </a:lnSpc>
-              <a:buNone/>
-            </a:pPr>
-            <a:r>
-              <a:rPr lang="en-US" altLang="ko-KR" sz="1000" dirty="0"/>
-              <a:t>import </a:t>
-            </a:r>
-            <a:r>
-              <a:rPr lang="en-US" altLang="ko-KR" sz="1000" dirty="0" err="1"/>
-              <a:t>HomeView</a:t>
-            </a:r>
-            <a:r>
-              <a:rPr lang="en-US" altLang="ko-KR" sz="1000" dirty="0"/>
-              <a:t> from '@/Views/</a:t>
-            </a:r>
-            <a:r>
-              <a:rPr lang="en-US" altLang="ko-KR" sz="1000" dirty="0" err="1"/>
-              <a:t>HomeView.vue</a:t>
-            </a:r>
-            <a:r>
-              <a:rPr lang="en-US" altLang="ko-KR" sz="1000" dirty="0"/>
+              <a:rPr lang="en-US" altLang="ko-KR" dirty="0"/>
+              <a:t>’;</a:t>
+            </a:r>
+          </a:p>
+          <a:p>
+            <a:pPr marL="0" indent="0">
+              <a:buNone/>
+            </a:pPr>
+            <a:endParaRPr lang="en-US" altLang="ko-KR" dirty="0"/>
+          </a:p>
+          <a:p>
+            <a:pPr marL="0" indent="0">
+              <a:buNone/>
+            </a:pPr>
+            <a:r>
+              <a:rPr lang="en-US" altLang="ko-KR" dirty="0" err="1"/>
+              <a:t>onMounted</a:t>
+            </a:r>
+            <a:r>
+              <a:rPr lang="en-US" altLang="ko-KR" dirty="0"/>
+              <a:t>(() =&gt; {</a:t>
+            </a:r>
+          </a:p>
+          <a:p>
+            <a:pPr marL="0" indent="0">
+              <a:buNone/>
+            </a:pPr>
+            <a:r>
+              <a:rPr lang="en-US" altLang="ko-KR" dirty="0"/>
+              <a:t>    console.log(`</a:t>
+            </a:r>
+            <a:r>
+              <a:rPr lang="ko-KR" altLang="en-US" dirty="0"/>
+              <a:t>프로그램 시작</a:t>
+            </a:r>
+            <a:r>
+              <a:rPr lang="en-US" altLang="ko-KR" dirty="0"/>
+              <a:t>! (${inject(‘$title’})`);</a:t>
+            </a:r>
+          </a:p>
+          <a:p>
+            <a:pPr marL="0" indent="0">
+              <a:buNone/>
+            </a:pPr>
+            <a:r>
+              <a:rPr lang="en-US" altLang="ko-KR" dirty="0"/>
+              <a:t>});</a:t>
+            </a:r>
+            <a:br>
+              <a:rPr lang="en-US" altLang="ko-KR" dirty="0"/>
+            </a:br>
+            <a:r>
+              <a:rPr lang="en-US" altLang="ko-KR" dirty="0"/>
+              <a:t>&lt;/script&gt;</a:t>
+            </a:r>
+          </a:p>
+          <a:p>
+            <a:pPr marL="0" indent="0">
+              <a:buNone/>
+            </a:pPr>
+            <a:endParaRPr lang="en-US" altLang="ko-KR" dirty="0"/>
+          </a:p>
+          <a:p>
+            <a:pPr marL="0" indent="0">
+              <a:buNone/>
+            </a:pPr>
+            <a:r>
+              <a:rPr lang="en-US" altLang="ko-KR" dirty="0"/>
+              <a:t>//Options </a:t>
+            </a:r>
+            <a:r>
+              <a:rPr lang="ko-KR" altLang="en-US" dirty="0"/>
+              <a:t>스타일</a:t>
+            </a:r>
+            <a:endParaRPr lang="en-US" altLang="ko-KR" dirty="0"/>
+          </a:p>
+          <a:p>
+            <a:pPr marL="0" indent="0">
+              <a:buNone/>
+            </a:pPr>
+            <a:r>
+              <a:rPr lang="en-US" altLang="ko-KR" dirty="0"/>
+              <a:t>&lt;script&gt;</a:t>
+            </a:r>
+          </a:p>
+          <a:p>
+            <a:pPr marL="0" indent="0">
+              <a:buNone/>
+            </a:pPr>
+            <a:r>
+              <a:rPr lang="en-US" altLang="ko-KR" dirty="0"/>
+              <a:t>import Header from './layouts/</a:t>
+            </a:r>
+            <a:r>
+              <a:rPr lang="en-US" altLang="ko-KR" dirty="0" err="1"/>
+              <a:t>Header.vue</a:t>
+            </a:r>
+            <a:r>
+              <a:rPr lang="en-US" altLang="ko-KR" dirty="0"/>
               <a:t>'</a:t>
             </a:r>
           </a:p>
           <a:p>
-            <a:pPr marL="342900" lvl="1" indent="0">
-              <a:lnSpc>
-                <a:spcPct val="50000"/>
-              </a:lnSpc>
-              <a:buNone/>
-            </a:pPr>
-            <a:r>
-              <a:rPr lang="en-US" altLang="ko-KR" sz="1000" dirty="0"/>
-              <a:t>import </a:t>
-            </a:r>
-            <a:r>
-              <a:rPr lang="en-US" altLang="ko-KR" sz="1000" dirty="0" err="1"/>
-              <a:t>AboutView</a:t>
-            </a:r>
-            <a:r>
-              <a:rPr lang="en-US" altLang="ko-KR" sz="1000" dirty="0"/>
-              <a:t> from '@/Views/</a:t>
-            </a:r>
-            <a:r>
-              <a:rPr lang="en-US" altLang="ko-KR" sz="1000" dirty="0" err="1"/>
-              <a:t>AboutView.vue</a:t>
-            </a:r>
-            <a:r>
-              <a:rPr lang="en-US" altLang="ko-KR" sz="1000" dirty="0"/>
+            <a:pPr marL="0" indent="0">
+              <a:buNone/>
+            </a:pPr>
+            <a:r>
+              <a:rPr lang="en-US" altLang="ko-KR" dirty="0"/>
+              <a:t>import Main from './layouts/</a:t>
+            </a:r>
+            <a:r>
+              <a:rPr lang="en-US" altLang="ko-KR" dirty="0" err="1"/>
+              <a:t>Main.vue</a:t>
+            </a:r>
+            <a:r>
+              <a:rPr lang="en-US" altLang="ko-KR" dirty="0"/>
               <a:t>'</a:t>
             </a:r>
           </a:p>
           <a:p>
-            <a:pPr marL="342900" lvl="1" indent="0">
-              <a:lnSpc>
-                <a:spcPct val="50000"/>
-              </a:lnSpc>
-              <a:buNone/>
-            </a:pPr>
+            <a:pPr marL="0" indent="0">
+              <a:buNone/>
+            </a:pPr>
+            <a:r>
+              <a:rPr lang="en-US" altLang="ko-KR" dirty="0"/>
+              <a:t>import Footer from './layouts/</a:t>
+            </a:r>
+            <a:r>
+              <a:rPr lang="en-US" altLang="ko-KR" dirty="0" err="1"/>
+              <a:t>Footer.vue</a:t>
+            </a:r>
+            <a:r>
+              <a:rPr lang="en-US" altLang="ko-KR" dirty="0"/>
+              <a:t>'</a:t>
+            </a:r>
             <a:br>
-              <a:rPr lang="en-US" altLang="ko-KR" sz="1000" dirty="0"/>
+              <a:rPr lang="en-US" altLang="ko-KR" dirty="0"/>
             </a:br>
-            <a:r>
-              <a:rPr lang="en-US" altLang="ko-KR" sz="1000" dirty="0"/>
-              <a:t>const routes = [</a:t>
-            </a:r>
-          </a:p>
-          <a:p>
-            <a:pPr marL="342900" lvl="1" indent="0">
-              <a:lnSpc>
-                <a:spcPct val="50000"/>
-              </a:lnSpc>
-              <a:buNone/>
-            </a:pPr>
-            <a:r>
-              <a:rPr lang="en-US" altLang="ko-KR" sz="1000" dirty="0"/>
-              <a:t>    { path: '</a:t>
-            </a:r>
-            <a:r>
-              <a:rPr lang="en-US" altLang="ko-KR" sz="1000" dirty="0">
-                <a:solidFill>
-                  <a:srgbClr val="FF0000"/>
-                </a:solidFill>
-              </a:rPr>
-              <a:t>/</a:t>
-            </a:r>
-            <a:r>
-              <a:rPr lang="en-US" altLang="ko-KR" sz="1000" dirty="0"/>
-              <a:t>',  component: </a:t>
-            </a:r>
-            <a:r>
-              <a:rPr lang="en-US" altLang="ko-KR" sz="1000" dirty="0" err="1">
-                <a:solidFill>
-                  <a:srgbClr val="0070C0"/>
-                </a:solidFill>
-              </a:rPr>
-              <a:t>HomeView</a:t>
-            </a:r>
-            <a:r>
-              <a:rPr lang="en-US" altLang="ko-KR" sz="1000" dirty="0"/>
-              <a:t> },</a:t>
-            </a:r>
-          </a:p>
-          <a:p>
-            <a:pPr marL="342900" lvl="1" indent="0">
-              <a:lnSpc>
-                <a:spcPct val="50000"/>
-              </a:lnSpc>
-              <a:buNone/>
-            </a:pPr>
-            <a:r>
-              <a:rPr lang="en-US" altLang="ko-KR" sz="1000" dirty="0"/>
-              <a:t>    { path: '</a:t>
-            </a:r>
-            <a:r>
-              <a:rPr lang="en-US" altLang="ko-KR" sz="1000" dirty="0">
-                <a:solidFill>
-                  <a:srgbClr val="FF0000"/>
-                </a:solidFill>
-              </a:rPr>
-              <a:t>/home</a:t>
-            </a:r>
-            <a:r>
-              <a:rPr lang="en-US" altLang="ko-KR" sz="1000" dirty="0"/>
-              <a:t>',  component: </a:t>
-            </a:r>
-            <a:r>
-              <a:rPr lang="en-US" altLang="ko-KR" sz="1000" dirty="0" err="1">
-                <a:solidFill>
-                  <a:srgbClr val="0070C0"/>
-                </a:solidFill>
-              </a:rPr>
-              <a:t>HomeView</a:t>
-            </a:r>
-            <a:r>
-              <a:rPr lang="en-US" altLang="ko-KR" sz="1000" dirty="0"/>
-              <a:t> },</a:t>
-            </a:r>
-          </a:p>
-          <a:p>
-            <a:pPr marL="342900" lvl="1" indent="0">
-              <a:lnSpc>
-                <a:spcPct val="50000"/>
-              </a:lnSpc>
-              <a:buNone/>
-            </a:pPr>
-            <a:r>
-              <a:rPr lang="en-US" altLang="ko-KR" sz="1000" dirty="0"/>
-              <a:t>    { path: '</a:t>
-            </a:r>
-            <a:r>
-              <a:rPr lang="en-US" altLang="ko-KR" sz="1000" dirty="0">
-                <a:solidFill>
-                  <a:srgbClr val="FF0000"/>
-                </a:solidFill>
-              </a:rPr>
-              <a:t>/about</a:t>
-            </a:r>
-            <a:r>
-              <a:rPr lang="en-US" altLang="ko-KR" sz="1000" dirty="0"/>
-              <a:t>', component: </a:t>
-            </a:r>
-            <a:r>
-              <a:rPr lang="en-US" altLang="ko-KR" sz="1000" dirty="0" err="1">
-                <a:solidFill>
-                  <a:srgbClr val="0070C0"/>
-                </a:solidFill>
-              </a:rPr>
-              <a:t>AboutView</a:t>
-            </a:r>
-            <a:r>
-              <a:rPr lang="en-US" altLang="ko-KR" sz="1000" dirty="0"/>
-              <a:t> },</a:t>
-            </a:r>
-          </a:p>
-          <a:p>
-            <a:pPr marL="342900" lvl="1" indent="0">
-              <a:lnSpc>
-                <a:spcPct val="50000"/>
-              </a:lnSpc>
-              <a:buNone/>
-            </a:pPr>
-            <a:r>
-              <a:rPr lang="en-US" altLang="ko-KR" sz="1000" dirty="0"/>
-              <a:t>];</a:t>
-            </a:r>
-          </a:p>
-          <a:p>
-            <a:pPr marL="342900" lvl="1" indent="0">
-              <a:lnSpc>
-                <a:spcPct val="50000"/>
-              </a:lnSpc>
-              <a:buNone/>
-            </a:pPr>
-            <a:br>
-              <a:rPr lang="en-US" altLang="ko-KR" sz="1000" dirty="0"/>
-            </a:br>
-            <a:r>
-              <a:rPr lang="en-US" altLang="ko-KR" sz="1000" dirty="0"/>
-              <a:t>const router = </a:t>
-            </a:r>
-            <a:r>
-              <a:rPr lang="en-US" altLang="ko-KR" sz="1000" dirty="0" err="1"/>
-              <a:t>createRouter</a:t>
-            </a:r>
-            <a:r>
-              <a:rPr lang="en-US" altLang="ko-KR" sz="1000" dirty="0"/>
-              <a:t>({</a:t>
-            </a:r>
-          </a:p>
-          <a:p>
-            <a:pPr marL="342900" lvl="1" indent="0">
-              <a:lnSpc>
-                <a:spcPct val="50000"/>
-              </a:lnSpc>
-              <a:buNone/>
-            </a:pPr>
-            <a:r>
-              <a:rPr lang="en-US" altLang="ko-KR" sz="1000" dirty="0"/>
-              <a:t>        history: </a:t>
-            </a:r>
-            <a:r>
-              <a:rPr lang="en-US" altLang="ko-KR" sz="1000" dirty="0" err="1"/>
-              <a:t>createWebHistory</a:t>
-            </a:r>
-            <a:r>
-              <a:rPr lang="en-US" altLang="ko-KR" sz="1000" dirty="0"/>
-              <a:t>('/'),</a:t>
-            </a:r>
-          </a:p>
-          <a:p>
-            <a:pPr marL="342900" lvl="1" indent="0">
-              <a:lnSpc>
-                <a:spcPct val="50000"/>
-              </a:lnSpc>
-              <a:buNone/>
-            </a:pPr>
-            <a:r>
-              <a:rPr lang="en-US" altLang="ko-KR" sz="1000" dirty="0"/>
-              <a:t>        //history: </a:t>
-            </a:r>
-            <a:r>
-              <a:rPr lang="en-US" altLang="ko-KR" sz="1000" dirty="0" err="1"/>
-              <a:t>createMemoryHistory</a:t>
-            </a:r>
-            <a:r>
-              <a:rPr lang="en-US" altLang="ko-KR" sz="1000" dirty="0"/>
-              <a:t>(),</a:t>
-            </a:r>
-          </a:p>
-          <a:p>
-            <a:pPr marL="342900" lvl="1" indent="0">
-              <a:lnSpc>
-                <a:spcPct val="50000"/>
-              </a:lnSpc>
-              <a:buNone/>
-            </a:pPr>
-            <a:r>
-              <a:rPr lang="en-US" altLang="ko-KR" sz="1000" dirty="0"/>
-              <a:t>        routes,</a:t>
-            </a:r>
-          </a:p>
-          <a:p>
-            <a:pPr marL="342900" lvl="1" indent="0">
-              <a:lnSpc>
-                <a:spcPct val="50000"/>
-              </a:lnSpc>
-              <a:buNone/>
-            </a:pPr>
-            <a:r>
-              <a:rPr lang="en-US" altLang="ko-KR" sz="1000" dirty="0"/>
-              <a:t>    });</a:t>
-            </a:r>
-          </a:p>
-          <a:p>
-            <a:pPr marL="342900" lvl="1" indent="0">
-              <a:lnSpc>
-                <a:spcPct val="50000"/>
-              </a:lnSpc>
-              <a:buNone/>
-            </a:pPr>
-            <a:endParaRPr lang="en-US" altLang="ko-KR" sz="1000" dirty="0"/>
-          </a:p>
-          <a:p>
-            <a:pPr marL="342900" lvl="1" indent="0">
-              <a:lnSpc>
-                <a:spcPct val="50000"/>
-              </a:lnSpc>
-              <a:buNone/>
-            </a:pPr>
-            <a:r>
-              <a:rPr lang="en-US" altLang="ko-KR" sz="1000" dirty="0"/>
-              <a:t>export default router;</a:t>
-            </a:r>
-          </a:p>
-          <a:p>
-            <a:pPr marL="0" indent="0">
-              <a:lnSpc>
-                <a:spcPct val="50000"/>
-              </a:lnSpc>
-              <a:buNone/>
-            </a:pPr>
-            <a:r>
-              <a:rPr lang="en-US" altLang="ko-KR" sz="1000" dirty="0"/>
+            <a:endParaRPr lang="en-US" altLang="ko-KR" dirty="0"/>
+          </a:p>
+          <a:p>
+            <a:pPr marL="0" indent="0">
+              <a:buNone/>
+            </a:pPr>
+            <a:r>
+              <a:rPr lang="en-US" altLang="ko-KR" dirty="0"/>
+              <a:t>export default {</a:t>
+            </a:r>
+          </a:p>
+          <a:p>
+            <a:pPr marL="0" indent="0">
+              <a:buNone/>
+            </a:pPr>
+            <a:r>
+              <a:rPr lang="en-US" altLang="ko-KR" dirty="0"/>
+              <a:t>  name: 'App',</a:t>
+            </a:r>
+          </a:p>
+          <a:p>
+            <a:pPr marL="0" indent="0">
+              <a:buNone/>
+            </a:pPr>
+            <a:r>
+              <a:rPr lang="en-US" altLang="ko-KR" dirty="0"/>
+              <a:t>  components: {</a:t>
+            </a:r>
+          </a:p>
+          <a:p>
+            <a:pPr marL="0" indent="0">
+              <a:buNone/>
+            </a:pPr>
+            <a:r>
+              <a:rPr lang="en-US" altLang="ko-KR" dirty="0"/>
+              <a:t>    Header, Main, Footer</a:t>
+            </a:r>
+          </a:p>
+          <a:p>
+            <a:pPr marL="0" indent="0">
+              <a:buNone/>
+            </a:pPr>
+            <a:r>
+              <a:rPr lang="en-US" altLang="ko-KR" dirty="0"/>
+              <a:t>  },</a:t>
+            </a:r>
+          </a:p>
+          <a:p>
+            <a:pPr marL="0" indent="0">
+              <a:buNone/>
+            </a:pPr>
+            <a:r>
+              <a:rPr lang="en-US" altLang="ko-KR" dirty="0"/>
+              <a:t>  created() {</a:t>
+            </a:r>
+          </a:p>
+          <a:p>
+            <a:pPr marL="0" indent="0">
+              <a:buNone/>
+            </a:pPr>
+            <a:r>
+              <a:rPr lang="en-US" altLang="ko-KR" dirty="0"/>
+              <a:t>    console.log(`</a:t>
+            </a:r>
+            <a:r>
+              <a:rPr lang="ko-KR" altLang="en-US" dirty="0"/>
+              <a:t>프로그램 시작</a:t>
+            </a:r>
+            <a:r>
+              <a:rPr lang="en-US" altLang="ko-KR" dirty="0"/>
+              <a:t>! (${</a:t>
+            </a:r>
+            <a:r>
+              <a:rPr lang="en-US" altLang="ko-KR" dirty="0" err="1"/>
+              <a:t>this.$title</a:t>
+            </a:r>
+            <a:r>
+              <a:rPr lang="en-US" altLang="ko-KR" dirty="0"/>
+              <a:t>})`);</a:t>
+            </a:r>
+          </a:p>
+          <a:p>
+            <a:pPr marL="0" indent="0">
+              <a:buNone/>
+            </a:pPr>
+            <a:r>
+              <a:rPr lang="en-US" altLang="ko-KR" dirty="0"/>
+              <a:t>  },</a:t>
+            </a:r>
+          </a:p>
+          <a:p>
+            <a:pPr marL="0" indent="0">
+              <a:buNone/>
+            </a:pPr>
+            <a:r>
+              <a:rPr lang="en-US" altLang="ko-KR" dirty="0"/>
               <a:t>}</a:t>
             </a:r>
           </a:p>
           <a:p>
             <a:pPr marL="0" indent="0">
-              <a:lnSpc>
-                <a:spcPct val="50000"/>
-              </a:lnSpc>
-              <a:buNone/>
-            </a:pPr>
-            <a:endParaRPr lang="en-US" altLang="ko-KR" sz="1000" dirty="0"/>
-          </a:p>
-          <a:p>
-            <a:pPr marL="0" indent="0">
-              <a:lnSpc>
-                <a:spcPct val="50000"/>
-              </a:lnSpc>
-              <a:buNone/>
-            </a:pPr>
-            <a:r>
-              <a:rPr lang="en-US" altLang="ko-KR" sz="1000" dirty="0" err="1"/>
-              <a:t>App.vue</a:t>
-            </a:r>
-            <a:endParaRPr lang="en-US" altLang="ko-KR" sz="1000" dirty="0"/>
-          </a:p>
-          <a:p>
-            <a:pPr marL="0" indent="0">
-              <a:lnSpc>
-                <a:spcPct val="50000"/>
-              </a:lnSpc>
-              <a:buNone/>
-            </a:pPr>
-            <a:r>
-              <a:rPr lang="en-US" altLang="ko-KR" sz="1000" dirty="0"/>
-              <a:t>{</a:t>
-            </a:r>
-          </a:p>
-          <a:p>
-            <a:pPr marL="342900" lvl="1" indent="0">
-              <a:lnSpc>
-                <a:spcPct val="50000"/>
-              </a:lnSpc>
-              <a:buNone/>
-            </a:pPr>
-            <a:r>
-              <a:rPr lang="en-US" altLang="ko-KR" sz="1000" dirty="0"/>
-              <a:t>&lt;template&gt;</a:t>
-            </a:r>
-          </a:p>
-          <a:p>
-            <a:pPr marL="342900" lvl="1" indent="0">
-              <a:lnSpc>
-                <a:spcPct val="50000"/>
-              </a:lnSpc>
-              <a:buNone/>
-            </a:pPr>
-            <a:r>
-              <a:rPr lang="en-US" altLang="ko-KR" sz="1000" dirty="0"/>
-              <a:t>  &lt;p&gt; </a:t>
-            </a:r>
-            <a:r>
-              <a:rPr lang="en-US" altLang="ko-KR" sz="1000" dirty="0">
-                <a:solidFill>
-                  <a:srgbClr val="0070C0"/>
-                </a:solidFill>
-              </a:rPr>
-              <a:t>{{ $</a:t>
-            </a:r>
-            <a:r>
-              <a:rPr lang="en-US" altLang="ko-KR" sz="1000" dirty="0" err="1">
-                <a:solidFill>
-                  <a:srgbClr val="0070C0"/>
-                </a:solidFill>
-              </a:rPr>
-              <a:t>route.fullPath</a:t>
-            </a:r>
-            <a:r>
-              <a:rPr lang="en-US" altLang="ko-KR" sz="1000" dirty="0">
-                <a:solidFill>
-                  <a:srgbClr val="0070C0"/>
-                </a:solidFill>
-              </a:rPr>
-              <a:t> }}</a:t>
-            </a:r>
-            <a:r>
-              <a:rPr lang="en-US" altLang="ko-KR" sz="1000" dirty="0"/>
-              <a:t>&lt;/p&gt;  </a:t>
-            </a:r>
-          </a:p>
-          <a:p>
-            <a:pPr marL="342900" lvl="1" indent="0">
-              <a:lnSpc>
-                <a:spcPct val="50000"/>
-              </a:lnSpc>
-              <a:buNone/>
-            </a:pPr>
-            <a:r>
-              <a:rPr lang="en-US" altLang="ko-KR" sz="1000" dirty="0"/>
-              <a:t>    &lt;</a:t>
-            </a:r>
-            <a:r>
-              <a:rPr lang="en-US" altLang="ko-KR" sz="1000" dirty="0" err="1">
-                <a:solidFill>
-                  <a:srgbClr val="FF0000"/>
-                </a:solidFill>
-              </a:rPr>
-              <a:t>RouterLink</a:t>
-            </a:r>
-            <a:r>
-              <a:rPr lang="en-US" altLang="ko-KR" sz="1000" dirty="0"/>
-              <a:t> to=‘/’&gt;Home&lt;/</a:t>
-            </a:r>
-            <a:r>
-              <a:rPr lang="en-US" altLang="ko-KR" sz="1000" dirty="0" err="1">
-                <a:solidFill>
-                  <a:srgbClr val="FF0000"/>
-                </a:solidFill>
-              </a:rPr>
-              <a:t>RouterLink</a:t>
-            </a:r>
-            <a:r>
-              <a:rPr lang="en-US" altLang="ko-KR" sz="1000" dirty="0"/>
-              <a:t>&gt;</a:t>
-            </a:r>
-          </a:p>
-          <a:p>
-            <a:pPr marL="342900" lvl="1" indent="0">
-              <a:lnSpc>
-                <a:spcPct val="50000"/>
-              </a:lnSpc>
-              <a:buNone/>
-            </a:pPr>
-            <a:r>
-              <a:rPr lang="en-US" altLang="ko-KR" sz="1000" dirty="0"/>
-              <a:t>    &lt;</a:t>
-            </a:r>
-            <a:r>
-              <a:rPr lang="en-US" altLang="ko-KR" sz="1000" dirty="0" err="1">
-                <a:solidFill>
-                  <a:srgbClr val="FF0000"/>
-                </a:solidFill>
-              </a:rPr>
-              <a:t>RouterLink</a:t>
-            </a:r>
-            <a:r>
-              <a:rPr lang="en-US" altLang="ko-KR" sz="1000" dirty="0"/>
-              <a:t> to=‘/about’&gt;About&lt;/</a:t>
-            </a:r>
-            <a:r>
-              <a:rPr lang="en-US" altLang="ko-KR" sz="1000" dirty="0" err="1">
-                <a:solidFill>
-                  <a:srgbClr val="FF0000"/>
-                </a:solidFill>
-              </a:rPr>
-              <a:t>RouterLink</a:t>
-            </a:r>
-            <a:r>
-              <a:rPr lang="en-US" altLang="ko-KR" sz="1000" dirty="0"/>
-              <a:t>&gt;</a:t>
-            </a:r>
-          </a:p>
-          <a:p>
-            <a:pPr marL="342900" lvl="1" indent="0">
-              <a:lnSpc>
-                <a:spcPct val="50000"/>
-              </a:lnSpc>
-              <a:buNone/>
-            </a:pPr>
-            <a:r>
-              <a:rPr lang="it-IT" altLang="ko-KR" sz="1000" dirty="0">
-                <a:solidFill>
-                  <a:schemeClr val="accent5"/>
-                </a:solidFill>
-              </a:rPr>
-              <a:t>    &lt;button @click="this.$router.push('control')"&gt;sd&lt;/button&gt;</a:t>
-            </a:r>
-            <a:endParaRPr lang="en-US" altLang="ko-KR" sz="1000" dirty="0">
-              <a:solidFill>
-                <a:schemeClr val="accent5"/>
-              </a:solidFill>
-            </a:endParaRPr>
-          </a:p>
-          <a:p>
-            <a:pPr marL="342900" lvl="1" indent="0">
-              <a:lnSpc>
-                <a:spcPct val="50000"/>
-              </a:lnSpc>
-              <a:buNone/>
-            </a:pPr>
-            <a:r>
-              <a:rPr lang="en-US" altLang="ko-KR" sz="1000" dirty="0">
-                <a:solidFill>
-                  <a:srgbClr val="00B050"/>
-                </a:solidFill>
-              </a:rPr>
-              <a:t>    &lt;button</a:t>
-            </a:r>
-            <a:r>
-              <a:rPr lang="ko-KR" altLang="en-US" sz="1000" dirty="0">
-                <a:solidFill>
-                  <a:srgbClr val="00B050"/>
-                </a:solidFill>
-              </a:rPr>
-              <a:t> </a:t>
-            </a:r>
-            <a:r>
-              <a:rPr lang="en-US" altLang="ko-KR" sz="1000" dirty="0">
-                <a:solidFill>
-                  <a:srgbClr val="00B050"/>
-                </a:solidFill>
-              </a:rPr>
-              <a:t>@click=“GoMenu(‘/home’)”&gt;</a:t>
-            </a:r>
-          </a:p>
-          <a:p>
-            <a:pPr marL="342900" lvl="1" indent="0">
-              <a:lnSpc>
-                <a:spcPct val="50000"/>
-              </a:lnSpc>
-              <a:buNone/>
-            </a:pPr>
-            <a:r>
-              <a:rPr lang="en-US" altLang="ko-KR" sz="1000" dirty="0"/>
-              <a:t>  &lt;</a:t>
-            </a:r>
-            <a:r>
-              <a:rPr lang="en-US" altLang="ko-KR" sz="1000" dirty="0" err="1">
-                <a:solidFill>
-                  <a:srgbClr val="FF0000"/>
-                </a:solidFill>
-              </a:rPr>
-              <a:t>RouterView</a:t>
-            </a:r>
-            <a:r>
-              <a:rPr lang="en-US" altLang="ko-KR" sz="1000" dirty="0"/>
-              <a:t> /&gt;</a:t>
-            </a:r>
-          </a:p>
-          <a:p>
-            <a:pPr marL="342900" lvl="1" indent="0">
-              <a:lnSpc>
-                <a:spcPct val="50000"/>
-              </a:lnSpc>
-              <a:buNone/>
-            </a:pPr>
-            <a:r>
-              <a:rPr lang="en-US" altLang="ko-KR" sz="1000" dirty="0"/>
-              <a:t>&lt;/template&gt;</a:t>
-            </a:r>
-          </a:p>
-          <a:p>
-            <a:pPr marL="342900" lvl="1" indent="0">
-              <a:lnSpc>
-                <a:spcPct val="50000"/>
-              </a:lnSpc>
-              <a:buNone/>
-            </a:pPr>
-            <a:endParaRPr lang="en-US" altLang="ko-KR" sz="1000" dirty="0"/>
-          </a:p>
-          <a:p>
-            <a:pPr marL="342900" lvl="1" indent="0">
-              <a:lnSpc>
-                <a:spcPct val="50000"/>
-              </a:lnSpc>
-              <a:buNone/>
-            </a:pPr>
-            <a:r>
-              <a:rPr lang="en-US" altLang="ko-KR" sz="1000" dirty="0">
-                <a:solidFill>
-                  <a:srgbClr val="00B050"/>
-                </a:solidFill>
-              </a:rPr>
-              <a:t>&lt;script&gt;</a:t>
-            </a:r>
-          </a:p>
-          <a:p>
-            <a:pPr marL="342900" lvl="1" indent="0">
-              <a:lnSpc>
-                <a:spcPct val="50000"/>
-              </a:lnSpc>
-              <a:buNone/>
-            </a:pPr>
-            <a:r>
-              <a:rPr lang="en-US" altLang="ko-KR" sz="1000" dirty="0">
-                <a:solidFill>
-                  <a:srgbClr val="00B050"/>
-                </a:solidFill>
-              </a:rPr>
-              <a:t>export default</a:t>
-            </a:r>
-          </a:p>
-          <a:p>
-            <a:pPr marL="342900" lvl="1" indent="0">
-              <a:lnSpc>
-                <a:spcPct val="50000"/>
-              </a:lnSpc>
-              <a:buNone/>
-            </a:pPr>
-            <a:r>
-              <a:rPr lang="en-US" altLang="ko-KR" sz="1000" dirty="0">
-                <a:solidFill>
-                  <a:srgbClr val="00B050"/>
-                </a:solidFill>
-              </a:rPr>
-              <a:t>{</a:t>
-            </a:r>
-          </a:p>
-          <a:p>
-            <a:pPr marL="342900" lvl="1" indent="0">
-              <a:lnSpc>
-                <a:spcPct val="50000"/>
-              </a:lnSpc>
-              <a:buNone/>
-            </a:pPr>
-            <a:r>
-              <a:rPr lang="en-US" altLang="ko-KR" sz="1000" dirty="0">
-                <a:solidFill>
-                  <a:srgbClr val="00B050"/>
-                </a:solidFill>
-              </a:rPr>
-              <a:t>	methods: {</a:t>
-            </a:r>
-          </a:p>
-          <a:p>
-            <a:pPr marL="342900" lvl="1" indent="0">
-              <a:lnSpc>
-                <a:spcPct val="50000"/>
-              </a:lnSpc>
-              <a:buNone/>
-            </a:pPr>
-            <a:r>
-              <a:rPr lang="en-US" altLang="ko-KR" sz="1000" dirty="0">
-                <a:solidFill>
-                  <a:srgbClr val="00B050"/>
-                </a:solidFill>
-              </a:rPr>
-              <a:t>	    </a:t>
-            </a:r>
-            <a:r>
-              <a:rPr lang="en-US" altLang="ko-KR" sz="1000" dirty="0" err="1">
-                <a:solidFill>
-                  <a:srgbClr val="00B050"/>
-                </a:solidFill>
-              </a:rPr>
-              <a:t>GoMenu</a:t>
-            </a:r>
-            <a:r>
-              <a:rPr lang="en-US" altLang="ko-KR" sz="1000" dirty="0">
-                <a:solidFill>
-                  <a:srgbClr val="00B050"/>
-                </a:solidFill>
-              </a:rPr>
-              <a:t>(path)</a:t>
-            </a:r>
-          </a:p>
-          <a:p>
-            <a:pPr marL="342900" lvl="1" indent="0">
-              <a:lnSpc>
-                <a:spcPct val="50000"/>
-              </a:lnSpc>
-              <a:buNone/>
-            </a:pPr>
-            <a:r>
-              <a:rPr lang="en-US" altLang="ko-KR" sz="1000" dirty="0">
-                <a:solidFill>
-                  <a:srgbClr val="00B050"/>
-                </a:solidFill>
-              </a:rPr>
-              <a:t>	    {</a:t>
-            </a:r>
-          </a:p>
-          <a:p>
-            <a:pPr marL="342900" lvl="1" indent="0">
-              <a:lnSpc>
-                <a:spcPct val="50000"/>
-              </a:lnSpc>
-              <a:buNone/>
-            </a:pPr>
-            <a:r>
-              <a:rPr lang="en-US" altLang="ko-KR" sz="1000" dirty="0">
-                <a:solidFill>
-                  <a:srgbClr val="00B050"/>
-                </a:solidFill>
-              </a:rPr>
-              <a:t>	        this.$</a:t>
-            </a:r>
-            <a:r>
-              <a:rPr lang="en-US" altLang="ko-KR" sz="1000" dirty="0" err="1">
-                <a:solidFill>
-                  <a:srgbClr val="00B050"/>
-                </a:solidFill>
-              </a:rPr>
-              <a:t>router.push</a:t>
-            </a:r>
-            <a:r>
-              <a:rPr lang="en-US" altLang="ko-KR" sz="1000" dirty="0">
-                <a:solidFill>
-                  <a:srgbClr val="00B050"/>
-                </a:solidFill>
-              </a:rPr>
-              <a:t>(path);</a:t>
-            </a:r>
-          </a:p>
-          <a:p>
-            <a:pPr marL="342900" lvl="1" indent="0">
-              <a:lnSpc>
-                <a:spcPct val="50000"/>
-              </a:lnSpc>
-              <a:buNone/>
-            </a:pPr>
-            <a:r>
-              <a:rPr lang="en-US" altLang="ko-KR" sz="1000" dirty="0">
-                <a:solidFill>
-                  <a:srgbClr val="00B050"/>
-                </a:solidFill>
-              </a:rPr>
-              <a:t>	    }</a:t>
-            </a:r>
-          </a:p>
-          <a:p>
-            <a:pPr marL="342900" lvl="1" indent="0">
-              <a:lnSpc>
-                <a:spcPct val="50000"/>
-              </a:lnSpc>
-              <a:buNone/>
-            </a:pPr>
-            <a:r>
-              <a:rPr lang="en-US" altLang="ko-KR" sz="1000" dirty="0">
-                <a:solidFill>
-                  <a:srgbClr val="00B050"/>
-                </a:solidFill>
-              </a:rPr>
-              <a:t>	}</a:t>
-            </a:r>
-          </a:p>
-          <a:p>
-            <a:pPr marL="342900" lvl="1" indent="0">
-              <a:lnSpc>
-                <a:spcPct val="50000"/>
-              </a:lnSpc>
-              <a:buNone/>
-            </a:pPr>
-            <a:r>
-              <a:rPr lang="en-US" altLang="ko-KR" sz="1000" dirty="0">
-                <a:solidFill>
-                  <a:srgbClr val="00B050"/>
-                </a:solidFill>
-              </a:rPr>
-              <a:t>}</a:t>
-            </a:r>
-          </a:p>
-          <a:p>
-            <a:pPr marL="342900" lvl="1" indent="0">
-              <a:lnSpc>
-                <a:spcPct val="50000"/>
-              </a:lnSpc>
-              <a:buNone/>
-            </a:pPr>
-            <a:r>
-              <a:rPr lang="en-US" altLang="ko-KR" sz="1000" dirty="0">
-                <a:solidFill>
-                  <a:srgbClr val="00B050"/>
-                </a:solidFill>
-              </a:rPr>
+              <a:buNone/>
+            </a:pPr>
+            <a:r>
+              <a:rPr lang="en-US" altLang="ko-KR" dirty="0"/>
               <a:t>&lt;/script&gt;</a:t>
             </a:r>
           </a:p>
           <a:p>
             <a:pPr marL="0" indent="0">
-              <a:lnSpc>
-                <a:spcPct val="50000"/>
-              </a:lnSpc>
-              <a:buNone/>
-            </a:pPr>
-            <a:r>
-              <a:rPr lang="en-US" altLang="ko-KR" sz="1000" dirty="0"/>
-              <a:t>}</a:t>
-            </a:r>
-          </a:p>
-          <a:p>
-            <a:pPr marL="0" indent="0">
-              <a:lnSpc>
-                <a:spcPct val="50000"/>
-              </a:lnSpc>
-              <a:buNone/>
-            </a:pPr>
-            <a:endParaRPr lang="en-US" altLang="ko-KR" sz="1000" dirty="0"/>
-          </a:p>
-          <a:p>
-            <a:pPr marL="0" indent="0">
-              <a:lnSpc>
-                <a:spcPct val="50000"/>
-              </a:lnSpc>
-              <a:buNone/>
-            </a:pPr>
-            <a:r>
-              <a:rPr lang="en-US" altLang="ko-KR" sz="1000" dirty="0"/>
-              <a:t>main.js</a:t>
-            </a:r>
-          </a:p>
-          <a:p>
-            <a:pPr marL="0" indent="0">
-              <a:lnSpc>
-                <a:spcPct val="50000"/>
-              </a:lnSpc>
-              <a:buNone/>
-            </a:pPr>
-            <a:r>
-              <a:rPr lang="en-US" altLang="ko-KR" sz="1000" dirty="0"/>
-              <a:t>{</a:t>
-            </a:r>
-          </a:p>
-          <a:p>
-            <a:pPr marL="342900" lvl="1" indent="0">
-              <a:lnSpc>
-                <a:spcPct val="50000"/>
-              </a:lnSpc>
-              <a:buNone/>
-            </a:pPr>
-            <a:r>
-              <a:rPr lang="fr-FR" altLang="ko-KR" sz="1000" dirty="0"/>
-              <a:t>// vue-router</a:t>
-            </a:r>
-          </a:p>
-          <a:p>
-            <a:pPr marL="342900" lvl="1" indent="0">
-              <a:lnSpc>
-                <a:spcPct val="50000"/>
-              </a:lnSpc>
-              <a:buNone/>
-            </a:pPr>
-            <a:r>
-              <a:rPr lang="fr-FR" altLang="ko-KR" sz="1000" dirty="0"/>
-              <a:t>import router from '@/router/index.js’    </a:t>
-            </a:r>
-            <a:r>
-              <a:rPr lang="fr-FR" altLang="ko-KR" sz="1000" dirty="0">
-                <a:solidFill>
-                  <a:schemeClr val="bg1">
-                    <a:lumMod val="65000"/>
-                  </a:schemeClr>
-                </a:solidFill>
-              </a:rPr>
-              <a:t>// import router from '@/router'</a:t>
-            </a:r>
-            <a:br>
-              <a:rPr lang="fr-FR" altLang="ko-KR" sz="1000" dirty="0">
-                <a:solidFill>
-                  <a:schemeClr val="bg1">
-                    <a:lumMod val="65000"/>
-                  </a:schemeClr>
-                </a:solidFill>
-              </a:rPr>
-            </a:br>
-            <a:endParaRPr lang="fr-FR" altLang="ko-KR" sz="1000" dirty="0">
-              <a:solidFill>
-                <a:schemeClr val="bg1">
-                  <a:lumMod val="65000"/>
-                </a:schemeClr>
-              </a:solidFill>
-            </a:endParaRPr>
-          </a:p>
-          <a:p>
-            <a:pPr marL="342900" lvl="1" indent="0">
-              <a:lnSpc>
-                <a:spcPct val="50000"/>
-              </a:lnSpc>
-              <a:buNone/>
-            </a:pPr>
-            <a:r>
-              <a:rPr lang="fr-FR" altLang="ko-KR" sz="1000" dirty="0"/>
-              <a:t>createApp(App).</a:t>
-            </a:r>
-            <a:r>
-              <a:rPr lang="fr-FR" altLang="ko-KR" sz="1000" dirty="0">
-                <a:solidFill>
-                  <a:srgbClr val="FF0000"/>
-                </a:solidFill>
-              </a:rPr>
-              <a:t>use(router)</a:t>
-            </a:r>
-            <a:r>
-              <a:rPr lang="fr-FR" altLang="ko-KR" sz="1000" dirty="0"/>
-              <a:t>.mount('#app')</a:t>
-            </a:r>
-            <a:endParaRPr lang="en-US" altLang="ko-KR" sz="1000" dirty="0"/>
-          </a:p>
-          <a:p>
-            <a:pPr marL="0" indent="0">
-              <a:lnSpc>
-                <a:spcPct val="50000"/>
-              </a:lnSpc>
-              <a:buNone/>
-            </a:pPr>
-            <a:r>
-              <a:rPr lang="en-US" altLang="ko-KR" sz="1000" dirty="0"/>
-              <a:t>}</a:t>
-            </a:r>
-            <a:endParaRPr lang="ko-KR" altLang="en-US" sz="1000" dirty="0"/>
+              <a:buNone/>
+            </a:pPr>
+            <a:endParaRPr lang="ko-KR" altLang="en-US" dirty="0"/>
           </a:p>
         </p:txBody>
       </p:sp>
     </p:spTree>
     <p:extLst>
       <p:ext uri="{BB962C8B-B14F-4D97-AF65-F5344CB8AC3E}">
-        <p14:creationId xmlns:p14="http://schemas.microsoft.com/office/powerpoint/2010/main" val="2359618191"/>
+        <p14:creationId xmlns:p14="http://schemas.microsoft.com/office/powerpoint/2010/main" val="2365144889"/>
       </p:ext>
     </p:extLst>
   </p:cSld>
@@ -4863,6 +4170,1121 @@
           <p:cNvPr id="2" name="제목 1">
             <a:extLst>
               <a:ext uri="{FF2B5EF4-FFF2-40B4-BE49-F238E27FC236}">
+                <a16:creationId xmlns:a16="http://schemas.microsoft.com/office/drawing/2014/main" id="{E372DB09-F1A5-0E9C-EE6B-14ABB7F9AF85}"/>
+              </a:ext>
+            </a:extLst>
+          </p:cNvPr>
+          <p:cNvSpPr>
+            <a:spLocks noGrp="1"/>
+          </p:cNvSpPr>
+          <p:nvPr>
+            <p:ph type="title"/>
+          </p:nvPr>
+        </p:nvSpPr>
+        <p:spPr/>
+        <p:txBody>
+          <a:bodyPr/>
+          <a:lstStyle/>
+          <a:p>
+            <a:r>
+              <a:rPr lang="en-US" altLang="ko-KR" dirty="0"/>
+              <a:t>Vue Router</a:t>
+            </a:r>
+            <a:br>
+              <a:rPr lang="en-US" altLang="ko-KR" dirty="0"/>
+            </a:br>
+            <a:r>
+              <a:rPr lang="en-US" altLang="ko-KR" dirty="0"/>
+              <a:t>(&gt;</a:t>
+            </a:r>
+            <a:r>
+              <a:rPr lang="en-US" altLang="ko-KR" sz="3600" dirty="0"/>
+              <a:t> </a:t>
+            </a:r>
+            <a:r>
+              <a:rPr lang="en-US" altLang="ko-KR" sz="3600" dirty="0" err="1"/>
+              <a:t>npm</a:t>
+            </a:r>
+            <a:r>
+              <a:rPr lang="en-US" altLang="ko-KR" sz="3600" dirty="0"/>
+              <a:t> install </a:t>
+            </a:r>
+            <a:r>
+              <a:rPr lang="en-US" altLang="ko-KR" sz="3600" dirty="0" err="1"/>
+              <a:t>vue</a:t>
+            </a:r>
+            <a:r>
+              <a:rPr lang="en-US" altLang="ko-KR" sz="3600" dirty="0"/>
+              <a:t>-router)</a:t>
+            </a:r>
+            <a:endParaRPr lang="ko-KR" altLang="en-US" dirty="0"/>
+          </a:p>
+        </p:txBody>
+      </p:sp>
+      <p:sp>
+        <p:nvSpPr>
+          <p:cNvPr id="3" name="내용 개체 틀 2">
+            <a:extLst>
+              <a:ext uri="{FF2B5EF4-FFF2-40B4-BE49-F238E27FC236}">
+                <a16:creationId xmlns:a16="http://schemas.microsoft.com/office/drawing/2014/main" id="{885DABAA-E41B-E3AC-B623-601A614B581B}"/>
+              </a:ext>
+            </a:extLst>
+          </p:cNvPr>
+          <p:cNvSpPr>
+            <a:spLocks noGrp="1"/>
+          </p:cNvSpPr>
+          <p:nvPr>
+            <p:ph idx="1"/>
+          </p:nvPr>
+        </p:nvSpPr>
+        <p:spPr/>
+        <p:txBody>
+          <a:bodyPr>
+            <a:noAutofit/>
+          </a:bodyPr>
+          <a:lstStyle/>
+          <a:p>
+            <a:pPr marL="0" indent="0">
+              <a:lnSpc>
+                <a:spcPct val="50000"/>
+              </a:lnSpc>
+              <a:buNone/>
+            </a:pPr>
+            <a:endParaRPr lang="en-US" altLang="ko-KR" sz="1000" dirty="0"/>
+          </a:p>
+          <a:p>
+            <a:pPr marL="0" indent="0">
+              <a:lnSpc>
+                <a:spcPct val="50000"/>
+              </a:lnSpc>
+              <a:buNone/>
+            </a:pPr>
+            <a:r>
+              <a:rPr lang="en-US" altLang="ko-KR" sz="1000" dirty="0"/>
+              <a:t>router/index.js</a:t>
+            </a:r>
+          </a:p>
+          <a:p>
+            <a:pPr marL="0" indent="0">
+              <a:lnSpc>
+                <a:spcPct val="50000"/>
+              </a:lnSpc>
+              <a:buNone/>
+            </a:pPr>
+            <a:r>
+              <a:rPr lang="en-US" altLang="ko-KR" sz="1000" dirty="0"/>
+              <a:t>{</a:t>
+            </a:r>
+          </a:p>
+          <a:p>
+            <a:pPr marL="342900" lvl="1" indent="0">
+              <a:lnSpc>
+                <a:spcPct val="50000"/>
+              </a:lnSpc>
+              <a:buNone/>
+            </a:pPr>
+            <a:r>
+              <a:rPr lang="en-US" altLang="ko-KR" sz="1000" dirty="0"/>
+              <a:t>/* </a:t>
+            </a:r>
+            <a:r>
+              <a:rPr lang="en-US" altLang="ko-KR" sz="1000" dirty="0" err="1"/>
+              <a:t>eslint</a:t>
+            </a:r>
+            <a:r>
+              <a:rPr lang="en-US" altLang="ko-KR" sz="1000" dirty="0"/>
+              <a:t>-disable no-unused-vars */</a:t>
+            </a:r>
+          </a:p>
+          <a:p>
+            <a:pPr marL="342900" lvl="1" indent="0">
+              <a:lnSpc>
+                <a:spcPct val="50000"/>
+              </a:lnSpc>
+              <a:buNone/>
+            </a:pPr>
+            <a:r>
+              <a:rPr lang="en-US" altLang="ko-KR" sz="1000" dirty="0"/>
+              <a:t>import { </a:t>
+            </a:r>
+            <a:r>
+              <a:rPr lang="en-US" altLang="ko-KR" sz="1000" dirty="0" err="1"/>
+              <a:t>createRouter</a:t>
+            </a:r>
+            <a:r>
+              <a:rPr lang="en-US" altLang="ko-KR" sz="1000" dirty="0"/>
+              <a:t>, </a:t>
+            </a:r>
+            <a:r>
+              <a:rPr lang="en-US" altLang="ko-KR" sz="1000" dirty="0" err="1"/>
+              <a:t>createWebHistory</a:t>
+            </a:r>
+            <a:r>
+              <a:rPr lang="en-US" altLang="ko-KR" sz="1000" dirty="0"/>
+              <a:t>, </a:t>
+            </a:r>
+            <a:r>
+              <a:rPr lang="en-US" altLang="ko-KR" sz="1000" dirty="0" err="1"/>
+              <a:t>createMemoryHistory</a:t>
+            </a:r>
+            <a:r>
+              <a:rPr lang="en-US" altLang="ko-KR" sz="1000" dirty="0"/>
+              <a:t>} from '</a:t>
+            </a:r>
+            <a:r>
+              <a:rPr lang="en-US" altLang="ko-KR" sz="1000" dirty="0" err="1"/>
+              <a:t>vue</a:t>
+            </a:r>
+            <a:r>
+              <a:rPr lang="en-US" altLang="ko-KR" sz="1000" dirty="0"/>
+              <a:t>-router'</a:t>
+            </a:r>
+          </a:p>
+          <a:p>
+            <a:pPr marL="342900" lvl="1" indent="0">
+              <a:lnSpc>
+                <a:spcPct val="50000"/>
+              </a:lnSpc>
+              <a:buNone/>
+            </a:pPr>
+            <a:r>
+              <a:rPr lang="en-US" altLang="ko-KR" sz="1000" dirty="0"/>
+              <a:t>import </a:t>
+            </a:r>
+            <a:r>
+              <a:rPr lang="en-US" altLang="ko-KR" sz="1000" dirty="0" err="1"/>
+              <a:t>HomeView</a:t>
+            </a:r>
+            <a:r>
+              <a:rPr lang="en-US" altLang="ko-KR" sz="1000" dirty="0"/>
+              <a:t> from '@/Views/</a:t>
+            </a:r>
+            <a:r>
+              <a:rPr lang="en-US" altLang="ko-KR" sz="1000" dirty="0" err="1"/>
+              <a:t>HomeView.vue</a:t>
+            </a:r>
+            <a:r>
+              <a:rPr lang="en-US" altLang="ko-KR" sz="1000" dirty="0"/>
+              <a:t>'</a:t>
+            </a:r>
+          </a:p>
+          <a:p>
+            <a:pPr marL="342900" lvl="1" indent="0">
+              <a:lnSpc>
+                <a:spcPct val="50000"/>
+              </a:lnSpc>
+              <a:buNone/>
+            </a:pPr>
+            <a:r>
+              <a:rPr lang="en-US" altLang="ko-KR" sz="1000" dirty="0"/>
+              <a:t>import </a:t>
+            </a:r>
+            <a:r>
+              <a:rPr lang="en-US" altLang="ko-KR" sz="1000" dirty="0" err="1"/>
+              <a:t>AboutView</a:t>
+            </a:r>
+            <a:r>
+              <a:rPr lang="en-US" altLang="ko-KR" sz="1000" dirty="0"/>
+              <a:t> from '@/Views/</a:t>
+            </a:r>
+            <a:r>
+              <a:rPr lang="en-US" altLang="ko-KR" sz="1000" dirty="0" err="1"/>
+              <a:t>AboutView.vue</a:t>
+            </a:r>
+            <a:r>
+              <a:rPr lang="en-US" altLang="ko-KR" sz="1000" dirty="0"/>
+              <a:t>'</a:t>
+            </a:r>
+          </a:p>
+          <a:p>
+            <a:pPr marL="342900" lvl="1" indent="0">
+              <a:lnSpc>
+                <a:spcPct val="50000"/>
+              </a:lnSpc>
+              <a:buNone/>
+            </a:pPr>
+            <a:br>
+              <a:rPr lang="en-US" altLang="ko-KR" sz="1000" dirty="0"/>
+            </a:br>
+            <a:r>
+              <a:rPr lang="en-US" altLang="ko-KR" sz="1000" dirty="0"/>
+              <a:t>const routes = [</a:t>
+            </a:r>
+          </a:p>
+          <a:p>
+            <a:pPr marL="342900" lvl="1" indent="0">
+              <a:lnSpc>
+                <a:spcPct val="50000"/>
+              </a:lnSpc>
+              <a:buNone/>
+            </a:pPr>
+            <a:r>
+              <a:rPr lang="en-US" altLang="ko-KR" sz="1000" dirty="0"/>
+              <a:t>    { path: '</a:t>
+            </a:r>
+            <a:r>
+              <a:rPr lang="en-US" altLang="ko-KR" sz="1000" dirty="0">
+                <a:solidFill>
+                  <a:srgbClr val="FF0000"/>
+                </a:solidFill>
+              </a:rPr>
+              <a:t>/</a:t>
+            </a:r>
+            <a:r>
+              <a:rPr lang="en-US" altLang="ko-KR" sz="1000" dirty="0"/>
+              <a:t>',  component: </a:t>
+            </a:r>
+            <a:r>
+              <a:rPr lang="en-US" altLang="ko-KR" sz="1000" dirty="0" err="1">
+                <a:solidFill>
+                  <a:srgbClr val="0070C0"/>
+                </a:solidFill>
+              </a:rPr>
+              <a:t>HomeView</a:t>
+            </a:r>
+            <a:r>
+              <a:rPr lang="en-US" altLang="ko-KR" sz="1000" dirty="0"/>
+              <a:t> },</a:t>
+            </a:r>
+          </a:p>
+          <a:p>
+            <a:pPr marL="342900" lvl="1" indent="0">
+              <a:lnSpc>
+                <a:spcPct val="50000"/>
+              </a:lnSpc>
+              <a:buNone/>
+            </a:pPr>
+            <a:r>
+              <a:rPr lang="en-US" altLang="ko-KR" sz="1000" dirty="0"/>
+              <a:t>    { path: '</a:t>
+            </a:r>
+            <a:r>
+              <a:rPr lang="en-US" altLang="ko-KR" sz="1000" dirty="0">
+                <a:solidFill>
+                  <a:srgbClr val="FF0000"/>
+                </a:solidFill>
+              </a:rPr>
+              <a:t>/home</a:t>
+            </a:r>
+            <a:r>
+              <a:rPr lang="en-US" altLang="ko-KR" sz="1000" dirty="0"/>
+              <a:t>',  component: </a:t>
+            </a:r>
+            <a:r>
+              <a:rPr lang="en-US" altLang="ko-KR" sz="1000" dirty="0" err="1">
+                <a:solidFill>
+                  <a:srgbClr val="0070C0"/>
+                </a:solidFill>
+              </a:rPr>
+              <a:t>HomeView</a:t>
+            </a:r>
+            <a:r>
+              <a:rPr lang="en-US" altLang="ko-KR" sz="1000" dirty="0"/>
+              <a:t> },</a:t>
+            </a:r>
+          </a:p>
+          <a:p>
+            <a:pPr marL="342900" lvl="1" indent="0">
+              <a:lnSpc>
+                <a:spcPct val="50000"/>
+              </a:lnSpc>
+              <a:buNone/>
+            </a:pPr>
+            <a:r>
+              <a:rPr lang="en-US" altLang="ko-KR" sz="1000" dirty="0"/>
+              <a:t>    { path: '</a:t>
+            </a:r>
+            <a:r>
+              <a:rPr lang="en-US" altLang="ko-KR" sz="1000" dirty="0">
+                <a:solidFill>
+                  <a:srgbClr val="FF0000"/>
+                </a:solidFill>
+              </a:rPr>
+              <a:t>/about</a:t>
+            </a:r>
+            <a:r>
+              <a:rPr lang="en-US" altLang="ko-KR" sz="1000" dirty="0"/>
+              <a:t>', component: </a:t>
+            </a:r>
+            <a:r>
+              <a:rPr lang="en-US" altLang="ko-KR" sz="1000" dirty="0" err="1">
+                <a:solidFill>
+                  <a:srgbClr val="0070C0"/>
+                </a:solidFill>
+              </a:rPr>
+              <a:t>AboutView</a:t>
+            </a:r>
+            <a:r>
+              <a:rPr lang="en-US" altLang="ko-KR" sz="1000" dirty="0"/>
+              <a:t> },</a:t>
+            </a:r>
+          </a:p>
+          <a:p>
+            <a:pPr marL="342900" lvl="1" indent="0">
+              <a:lnSpc>
+                <a:spcPct val="50000"/>
+              </a:lnSpc>
+              <a:buNone/>
+            </a:pPr>
+            <a:r>
+              <a:rPr lang="en-US" altLang="ko-KR" sz="1000" dirty="0"/>
+              <a:t>];</a:t>
+            </a:r>
+          </a:p>
+          <a:p>
+            <a:pPr marL="342900" lvl="1" indent="0">
+              <a:lnSpc>
+                <a:spcPct val="50000"/>
+              </a:lnSpc>
+              <a:buNone/>
+            </a:pPr>
+            <a:br>
+              <a:rPr lang="en-US" altLang="ko-KR" sz="1000" dirty="0"/>
+            </a:br>
+            <a:r>
+              <a:rPr lang="en-US" altLang="ko-KR" sz="1000" dirty="0"/>
+              <a:t>const router = </a:t>
+            </a:r>
+            <a:r>
+              <a:rPr lang="en-US" altLang="ko-KR" sz="1000" dirty="0" err="1"/>
+              <a:t>createRouter</a:t>
+            </a:r>
+            <a:r>
+              <a:rPr lang="en-US" altLang="ko-KR" sz="1000" dirty="0"/>
+              <a:t>({</a:t>
+            </a:r>
+          </a:p>
+          <a:p>
+            <a:pPr marL="342900" lvl="1" indent="0">
+              <a:lnSpc>
+                <a:spcPct val="50000"/>
+              </a:lnSpc>
+              <a:buNone/>
+            </a:pPr>
+            <a:r>
+              <a:rPr lang="en-US" altLang="ko-KR" sz="1000" dirty="0"/>
+              <a:t>        history: </a:t>
+            </a:r>
+            <a:r>
+              <a:rPr lang="en-US" altLang="ko-KR" sz="1000" dirty="0" err="1"/>
+              <a:t>createWebHistory</a:t>
+            </a:r>
+            <a:r>
+              <a:rPr lang="en-US" altLang="ko-KR" sz="1000" dirty="0"/>
+              <a:t>('/'),</a:t>
+            </a:r>
+          </a:p>
+          <a:p>
+            <a:pPr marL="342900" lvl="1" indent="0">
+              <a:lnSpc>
+                <a:spcPct val="50000"/>
+              </a:lnSpc>
+              <a:buNone/>
+            </a:pPr>
+            <a:r>
+              <a:rPr lang="en-US" altLang="ko-KR" sz="1000" dirty="0"/>
+              <a:t>        //history: </a:t>
+            </a:r>
+            <a:r>
+              <a:rPr lang="en-US" altLang="ko-KR" sz="1000" dirty="0" err="1"/>
+              <a:t>createMemoryHistory</a:t>
+            </a:r>
+            <a:r>
+              <a:rPr lang="en-US" altLang="ko-KR" sz="1000" dirty="0"/>
+              <a:t>(),</a:t>
+            </a:r>
+          </a:p>
+          <a:p>
+            <a:pPr marL="342900" lvl="1" indent="0">
+              <a:lnSpc>
+                <a:spcPct val="50000"/>
+              </a:lnSpc>
+              <a:buNone/>
+            </a:pPr>
+            <a:r>
+              <a:rPr lang="en-US" altLang="ko-KR" sz="1000" dirty="0"/>
+              <a:t>        routes,</a:t>
+            </a:r>
+          </a:p>
+          <a:p>
+            <a:pPr marL="342900" lvl="1" indent="0">
+              <a:lnSpc>
+                <a:spcPct val="50000"/>
+              </a:lnSpc>
+              <a:buNone/>
+            </a:pPr>
+            <a:r>
+              <a:rPr lang="en-US" altLang="ko-KR" sz="1000" dirty="0"/>
+              <a:t>    });</a:t>
+            </a:r>
+          </a:p>
+          <a:p>
+            <a:pPr marL="342900" lvl="1" indent="0">
+              <a:lnSpc>
+                <a:spcPct val="50000"/>
+              </a:lnSpc>
+              <a:buNone/>
+            </a:pPr>
+            <a:endParaRPr lang="en-US" altLang="ko-KR" sz="1000" dirty="0"/>
+          </a:p>
+          <a:p>
+            <a:pPr marL="342900" lvl="1" indent="0">
+              <a:lnSpc>
+                <a:spcPct val="50000"/>
+              </a:lnSpc>
+              <a:buNone/>
+            </a:pPr>
+            <a:r>
+              <a:rPr lang="en-US" altLang="ko-KR" sz="1000" dirty="0"/>
+              <a:t>export default router;</a:t>
+            </a:r>
+          </a:p>
+          <a:p>
+            <a:pPr marL="0" indent="0">
+              <a:lnSpc>
+                <a:spcPct val="50000"/>
+              </a:lnSpc>
+              <a:buNone/>
+            </a:pPr>
+            <a:r>
+              <a:rPr lang="en-US" altLang="ko-KR" sz="1000" dirty="0"/>
+              <a:t>}</a:t>
+            </a:r>
+          </a:p>
+          <a:p>
+            <a:pPr marL="0" indent="0">
+              <a:lnSpc>
+                <a:spcPct val="50000"/>
+              </a:lnSpc>
+              <a:buNone/>
+            </a:pPr>
+            <a:endParaRPr lang="en-US" altLang="ko-KR" sz="1000" dirty="0"/>
+          </a:p>
+          <a:p>
+            <a:pPr marL="0" indent="0">
+              <a:lnSpc>
+                <a:spcPct val="50000"/>
+              </a:lnSpc>
+              <a:buNone/>
+            </a:pPr>
+            <a:r>
+              <a:rPr lang="en-US" altLang="ko-KR" sz="1000" dirty="0" err="1"/>
+              <a:t>App.vue</a:t>
+            </a:r>
+            <a:endParaRPr lang="en-US" altLang="ko-KR" sz="1000" dirty="0"/>
+          </a:p>
+          <a:p>
+            <a:pPr marL="0" indent="0">
+              <a:lnSpc>
+                <a:spcPct val="50000"/>
+              </a:lnSpc>
+              <a:buNone/>
+            </a:pPr>
+            <a:r>
+              <a:rPr lang="en-US" altLang="ko-KR" sz="1000" dirty="0"/>
+              <a:t>{</a:t>
+            </a:r>
+          </a:p>
+          <a:p>
+            <a:pPr marL="342900" lvl="1" indent="0">
+              <a:lnSpc>
+                <a:spcPct val="50000"/>
+              </a:lnSpc>
+              <a:buNone/>
+            </a:pPr>
+            <a:r>
+              <a:rPr lang="en-US" altLang="ko-KR" sz="1000" dirty="0"/>
+              <a:t>&lt;template&gt;</a:t>
+            </a:r>
+          </a:p>
+          <a:p>
+            <a:pPr marL="342900" lvl="1" indent="0">
+              <a:lnSpc>
+                <a:spcPct val="50000"/>
+              </a:lnSpc>
+              <a:buNone/>
+            </a:pPr>
+            <a:r>
+              <a:rPr lang="en-US" altLang="ko-KR" sz="1000" dirty="0"/>
+              <a:t>  &lt;p&gt; </a:t>
+            </a:r>
+            <a:r>
+              <a:rPr lang="en-US" altLang="ko-KR" sz="1000" dirty="0">
+                <a:solidFill>
+                  <a:srgbClr val="0070C0"/>
+                </a:solidFill>
+              </a:rPr>
+              <a:t>{{ $</a:t>
+            </a:r>
+            <a:r>
+              <a:rPr lang="en-US" altLang="ko-KR" sz="1000" dirty="0" err="1">
+                <a:solidFill>
+                  <a:srgbClr val="0070C0"/>
+                </a:solidFill>
+              </a:rPr>
+              <a:t>route.fullPath</a:t>
+            </a:r>
+            <a:r>
+              <a:rPr lang="en-US" altLang="ko-KR" sz="1000" dirty="0">
+                <a:solidFill>
+                  <a:srgbClr val="0070C0"/>
+                </a:solidFill>
+              </a:rPr>
+              <a:t> }}</a:t>
+            </a:r>
+            <a:r>
+              <a:rPr lang="en-US" altLang="ko-KR" sz="1000" dirty="0"/>
+              <a:t>&lt;/p&gt;  </a:t>
+            </a:r>
+          </a:p>
+          <a:p>
+            <a:pPr marL="342900" lvl="1" indent="0">
+              <a:lnSpc>
+                <a:spcPct val="50000"/>
+              </a:lnSpc>
+              <a:buNone/>
+            </a:pPr>
+            <a:r>
+              <a:rPr lang="en-US" altLang="ko-KR" sz="1000" dirty="0"/>
+              <a:t>    &lt;</a:t>
+            </a:r>
+            <a:r>
+              <a:rPr lang="en-US" altLang="ko-KR" sz="1000" dirty="0" err="1">
+                <a:solidFill>
+                  <a:srgbClr val="FF0000"/>
+                </a:solidFill>
+              </a:rPr>
+              <a:t>RouterLink</a:t>
+            </a:r>
+            <a:r>
+              <a:rPr lang="en-US" altLang="ko-KR" sz="1000" dirty="0"/>
+              <a:t> to=‘/’&gt;Home&lt;/</a:t>
+            </a:r>
+            <a:r>
+              <a:rPr lang="en-US" altLang="ko-KR" sz="1000" dirty="0" err="1">
+                <a:solidFill>
+                  <a:srgbClr val="FF0000"/>
+                </a:solidFill>
+              </a:rPr>
+              <a:t>RouterLink</a:t>
+            </a:r>
+            <a:r>
+              <a:rPr lang="en-US" altLang="ko-KR" sz="1000" dirty="0"/>
+              <a:t>&gt;</a:t>
+            </a:r>
+          </a:p>
+          <a:p>
+            <a:pPr marL="342900" lvl="1" indent="0">
+              <a:lnSpc>
+                <a:spcPct val="50000"/>
+              </a:lnSpc>
+              <a:buNone/>
+            </a:pPr>
+            <a:r>
+              <a:rPr lang="en-US" altLang="ko-KR" sz="1000" dirty="0"/>
+              <a:t>    &lt;</a:t>
+            </a:r>
+            <a:r>
+              <a:rPr lang="en-US" altLang="ko-KR" sz="1000" dirty="0" err="1">
+                <a:solidFill>
+                  <a:srgbClr val="FF0000"/>
+                </a:solidFill>
+              </a:rPr>
+              <a:t>RouterLink</a:t>
+            </a:r>
+            <a:r>
+              <a:rPr lang="en-US" altLang="ko-KR" sz="1000" dirty="0"/>
+              <a:t> to=‘/about’&gt;About&lt;/</a:t>
+            </a:r>
+            <a:r>
+              <a:rPr lang="en-US" altLang="ko-KR" sz="1000" dirty="0" err="1">
+                <a:solidFill>
+                  <a:srgbClr val="FF0000"/>
+                </a:solidFill>
+              </a:rPr>
+              <a:t>RouterLink</a:t>
+            </a:r>
+            <a:r>
+              <a:rPr lang="en-US" altLang="ko-KR" sz="1000" dirty="0"/>
+              <a:t>&gt;</a:t>
+            </a:r>
+          </a:p>
+          <a:p>
+            <a:pPr marL="342900" lvl="1" indent="0">
+              <a:lnSpc>
+                <a:spcPct val="50000"/>
+              </a:lnSpc>
+              <a:buNone/>
+            </a:pPr>
+            <a:r>
+              <a:rPr lang="it-IT" altLang="ko-KR" sz="1000" dirty="0">
+                <a:solidFill>
+                  <a:schemeClr val="accent5"/>
+                </a:solidFill>
+              </a:rPr>
+              <a:t>    &lt;button @click="this.$router.push('control')"&gt;sd&lt;/button&gt;</a:t>
+            </a:r>
+            <a:endParaRPr lang="en-US" altLang="ko-KR" sz="1000" dirty="0">
+              <a:solidFill>
+                <a:schemeClr val="accent5"/>
+              </a:solidFill>
+            </a:endParaRPr>
+          </a:p>
+          <a:p>
+            <a:pPr marL="342900" lvl="1" indent="0">
+              <a:lnSpc>
+                <a:spcPct val="50000"/>
+              </a:lnSpc>
+              <a:buNone/>
+            </a:pPr>
+            <a:r>
+              <a:rPr lang="en-US" altLang="ko-KR" sz="1000" dirty="0">
+                <a:solidFill>
+                  <a:srgbClr val="00B050"/>
+                </a:solidFill>
+              </a:rPr>
+              <a:t>    &lt;button</a:t>
+            </a:r>
+            <a:r>
+              <a:rPr lang="ko-KR" altLang="en-US" sz="1000" dirty="0">
+                <a:solidFill>
+                  <a:srgbClr val="00B050"/>
+                </a:solidFill>
+              </a:rPr>
+              <a:t> </a:t>
+            </a:r>
+            <a:r>
+              <a:rPr lang="en-US" altLang="ko-KR" sz="1000" dirty="0">
+                <a:solidFill>
+                  <a:srgbClr val="00B050"/>
+                </a:solidFill>
+              </a:rPr>
+              <a:t>@click=“GoMenu(‘/home’)”&gt;</a:t>
+            </a:r>
+          </a:p>
+          <a:p>
+            <a:pPr marL="342900" lvl="1" indent="0">
+              <a:lnSpc>
+                <a:spcPct val="50000"/>
+              </a:lnSpc>
+              <a:buNone/>
+            </a:pPr>
+            <a:r>
+              <a:rPr lang="en-US" altLang="ko-KR" sz="1000" dirty="0"/>
+              <a:t>  &lt;</a:t>
+            </a:r>
+            <a:r>
+              <a:rPr lang="en-US" altLang="ko-KR" sz="1000" dirty="0" err="1">
+                <a:solidFill>
+                  <a:srgbClr val="FF0000"/>
+                </a:solidFill>
+              </a:rPr>
+              <a:t>RouterView</a:t>
+            </a:r>
+            <a:r>
+              <a:rPr lang="en-US" altLang="ko-KR" sz="1000" dirty="0"/>
+              <a:t> /&gt;</a:t>
+            </a:r>
+          </a:p>
+          <a:p>
+            <a:pPr marL="342900" lvl="1" indent="0">
+              <a:lnSpc>
+                <a:spcPct val="50000"/>
+              </a:lnSpc>
+              <a:buNone/>
+            </a:pPr>
+            <a:r>
+              <a:rPr lang="en-US" altLang="ko-KR" sz="1000" dirty="0"/>
+              <a:t>&lt;/template&gt;</a:t>
+            </a:r>
+          </a:p>
+          <a:p>
+            <a:pPr marL="342900" lvl="1" indent="0">
+              <a:lnSpc>
+                <a:spcPct val="50000"/>
+              </a:lnSpc>
+              <a:buNone/>
+            </a:pPr>
+            <a:endParaRPr lang="en-US" altLang="ko-KR" sz="1000" dirty="0"/>
+          </a:p>
+          <a:p>
+            <a:pPr marL="342900" lvl="1" indent="0">
+              <a:lnSpc>
+                <a:spcPct val="50000"/>
+              </a:lnSpc>
+              <a:buNone/>
+            </a:pPr>
+            <a:r>
+              <a:rPr lang="en-US" altLang="ko-KR" sz="1000" dirty="0">
+                <a:solidFill>
+                  <a:srgbClr val="00B050"/>
+                </a:solidFill>
+              </a:rPr>
+              <a:t>&lt;script&gt;</a:t>
+            </a:r>
+          </a:p>
+          <a:p>
+            <a:pPr marL="342900" lvl="1" indent="0">
+              <a:lnSpc>
+                <a:spcPct val="50000"/>
+              </a:lnSpc>
+              <a:buNone/>
+            </a:pPr>
+            <a:r>
+              <a:rPr lang="en-US" altLang="ko-KR" sz="1000" dirty="0">
+                <a:solidFill>
+                  <a:srgbClr val="00B050"/>
+                </a:solidFill>
+              </a:rPr>
+              <a:t>export default</a:t>
+            </a:r>
+          </a:p>
+          <a:p>
+            <a:pPr marL="342900" lvl="1" indent="0">
+              <a:lnSpc>
+                <a:spcPct val="50000"/>
+              </a:lnSpc>
+              <a:buNone/>
+            </a:pPr>
+            <a:r>
+              <a:rPr lang="en-US" altLang="ko-KR" sz="1000" dirty="0">
+                <a:solidFill>
+                  <a:srgbClr val="00B050"/>
+                </a:solidFill>
+              </a:rPr>
+              <a:t>{</a:t>
+            </a:r>
+          </a:p>
+          <a:p>
+            <a:pPr marL="342900" lvl="1" indent="0">
+              <a:lnSpc>
+                <a:spcPct val="50000"/>
+              </a:lnSpc>
+              <a:buNone/>
+            </a:pPr>
+            <a:r>
+              <a:rPr lang="en-US" altLang="ko-KR" sz="1000" dirty="0">
+                <a:solidFill>
+                  <a:srgbClr val="00B050"/>
+                </a:solidFill>
+              </a:rPr>
+              <a:t>	methods: {</a:t>
+            </a:r>
+          </a:p>
+          <a:p>
+            <a:pPr marL="342900" lvl="1" indent="0">
+              <a:lnSpc>
+                <a:spcPct val="50000"/>
+              </a:lnSpc>
+              <a:buNone/>
+            </a:pPr>
+            <a:r>
+              <a:rPr lang="en-US" altLang="ko-KR" sz="1000" dirty="0">
+                <a:solidFill>
+                  <a:srgbClr val="00B050"/>
+                </a:solidFill>
+              </a:rPr>
+              <a:t>	    </a:t>
+            </a:r>
+            <a:r>
+              <a:rPr lang="en-US" altLang="ko-KR" sz="1000" dirty="0" err="1">
+                <a:solidFill>
+                  <a:srgbClr val="00B050"/>
+                </a:solidFill>
+              </a:rPr>
+              <a:t>GoMenu</a:t>
+            </a:r>
+            <a:r>
+              <a:rPr lang="en-US" altLang="ko-KR" sz="1000" dirty="0">
+                <a:solidFill>
+                  <a:srgbClr val="00B050"/>
+                </a:solidFill>
+              </a:rPr>
+              <a:t>(path)</a:t>
+            </a:r>
+          </a:p>
+          <a:p>
+            <a:pPr marL="342900" lvl="1" indent="0">
+              <a:lnSpc>
+                <a:spcPct val="50000"/>
+              </a:lnSpc>
+              <a:buNone/>
+            </a:pPr>
+            <a:r>
+              <a:rPr lang="en-US" altLang="ko-KR" sz="1000" dirty="0">
+                <a:solidFill>
+                  <a:srgbClr val="00B050"/>
+                </a:solidFill>
+              </a:rPr>
+              <a:t>	    {</a:t>
+            </a:r>
+          </a:p>
+          <a:p>
+            <a:pPr marL="342900" lvl="1" indent="0">
+              <a:lnSpc>
+                <a:spcPct val="50000"/>
+              </a:lnSpc>
+              <a:buNone/>
+            </a:pPr>
+            <a:r>
+              <a:rPr lang="en-US" altLang="ko-KR" sz="1000" dirty="0">
+                <a:solidFill>
+                  <a:srgbClr val="00B050"/>
+                </a:solidFill>
+              </a:rPr>
+              <a:t>	        this.$</a:t>
+            </a:r>
+            <a:r>
+              <a:rPr lang="en-US" altLang="ko-KR" sz="1000" dirty="0" err="1">
+                <a:solidFill>
+                  <a:srgbClr val="00B050"/>
+                </a:solidFill>
+              </a:rPr>
+              <a:t>router.push</a:t>
+            </a:r>
+            <a:r>
+              <a:rPr lang="en-US" altLang="ko-KR" sz="1000" dirty="0">
+                <a:solidFill>
+                  <a:srgbClr val="00B050"/>
+                </a:solidFill>
+              </a:rPr>
+              <a:t>(path);</a:t>
+            </a:r>
+          </a:p>
+          <a:p>
+            <a:pPr marL="342900" lvl="1" indent="0">
+              <a:lnSpc>
+                <a:spcPct val="50000"/>
+              </a:lnSpc>
+              <a:buNone/>
+            </a:pPr>
+            <a:r>
+              <a:rPr lang="en-US" altLang="ko-KR" sz="1000" dirty="0">
+                <a:solidFill>
+                  <a:srgbClr val="00B050"/>
+                </a:solidFill>
+              </a:rPr>
+              <a:t>	    }</a:t>
+            </a:r>
+          </a:p>
+          <a:p>
+            <a:pPr marL="342900" lvl="1" indent="0">
+              <a:lnSpc>
+                <a:spcPct val="50000"/>
+              </a:lnSpc>
+              <a:buNone/>
+            </a:pPr>
+            <a:r>
+              <a:rPr lang="en-US" altLang="ko-KR" sz="1000" dirty="0">
+                <a:solidFill>
+                  <a:srgbClr val="00B050"/>
+                </a:solidFill>
+              </a:rPr>
+              <a:t>	}</a:t>
+            </a:r>
+          </a:p>
+          <a:p>
+            <a:pPr marL="342900" lvl="1" indent="0">
+              <a:lnSpc>
+                <a:spcPct val="50000"/>
+              </a:lnSpc>
+              <a:buNone/>
+            </a:pPr>
+            <a:r>
+              <a:rPr lang="en-US" altLang="ko-KR" sz="1000" dirty="0">
+                <a:solidFill>
+                  <a:srgbClr val="00B050"/>
+                </a:solidFill>
+              </a:rPr>
+              <a:t>}</a:t>
+            </a:r>
+          </a:p>
+          <a:p>
+            <a:pPr marL="342900" lvl="1" indent="0">
+              <a:lnSpc>
+                <a:spcPct val="50000"/>
+              </a:lnSpc>
+              <a:buNone/>
+            </a:pPr>
+            <a:r>
+              <a:rPr lang="en-US" altLang="ko-KR" sz="1000" dirty="0">
+                <a:solidFill>
+                  <a:srgbClr val="00B050"/>
+                </a:solidFill>
+              </a:rPr>
+              <a:t>&lt;/script&gt;</a:t>
+            </a:r>
+          </a:p>
+          <a:p>
+            <a:pPr marL="0" indent="0">
+              <a:lnSpc>
+                <a:spcPct val="50000"/>
+              </a:lnSpc>
+              <a:buNone/>
+            </a:pPr>
+            <a:r>
+              <a:rPr lang="en-US" altLang="ko-KR" sz="1000" dirty="0"/>
+              <a:t>}</a:t>
+            </a:r>
+          </a:p>
+          <a:p>
+            <a:pPr marL="0" indent="0">
+              <a:lnSpc>
+                <a:spcPct val="50000"/>
+              </a:lnSpc>
+              <a:buNone/>
+            </a:pPr>
+            <a:endParaRPr lang="en-US" altLang="ko-KR" sz="1000" dirty="0"/>
+          </a:p>
+          <a:p>
+            <a:pPr marL="0" indent="0">
+              <a:lnSpc>
+                <a:spcPct val="50000"/>
+              </a:lnSpc>
+              <a:buNone/>
+            </a:pPr>
+            <a:r>
+              <a:rPr lang="en-US" altLang="ko-KR" sz="1000" dirty="0"/>
+              <a:t>main.js</a:t>
+            </a:r>
+          </a:p>
+          <a:p>
+            <a:pPr marL="0" indent="0">
+              <a:lnSpc>
+                <a:spcPct val="50000"/>
+              </a:lnSpc>
+              <a:buNone/>
+            </a:pPr>
+            <a:r>
+              <a:rPr lang="en-US" altLang="ko-KR" sz="1000" dirty="0"/>
+              <a:t>{</a:t>
+            </a:r>
+          </a:p>
+          <a:p>
+            <a:pPr marL="342900" lvl="1" indent="0">
+              <a:lnSpc>
+                <a:spcPct val="50000"/>
+              </a:lnSpc>
+              <a:buNone/>
+            </a:pPr>
+            <a:r>
+              <a:rPr lang="fr-FR" altLang="ko-KR" sz="1000" dirty="0"/>
+              <a:t>// vue-router</a:t>
+            </a:r>
+          </a:p>
+          <a:p>
+            <a:pPr marL="342900" lvl="1" indent="0">
+              <a:lnSpc>
+                <a:spcPct val="50000"/>
+              </a:lnSpc>
+              <a:buNone/>
+            </a:pPr>
+            <a:r>
+              <a:rPr lang="fr-FR" altLang="ko-KR" sz="1000" dirty="0"/>
+              <a:t>import router from '@/router/index.js’    </a:t>
+            </a:r>
+            <a:r>
+              <a:rPr lang="fr-FR" altLang="ko-KR" sz="1000" dirty="0">
+                <a:solidFill>
+                  <a:schemeClr val="bg1">
+                    <a:lumMod val="65000"/>
+                  </a:schemeClr>
+                </a:solidFill>
+              </a:rPr>
+              <a:t>// import router from '@/router'</a:t>
+            </a:r>
+            <a:br>
+              <a:rPr lang="fr-FR" altLang="ko-KR" sz="1000" dirty="0">
+                <a:solidFill>
+                  <a:schemeClr val="bg1">
+                    <a:lumMod val="65000"/>
+                  </a:schemeClr>
+                </a:solidFill>
+              </a:rPr>
+            </a:br>
+            <a:endParaRPr lang="fr-FR" altLang="ko-KR" sz="1000" dirty="0">
+              <a:solidFill>
+                <a:schemeClr val="bg1">
+                  <a:lumMod val="65000"/>
+                </a:schemeClr>
+              </a:solidFill>
+            </a:endParaRPr>
+          </a:p>
+          <a:p>
+            <a:pPr marL="342900" lvl="1" indent="0">
+              <a:lnSpc>
+                <a:spcPct val="50000"/>
+              </a:lnSpc>
+              <a:buNone/>
+            </a:pPr>
+            <a:r>
+              <a:rPr lang="fr-FR" altLang="ko-KR" sz="1000" dirty="0"/>
+              <a:t>createApp(App).</a:t>
+            </a:r>
+            <a:r>
+              <a:rPr lang="fr-FR" altLang="ko-KR" sz="1000" dirty="0">
+                <a:solidFill>
+                  <a:srgbClr val="FF0000"/>
+                </a:solidFill>
+              </a:rPr>
+              <a:t>use(router)</a:t>
+            </a:r>
+            <a:r>
+              <a:rPr lang="fr-FR" altLang="ko-KR" sz="1000" dirty="0"/>
+              <a:t>.mount('#app')</a:t>
+            </a:r>
+            <a:endParaRPr lang="en-US" altLang="ko-KR" sz="1000" dirty="0"/>
+          </a:p>
+          <a:p>
+            <a:pPr marL="0" indent="0">
+              <a:lnSpc>
+                <a:spcPct val="50000"/>
+              </a:lnSpc>
+              <a:buNone/>
+            </a:pPr>
+            <a:r>
+              <a:rPr lang="en-US" altLang="ko-KR" sz="1000" dirty="0"/>
+              <a:t>}</a:t>
+            </a:r>
+            <a:endParaRPr lang="ko-KR" altLang="en-US" sz="1000" dirty="0"/>
+          </a:p>
+        </p:txBody>
+      </p:sp>
+    </p:spTree>
+    <p:extLst>
+      <p:ext uri="{BB962C8B-B14F-4D97-AF65-F5344CB8AC3E}">
+        <p14:creationId xmlns:p14="http://schemas.microsoft.com/office/powerpoint/2010/main" val="2359618191"/>
+      </p:ext>
+    </p:extLst>
+  </p:cSld>
+  <p:clrMapOvr>
+    <a:masterClrMapping/>
+  </p:clrMapOvr>
+</p:sld>
+</file>
+
+<file path=ppt/slides/slide7.xml><?xml version="1.0" encoding="utf-8"?>
+<p:sld xmlns:a="http://schemas.openxmlformats.org/drawingml/2006/main" xmlns:r="http://schemas.openxmlformats.org/officeDocument/2006/relationships" xmlns:p="http://schemas.openxmlformats.org/presentationml/2006/main">
+  <p:cSld>
+    <p:spTree>
+      <p:nvGrpSpPr>
+        <p:cNvPr id="1" name=""/>
+        <p:cNvGrpSpPr/>
+        <p:nvPr/>
+      </p:nvGrpSpPr>
+      <p:grpSpPr>
+        <a:xfrm>
+          <a:off x="0" y="0"/>
+          <a:ext cx="0" cy="0"/>
+          <a:chOff x="0" y="0"/>
+          <a:chExt cx="0" cy="0"/>
+        </a:xfrm>
+      </p:grpSpPr>
+      <p:sp>
+        <p:nvSpPr>
+          <p:cNvPr id="2" name="제목 1">
+            <a:extLst>
+              <a:ext uri="{FF2B5EF4-FFF2-40B4-BE49-F238E27FC236}">
                 <a16:creationId xmlns:a16="http://schemas.microsoft.com/office/drawing/2014/main" id="{EFBFC305-4B5A-94B8-A925-D0F01F378E60}"/>
               </a:ext>
             </a:extLst>
@@ -4905,7 +5327,9 @@
         </p:nvSpPr>
         <p:spPr/>
         <p:txBody>
-          <a:bodyPr/>
+          <a:bodyPr>
+            <a:normAutofit fontScale="55000" lnSpcReduction="20000"/>
+          </a:bodyPr>
           <a:lstStyle/>
           <a:p>
             <a:pPr marL="0" indent="0">
@@ -4913,7 +5337,29 @@
             </a:pPr>
             <a:r>
               <a:rPr lang="en-US" altLang="ko-KR" dirty="0"/>
-              <a:t>/.env</a:t>
+              <a:t>// </a:t>
+            </a:r>
+            <a:r>
+              <a:rPr lang="en-US" altLang="ko-KR" dirty="0" err="1"/>
+              <a:t>dotenv</a:t>
+            </a:r>
+            <a:r>
+              <a:rPr lang="en-US" altLang="ko-KR" dirty="0"/>
+              <a:t> </a:t>
+            </a:r>
+            <a:r>
+              <a:rPr lang="ko-KR" altLang="en-US" dirty="0"/>
+              <a:t>사용</a:t>
+            </a:r>
+            <a:endParaRPr lang="en-US" altLang="ko-KR" dirty="0"/>
+          </a:p>
+          <a:p>
+            <a:pPr marL="0" indent="0">
+              <a:buNone/>
+            </a:pPr>
+            <a:r>
+              <a:rPr lang="en-US" altLang="ko-KR" dirty="0"/>
+              <a:t>.env</a:t>
             </a:r>
           </a:p>
           <a:p>
@@ -4980,12 +5426,6 @@
             <a:pPr marL="0" indent="0">
               <a:buNone/>
             </a:pPr>
-            <a:endParaRPr lang="en-US" altLang="ko-KR" dirty="0"/>
-          </a:p>
-          <a:p>
-            <a:pPr marL="0" indent="0">
-              <a:buNone/>
-            </a:pPr>
             <a:r>
               <a:rPr lang="en-US" altLang="ko-KR" dirty="0"/>
               <a:t>console.log( </a:t>
@@ -5026,6 +5466,525 @@
               <a:rPr lang="en-US" altLang="ko-KR" dirty="0"/>
               <a:t>);</a:t>
             </a:r>
+          </a:p>
+          <a:p>
+            <a:pPr marL="0" indent="0">
+              <a:buNone/>
+            </a:pPr>
+            <a:endParaRPr lang="en-US" altLang="ko-KR" dirty="0"/>
+          </a:p>
+          <a:p>
+            <a:pPr marL="0" indent="0">
+              <a:buNone/>
+            </a:pPr>
+            <a:r>
+              <a:rPr lang="en-US" altLang="ko-KR" dirty="0"/>
+              <a:t>// </a:t>
+            </a:r>
+            <a:r>
+              <a:rPr lang="ko-KR" altLang="en-US" dirty="0"/>
+              <a:t>전역변수 사용</a:t>
+            </a:r>
+            <a:endParaRPr lang="en-US" altLang="ko-KR" dirty="0"/>
+          </a:p>
+          <a:p>
+            <a:pPr marL="0" indent="0">
+              <a:buNone/>
+            </a:pPr>
+            <a:r>
+              <a:rPr lang="en-US" altLang="ko-KR" dirty="0"/>
+              <a:t>main.js</a:t>
+            </a:r>
+          </a:p>
+          <a:p>
+            <a:pPr marL="0" indent="0">
+              <a:buNone/>
+            </a:pPr>
+            <a:r>
+              <a:rPr lang="en-US" altLang="ko-KR" dirty="0"/>
+              <a:t>{</a:t>
+            </a:r>
+          </a:p>
+          <a:p>
+            <a:pPr marL="0" indent="0">
+              <a:buNone/>
+            </a:pPr>
+            <a:r>
+              <a:rPr lang="en-US" altLang="ko-KR" dirty="0" err="1">
+                <a:solidFill>
+                  <a:srgbClr val="00B050"/>
+                </a:solidFill>
+              </a:rPr>
+              <a:t>app.provide</a:t>
+            </a:r>
+            <a:r>
+              <a:rPr lang="en-US" altLang="ko-KR" dirty="0">
+                <a:solidFill>
+                  <a:srgbClr val="00B050"/>
+                </a:solidFill>
+              </a:rPr>
+              <a:t>("$title", "</a:t>
+            </a:r>
+            <a:r>
+              <a:rPr lang="ko-KR" altLang="en-US" dirty="0">
+                <a:solidFill>
+                  <a:srgbClr val="00B050"/>
+                </a:solidFill>
+              </a:rPr>
+              <a:t>운영지원시스템</a:t>
+            </a:r>
+            <a:r>
+              <a:rPr lang="en-US" altLang="ko-KR" dirty="0">
+                <a:solidFill>
+                  <a:srgbClr val="00B050"/>
+                </a:solidFill>
+              </a:rPr>
+              <a:t>");</a:t>
+            </a:r>
+          </a:p>
+          <a:p>
+            <a:pPr marL="0" indent="0">
+              <a:buNone/>
+            </a:pPr>
+            <a:r>
+              <a:rPr lang="en-US" altLang="ko-KR" dirty="0">
+                <a:solidFill>
+                  <a:srgbClr val="0070C0"/>
+                </a:solidFill>
+              </a:rPr>
+              <a:t>app.config.</a:t>
+            </a:r>
+            <a:r>
+              <a:rPr lang="en-US" altLang="ko-KR" dirty="0" err="1">
+                <a:solidFill>
+                  <a:srgbClr val="0070C0"/>
+                </a:solidFill>
+              </a:rPr>
+              <a:t>globalProperties</a:t>
+            </a:r>
+            <a:r>
+              <a:rPr lang="en-US" altLang="ko-KR" dirty="0">
+                <a:solidFill>
+                  <a:srgbClr val="0070C0"/>
+                </a:solidFill>
+              </a:rPr>
+              <a:t>.$title = "</a:t>
+            </a:r>
+            <a:r>
+              <a:rPr lang="ko-KR" altLang="en-US" dirty="0">
+                <a:solidFill>
+                  <a:srgbClr val="0070C0"/>
+                </a:solidFill>
+              </a:rPr>
+              <a:t>운영지원시스템</a:t>
+            </a:r>
+            <a:r>
+              <a:rPr lang="en-US" altLang="ko-KR" dirty="0">
+                <a:solidFill>
+                  <a:srgbClr val="0070C0"/>
+                </a:solidFill>
+              </a:rPr>
+              <a:t>";</a:t>
+            </a:r>
+          </a:p>
+          <a:p>
+            <a:pPr marL="0" indent="0">
+              <a:buNone/>
+            </a:pPr>
+            <a:r>
+              <a:rPr lang="en-US" altLang="ko-KR" dirty="0"/>
+              <a:t>}</a:t>
+            </a:r>
+          </a:p>
+          <a:p>
+            <a:pPr marL="0" indent="0">
+              <a:buNone/>
+            </a:pPr>
+            <a:endParaRPr lang="en-US" altLang="ko-KR" dirty="0"/>
+          </a:p>
+          <a:p>
+            <a:pPr marL="0" indent="0">
+              <a:buNone/>
+            </a:pPr>
+            <a:r>
+              <a:rPr lang="en-US" altLang="ko-KR" dirty="0">
+                <a:solidFill>
+                  <a:srgbClr val="00B050"/>
+                </a:solidFill>
+              </a:rPr>
+              <a:t>//script setup </a:t>
+            </a:r>
+            <a:r>
+              <a:rPr lang="ko-KR" altLang="en-US" dirty="0">
+                <a:solidFill>
+                  <a:srgbClr val="00B050"/>
+                </a:solidFill>
+              </a:rPr>
+              <a:t>스타일</a:t>
+            </a:r>
+            <a:endParaRPr lang="en-US" altLang="ko-KR" dirty="0">
+              <a:solidFill>
+                <a:srgbClr val="00B050"/>
+              </a:solidFill>
+            </a:endParaRPr>
+          </a:p>
+          <a:p>
+            <a:pPr marL="0" indent="0">
+              <a:buNone/>
+            </a:pPr>
+            <a:r>
+              <a:rPr lang="en-US" altLang="ko-KR" dirty="0">
+                <a:solidFill>
+                  <a:srgbClr val="00B050"/>
+                </a:solidFill>
+              </a:rPr>
+              <a:t>&lt;script setup&gt;</a:t>
+            </a:r>
+          </a:p>
+          <a:p>
+            <a:pPr marL="0" indent="0">
+              <a:buNone/>
+            </a:pPr>
+            <a:r>
+              <a:rPr lang="en-US" altLang="ko-KR" dirty="0">
+                <a:solidFill>
+                  <a:srgbClr val="00B050"/>
+                </a:solidFill>
+              </a:rPr>
+              <a:t>import { </a:t>
+            </a:r>
+            <a:r>
+              <a:rPr lang="en-US" altLang="ko-KR" dirty="0" err="1">
+                <a:solidFill>
+                  <a:srgbClr val="00B050"/>
+                </a:solidFill>
+              </a:rPr>
+              <a:t>onMounted</a:t>
+            </a:r>
+            <a:r>
+              <a:rPr lang="en-US" altLang="ko-KR" dirty="0">
+                <a:solidFill>
+                  <a:srgbClr val="00B050"/>
+                </a:solidFill>
+              </a:rPr>
+              <a:t> , inject } from '</a:t>
+            </a:r>
+            <a:r>
+              <a:rPr lang="en-US" altLang="ko-KR" dirty="0" err="1">
+                <a:solidFill>
+                  <a:srgbClr val="00B050"/>
+                </a:solidFill>
+              </a:rPr>
+              <a:t>vue</a:t>
+            </a:r>
+            <a:r>
+              <a:rPr lang="en-US" altLang="ko-KR" dirty="0">
+                <a:solidFill>
+                  <a:srgbClr val="00B050"/>
+                </a:solidFill>
+              </a:rPr>
+              <a:t>’;</a:t>
+            </a:r>
+          </a:p>
+          <a:p>
+            <a:pPr marL="0" indent="0">
+              <a:buNone/>
+            </a:pPr>
+            <a:endParaRPr lang="en-US" altLang="ko-KR" dirty="0">
+              <a:solidFill>
+                <a:srgbClr val="00B050"/>
+              </a:solidFill>
+            </a:endParaRPr>
+          </a:p>
+          <a:p>
+            <a:pPr marL="0" indent="0">
+              <a:buNone/>
+            </a:pPr>
+            <a:r>
+              <a:rPr lang="en-US" altLang="ko-KR" dirty="0" err="1">
+                <a:solidFill>
+                  <a:srgbClr val="00B050"/>
+                </a:solidFill>
+              </a:rPr>
+              <a:t>onMounted</a:t>
+            </a:r>
+            <a:r>
+              <a:rPr lang="en-US" altLang="ko-KR" dirty="0">
+                <a:solidFill>
+                  <a:srgbClr val="00B050"/>
+                </a:solidFill>
+              </a:rPr>
+              <a:t>(() =&gt; {</a:t>
+            </a:r>
+          </a:p>
+          <a:p>
+            <a:pPr marL="0" indent="0">
+              <a:buNone/>
+            </a:pPr>
+            <a:r>
+              <a:rPr lang="en-US" altLang="ko-KR" dirty="0">
+                <a:solidFill>
+                  <a:srgbClr val="00B050"/>
+                </a:solidFill>
+              </a:rPr>
+              <a:t>    console.log(Mounted’);</a:t>
+            </a:r>
+          </a:p>
+          <a:p>
+            <a:pPr marL="0" indent="0">
+              <a:buNone/>
+            </a:pPr>
+            <a:r>
+              <a:rPr lang="en-US" altLang="ko-KR" dirty="0">
+                <a:solidFill>
+                  <a:srgbClr val="00B050"/>
+                </a:solidFill>
+              </a:rPr>
+              <a:t>    console.log(`</a:t>
+            </a:r>
+            <a:r>
+              <a:rPr lang="ko-KR" altLang="en-US" dirty="0">
+                <a:solidFill>
+                  <a:srgbClr val="00B050"/>
+                </a:solidFill>
+              </a:rPr>
+              <a:t>프로그램 시작</a:t>
+            </a:r>
+            <a:r>
+              <a:rPr lang="en-US" altLang="ko-KR" dirty="0">
+                <a:solidFill>
+                  <a:srgbClr val="00B050"/>
+                </a:solidFill>
+              </a:rPr>
+              <a:t>! (${inject('$title')})`);</a:t>
+            </a:r>
+          </a:p>
+          <a:p>
+            <a:pPr marL="0" indent="0">
+              <a:buNone/>
+            </a:pPr>
+            <a:r>
+              <a:rPr lang="en-US" altLang="ko-KR" dirty="0">
+                <a:solidFill>
+                  <a:srgbClr val="00B050"/>
+                </a:solidFill>
+              </a:rPr>
+              <a:t>});</a:t>
+            </a:r>
+            <a:br>
+              <a:rPr lang="en-US" altLang="ko-KR" dirty="0">
+                <a:solidFill>
+                  <a:srgbClr val="00B050"/>
+                </a:solidFill>
+              </a:rPr>
+            </a:br>
+            <a:r>
+              <a:rPr lang="en-US" altLang="ko-KR" dirty="0">
+                <a:solidFill>
+                  <a:srgbClr val="00B050"/>
+                </a:solidFill>
+              </a:rPr>
+              <a:t>&lt;/script&gt;</a:t>
+            </a:r>
+          </a:p>
+          <a:p>
+            <a:pPr marL="0" indent="0">
+              <a:buNone/>
+            </a:pPr>
+            <a:endParaRPr lang="en-US" altLang="ko-KR" dirty="0"/>
+          </a:p>
+          <a:p>
+            <a:pPr marL="0" indent="0">
+              <a:buNone/>
+            </a:pPr>
+            <a:r>
+              <a:rPr lang="en-US" altLang="ko-KR" dirty="0">
+                <a:solidFill>
+                  <a:srgbClr val="0070C0"/>
+                </a:solidFill>
+              </a:rPr>
+              <a:t>//Options </a:t>
+            </a:r>
+            <a:r>
+              <a:rPr lang="ko-KR" altLang="en-US" dirty="0">
+                <a:solidFill>
+                  <a:srgbClr val="0070C0"/>
+                </a:solidFill>
+              </a:rPr>
+              <a:t>스타일</a:t>
+            </a:r>
+            <a:endParaRPr lang="en-US" altLang="ko-KR" dirty="0">
+              <a:solidFill>
+                <a:srgbClr val="0070C0"/>
+              </a:solidFill>
+            </a:endParaRPr>
+          </a:p>
+          <a:p>
+            <a:pPr marL="0" indent="0">
+              <a:buNone/>
+            </a:pPr>
+            <a:r>
+              <a:rPr lang="en-US" altLang="ko-KR" dirty="0">
+                <a:solidFill>
+                  <a:srgbClr val="0070C0"/>
+                </a:solidFill>
+              </a:rPr>
+              <a:t>&lt;script&gt;</a:t>
+            </a:r>
+          </a:p>
+          <a:p>
+            <a:pPr marL="0" indent="0">
+              <a:buNone/>
+            </a:pPr>
+            <a:r>
+              <a:rPr lang="en-US" altLang="ko-KR" dirty="0">
+                <a:solidFill>
+                  <a:srgbClr val="0070C0"/>
+                </a:solidFill>
+              </a:rPr>
+              <a:t>export default {</a:t>
+            </a:r>
+          </a:p>
+          <a:p>
+            <a:pPr marL="0" indent="0">
+              <a:buNone/>
+            </a:pPr>
+            <a:r>
+              <a:rPr lang="en-US" altLang="ko-KR" dirty="0">
+                <a:solidFill>
+                  <a:srgbClr val="0070C0"/>
+                </a:solidFill>
+              </a:rPr>
+              <a:t>  name: 'App',</a:t>
+            </a:r>
+          </a:p>
+          <a:p>
+            <a:pPr marL="0" indent="0">
+              <a:buNone/>
+            </a:pPr>
+            <a:r>
+              <a:rPr lang="en-US" altLang="ko-KR" dirty="0">
+                <a:solidFill>
+                  <a:srgbClr val="0070C0"/>
+                </a:solidFill>
+              </a:rPr>
+              <a:t>  components: {  },</a:t>
+            </a:r>
+          </a:p>
+          <a:p>
+            <a:pPr marL="0" indent="0">
+              <a:buNone/>
+            </a:pPr>
+            <a:r>
+              <a:rPr lang="en-US" altLang="ko-KR" dirty="0">
+                <a:solidFill>
+                  <a:srgbClr val="0070C0"/>
+                </a:solidFill>
+              </a:rPr>
+              <a:t>  created() {</a:t>
+            </a:r>
+          </a:p>
+          <a:p>
+            <a:pPr marL="0" indent="0">
+              <a:buNone/>
+            </a:pPr>
+            <a:r>
+              <a:rPr lang="en-US" altLang="ko-KR" dirty="0">
+                <a:solidFill>
+                  <a:srgbClr val="0070C0"/>
+                </a:solidFill>
+              </a:rPr>
+              <a:t>    console.log(`</a:t>
+            </a:r>
+            <a:r>
+              <a:rPr lang="ko-KR" altLang="en-US" dirty="0">
+                <a:solidFill>
+                  <a:srgbClr val="0070C0"/>
+                </a:solidFill>
+              </a:rPr>
+              <a:t>프로그램 시작</a:t>
+            </a:r>
+            <a:r>
+              <a:rPr lang="en-US" altLang="ko-KR" dirty="0">
+                <a:solidFill>
+                  <a:srgbClr val="0070C0"/>
+                </a:solidFill>
+              </a:rPr>
+              <a:t>! (${</a:t>
+            </a:r>
+            <a:r>
+              <a:rPr lang="en-US" altLang="ko-KR" dirty="0" err="1">
+                <a:solidFill>
+                  <a:srgbClr val="0070C0"/>
+                </a:solidFill>
+              </a:rPr>
+              <a:t>this.$title</a:t>
+            </a:r>
+            <a:r>
+              <a:rPr lang="en-US" altLang="ko-KR" dirty="0">
+                <a:solidFill>
+                  <a:srgbClr val="0070C0"/>
+                </a:solidFill>
+              </a:rPr>
+              <a:t>})`);</a:t>
+            </a:r>
+          </a:p>
+          <a:p>
+            <a:pPr marL="0" indent="0">
+              <a:buNone/>
+            </a:pPr>
+            <a:r>
+              <a:rPr lang="en-US" altLang="ko-KR" dirty="0">
+                <a:solidFill>
+                  <a:srgbClr val="0070C0"/>
+                </a:solidFill>
+              </a:rPr>
+              <a:t>  },</a:t>
+            </a:r>
+          </a:p>
+          <a:p>
+            <a:pPr marL="0" indent="0">
+              <a:buNone/>
+            </a:pPr>
+            <a:r>
+              <a:rPr lang="en-US" altLang="ko-KR" dirty="0">
+                <a:solidFill>
+                  <a:srgbClr val="0070C0"/>
+                </a:solidFill>
+              </a:rPr>
+              <a:t>}</a:t>
+            </a:r>
+          </a:p>
+          <a:p>
+            <a:pPr marL="0" indent="0">
+              <a:buNone/>
+            </a:pPr>
+            <a:r>
+              <a:rPr lang="en-US" altLang="ko-KR" dirty="0">
+                <a:solidFill>
+                  <a:srgbClr val="0070C0"/>
+                </a:solidFill>
+              </a:rPr>
+              <a:t>&lt;/script&gt;</a:t>
+            </a:r>
+          </a:p>
+          <a:p>
+            <a:pPr marL="0" indent="0">
+              <a:buNone/>
+            </a:pPr>
+            <a:endParaRPr lang="en-US" altLang="ko-KR" dirty="0"/>
+          </a:p>
+          <a:p>
+            <a:pPr marL="0" indent="0">
+              <a:buNone/>
+            </a:pPr>
+            <a:endParaRPr lang="en-US" altLang="ko-KR" dirty="0"/>
+          </a:p>
+          <a:p>
+            <a:pPr marL="0" indent="0">
+              <a:buNone/>
+            </a:pPr>
+            <a:endParaRPr lang="en-US" altLang="ko-KR" dirty="0"/>
           </a:p>
           <a:p>
             <a:pPr marL="0" indent="0">
@@ -5048,7 +6007,7 @@
 </p:sld>
 </file>
 
-<file path=ppt/slides/slide7.xml><?xml version="1.0" encoding="utf-8"?>
+<file path=ppt/slides/slide8.xml><?xml version="1.0" encoding="utf-8"?>
 <p:sld xmlns:a="http://schemas.openxmlformats.org/drawingml/2006/main" xmlns:r="http://schemas.openxmlformats.org/officeDocument/2006/relationships" xmlns:p="http://schemas.openxmlformats.org/presentationml/2006/main">
   <p:cSld>
     <p:spTree>

--- a/doc/개발환경_설치매뉴얼(Vue.JS).pptx
+++ b/doc/개발환경_설치매뉴얼(Vue.JS).pptx
@@ -3049,7 +3049,18 @@
               <a:rPr lang="en-US" altLang="ko-KR" dirty="0"/>
               <a:t>Vue.JS 3</a:t>
             </a:r>
-            <a:endParaRPr lang="ko-KR" altLang="en-US" dirty="0"/>
+          </a:p>
+          <a:p>
+            <a:endParaRPr lang="en-US" altLang="ko-KR" dirty="0"/>
+          </a:p>
+          <a:p>
+            <a:r>
+              <a:rPr lang="en-US" altLang="ko-KR" sz="1600" dirty="0">
+                <a:hlinkClick r:id="rId2"/>
+              </a:rPr>
+              <a:t>(Vue.js - The Progressive JavaScript Framework | Vue.js)</a:t>
+            </a:r>
+            <a:endParaRPr lang="ko-KR" altLang="en-US" sz="1600" dirty="0"/>
           </a:p>
         </p:txBody>
       </p:sp>
@@ -3789,7 +3800,7 @@
         <p:spPr/>
         <p:txBody>
           <a:bodyPr>
-            <a:normAutofit fontScale="62500" lnSpcReduction="20000"/>
+            <a:normAutofit fontScale="47500" lnSpcReduction="20000"/>
           </a:bodyPr>
           <a:lstStyle/>
           <a:p>
@@ -3835,28 +3846,48 @@
             <a:br>
               <a:rPr lang="en-US" altLang="ko-KR" dirty="0"/>
             </a:br>
-            <a:endParaRPr lang="en-US" altLang="ko-KR" dirty="0"/>
-          </a:p>
-          <a:p>
-            <a:pPr marL="0" indent="0">
-              <a:buNone/>
-            </a:pPr>
-            <a:r>
-              <a:rPr lang="en-US" altLang="ko-KR" dirty="0"/>
+            <a:endParaRPr lang="en-US" altLang="ko-KR" dirty="0">
+              <a:solidFill>
+                <a:srgbClr val="7030A0"/>
+              </a:solidFill>
+            </a:endParaRPr>
+          </a:p>
+          <a:p>
+            <a:pPr marL="0" indent="0">
+              <a:buNone/>
+            </a:pPr>
+            <a:r>
+              <a:rPr lang="en-US" altLang="ko-KR" dirty="0">
+                <a:solidFill>
+                  <a:srgbClr val="7030A0"/>
+                </a:solidFill>
+              </a:rPr>
               <a:t>//Composition </a:t>
             </a:r>
             <a:r>
-              <a:rPr lang="ko-KR" altLang="en-US" dirty="0"/>
+              <a:rPr lang="ko-KR" altLang="en-US" dirty="0">
+                <a:solidFill>
+                  <a:srgbClr val="7030A0"/>
+                </a:solidFill>
+              </a:rPr>
               <a:t>스타일</a:t>
             </a:r>
-            <a:endParaRPr lang="en-US" altLang="ko-KR" dirty="0"/>
-          </a:p>
-          <a:p>
-            <a:pPr marL="0" indent="0">
-              <a:buNone/>
-            </a:pPr>
-            <a:r>
-              <a:rPr lang="en-US" altLang="ko-KR" dirty="0"/>
+            <a:endParaRPr lang="en-US" altLang="ko-KR" dirty="0">
+              <a:solidFill>
+                <a:srgbClr val="7030A0"/>
+              </a:solidFill>
+            </a:endParaRPr>
+          </a:p>
+          <a:p>
+            <a:pPr marL="0" indent="0">
+              <a:buNone/>
+            </a:pPr>
+            <a:r>
+              <a:rPr lang="en-US" altLang="ko-KR" dirty="0">
+                <a:solidFill>
+                  <a:srgbClr val="7030A0"/>
+                </a:solidFill>
+              </a:rPr>
               <a:t>&lt;script setup&gt;</a:t>
             </a:r>
           </a:p>
@@ -3865,23 +3896,43 @@
               <a:buNone/>
             </a:pPr>
             <a:r>
-              <a:rPr lang="en-US" altLang="ko-KR" dirty="0"/>
+              <a:rPr lang="en-US" altLang="ko-KR" dirty="0">
+                <a:solidFill>
+                  <a:srgbClr val="7030A0"/>
+                </a:solidFill>
+              </a:rPr>
               <a:t>import { </a:t>
             </a:r>
             <a:r>
-              <a:rPr lang="en-US" altLang="ko-KR" dirty="0" err="1"/>
+              <a:rPr lang="en-US" altLang="ko-KR" dirty="0" err="1">
+                <a:solidFill>
+                  <a:srgbClr val="7030A0"/>
+                </a:solidFill>
+              </a:rPr>
               <a:t>onMounted</a:t>
             </a:r>
             <a:r>
-              <a:rPr lang="en-US" altLang="ko-KR" dirty="0"/>
+              <a:rPr lang="en-US" altLang="ko-KR" dirty="0">
+                <a:solidFill>
+                  <a:srgbClr val="7030A0"/>
+                </a:solidFill>
+              </a:rPr>
               <a:t> , inject } from ‘</a:t>
             </a:r>
             <a:r>
-              <a:rPr lang="en-US" altLang="ko-KR" dirty="0" err="1"/>
+              <a:rPr lang="en-US" altLang="ko-KR" dirty="0" err="1">
+                <a:solidFill>
+                  <a:srgbClr val="7030A0"/>
+                </a:solidFill>
+              </a:rPr>
               <a:t>vue</a:t>
             </a:r>
             <a:r>
-              <a:rPr lang="en-US" altLang="ko-KR" dirty="0"/>
+              <a:rPr lang="en-US" altLang="ko-KR" dirty="0">
+                <a:solidFill>
+                  <a:srgbClr val="7030A0"/>
+                </a:solidFill>
+              </a:rPr>
               <a:t>’;</a:t>
             </a:r>
           </a:p>
@@ -3889,18 +3940,30 @@
             <a:pPr marL="0" indent="0">
               <a:buNone/>
             </a:pPr>
-            <a:endParaRPr lang="en-US" altLang="ko-KR" dirty="0"/>
-          </a:p>
-          <a:p>
-            <a:pPr marL="0" indent="0">
-              <a:buNone/>
-            </a:pPr>
-            <a:r>
-              <a:rPr lang="en-US" altLang="ko-KR" dirty="0" err="1"/>
+            <a:endParaRPr lang="en-US" altLang="ko-KR" dirty="0">
+              <a:solidFill>
+                <a:srgbClr val="7030A0"/>
+              </a:solidFill>
+            </a:endParaRPr>
+          </a:p>
+          <a:p>
+            <a:pPr marL="0" indent="0">
+              <a:buNone/>
+            </a:pPr>
+            <a:r>
+              <a:rPr lang="en-US" altLang="ko-KR" dirty="0" err="1">
+                <a:solidFill>
+                  <a:srgbClr val="7030A0"/>
+                </a:solidFill>
+              </a:rPr>
               <a:t>onMounted</a:t>
             </a:r>
             <a:r>
-              <a:rPr lang="en-US" altLang="ko-KR" dirty="0"/>
+              <a:rPr lang="en-US" altLang="ko-KR" dirty="0">
+                <a:solidFill>
+                  <a:srgbClr val="7030A0"/>
+                </a:solidFill>
+              </a:rPr>
               <a:t>(() =&gt; {</a:t>
             </a:r>
           </a:p>
@@ -3909,15 +3972,27 @@
               <a:buNone/>
             </a:pPr>
             <a:r>
-              <a:rPr lang="en-US" altLang="ko-KR" dirty="0"/>
+              <a:rPr lang="en-US" altLang="ko-KR" dirty="0">
+                <a:solidFill>
+                  <a:srgbClr val="7030A0"/>
+                </a:solidFill>
+              </a:rPr>
               <a:t>    console.log(`</a:t>
             </a:r>
             <a:r>
-              <a:rPr lang="ko-KR" altLang="en-US" dirty="0"/>
+              <a:rPr lang="ko-KR" altLang="en-US" dirty="0">
+                <a:solidFill>
+                  <a:srgbClr val="7030A0"/>
+                </a:solidFill>
+              </a:rPr>
               <a:t>프로그램 시작</a:t>
             </a:r>
             <a:r>
-              <a:rPr lang="en-US" altLang="ko-KR" dirty="0"/>
+              <a:rPr lang="en-US" altLang="ko-KR" dirty="0">
+                <a:solidFill>
+                  <a:srgbClr val="7030A0"/>
+                </a:solidFill>
+              </a:rPr>
               <a:t>! (${inject(‘$title’})`);</a:t>
             </a:r>
           </a:p>
@@ -3926,14 +4001,26 @@
               <a:buNone/>
             </a:pPr>
             <a:r>
-              <a:rPr lang="en-US" altLang="ko-KR" dirty="0"/>
+              <a:rPr lang="en-US" altLang="ko-KR" dirty="0">
+                <a:solidFill>
+                  <a:srgbClr val="7030A0"/>
+                </a:solidFill>
+              </a:rPr>
               <a:t>});</a:t>
             </a:r>
             <a:br>
-              <a:rPr lang="en-US" altLang="ko-KR" dirty="0"/>
+              <a:rPr lang="en-US" altLang="ko-KR" dirty="0">
+                <a:solidFill>
+                  <a:srgbClr val="7030A0"/>
+                </a:solidFill>
+              </a:rPr>
             </a:br>
             <a:r>
-              <a:rPr lang="en-US" altLang="ko-KR" dirty="0"/>
+              <a:rPr lang="en-US" altLang="ko-KR" dirty="0">
+                <a:solidFill>
+                  <a:srgbClr val="7030A0"/>
+                </a:solidFill>
+              </a:rPr>
               <a:t>&lt;/script&gt;</a:t>
             </a:r>
           </a:p>
@@ -3941,28 +4028,48 @@
             <a:pPr marL="0" indent="0">
               <a:buNone/>
             </a:pPr>
-            <a:endParaRPr lang="en-US" altLang="ko-KR" dirty="0"/>
-          </a:p>
-          <a:p>
-            <a:pPr marL="0" indent="0">
-              <a:buNone/>
-            </a:pPr>
-            <a:r>
-              <a:rPr lang="en-US" altLang="ko-KR" dirty="0"/>
+            <a:endParaRPr lang="en-US" altLang="ko-KR" dirty="0">
+              <a:solidFill>
+                <a:schemeClr val="accent6"/>
+              </a:solidFill>
+            </a:endParaRPr>
+          </a:p>
+          <a:p>
+            <a:pPr marL="0" indent="0">
+              <a:buNone/>
+            </a:pPr>
+            <a:r>
+              <a:rPr lang="en-US" altLang="ko-KR" dirty="0">
+                <a:solidFill>
+                  <a:schemeClr val="accent6"/>
+                </a:solidFill>
+              </a:rPr>
               <a:t>//Options </a:t>
             </a:r>
             <a:r>
-              <a:rPr lang="ko-KR" altLang="en-US" dirty="0"/>
+              <a:rPr lang="ko-KR" altLang="en-US" dirty="0">
+                <a:solidFill>
+                  <a:schemeClr val="accent6"/>
+                </a:solidFill>
+              </a:rPr>
               <a:t>스타일</a:t>
             </a:r>
-            <a:endParaRPr lang="en-US" altLang="ko-KR" dirty="0"/>
-          </a:p>
-          <a:p>
-            <a:pPr marL="0" indent="0">
-              <a:buNone/>
-            </a:pPr>
-            <a:r>
-              <a:rPr lang="en-US" altLang="ko-KR" dirty="0"/>
+            <a:endParaRPr lang="en-US" altLang="ko-KR" dirty="0">
+              <a:solidFill>
+                <a:schemeClr val="accent6"/>
+              </a:solidFill>
+            </a:endParaRPr>
+          </a:p>
+          <a:p>
+            <a:pPr marL="0" indent="0">
+              <a:buNone/>
+            </a:pPr>
+            <a:r>
+              <a:rPr lang="en-US" altLang="ko-KR" dirty="0">
+                <a:solidFill>
+                  <a:schemeClr val="accent6"/>
+                </a:solidFill>
+              </a:rPr>
               <a:t>&lt;script&gt;</a:t>
             </a:r>
           </a:p>
@@ -3971,15 +4078,27 @@
               <a:buNone/>
             </a:pPr>
             <a:r>
-              <a:rPr lang="en-US" altLang="ko-KR" dirty="0"/>
+              <a:rPr lang="en-US" altLang="ko-KR" dirty="0">
+                <a:solidFill>
+                  <a:schemeClr val="accent6"/>
+                </a:solidFill>
+              </a:rPr>
               <a:t>import Header from './layouts/</a:t>
             </a:r>
             <a:r>
-              <a:rPr lang="en-US" altLang="ko-KR" dirty="0" err="1"/>
+              <a:rPr lang="en-US" altLang="ko-KR" dirty="0" err="1">
+                <a:solidFill>
+                  <a:schemeClr val="accent6"/>
+                </a:solidFill>
+              </a:rPr>
               <a:t>Header.vue</a:t>
             </a:r>
             <a:r>
-              <a:rPr lang="en-US" altLang="ko-KR" dirty="0"/>
+              <a:rPr lang="en-US" altLang="ko-KR" dirty="0">
+                <a:solidFill>
+                  <a:schemeClr val="accent6"/>
+                </a:solidFill>
+              </a:rPr>
               <a:t>'</a:t>
             </a:r>
           </a:p>
@@ -3988,15 +4107,27 @@
               <a:buNone/>
             </a:pPr>
             <a:r>
-              <a:rPr lang="en-US" altLang="ko-KR" dirty="0"/>
+              <a:rPr lang="en-US" altLang="ko-KR" dirty="0">
+                <a:solidFill>
+                  <a:schemeClr val="accent6"/>
+                </a:solidFill>
+              </a:rPr>
               <a:t>import Main from './layouts/</a:t>
             </a:r>
             <a:r>
-              <a:rPr lang="en-US" altLang="ko-KR" dirty="0" err="1"/>
+              <a:rPr lang="en-US" altLang="ko-KR" dirty="0" err="1">
+                <a:solidFill>
+                  <a:schemeClr val="accent6"/>
+                </a:solidFill>
+              </a:rPr>
               <a:t>Main.vue</a:t>
             </a:r>
             <a:r>
-              <a:rPr lang="en-US" altLang="ko-KR" dirty="0"/>
+              <a:rPr lang="en-US" altLang="ko-KR" dirty="0">
+                <a:solidFill>
+                  <a:schemeClr val="accent6"/>
+                </a:solidFill>
+              </a:rPr>
               <a:t>'</a:t>
             </a:r>
           </a:p>
@@ -4005,28 +4136,52 @@
               <a:buNone/>
             </a:pPr>
             <a:r>
-              <a:rPr lang="en-US" altLang="ko-KR" dirty="0"/>
+              <a:rPr lang="en-US" altLang="ko-KR" dirty="0">
+                <a:solidFill>
+                  <a:schemeClr val="accent6"/>
+                </a:solidFill>
+              </a:rPr>
               <a:t>import Footer from './layouts/</a:t>
             </a:r>
             <a:r>
-              <a:rPr lang="en-US" altLang="ko-KR" dirty="0" err="1"/>
+              <a:rPr lang="en-US" altLang="ko-KR" dirty="0" err="1">
+                <a:solidFill>
+                  <a:schemeClr val="accent6"/>
+                </a:solidFill>
+              </a:rPr>
               <a:t>Footer.vue</a:t>
             </a:r>
             <a:r>
-              <a:rPr lang="en-US" altLang="ko-KR" dirty="0"/>
+              <a:rPr lang="en-US" altLang="ko-KR" dirty="0">
+                <a:solidFill>
+                  <a:schemeClr val="accent6"/>
+                </a:solidFill>
+              </a:rPr>
               <a:t>'</a:t>
             </a:r>
             <a:br>
-              <a:rPr lang="en-US" altLang="ko-KR" dirty="0"/>
+              <a:rPr lang="en-US" altLang="ko-KR" dirty="0">
+                <a:solidFill>
+                  <a:schemeClr val="accent6"/>
+                </a:solidFill>
+              </a:rPr>
             </a:br>
-            <a:endParaRPr lang="en-US" altLang="ko-KR" dirty="0"/>
-          </a:p>
-          <a:p>
-            <a:pPr marL="0" indent="0">
-              <a:buNone/>
-            </a:pPr>
-            <a:r>
-              <a:rPr lang="en-US" altLang="ko-KR" dirty="0"/>
+            <a:endParaRPr lang="en-US" altLang="ko-KR" dirty="0">
+              <a:solidFill>
+                <a:schemeClr val="accent6"/>
+              </a:solidFill>
+            </a:endParaRPr>
+          </a:p>
+          <a:p>
+            <a:pPr marL="0" indent="0">
+              <a:buNone/>
+            </a:pPr>
+            <a:r>
+              <a:rPr lang="en-US" altLang="ko-KR" dirty="0">
+                <a:solidFill>
+                  <a:schemeClr val="accent6"/>
+                </a:solidFill>
+              </a:rPr>
               <a:t>export default {</a:t>
             </a:r>
           </a:p>
@@ -4035,7 +4190,11 @@
               <a:buNone/>
             </a:pPr>
             <a:r>
-              <a:rPr lang="en-US" altLang="ko-KR" dirty="0"/>
+              <a:rPr lang="en-US" altLang="ko-KR" dirty="0">
+                <a:solidFill>
+                  <a:schemeClr val="accent6"/>
+                </a:solidFill>
+              </a:rPr>
               <a:t>  name: 'App',</a:t>
             </a:r>
           </a:p>
@@ -4044,7 +4203,11 @@
               <a:buNone/>
             </a:pPr>
             <a:r>
-              <a:rPr lang="en-US" altLang="ko-KR" dirty="0"/>
+              <a:rPr lang="en-US" altLang="ko-KR" dirty="0">
+                <a:solidFill>
+                  <a:schemeClr val="accent6"/>
+                </a:solidFill>
+              </a:rPr>
               <a:t>  components: {</a:t>
             </a:r>
           </a:p>
@@ -4053,7 +4216,11 @@
               <a:buNone/>
             </a:pPr>
             <a:r>
-              <a:rPr lang="en-US" altLang="ko-KR" dirty="0"/>
+              <a:rPr lang="en-US" altLang="ko-KR" dirty="0">
+                <a:solidFill>
+                  <a:schemeClr val="accent6"/>
+                </a:solidFill>
+              </a:rPr>
               <a:t>    Header, Main, Footer</a:t>
             </a:r>
           </a:p>
@@ -4062,7 +4229,11 @@
               <a:buNone/>
             </a:pPr>
             <a:r>
-              <a:rPr lang="en-US" altLang="ko-KR" dirty="0"/>
+              <a:rPr lang="en-US" altLang="ko-KR" dirty="0">
+                <a:solidFill>
+                  <a:schemeClr val="accent6"/>
+                </a:solidFill>
+              </a:rPr>
               <a:t>  },</a:t>
             </a:r>
           </a:p>
@@ -4071,32 +4242,121 @@
               <a:buNone/>
             </a:pPr>
             <a:r>
-              <a:rPr lang="en-US" altLang="ko-KR" dirty="0"/>
-              <a:t>  created() {</a:t>
-            </a:r>
-          </a:p>
-          <a:p>
-            <a:pPr marL="0" indent="0">
-              <a:buNone/>
-            </a:pPr>
-            <a:r>
-              <a:rPr lang="en-US" altLang="ko-KR" dirty="0"/>
+              <a:rPr lang="en-US" altLang="ko-KR" dirty="0">
+                <a:solidFill>
+                  <a:schemeClr val="accent6"/>
+                </a:solidFill>
+              </a:rPr>
+              <a:t>setup()</a:t>
+            </a:r>
+          </a:p>
+          <a:p>
+            <a:pPr marL="0" indent="0">
+              <a:buNone/>
+            </a:pPr>
+            <a:r>
+              <a:rPr lang="en-US" altLang="ko-KR" dirty="0">
+                <a:solidFill>
+                  <a:schemeClr val="accent6"/>
+                </a:solidFill>
+              </a:rPr>
+              <a:t>{</a:t>
+            </a:r>
+          </a:p>
+          <a:p>
+            <a:pPr marL="0" indent="0">
+              <a:buNone/>
+            </a:pPr>
+            <a:r>
+              <a:rPr lang="en-US" altLang="ko-KR" dirty="0">
+                <a:solidFill>
+                  <a:schemeClr val="accent6"/>
+                </a:solidFill>
+              </a:rPr>
+              <a:t>const count = ref(0)</a:t>
+            </a:r>
+          </a:p>
+          <a:p>
+            <a:pPr marL="0" indent="0">
+              <a:buNone/>
+            </a:pPr>
+            <a:r>
+              <a:rPr lang="en-US" altLang="ko-KR" dirty="0">
+                <a:solidFill>
+                  <a:schemeClr val="accent6"/>
+                </a:solidFill>
+              </a:rPr>
+              <a:t>return {count}</a:t>
+            </a:r>
+          </a:p>
+          <a:p>
+            <a:pPr marL="0" indent="0">
+              <a:buNone/>
+            </a:pPr>
+            <a:r>
+              <a:rPr lang="en-US" altLang="ko-KR" dirty="0">
+                <a:solidFill>
+                  <a:schemeClr val="accent6"/>
+                </a:solidFill>
+              </a:rPr>
+              <a:t>},</a:t>
+            </a:r>
+          </a:p>
+          <a:p>
+            <a:pPr marL="0" indent="0">
+              <a:buNone/>
+            </a:pPr>
+            <a:r>
+              <a:rPr lang="en-US" altLang="ko-KR" dirty="0">
+                <a:solidFill>
+                  <a:schemeClr val="accent6"/>
+                </a:solidFill>
+              </a:rPr>
+              <a:t>  mounted() {</a:t>
+            </a:r>
+          </a:p>
+          <a:p>
+            <a:pPr marL="0" indent="0">
+              <a:buNone/>
+            </a:pPr>
+            <a:r>
+              <a:rPr lang="en-US" altLang="ko-KR" dirty="0">
+                <a:solidFill>
+                  <a:schemeClr val="accent6"/>
+                </a:solidFill>
+              </a:rPr>
               <a:t>    console.log(`</a:t>
             </a:r>
             <a:r>
-              <a:rPr lang="ko-KR" altLang="en-US" dirty="0"/>
+              <a:rPr lang="ko-KR" altLang="en-US" dirty="0">
+                <a:solidFill>
+                  <a:schemeClr val="accent6"/>
+                </a:solidFill>
+              </a:rPr>
               <a:t>프로그램 시작</a:t>
             </a:r>
             <a:r>
-              <a:rPr lang="en-US" altLang="ko-KR" dirty="0"/>
+              <a:rPr lang="en-US" altLang="ko-KR" dirty="0">
+                <a:solidFill>
+                  <a:schemeClr val="accent6"/>
+                </a:solidFill>
+              </a:rPr>
               <a:t>! (${</a:t>
             </a:r>
             <a:r>
-              <a:rPr lang="en-US" altLang="ko-KR" dirty="0" err="1"/>
+              <a:rPr lang="en-US" altLang="ko-KR" dirty="0" err="1">
+                <a:solidFill>
+                  <a:schemeClr val="accent6"/>
+                </a:solidFill>
+              </a:rPr>
               <a:t>this.$title</a:t>
             </a:r>
             <a:r>
-              <a:rPr lang="en-US" altLang="ko-KR" dirty="0"/>
+              <a:rPr lang="en-US" altLang="ko-KR" dirty="0">
+                <a:solidFill>
+                  <a:schemeClr val="accent6"/>
+                </a:solidFill>
+              </a:rPr>
               <a:t>})`);</a:t>
             </a:r>
           </a:p>
@@ -4105,7 +4365,11 @@
               <a:buNone/>
             </a:pPr>
             <a:r>
-              <a:rPr lang="en-US" altLang="ko-KR" dirty="0"/>
+              <a:rPr lang="en-US" altLang="ko-KR" dirty="0">
+                <a:solidFill>
+                  <a:schemeClr val="accent6"/>
+                </a:solidFill>
+              </a:rPr>
               <a:t>  },</a:t>
             </a:r>
           </a:p>
@@ -4114,7 +4378,11 @@
               <a:buNone/>
             </a:pPr>
             <a:r>
-              <a:rPr lang="en-US" altLang="ko-KR" dirty="0"/>
+              <a:rPr lang="en-US" altLang="ko-KR" dirty="0">
+                <a:solidFill>
+                  <a:schemeClr val="accent6"/>
+                </a:solidFill>
+              </a:rPr>
               <a:t>}</a:t>
             </a:r>
           </a:p>
@@ -4123,7 +4391,11 @@
               <a:buNone/>
             </a:pPr>
             <a:r>
-              <a:rPr lang="en-US" altLang="ko-KR" dirty="0"/>
+              <a:rPr lang="en-US" altLang="ko-KR" dirty="0">
+                <a:solidFill>
+                  <a:schemeClr val="accent6"/>
+                </a:solidFill>
+              </a:rPr>
               <a:t>&lt;/script&gt;</a:t>
             </a:r>
           </a:p>
@@ -5727,19 +5999,6 @@
                   <a:srgbClr val="00B050"/>
                 </a:solidFill>
               </a:rPr>
-              <a:t>    console.log(Mounted’);</a:t>
-            </a:r>
-          </a:p>
-          <a:p>
-            <a:pPr marL="0" indent="0">
-              <a:buNone/>
-            </a:pPr>
-            <a:r>
-              <a:rPr lang="en-US" altLang="ko-KR" dirty="0">
-                <a:solidFill>
-                  <a:srgbClr val="00B050"/>
-                </a:solidFill>
-              </a:rPr>
               <a:t>    console.log(`</a:t>
             </a:r>
             <a:r>
@@ -5881,7 +6140,20 @@
                   <a:srgbClr val="0070C0"/>
                 </a:solidFill>
               </a:rPr>
-              <a:t>  created() {</a:t>
+              <a:t>  setup() { },</a:t>
+            </a:r>
+          </a:p>
+          <a:p>
+            <a:pPr marL="0" indent="0">
+              <a:buNone/>
+            </a:pPr>
+            <a:r>
+              <a:rPr lang="en-US" altLang="ko-KR" dirty="0">
+                <a:solidFill>
+                  <a:srgbClr val="0070C0"/>
+                </a:solidFill>
+              </a:rPr>
+              <a:t>  mounted() {</a:t>
             </a:r>
           </a:p>
           <a:p>
